--- a/reports/2026-02.pptx
+++ b/reports/2026-02.pptx
@@ -7676,7 +7676,7 @@
                 <a:ea typeface="Century Gothic" pitchFamily="34" charset="-122"/>
                 <a:cs typeface="Century Gothic" pitchFamily="34" charset="-120"/>
               </a:rPr>
-              <a:t>349</a:t>
+              <a:t>—</a:t>
             </a:r>
             <a:endParaRPr lang="en-US" sz="2600" dirty="0"/>
           </a:p>
@@ -7715,7 +7715,7 @@
                 <a:ea typeface="Calibri" pitchFamily="34" charset="-122"/>
                 <a:cs typeface="Calibri" pitchFamily="34" charset="-120"/>
               </a:rPr>
-              <a:t>Total Teams</a:t>
+              <a:t>Change vs Prior Month</a:t>
             </a:r>
             <a:endParaRPr lang="en-US" sz="1200" dirty="0"/>
           </a:p>
@@ -9853,6 +9853,141 @@
                 <a:ea typeface="Century Gothic" pitchFamily="34" charset="-122"/>
                 <a:cs typeface="Century Gothic" pitchFamily="34" charset="-120"/>
               </a:rPr>
+              <a:t>$11,897</a:t>
+            </a:r>
+            <a:endParaRPr lang="en-US" sz="2600" dirty="0"/>
+          </a:p>
+        </p:txBody>
+      </p:sp>
+      <p:sp>
+        <p:nvSpPr>
+          <p:cNvPr id="27" name="Text 24"/>
+          <p:cNvSpPr/>
+          <p:nvPr/>
+        </p:nvSpPr>
+        <p:spPr>
+          <a:xfrm>
+            <a:off x="8001000" y="2459736"/>
+            <a:ext cx="3977640" cy="420624"/>
+          </a:xfrm>
+          <a:prstGeom prst="rect">
+            <a:avLst/>
+          </a:prstGeom>
+          <a:noFill/>
+          <a:ln/>
+        </p:spPr>
+        <p:txBody>
+          <a:bodyPr wrap="square" rtlCol="0" anchor="ctr"/>
+          <a:lstStyle/>
+          <a:p>
+            <a:pPr algn="ctr" indent="0" marL="0">
+              <a:buNone/>
+            </a:pPr>
+            <a:r>
+              <a:rPr lang="en-US" sz="1200" dirty="0">
+                <a:solidFill>
+                  <a:srgbClr val="718096"/>
+                </a:solidFill>
+                <a:latin typeface="Calibri" pitchFamily="34" charset="0"/>
+                <a:ea typeface="Calibri" pitchFamily="34" charset="-122"/>
+                <a:cs typeface="Calibri" pitchFamily="34" charset="-120"/>
+              </a:rPr>
+              <a:t>Group Disb per Team</a:t>
+            </a:r>
+            <a:endParaRPr lang="en-US" sz="1200" dirty="0"/>
+          </a:p>
+        </p:txBody>
+      </p:sp>
+      <p:sp>
+        <p:nvSpPr>
+          <p:cNvPr id="28" name="Shape 25"/>
+          <p:cNvSpPr/>
+          <p:nvPr/>
+        </p:nvSpPr>
+        <p:spPr>
+          <a:xfrm>
+            <a:off x="7955280" y="2971800"/>
+            <a:ext cx="4069080" cy="731520"/>
+          </a:xfrm>
+          <a:prstGeom prst="rect">
+            <a:avLst/>
+          </a:prstGeom>
+          <a:solidFill>
+            <a:srgbClr val="FFFFFF"/>
+          </a:solidFill>
+          <a:ln w="12700">
+            <a:solidFill>
+              <a:srgbClr val="D6CFC4"/>
+            </a:solidFill>
+            <a:prstDash val="solid"/>
+          </a:ln>
+          <a:effectLst>
+            <a:outerShdw sx="100000" sy="100000" kx="0" ky="0" algn="bl" rotWithShape="0" blurRad="50800" dist="25400" dir="8100000">
+              <a:srgbClr val="000000">
+                <a:alpha val="8000"/>
+              </a:srgbClr>
+            </a:outerShdw>
+          </a:effectLst>
+        </p:spPr>
+      </p:sp>
+      <p:sp>
+        <p:nvSpPr>
+          <p:cNvPr id="29" name="Shape 26"/>
+          <p:cNvSpPr/>
+          <p:nvPr/>
+        </p:nvSpPr>
+        <p:spPr>
+          <a:xfrm>
+            <a:off x="7955280" y="2971800"/>
+            <a:ext cx="4069080" cy="45720"/>
+          </a:xfrm>
+          <a:prstGeom prst="rect">
+            <a:avLst/>
+          </a:prstGeom>
+          <a:solidFill>
+            <a:srgbClr val="5D300F"/>
+          </a:solidFill>
+          <a:ln w="12700">
+            <a:solidFill>
+              <a:srgbClr val="5D300F"/>
+            </a:solidFill>
+            <a:prstDash val="solid"/>
+          </a:ln>
+        </p:spPr>
+      </p:sp>
+      <p:sp>
+        <p:nvSpPr>
+          <p:cNvPr id="30" name="Text 27"/>
+          <p:cNvSpPr/>
+          <p:nvPr/>
+        </p:nvSpPr>
+        <p:spPr>
+          <a:xfrm>
+            <a:off x="7955280" y="3063240"/>
+            <a:ext cx="4069080" cy="402336"/>
+          </a:xfrm>
+          <a:prstGeom prst="rect">
+            <a:avLst/>
+          </a:prstGeom>
+          <a:noFill/>
+          <a:ln/>
+        </p:spPr>
+        <p:txBody>
+          <a:bodyPr wrap="square" rtlCol="0" anchor="ctr"/>
+          <a:lstStyle/>
+          <a:p>
+            <a:pPr algn="ctr" indent="0" marL="0">
+              <a:buNone/>
+            </a:pPr>
+            <a:r>
+              <a:rPr lang="en-US" sz="2600" b="1" dirty="0">
+                <a:solidFill>
+                  <a:srgbClr val="5D300F"/>
+                </a:solidFill>
+                <a:latin typeface="Century Gothic" pitchFamily="34" charset="0"/>
+                <a:ea typeface="Century Gothic" pitchFamily="34" charset="-122"/>
+                <a:cs typeface="Century Gothic" pitchFamily="34" charset="-120"/>
+              </a:rPr>
               <a:t>—</a:t>
             </a:r>
             <a:endParaRPr lang="en-US" sz="2600" dirty="0"/>
@@ -9861,14 +9996,14 @@
       </p:sp>
       <p:sp>
         <p:nvSpPr>
-          <p:cNvPr id="27" name="Text 24"/>
-          <p:cNvSpPr/>
-          <p:nvPr/>
-        </p:nvSpPr>
-        <p:spPr>
-          <a:xfrm>
-            <a:off x="8001000" y="2459736"/>
-            <a:ext cx="3977640" cy="420624"/>
+          <p:cNvPr id="31" name="Text 28"/>
+          <p:cNvSpPr/>
+          <p:nvPr/>
+        </p:nvSpPr>
+        <p:spPr>
+          <a:xfrm>
+            <a:off x="8001000" y="3410712"/>
+            <a:ext cx="3977640" cy="292608"/>
           </a:xfrm>
           <a:prstGeom prst="rect">
             <a:avLst/>
@@ -9900,13 +10035,13 @@
       </p:sp>
       <p:sp>
         <p:nvSpPr>
-          <p:cNvPr id="28" name="Shape 25"/>
-          <p:cNvSpPr/>
-          <p:nvPr/>
-        </p:nvSpPr>
-        <p:spPr>
-          <a:xfrm>
-            <a:off x="7955280" y="2971800"/>
+          <p:cNvPr id="32" name="Shape 29"/>
+          <p:cNvSpPr/>
+          <p:nvPr/>
+        </p:nvSpPr>
+        <p:spPr>
+          <a:xfrm>
+            <a:off x="7955280" y="3794760"/>
             <a:ext cx="4069080" cy="292608"/>
           </a:xfrm>
           <a:prstGeom prst="rect">
@@ -9925,13 +10060,13 @@
       </p:sp>
       <p:sp>
         <p:nvSpPr>
-          <p:cNvPr id="29" name="Shape 26"/>
-          <p:cNvSpPr/>
-          <p:nvPr/>
-        </p:nvSpPr>
-        <p:spPr>
-          <a:xfrm>
-            <a:off x="7955280" y="2971800"/>
+          <p:cNvPr id="33" name="Shape 30"/>
+          <p:cNvSpPr/>
+          <p:nvPr/>
+        </p:nvSpPr>
+        <p:spPr>
+          <a:xfrm>
+            <a:off x="7955280" y="3794760"/>
             <a:ext cx="54864" cy="292608"/>
           </a:xfrm>
           <a:prstGeom prst="rect">
@@ -9950,13 +10085,13 @@
       </p:sp>
       <p:sp>
         <p:nvSpPr>
-          <p:cNvPr id="30" name="Text 27"/>
-          <p:cNvSpPr/>
-          <p:nvPr/>
-        </p:nvSpPr>
-        <p:spPr>
-          <a:xfrm>
-            <a:off x="8065008" y="2971800"/>
+          <p:cNvPr id="34" name="Text 31"/>
+          <p:cNvSpPr/>
+          <p:nvPr/>
+        </p:nvSpPr>
+        <p:spPr>
+          <a:xfrm>
+            <a:off x="8065008" y="3794760"/>
             <a:ext cx="3959352" cy="292608"/>
           </a:xfrm>
           <a:prstGeom prst="rect">
@@ -9989,13 +10124,13 @@
       </p:sp>
       <p:sp>
         <p:nvSpPr>
-          <p:cNvPr id="31" name="Shape 28"/>
-          <p:cNvSpPr/>
-          <p:nvPr/>
-        </p:nvSpPr>
-        <p:spPr>
-          <a:xfrm>
-            <a:off x="7955280" y="3310128"/>
+          <p:cNvPr id="35" name="Shape 32"/>
+          <p:cNvSpPr/>
+          <p:nvPr/>
+        </p:nvSpPr>
+        <p:spPr>
+          <a:xfrm>
+            <a:off x="7955280" y="4133088"/>
             <a:ext cx="1234440" cy="566928"/>
           </a:xfrm>
           <a:prstGeom prst="rect">
@@ -10014,13 +10149,13 @@
       </p:sp>
       <p:sp>
         <p:nvSpPr>
-          <p:cNvPr id="32" name="Text 29"/>
-          <p:cNvSpPr/>
-          <p:nvPr/>
-        </p:nvSpPr>
-        <p:spPr>
-          <a:xfrm>
-            <a:off x="7955280" y="3310128"/>
+          <p:cNvPr id="36" name="Text 33"/>
+          <p:cNvSpPr/>
+          <p:nvPr/>
+        </p:nvSpPr>
+        <p:spPr>
+          <a:xfrm>
+            <a:off x="7955280" y="4133088"/>
             <a:ext cx="1234440" cy="256032"/>
           </a:xfrm>
           <a:prstGeom prst="rect">
@@ -10053,13 +10188,13 @@
       </p:sp>
       <p:sp>
         <p:nvSpPr>
-          <p:cNvPr id="33" name="Text 30"/>
-          <p:cNvSpPr/>
-          <p:nvPr/>
-        </p:nvSpPr>
-        <p:spPr>
-          <a:xfrm>
-            <a:off x="7955280" y="3566160"/>
+          <p:cNvPr id="37" name="Text 34"/>
+          <p:cNvSpPr/>
+          <p:nvPr/>
+        </p:nvSpPr>
+        <p:spPr>
+          <a:xfrm>
+            <a:off x="7955280" y="4389120"/>
             <a:ext cx="1234440" cy="310896"/>
           </a:xfrm>
           <a:prstGeom prst="rect">
@@ -10092,13 +10227,13 @@
       </p:sp>
       <p:sp>
         <p:nvSpPr>
-          <p:cNvPr id="34" name="Shape 31"/>
-          <p:cNvSpPr/>
-          <p:nvPr/>
-        </p:nvSpPr>
-        <p:spPr>
-          <a:xfrm>
-            <a:off x="9308592" y="3310128"/>
+          <p:cNvPr id="38" name="Shape 35"/>
+          <p:cNvSpPr/>
+          <p:nvPr/>
+        </p:nvSpPr>
+        <p:spPr>
+          <a:xfrm>
+            <a:off x="9308592" y="4133088"/>
             <a:ext cx="1234440" cy="566928"/>
           </a:xfrm>
           <a:prstGeom prst="rect">
@@ -10117,13 +10252,13 @@
       </p:sp>
       <p:sp>
         <p:nvSpPr>
-          <p:cNvPr id="35" name="Text 32"/>
-          <p:cNvSpPr/>
-          <p:nvPr/>
-        </p:nvSpPr>
-        <p:spPr>
-          <a:xfrm>
-            <a:off x="9308592" y="3310128"/>
+          <p:cNvPr id="39" name="Text 36"/>
+          <p:cNvSpPr/>
+          <p:nvPr/>
+        </p:nvSpPr>
+        <p:spPr>
+          <a:xfrm>
+            <a:off x="9308592" y="4133088"/>
             <a:ext cx="1234440" cy="256032"/>
           </a:xfrm>
           <a:prstGeom prst="rect">
@@ -10156,13 +10291,13 @@
       </p:sp>
       <p:sp>
         <p:nvSpPr>
-          <p:cNvPr id="36" name="Text 33"/>
-          <p:cNvSpPr/>
-          <p:nvPr/>
-        </p:nvSpPr>
-        <p:spPr>
-          <a:xfrm>
-            <a:off x="9308592" y="3566160"/>
+          <p:cNvPr id="40" name="Text 37"/>
+          <p:cNvSpPr/>
+          <p:nvPr/>
+        </p:nvSpPr>
+        <p:spPr>
+          <a:xfrm>
+            <a:off x="9308592" y="4389120"/>
             <a:ext cx="1234440" cy="310896"/>
           </a:xfrm>
           <a:prstGeom prst="rect">
@@ -10195,13 +10330,13 @@
       </p:sp>
       <p:sp>
         <p:nvSpPr>
-          <p:cNvPr id="37" name="Shape 34"/>
-          <p:cNvSpPr/>
-          <p:nvPr/>
-        </p:nvSpPr>
-        <p:spPr>
-          <a:xfrm>
-            <a:off x="10661904" y="3310128"/>
+          <p:cNvPr id="41" name="Shape 38"/>
+          <p:cNvSpPr/>
+          <p:nvPr/>
+        </p:nvSpPr>
+        <p:spPr>
+          <a:xfrm>
+            <a:off x="10661904" y="4133088"/>
             <a:ext cx="1234440" cy="566928"/>
           </a:xfrm>
           <a:prstGeom prst="rect">
@@ -10220,13 +10355,13 @@
       </p:sp>
       <p:sp>
         <p:nvSpPr>
-          <p:cNvPr id="38" name="Text 35"/>
-          <p:cNvSpPr/>
-          <p:nvPr/>
-        </p:nvSpPr>
-        <p:spPr>
-          <a:xfrm>
-            <a:off x="10661904" y="3310128"/>
+          <p:cNvPr id="42" name="Text 39"/>
+          <p:cNvSpPr/>
+          <p:nvPr/>
+        </p:nvSpPr>
+        <p:spPr>
+          <a:xfrm>
+            <a:off x="10661904" y="4133088"/>
             <a:ext cx="1234440" cy="256032"/>
           </a:xfrm>
           <a:prstGeom prst="rect">
@@ -10259,13 +10394,13 @@
       </p:sp>
       <p:sp>
         <p:nvSpPr>
-          <p:cNvPr id="39" name="Text 36"/>
-          <p:cNvSpPr/>
-          <p:nvPr/>
-        </p:nvSpPr>
-        <p:spPr>
-          <a:xfrm>
-            <a:off x="10661904" y="3566160"/>
+          <p:cNvPr id="43" name="Text 40"/>
+          <p:cNvSpPr/>
+          <p:nvPr/>
+        </p:nvSpPr>
+        <p:spPr>
+          <a:xfrm>
+            <a:off x="10661904" y="4389120"/>
             <a:ext cx="1234440" cy="310896"/>
           </a:xfrm>
           <a:prstGeom prst="rect">
@@ -10298,13 +10433,13 @@
       </p:sp>
       <p:sp>
         <p:nvSpPr>
-          <p:cNvPr id="40" name="Shape 37"/>
-          <p:cNvSpPr/>
-          <p:nvPr/>
-        </p:nvSpPr>
-        <p:spPr>
-          <a:xfrm>
-            <a:off x="7955280" y="3968496"/>
+          <p:cNvPr id="44" name="Shape 41"/>
+          <p:cNvSpPr/>
+          <p:nvPr/>
+        </p:nvSpPr>
+        <p:spPr>
+          <a:xfrm>
+            <a:off x="7955280" y="4791456"/>
             <a:ext cx="1234440" cy="566928"/>
           </a:xfrm>
           <a:prstGeom prst="rect">
@@ -10323,13 +10458,13 @@
       </p:sp>
       <p:sp>
         <p:nvSpPr>
-          <p:cNvPr id="41" name="Text 38"/>
-          <p:cNvSpPr/>
-          <p:nvPr/>
-        </p:nvSpPr>
-        <p:spPr>
-          <a:xfrm>
-            <a:off x="7955280" y="3968496"/>
+          <p:cNvPr id="45" name="Text 42"/>
+          <p:cNvSpPr/>
+          <p:nvPr/>
+        </p:nvSpPr>
+        <p:spPr>
+          <a:xfrm>
+            <a:off x="7955280" y="4791456"/>
             <a:ext cx="1234440" cy="256032"/>
           </a:xfrm>
           <a:prstGeom prst="rect">
@@ -10362,13 +10497,13 @@
       </p:sp>
       <p:sp>
         <p:nvSpPr>
-          <p:cNvPr id="42" name="Text 39"/>
-          <p:cNvSpPr/>
-          <p:nvPr/>
-        </p:nvSpPr>
-        <p:spPr>
-          <a:xfrm>
-            <a:off x="7955280" y="4224528"/>
+          <p:cNvPr id="46" name="Text 43"/>
+          <p:cNvSpPr/>
+          <p:nvPr/>
+        </p:nvSpPr>
+        <p:spPr>
+          <a:xfrm>
+            <a:off x="7955280" y="5047488"/>
             <a:ext cx="1234440" cy="310896"/>
           </a:xfrm>
           <a:prstGeom prst="rect">
@@ -10401,13 +10536,13 @@
       </p:sp>
       <p:sp>
         <p:nvSpPr>
-          <p:cNvPr id="43" name="Shape 40"/>
-          <p:cNvSpPr/>
-          <p:nvPr/>
-        </p:nvSpPr>
-        <p:spPr>
-          <a:xfrm>
-            <a:off x="9308592" y="3968496"/>
+          <p:cNvPr id="47" name="Shape 44"/>
+          <p:cNvSpPr/>
+          <p:nvPr/>
+        </p:nvSpPr>
+        <p:spPr>
+          <a:xfrm>
+            <a:off x="9308592" y="4791456"/>
             <a:ext cx="1234440" cy="566928"/>
           </a:xfrm>
           <a:prstGeom prst="rect">
@@ -10426,13 +10561,13 @@
       </p:sp>
       <p:sp>
         <p:nvSpPr>
-          <p:cNvPr id="44" name="Text 41"/>
-          <p:cNvSpPr/>
-          <p:nvPr/>
-        </p:nvSpPr>
-        <p:spPr>
-          <a:xfrm>
-            <a:off x="9308592" y="3968496"/>
+          <p:cNvPr id="48" name="Text 45"/>
+          <p:cNvSpPr/>
+          <p:nvPr/>
+        </p:nvSpPr>
+        <p:spPr>
+          <a:xfrm>
+            <a:off x="9308592" y="4791456"/>
             <a:ext cx="1234440" cy="256032"/>
           </a:xfrm>
           <a:prstGeom prst="rect">
@@ -10465,13 +10600,13 @@
       </p:sp>
       <p:sp>
         <p:nvSpPr>
-          <p:cNvPr id="45" name="Text 42"/>
-          <p:cNvSpPr/>
-          <p:nvPr/>
-        </p:nvSpPr>
-        <p:spPr>
-          <a:xfrm>
-            <a:off x="9308592" y="4224528"/>
+          <p:cNvPr id="49" name="Text 46"/>
+          <p:cNvSpPr/>
+          <p:nvPr/>
+        </p:nvSpPr>
+        <p:spPr>
+          <a:xfrm>
+            <a:off x="9308592" y="5047488"/>
             <a:ext cx="1234440" cy="310896"/>
           </a:xfrm>
           <a:prstGeom prst="rect">
@@ -10504,14 +10639,14 @@
       </p:sp>
       <p:sp>
         <p:nvSpPr>
-          <p:cNvPr id="46" name="Shape 43"/>
-          <p:cNvSpPr/>
-          <p:nvPr/>
-        </p:nvSpPr>
-        <p:spPr>
-          <a:xfrm>
-            <a:off x="7955280" y="4663440"/>
-            <a:ext cx="4069080" cy="1892808"/>
+          <p:cNvPr id="50" name="Shape 47"/>
+          <p:cNvSpPr/>
+          <p:nvPr/>
+        </p:nvSpPr>
+        <p:spPr>
+          <a:xfrm>
+            <a:off x="7955280" y="5577840"/>
+            <a:ext cx="4069080" cy="978408"/>
           </a:xfrm>
           <a:prstGeom prst="rect">
             <a:avLst/>
@@ -10529,14 +10664,14 @@
       </p:sp>
       <p:sp>
         <p:nvSpPr>
-          <p:cNvPr id="47" name="Shape 44"/>
-          <p:cNvSpPr/>
-          <p:nvPr/>
-        </p:nvSpPr>
-        <p:spPr>
-          <a:xfrm>
-            <a:off x="7955280" y="4663440"/>
-            <a:ext cx="54864" cy="1892808"/>
+          <p:cNvPr id="51" name="Shape 48"/>
+          <p:cNvSpPr/>
+          <p:nvPr/>
+        </p:nvSpPr>
+        <p:spPr>
+          <a:xfrm>
+            <a:off x="7955280" y="5577840"/>
+            <a:ext cx="54864" cy="978408"/>
           </a:xfrm>
           <a:prstGeom prst="rect">
             <a:avLst/>
@@ -10554,13 +10689,13 @@
       </p:sp>
       <p:sp>
         <p:nvSpPr>
-          <p:cNvPr id="48" name="Text 45"/>
-          <p:cNvSpPr/>
-          <p:nvPr/>
-        </p:nvSpPr>
-        <p:spPr>
-          <a:xfrm>
-            <a:off x="8065008" y="4718304"/>
+          <p:cNvPr id="52" name="Text 49"/>
+          <p:cNvSpPr/>
+          <p:nvPr/>
+        </p:nvSpPr>
+        <p:spPr>
+          <a:xfrm>
+            <a:off x="8065008" y="5632704"/>
             <a:ext cx="3886200" cy="228600"/>
           </a:xfrm>
           <a:prstGeom prst="rect">
@@ -10593,14 +10728,14 @@
       </p:sp>
       <p:sp>
         <p:nvSpPr>
-          <p:cNvPr id="49" name="Text 46"/>
-          <p:cNvSpPr/>
-          <p:nvPr/>
-        </p:nvSpPr>
-        <p:spPr>
-          <a:xfrm>
-            <a:off x="8065008" y="4983480"/>
-            <a:ext cx="3886200" cy="1481328"/>
+          <p:cNvPr id="53" name="Text 50"/>
+          <p:cNvSpPr/>
+          <p:nvPr/>
+        </p:nvSpPr>
+        <p:spPr>
+          <a:xfrm>
+            <a:off x="8065008" y="5897880"/>
+            <a:ext cx="3886200" cy="566928"/>
           </a:xfrm>
           <a:prstGeom prst="rect">
             <a:avLst/>
@@ -14641,6 +14776,280 @@
                   </a:tcPr>
                 </a:tc>
               </a:tr>
+              <a:tr h="384048">
+                <a:tc>
+                  <a:txBody>
+                    <a:bodyPr/>
+                    <a:lstStyle/>
+                    <a:p>
+                      <a:pPr algn="l" indent="0" marL="0">
+                        <a:buNone/>
+                      </a:pPr>
+                      <a:r>
+                        <a:rPr lang="en-US" sz="1200" b="1" dirty="0">
+                          <a:solidFill>
+                            <a:srgbClr val="5D300F"/>
+                          </a:solidFill>
+                          <a:latin typeface="Century Gothic" pitchFamily="34" charset="0"/>
+                          <a:ea typeface="Century Gothic" pitchFamily="34" charset="-122"/>
+                          <a:cs typeface="Century Gothic" pitchFamily="34" charset="-120"/>
+                        </a:rPr>
+                        <a:t>GROUP TOTAL</a:t>
+                      </a:r>
+                      <a:endParaRPr lang="en-US" sz="1200" dirty="0">
+                        <a:latin typeface="Century Gothic" charset="0"/>
+                        <a:ea typeface="Century Gothic" charset="0"/>
+                        <a:cs typeface="Century Gothic" charset="0"/>
+                      </a:endParaRPr>
+                    </a:p>
+                  </a:txBody>
+                  <a:tcPr marL="91440" marR="91440" marT="45720" marB="45720" anchor="ctr">
+                    <a:lnL w="6350" cap="flat" cmpd="sng" algn="ctr">
+                      <a:solidFill>
+                        <a:srgbClr val="D6CFC4"/>
+                      </a:solidFill>
+                      <a:prstDash val="solid"/>
+                      <a:round/>
+                      <a:headEnd type="none" w="med" len="med"/>
+                      <a:tailEnd type="none" w="med" len="med"/>
+                    </a:lnL>
+                    <a:lnR w="6350" cap="flat" cmpd="sng" algn="ctr">
+                      <a:solidFill>
+                        <a:srgbClr val="D6CFC4"/>
+                      </a:solidFill>
+                      <a:prstDash val="solid"/>
+                      <a:round/>
+                      <a:headEnd type="none" w="med" len="med"/>
+                      <a:tailEnd type="none" w="med" len="med"/>
+                    </a:lnR>
+                    <a:lnT w="6350" cap="flat" cmpd="sng" algn="ctr">
+                      <a:solidFill>
+                        <a:srgbClr val="D6CFC4"/>
+                      </a:solidFill>
+                      <a:prstDash val="solid"/>
+                      <a:round/>
+                      <a:headEnd type="none" w="med" len="med"/>
+                      <a:tailEnd type="none" w="med" len="med"/>
+                    </a:lnT>
+                    <a:lnB w="6350" cap="flat" cmpd="sng" algn="ctr">
+                      <a:solidFill>
+                        <a:srgbClr val="D6CFC4"/>
+                      </a:solidFill>
+                      <a:prstDash val="solid"/>
+                      <a:round/>
+                      <a:headEnd type="none" w="med" len="med"/>
+                      <a:tailEnd type="none" w="med" len="med"/>
+                    </a:lnB>
+                    <a:solidFill>
+                      <a:srgbClr val="FFF9D9"/>
+                    </a:solidFill>
+                  </a:tcPr>
+                </a:tc>
+                <a:tc>
+                  <a:txBody>
+                    <a:bodyPr/>
+                    <a:lstStyle/>
+                    <a:p>
+                      <a:pPr algn="ctr" indent="0" marL="0">
+                        <a:buNone/>
+                      </a:pPr>
+                      <a:r>
+                        <a:rPr lang="en-US" sz="1200" b="1" dirty="0">
+                          <a:solidFill>
+                            <a:srgbClr val="5D300F"/>
+                          </a:solidFill>
+                          <a:latin typeface="Calibri" pitchFamily="34" charset="0"/>
+                          <a:ea typeface="Calibri" pitchFamily="34" charset="-122"/>
+                          <a:cs typeface="Calibri" pitchFamily="34" charset="-120"/>
+                        </a:rPr>
+                        <a:t>—</a:t>
+                      </a:r>
+                      <a:endParaRPr lang="en-US" sz="1200" dirty="0">
+                        <a:latin typeface="Calibri" charset="0"/>
+                        <a:ea typeface="Calibri" charset="0"/>
+                        <a:cs typeface="Calibri" charset="0"/>
+                      </a:endParaRPr>
+                    </a:p>
+                  </a:txBody>
+                  <a:tcPr marL="91440" marR="91440" marT="45720" marB="45720" anchor="ctr">
+                    <a:lnL w="6350" cap="flat" cmpd="sng" algn="ctr">
+                      <a:solidFill>
+                        <a:srgbClr val="D6CFC4"/>
+                      </a:solidFill>
+                      <a:prstDash val="solid"/>
+                      <a:round/>
+                      <a:headEnd type="none" w="med" len="med"/>
+                      <a:tailEnd type="none" w="med" len="med"/>
+                    </a:lnL>
+                    <a:lnR w="6350" cap="flat" cmpd="sng" algn="ctr">
+                      <a:solidFill>
+                        <a:srgbClr val="D6CFC4"/>
+                      </a:solidFill>
+                      <a:prstDash val="solid"/>
+                      <a:round/>
+                      <a:headEnd type="none" w="med" len="med"/>
+                      <a:tailEnd type="none" w="med" len="med"/>
+                    </a:lnR>
+                    <a:lnT w="6350" cap="flat" cmpd="sng" algn="ctr">
+                      <a:solidFill>
+                        <a:srgbClr val="D6CFC4"/>
+                      </a:solidFill>
+                      <a:prstDash val="solid"/>
+                      <a:round/>
+                      <a:headEnd type="none" w="med" len="med"/>
+                      <a:tailEnd type="none" w="med" len="med"/>
+                    </a:lnT>
+                    <a:lnB w="6350" cap="flat" cmpd="sng" algn="ctr">
+                      <a:solidFill>
+                        <a:srgbClr val="D6CFC4"/>
+                      </a:solidFill>
+                      <a:prstDash val="solid"/>
+                      <a:round/>
+                      <a:headEnd type="none" w="med" len="med"/>
+                      <a:tailEnd type="none" w="med" len="med"/>
+                    </a:lnB>
+                    <a:solidFill>
+                      <a:srgbClr val="FFF9D9"/>
+                    </a:solidFill>
+                  </a:tcPr>
+                </a:tc>
+                <a:tc>
+                  <a:txBody>
+                    <a:bodyPr/>
+                    <a:lstStyle/>
+                    <a:p>
+                      <a:pPr algn="ctr" indent="0" marL="0">
+                        <a:buNone/>
+                      </a:pPr>
+                      <a:r>
+                        <a:rPr lang="en-US" sz="1200" b="1" dirty="0">
+                          <a:solidFill>
+                            <a:srgbClr val="5D300F"/>
+                          </a:solidFill>
+                          <a:latin typeface="Calibri" pitchFamily="34" charset="0"/>
+                          <a:ea typeface="Calibri" pitchFamily="34" charset="-122"/>
+                          <a:cs typeface="Calibri" pitchFamily="34" charset="-120"/>
+                        </a:rPr>
+                        <a:t>6.4%</a:t>
+                      </a:r>
+                      <a:endParaRPr lang="en-US" sz="1200" dirty="0">
+                        <a:latin typeface="Calibri" charset="0"/>
+                        <a:ea typeface="Calibri" charset="0"/>
+                        <a:cs typeface="Calibri" charset="0"/>
+                      </a:endParaRPr>
+                    </a:p>
+                  </a:txBody>
+                  <a:tcPr marL="91440" marR="91440" marT="45720" marB="45720" anchor="ctr">
+                    <a:lnL w="6350" cap="flat" cmpd="sng" algn="ctr">
+                      <a:solidFill>
+                        <a:srgbClr val="D6CFC4"/>
+                      </a:solidFill>
+                      <a:prstDash val="solid"/>
+                      <a:round/>
+                      <a:headEnd type="none" w="med" len="med"/>
+                      <a:tailEnd type="none" w="med" len="med"/>
+                    </a:lnL>
+                    <a:lnR w="6350" cap="flat" cmpd="sng" algn="ctr">
+                      <a:solidFill>
+                        <a:srgbClr val="D6CFC4"/>
+                      </a:solidFill>
+                      <a:prstDash val="solid"/>
+                      <a:round/>
+                      <a:headEnd type="none" w="med" len="med"/>
+                      <a:tailEnd type="none" w="med" len="med"/>
+                    </a:lnR>
+                    <a:lnT w="6350" cap="flat" cmpd="sng" algn="ctr">
+                      <a:solidFill>
+                        <a:srgbClr val="D6CFC4"/>
+                      </a:solidFill>
+                      <a:prstDash val="solid"/>
+                      <a:round/>
+                      <a:headEnd type="none" w="med" len="med"/>
+                      <a:tailEnd type="none" w="med" len="med"/>
+                    </a:lnT>
+                    <a:lnB w="6350" cap="flat" cmpd="sng" algn="ctr">
+                      <a:solidFill>
+                        <a:srgbClr val="D6CFC4"/>
+                      </a:solidFill>
+                      <a:prstDash val="solid"/>
+                      <a:round/>
+                      <a:headEnd type="none" w="med" len="med"/>
+                      <a:tailEnd type="none" w="med" len="med"/>
+                    </a:lnB>
+                    <a:solidFill>
+                      <a:srgbClr val="FFF9D9"/>
+                    </a:solidFill>
+                  </a:tcPr>
+                </a:tc>
+                <a:tc>
+                  <a:txBody>
+                    <a:bodyPr/>
+                    <a:lstStyle/>
+                    <a:p>
+                      <a:pPr algn="ctr" indent="0" marL="0">
+                        <a:buNone/>
+                      </a:pPr>
+                      <a:r>
+                        <a:rPr lang="en-US" sz="1200" b="1" dirty="0">
+                          <a:solidFill>
+                            <a:srgbClr val="718096"/>
+                          </a:solidFill>
+                          <a:latin typeface="Calibri" pitchFamily="34" charset="0"/>
+                          <a:ea typeface="Calibri" pitchFamily="34" charset="-122"/>
+                          <a:cs typeface="Calibri" pitchFamily="34" charset="-120"/>
+                        </a:rPr>
+                        <a:t>—</a:t>
+                      </a:r>
+                      <a:endParaRPr lang="en-US" sz="1200" dirty="0">
+                        <a:latin typeface="Calibri" charset="0"/>
+                        <a:ea typeface="Calibri" charset="0"/>
+                        <a:cs typeface="Calibri" charset="0"/>
+                      </a:endParaRPr>
+                    </a:p>
+                  </a:txBody>
+                  <a:tcPr marL="91440" marR="91440" marT="45720" marB="45720" anchor="ctr">
+                    <a:lnL w="6350" cap="flat" cmpd="sng" algn="ctr">
+                      <a:solidFill>
+                        <a:srgbClr val="D6CFC4"/>
+                      </a:solidFill>
+                      <a:prstDash val="solid"/>
+                      <a:round/>
+                      <a:headEnd type="none" w="med" len="med"/>
+                      <a:tailEnd type="none" w="med" len="med"/>
+                    </a:lnL>
+                    <a:lnR w="6350" cap="flat" cmpd="sng" algn="ctr">
+                      <a:solidFill>
+                        <a:srgbClr val="D6CFC4"/>
+                      </a:solidFill>
+                      <a:prstDash val="solid"/>
+                      <a:round/>
+                      <a:headEnd type="none" w="med" len="med"/>
+                      <a:tailEnd type="none" w="med" len="med"/>
+                    </a:lnR>
+                    <a:lnT w="6350" cap="flat" cmpd="sng" algn="ctr">
+                      <a:solidFill>
+                        <a:srgbClr val="D6CFC4"/>
+                      </a:solidFill>
+                      <a:prstDash val="solid"/>
+                      <a:round/>
+                      <a:headEnd type="none" w="med" len="med"/>
+                      <a:tailEnd type="none" w="med" len="med"/>
+                    </a:lnT>
+                    <a:lnB w="6350" cap="flat" cmpd="sng" algn="ctr">
+                      <a:solidFill>
+                        <a:srgbClr val="D6CFC4"/>
+                      </a:solidFill>
+                      <a:prstDash val="solid"/>
+                      <a:round/>
+                      <a:headEnd type="none" w="med" len="med"/>
+                      <a:tailEnd type="none" w="med" len="med"/>
+                    </a:lnB>
+                    <a:solidFill>
+                      <a:srgbClr val="FFF9D9"/>
+                    </a:solidFill>
+                  </a:tcPr>
+                </a:tc>
+              </a:tr>
             </a:tbl>
           </a:graphicData>
         </a:graphic>
@@ -16619,6 +17028,280 @@
                     </a:lnB>
                     <a:solidFill>
                       <a:srgbClr val="FFFFFF"/>
+                    </a:solidFill>
+                  </a:tcPr>
+                </a:tc>
+              </a:tr>
+              <a:tr h="384048">
+                <a:tc>
+                  <a:txBody>
+                    <a:bodyPr/>
+                    <a:lstStyle/>
+                    <a:p>
+                      <a:pPr algn="l" indent="0" marL="0">
+                        <a:buNone/>
+                      </a:pPr>
+                      <a:r>
+                        <a:rPr lang="en-US" sz="1200" b="1" dirty="0">
+                          <a:solidFill>
+                            <a:srgbClr val="5D300F"/>
+                          </a:solidFill>
+                          <a:latin typeface="Century Gothic" pitchFamily="34" charset="0"/>
+                          <a:ea typeface="Century Gothic" pitchFamily="34" charset="-122"/>
+                          <a:cs typeface="Century Gothic" pitchFamily="34" charset="-120"/>
+                        </a:rPr>
+                        <a:t>GROUP TOTAL</a:t>
+                      </a:r>
+                      <a:endParaRPr lang="en-US" sz="1200" dirty="0">
+                        <a:latin typeface="Century Gothic" charset="0"/>
+                        <a:ea typeface="Century Gothic" charset="0"/>
+                        <a:cs typeface="Century Gothic" charset="0"/>
+                      </a:endParaRPr>
+                    </a:p>
+                  </a:txBody>
+                  <a:tcPr marL="91440" marR="91440" marT="45720" marB="45720" anchor="ctr">
+                    <a:lnL w="6350" cap="flat" cmpd="sng" algn="ctr">
+                      <a:solidFill>
+                        <a:srgbClr val="D6CFC4"/>
+                      </a:solidFill>
+                      <a:prstDash val="solid"/>
+                      <a:round/>
+                      <a:headEnd type="none" w="med" len="med"/>
+                      <a:tailEnd type="none" w="med" len="med"/>
+                    </a:lnL>
+                    <a:lnR w="6350" cap="flat" cmpd="sng" algn="ctr">
+                      <a:solidFill>
+                        <a:srgbClr val="D6CFC4"/>
+                      </a:solidFill>
+                      <a:prstDash val="solid"/>
+                      <a:round/>
+                      <a:headEnd type="none" w="med" len="med"/>
+                      <a:tailEnd type="none" w="med" len="med"/>
+                    </a:lnR>
+                    <a:lnT w="6350" cap="flat" cmpd="sng" algn="ctr">
+                      <a:solidFill>
+                        <a:srgbClr val="D6CFC4"/>
+                      </a:solidFill>
+                      <a:prstDash val="solid"/>
+                      <a:round/>
+                      <a:headEnd type="none" w="med" len="med"/>
+                      <a:tailEnd type="none" w="med" len="med"/>
+                    </a:lnT>
+                    <a:lnB w="6350" cap="flat" cmpd="sng" algn="ctr">
+                      <a:solidFill>
+                        <a:srgbClr val="D6CFC4"/>
+                      </a:solidFill>
+                      <a:prstDash val="solid"/>
+                      <a:round/>
+                      <a:headEnd type="none" w="med" len="med"/>
+                      <a:tailEnd type="none" w="med" len="med"/>
+                    </a:lnB>
+                    <a:solidFill>
+                      <a:srgbClr val="FFF9D9"/>
+                    </a:solidFill>
+                  </a:tcPr>
+                </a:tc>
+                <a:tc>
+                  <a:txBody>
+                    <a:bodyPr/>
+                    <a:lstStyle/>
+                    <a:p>
+                      <a:pPr algn="ctr" indent="0" marL="0">
+                        <a:buNone/>
+                      </a:pPr>
+                      <a:r>
+                        <a:rPr lang="en-US" sz="1200" b="1" dirty="0">
+                          <a:solidFill>
+                            <a:srgbClr val="5D300F"/>
+                          </a:solidFill>
+                          <a:latin typeface="Calibri" pitchFamily="34" charset="0"/>
+                          <a:ea typeface="Calibri" pitchFamily="34" charset="-122"/>
+                          <a:cs typeface="Calibri" pitchFamily="34" charset="-120"/>
+                        </a:rPr>
+                        <a:t>—</a:t>
+                      </a:r>
+                      <a:endParaRPr lang="en-US" sz="1200" dirty="0">
+                        <a:latin typeface="Calibri" charset="0"/>
+                        <a:ea typeface="Calibri" charset="0"/>
+                        <a:cs typeface="Calibri" charset="0"/>
+                      </a:endParaRPr>
+                    </a:p>
+                  </a:txBody>
+                  <a:tcPr marL="91440" marR="91440" marT="45720" marB="45720" anchor="ctr">
+                    <a:lnL w="6350" cap="flat" cmpd="sng" algn="ctr">
+                      <a:solidFill>
+                        <a:srgbClr val="D6CFC4"/>
+                      </a:solidFill>
+                      <a:prstDash val="solid"/>
+                      <a:round/>
+                      <a:headEnd type="none" w="med" len="med"/>
+                      <a:tailEnd type="none" w="med" len="med"/>
+                    </a:lnL>
+                    <a:lnR w="6350" cap="flat" cmpd="sng" algn="ctr">
+                      <a:solidFill>
+                        <a:srgbClr val="D6CFC4"/>
+                      </a:solidFill>
+                      <a:prstDash val="solid"/>
+                      <a:round/>
+                      <a:headEnd type="none" w="med" len="med"/>
+                      <a:tailEnd type="none" w="med" len="med"/>
+                    </a:lnR>
+                    <a:lnT w="6350" cap="flat" cmpd="sng" algn="ctr">
+                      <a:solidFill>
+                        <a:srgbClr val="D6CFC4"/>
+                      </a:solidFill>
+                      <a:prstDash val="solid"/>
+                      <a:round/>
+                      <a:headEnd type="none" w="med" len="med"/>
+                      <a:tailEnd type="none" w="med" len="med"/>
+                    </a:lnT>
+                    <a:lnB w="6350" cap="flat" cmpd="sng" algn="ctr">
+                      <a:solidFill>
+                        <a:srgbClr val="D6CFC4"/>
+                      </a:solidFill>
+                      <a:prstDash val="solid"/>
+                      <a:round/>
+                      <a:headEnd type="none" w="med" len="med"/>
+                      <a:tailEnd type="none" w="med" len="med"/>
+                    </a:lnB>
+                    <a:solidFill>
+                      <a:srgbClr val="FFF9D9"/>
+                    </a:solidFill>
+                  </a:tcPr>
+                </a:tc>
+                <a:tc>
+                  <a:txBody>
+                    <a:bodyPr/>
+                    <a:lstStyle/>
+                    <a:p>
+                      <a:pPr algn="ctr" indent="0" marL="0">
+                        <a:buNone/>
+                      </a:pPr>
+                      <a:r>
+                        <a:rPr lang="en-US" sz="1200" b="1" dirty="0">
+                          <a:solidFill>
+                            <a:srgbClr val="5D300F"/>
+                          </a:solidFill>
+                          <a:latin typeface="Calibri" pitchFamily="34" charset="0"/>
+                          <a:ea typeface="Calibri" pitchFamily="34" charset="-122"/>
+                          <a:cs typeface="Calibri" pitchFamily="34" charset="-120"/>
+                        </a:rPr>
+                        <a:t>9.2%</a:t>
+                      </a:r>
+                      <a:endParaRPr lang="en-US" sz="1200" dirty="0">
+                        <a:latin typeface="Calibri" charset="0"/>
+                        <a:ea typeface="Calibri" charset="0"/>
+                        <a:cs typeface="Calibri" charset="0"/>
+                      </a:endParaRPr>
+                    </a:p>
+                  </a:txBody>
+                  <a:tcPr marL="91440" marR="91440" marT="45720" marB="45720" anchor="ctr">
+                    <a:lnL w="6350" cap="flat" cmpd="sng" algn="ctr">
+                      <a:solidFill>
+                        <a:srgbClr val="D6CFC4"/>
+                      </a:solidFill>
+                      <a:prstDash val="solid"/>
+                      <a:round/>
+                      <a:headEnd type="none" w="med" len="med"/>
+                      <a:tailEnd type="none" w="med" len="med"/>
+                    </a:lnL>
+                    <a:lnR w="6350" cap="flat" cmpd="sng" algn="ctr">
+                      <a:solidFill>
+                        <a:srgbClr val="D6CFC4"/>
+                      </a:solidFill>
+                      <a:prstDash val="solid"/>
+                      <a:round/>
+                      <a:headEnd type="none" w="med" len="med"/>
+                      <a:tailEnd type="none" w="med" len="med"/>
+                    </a:lnR>
+                    <a:lnT w="6350" cap="flat" cmpd="sng" algn="ctr">
+                      <a:solidFill>
+                        <a:srgbClr val="D6CFC4"/>
+                      </a:solidFill>
+                      <a:prstDash val="solid"/>
+                      <a:round/>
+                      <a:headEnd type="none" w="med" len="med"/>
+                      <a:tailEnd type="none" w="med" len="med"/>
+                    </a:lnT>
+                    <a:lnB w="6350" cap="flat" cmpd="sng" algn="ctr">
+                      <a:solidFill>
+                        <a:srgbClr val="D6CFC4"/>
+                      </a:solidFill>
+                      <a:prstDash val="solid"/>
+                      <a:round/>
+                      <a:headEnd type="none" w="med" len="med"/>
+                      <a:tailEnd type="none" w="med" len="med"/>
+                    </a:lnB>
+                    <a:solidFill>
+                      <a:srgbClr val="FFF9D9"/>
+                    </a:solidFill>
+                  </a:tcPr>
+                </a:tc>
+                <a:tc>
+                  <a:txBody>
+                    <a:bodyPr/>
+                    <a:lstStyle/>
+                    <a:p>
+                      <a:pPr algn="ctr" indent="0" marL="0">
+                        <a:buNone/>
+                      </a:pPr>
+                      <a:r>
+                        <a:rPr lang="en-US" sz="1200" b="1" dirty="0">
+                          <a:solidFill>
+                            <a:srgbClr val="718096"/>
+                          </a:solidFill>
+                          <a:latin typeface="Calibri" pitchFamily="34" charset="0"/>
+                          <a:ea typeface="Calibri" pitchFamily="34" charset="-122"/>
+                          <a:cs typeface="Calibri" pitchFamily="34" charset="-120"/>
+                        </a:rPr>
+                        <a:t>—</a:t>
+                      </a:r>
+                      <a:endParaRPr lang="en-US" sz="1200" dirty="0">
+                        <a:latin typeface="Calibri" charset="0"/>
+                        <a:ea typeface="Calibri" charset="0"/>
+                        <a:cs typeface="Calibri" charset="0"/>
+                      </a:endParaRPr>
+                    </a:p>
+                  </a:txBody>
+                  <a:tcPr marL="91440" marR="91440" marT="45720" marB="45720" anchor="ctr">
+                    <a:lnL w="6350" cap="flat" cmpd="sng" algn="ctr">
+                      <a:solidFill>
+                        <a:srgbClr val="D6CFC4"/>
+                      </a:solidFill>
+                      <a:prstDash val="solid"/>
+                      <a:round/>
+                      <a:headEnd type="none" w="med" len="med"/>
+                      <a:tailEnd type="none" w="med" len="med"/>
+                    </a:lnL>
+                    <a:lnR w="6350" cap="flat" cmpd="sng" algn="ctr">
+                      <a:solidFill>
+                        <a:srgbClr val="D6CFC4"/>
+                      </a:solidFill>
+                      <a:prstDash val="solid"/>
+                      <a:round/>
+                      <a:headEnd type="none" w="med" len="med"/>
+                      <a:tailEnd type="none" w="med" len="med"/>
+                    </a:lnR>
+                    <a:lnT w="6350" cap="flat" cmpd="sng" algn="ctr">
+                      <a:solidFill>
+                        <a:srgbClr val="D6CFC4"/>
+                      </a:solidFill>
+                      <a:prstDash val="solid"/>
+                      <a:round/>
+                      <a:headEnd type="none" w="med" len="med"/>
+                      <a:tailEnd type="none" w="med" len="med"/>
+                    </a:lnT>
+                    <a:lnB w="6350" cap="flat" cmpd="sng" algn="ctr">
+                      <a:solidFill>
+                        <a:srgbClr val="D6CFC4"/>
+                      </a:solidFill>
+                      <a:prstDash val="solid"/>
+                      <a:round/>
+                      <a:headEnd type="none" w="med" len="med"/>
+                      <a:tailEnd type="none" w="med" len="med"/>
+                    </a:lnB>
+                    <a:solidFill>
+                      <a:srgbClr val="FFF9D9"/>
                     </a:solidFill>
                   </a:tcPr>
                 </a:tc>

--- a/reports/2026-02.pptx
+++ b/reports/2026-02.pptx
@@ -562,7 +562,7 @@
                 <c:formatCode>General</c:formatCode>
                 <c:ptCount val="5"/>
                 <c:pt idx="0">
-                  <c:v>0</c:v>
+                  <c:v>0.944763</c:v>
                 </c:pt>
                 <c:pt idx="1">
                   <c:v>0.933149</c:v>
@@ -7148,13 +7148,13 @@
             <a:r>
               <a:rPr lang="en-US" sz="1200" b="1" dirty="0">
                 <a:solidFill>
-                  <a:srgbClr val="718096"/>
+                  <a:srgbClr val="1A7A6E"/>
                 </a:solidFill>
                 <a:latin typeface="Calibri" pitchFamily="34" charset="0"/>
                 <a:ea typeface="Calibri" pitchFamily="34" charset="-122"/>
                 <a:cs typeface="Calibri" pitchFamily="34" charset="-120"/>
               </a:rPr>
-              <a:t>—</a:t>
+              <a:t>-5.8%</a:t>
             </a:r>
             <a:endParaRPr lang="en-US" sz="1200" dirty="0"/>
           </a:p>
@@ -7187,13 +7187,13 @@
             <a:r>
               <a:rPr lang="en-US" sz="1200" b="1" dirty="0">
                 <a:solidFill>
-                  <a:srgbClr val="718096"/>
+                  <a:srgbClr val="1A7A6E"/>
                 </a:solidFill>
                 <a:latin typeface="Calibri" pitchFamily="34" charset="0"/>
                 <a:ea typeface="Calibri" pitchFamily="34" charset="-122"/>
                 <a:cs typeface="Calibri" pitchFamily="34" charset="-120"/>
               </a:rPr>
-              <a:t>—</a:t>
+              <a:t>-23.4%</a:t>
             </a:r>
             <a:endParaRPr lang="en-US" sz="1200" dirty="0"/>
           </a:p>
@@ -8304,13 +8304,13 @@
             <a:r>
               <a:rPr lang="en-US" sz="1200" b="1" dirty="0">
                 <a:solidFill>
-                  <a:srgbClr val="718096"/>
+                  <a:srgbClr val="1A7A6E"/>
                 </a:solidFill>
                 <a:latin typeface="Calibri" pitchFamily="34" charset="0"/>
                 <a:ea typeface="Calibri" pitchFamily="34" charset="-122"/>
                 <a:cs typeface="Calibri" pitchFamily="34" charset="-120"/>
               </a:rPr>
-              <a:t>+0 bps</a:t>
+              <a:t>-197 bps</a:t>
             </a:r>
             <a:endParaRPr lang="en-US" sz="1200" dirty="0"/>
           </a:p>
@@ -8343,13 +8343,13 @@
             <a:r>
               <a:rPr lang="en-US" sz="1200" b="1" dirty="0">
                 <a:solidFill>
-                  <a:srgbClr val="718096"/>
+                  <a:srgbClr val="C0392B"/>
                 </a:solidFill>
                 <a:latin typeface="Calibri" pitchFamily="34" charset="0"/>
                 <a:ea typeface="Calibri" pitchFamily="34" charset="-122"/>
                 <a:cs typeface="Calibri" pitchFamily="34" charset="-120"/>
               </a:rPr>
-              <a:t>+9331 bps</a:t>
+              <a:t>+421 bps</a:t>
             </a:r>
             <a:endParaRPr lang="en-US" sz="1200" dirty="0"/>
           </a:p>
@@ -8562,7 +8562,7 @@
                 <a:ea typeface="Century Gothic" pitchFamily="34" charset="-122"/>
                 <a:cs typeface="Century Gothic" pitchFamily="34" charset="-120"/>
               </a:rPr>
-              <a:t>13,263</a:t>
+              <a:t>25,937</a:t>
             </a:r>
             <a:endParaRPr lang="en-US" sz="2600" dirty="0"/>
           </a:p>
@@ -8697,7 +8697,7 @@
                 <a:ea typeface="Century Gothic" pitchFamily="34" charset="-122"/>
                 <a:cs typeface="Century Gothic" pitchFamily="34" charset="-120"/>
               </a:rPr>
-              <a:t>47.1%</a:t>
+              <a:t>92.1%</a:t>
             </a:r>
             <a:endParaRPr lang="en-US" sz="2600" dirty="0"/>
           </a:p>
@@ -8832,7 +8832,7 @@
                 <a:ea typeface="Century Gothic" pitchFamily="34" charset="-122"/>
                 <a:cs typeface="Century Gothic" pitchFamily="34" charset="-120"/>
               </a:rPr>
-              <a:t>+4712 bps</a:t>
+              <a:t>+9215 bps</a:t>
             </a:r>
             <a:endParaRPr lang="en-US" sz="2600" dirty="0"/>
           </a:p>
@@ -8999,7 +8999,7 @@
                 <a:ea typeface="Calibri" pitchFamily="34" charset="-122"/>
                 <a:cs typeface="Calibri" pitchFamily="34" charset="-120"/>
               </a:rPr>
-              <a:t>Group total approvals: 13,263.</a:t>
+              <a:t>Group total approvals: 25,937.</a:t>
             </a:r>
             <a:endParaRPr lang="en-US" sz="1200" dirty="0"/>
           </a:p>
@@ -9460,13 +9460,13 @@
             <a:r>
               <a:rPr lang="en-US" sz="1200" b="1" dirty="0">
                 <a:solidFill>
-                  <a:srgbClr val="718096"/>
+                  <a:srgbClr val="1A7A6E"/>
                 </a:solidFill>
                 <a:latin typeface="Calibri" pitchFamily="34" charset="0"/>
                 <a:ea typeface="Calibri" pitchFamily="34" charset="-122"/>
                 <a:cs typeface="Calibri" pitchFamily="34" charset="-120"/>
               </a:rPr>
-              <a:t>—</a:t>
+              <a:t>-8.1%</a:t>
             </a:r>
             <a:endParaRPr lang="en-US" sz="1200" dirty="0"/>
           </a:p>
@@ -9481,6 +9481,45 @@
         <p:spPr>
           <a:xfrm>
             <a:off x="1655064" y="5925312"/>
+            <a:ext cx="1517904" cy="347472"/>
+          </a:xfrm>
+          <a:prstGeom prst="rect">
+            <a:avLst/>
+          </a:prstGeom>
+          <a:noFill/>
+          <a:ln/>
+        </p:spPr>
+        <p:txBody>
+          <a:bodyPr wrap="square" rtlCol="0" anchor="ctr"/>
+          <a:lstStyle/>
+          <a:p>
+            <a:pPr algn="ctr" indent="0" marL="0">
+              <a:buNone/>
+            </a:pPr>
+            <a:r>
+              <a:rPr lang="en-US" sz="1200" b="1" dirty="0">
+                <a:solidFill>
+                  <a:srgbClr val="C0392B"/>
+                </a:solidFill>
+                <a:latin typeface="Calibri" pitchFamily="34" charset="0"/>
+                <a:ea typeface="Calibri" pitchFamily="34" charset="-122"/>
+                <a:cs typeface="Calibri" pitchFamily="34" charset="-120"/>
+              </a:rPr>
+              <a:t>+16.2%</a:t>
+            </a:r>
+            <a:endParaRPr lang="en-US" sz="1200" dirty="0"/>
+          </a:p>
+        </p:txBody>
+      </p:sp>
+      <p:sp>
+        <p:nvSpPr>
+          <p:cNvPr id="17" name="Text 14"/>
+          <p:cNvSpPr/>
+          <p:nvPr/>
+        </p:nvSpPr>
+        <p:spPr>
+          <a:xfrm>
+            <a:off x="3172968" y="5925312"/>
             <a:ext cx="1517904" cy="347472"/>
           </a:xfrm>
           <a:prstGeom prst="rect">
@@ -9513,13 +9552,13 @@
       </p:sp>
       <p:sp>
         <p:nvSpPr>
-          <p:cNvPr id="17" name="Text 14"/>
-          <p:cNvSpPr/>
-          <p:nvPr/>
-        </p:nvSpPr>
-        <p:spPr>
-          <a:xfrm>
-            <a:off x="3172968" y="5925312"/>
+          <p:cNvPr id="18" name="Text 15"/>
+          <p:cNvSpPr/>
+          <p:nvPr/>
+        </p:nvSpPr>
+        <p:spPr>
+          <a:xfrm>
+            <a:off x="4690872" y="5925312"/>
             <a:ext cx="1517904" cy="347472"/>
           </a:xfrm>
           <a:prstGeom prst="rect">
@@ -9552,13 +9591,13 @@
       </p:sp>
       <p:sp>
         <p:nvSpPr>
-          <p:cNvPr id="18" name="Text 15"/>
-          <p:cNvSpPr/>
-          <p:nvPr/>
-        </p:nvSpPr>
-        <p:spPr>
-          <a:xfrm>
-            <a:off x="4690872" y="5925312"/>
+          <p:cNvPr id="19" name="Text 16"/>
+          <p:cNvSpPr/>
+          <p:nvPr/>
+        </p:nvSpPr>
+        <p:spPr>
+          <a:xfrm>
+            <a:off x="6208776" y="5925312"/>
             <a:ext cx="1517904" cy="347472"/>
           </a:xfrm>
           <a:prstGeom prst="rect">
@@ -9591,45 +9630,6 @@
       </p:sp>
       <p:sp>
         <p:nvSpPr>
-          <p:cNvPr id="19" name="Text 16"/>
-          <p:cNvSpPr/>
-          <p:nvPr/>
-        </p:nvSpPr>
-        <p:spPr>
-          <a:xfrm>
-            <a:off x="6208776" y="5925312"/>
-            <a:ext cx="1517904" cy="347472"/>
-          </a:xfrm>
-          <a:prstGeom prst="rect">
-            <a:avLst/>
-          </a:prstGeom>
-          <a:noFill/>
-          <a:ln/>
-        </p:spPr>
-        <p:txBody>
-          <a:bodyPr wrap="square" rtlCol="0" anchor="ctr"/>
-          <a:lstStyle/>
-          <a:p>
-            <a:pPr algn="ctr" indent="0" marL="0">
-              <a:buNone/>
-            </a:pPr>
-            <a:r>
-              <a:rPr lang="en-US" sz="1200" b="1" dirty="0">
-                <a:solidFill>
-                  <a:srgbClr val="718096"/>
-                </a:solidFill>
-                <a:latin typeface="Calibri" pitchFamily="34" charset="0"/>
-                <a:ea typeface="Calibri" pitchFamily="34" charset="-122"/>
-                <a:cs typeface="Calibri" pitchFamily="34" charset="-120"/>
-              </a:rPr>
-              <a:t>—</a:t>
-            </a:r>
-            <a:endParaRPr lang="en-US" sz="1200" dirty="0"/>
-          </a:p>
-        </p:txBody>
-      </p:sp>
-      <p:sp>
-        <p:nvSpPr>
           <p:cNvPr id="20" name="Shape 17"/>
           <p:cNvSpPr/>
           <p:nvPr/>
@@ -10759,7 +10759,7 @@
                 <a:ea typeface="Calibri" pitchFamily="34" charset="-122"/>
                 <a:cs typeface="Calibri" pitchFamily="34" charset="-120"/>
               </a:rPr>
-              <a:t>Total disbursed: $4,152,197.</a:t>
+              <a:t>Total disbursed: $4,152,197 (+31.8% vs prior month).</a:t>
             </a:r>
             <a:endParaRPr lang="en-US" sz="1200" dirty="0"/>
           </a:p>
@@ -11325,13 +11325,13 @@
             <a:r>
               <a:rPr lang="en-US" sz="1200" b="1" dirty="0">
                 <a:solidFill>
-                  <a:srgbClr val="718096"/>
+                  <a:srgbClr val="C0392B"/>
                 </a:solidFill>
                 <a:latin typeface="Calibri" pitchFamily="34" charset="0"/>
                 <a:ea typeface="Calibri" pitchFamily="34" charset="-122"/>
                 <a:cs typeface="Calibri" pitchFamily="34" charset="-120"/>
               </a:rPr>
-              <a:t>—</a:t>
+              <a:t>+3.2%</a:t>
             </a:r>
             <a:endParaRPr lang="en-US" sz="1200" dirty="0"/>
           </a:p>
@@ -11346,6 +11346,45 @@
         <p:spPr>
           <a:xfrm>
             <a:off x="1298448" y="5925312"/>
+            <a:ext cx="1161288" cy="347472"/>
+          </a:xfrm>
+          <a:prstGeom prst="rect">
+            <a:avLst/>
+          </a:prstGeom>
+          <a:noFill/>
+          <a:ln/>
+        </p:spPr>
+        <p:txBody>
+          <a:bodyPr wrap="square" rtlCol="0" anchor="ctr"/>
+          <a:lstStyle/>
+          <a:p>
+            <a:pPr algn="ctr" indent="0" marL="0">
+              <a:buNone/>
+            </a:pPr>
+            <a:r>
+              <a:rPr lang="en-US" sz="1200" b="1" dirty="0">
+                <a:solidFill>
+                  <a:srgbClr val="C0392B"/>
+                </a:solidFill>
+                <a:latin typeface="Calibri" pitchFamily="34" charset="0"/>
+                <a:ea typeface="Calibri" pitchFamily="34" charset="-122"/>
+                <a:cs typeface="Calibri" pitchFamily="34" charset="-120"/>
+              </a:rPr>
+              <a:t>+2.9%</a:t>
+            </a:r>
+            <a:endParaRPr lang="en-US" sz="1200" dirty="0"/>
+          </a:p>
+        </p:txBody>
+      </p:sp>
+      <p:sp>
+        <p:nvSpPr>
+          <p:cNvPr id="21" name="Text 17"/>
+          <p:cNvSpPr/>
+          <p:nvPr/>
+        </p:nvSpPr>
+        <p:spPr>
+          <a:xfrm>
+            <a:off x="2459736" y="5925312"/>
             <a:ext cx="1161288" cy="347472"/>
           </a:xfrm>
           <a:prstGeom prst="rect">
@@ -11378,13 +11417,13 @@
       </p:sp>
       <p:sp>
         <p:nvSpPr>
-          <p:cNvPr id="21" name="Text 17"/>
-          <p:cNvSpPr/>
-          <p:nvPr/>
-        </p:nvSpPr>
-        <p:spPr>
-          <a:xfrm>
-            <a:off x="2459736" y="5925312"/>
+          <p:cNvPr id="22" name="Text 18"/>
+          <p:cNvSpPr/>
+          <p:nvPr/>
+        </p:nvSpPr>
+        <p:spPr>
+          <a:xfrm>
+            <a:off x="3621024" y="5925312"/>
             <a:ext cx="1161288" cy="347472"/>
           </a:xfrm>
           <a:prstGeom prst="rect">
@@ -11417,13 +11456,13 @@
       </p:sp>
       <p:sp>
         <p:nvSpPr>
-          <p:cNvPr id="22" name="Text 18"/>
-          <p:cNvSpPr/>
-          <p:nvPr/>
-        </p:nvSpPr>
-        <p:spPr>
-          <a:xfrm>
-            <a:off x="3621024" y="5925312"/>
+          <p:cNvPr id="23" name="Text 19"/>
+          <p:cNvSpPr/>
+          <p:nvPr/>
+        </p:nvSpPr>
+        <p:spPr>
+          <a:xfrm>
+            <a:off x="4782312" y="5925312"/>
             <a:ext cx="1161288" cy="347472"/>
           </a:xfrm>
           <a:prstGeom prst="rect">
@@ -11456,45 +11495,6 @@
       </p:sp>
       <p:sp>
         <p:nvSpPr>
-          <p:cNvPr id="23" name="Text 19"/>
-          <p:cNvSpPr/>
-          <p:nvPr/>
-        </p:nvSpPr>
-        <p:spPr>
-          <a:xfrm>
-            <a:off x="4782312" y="5925312"/>
-            <a:ext cx="1161288" cy="347472"/>
-          </a:xfrm>
-          <a:prstGeom prst="rect">
-            <a:avLst/>
-          </a:prstGeom>
-          <a:noFill/>
-          <a:ln/>
-        </p:spPr>
-        <p:txBody>
-          <a:bodyPr wrap="square" rtlCol="0" anchor="ctr"/>
-          <a:lstStyle/>
-          <a:p>
-            <a:pPr algn="ctr" indent="0" marL="0">
-              <a:buNone/>
-            </a:pPr>
-            <a:r>
-              <a:rPr lang="en-US" sz="1200" b="1" dirty="0">
-                <a:solidFill>
-                  <a:srgbClr val="718096"/>
-                </a:solidFill>
-                <a:latin typeface="Calibri" pitchFamily="34" charset="0"/>
-                <a:ea typeface="Calibri" pitchFamily="34" charset="-122"/>
-                <a:cs typeface="Calibri" pitchFamily="34" charset="-120"/>
-              </a:rPr>
-              <a:t>—</a:t>
-            </a:r>
-            <a:endParaRPr lang="en-US" sz="1200" dirty="0"/>
-          </a:p>
-        </p:txBody>
-      </p:sp>
-      <p:sp>
-        <p:nvSpPr>
           <p:cNvPr id="24" name="Shape 20"/>
           <p:cNvSpPr/>
           <p:nvPr/>
@@ -11609,13 +11609,13 @@
             <a:r>
               <a:rPr lang="en-US" sz="1200" b="1" dirty="0">
                 <a:solidFill>
-                  <a:srgbClr val="718096"/>
+                  <a:srgbClr val="1A7A6E"/>
                 </a:solidFill>
                 <a:latin typeface="Calibri" pitchFamily="34" charset="0"/>
                 <a:ea typeface="Calibri" pitchFamily="34" charset="-122"/>
                 <a:cs typeface="Calibri" pitchFamily="34" charset="-120"/>
               </a:rPr>
-              <a:t>—</a:t>
+              <a:t>-40.2%</a:t>
             </a:r>
             <a:endParaRPr lang="en-US" sz="1200" dirty="0"/>
           </a:p>
@@ -11648,13 +11648,13 @@
             <a:r>
               <a:rPr lang="en-US" sz="1200" b="1" dirty="0">
                 <a:solidFill>
-                  <a:srgbClr val="718096"/>
+                  <a:srgbClr val="1A7A6E"/>
                 </a:solidFill>
                 <a:latin typeface="Calibri" pitchFamily="34" charset="0"/>
                 <a:ea typeface="Calibri" pitchFamily="34" charset="-122"/>
                 <a:cs typeface="Calibri" pitchFamily="34" charset="-120"/>
               </a:rPr>
-              <a:t>—</a:t>
+              <a:t>-14.9%</a:t>
             </a:r>
             <a:endParaRPr lang="en-US" sz="1200" dirty="0"/>
           </a:p>
@@ -12215,13 +12215,13 @@
             <a:r>
               <a:rPr lang="en-US" sz="1200" b="1" dirty="0">
                 <a:solidFill>
-                  <a:srgbClr val="718096"/>
+                  <a:srgbClr val="C0392B"/>
                 </a:solidFill>
                 <a:latin typeface="Calibri" pitchFamily="34" charset="0"/>
                 <a:ea typeface="Calibri" pitchFamily="34" charset="-122"/>
                 <a:cs typeface="Calibri" pitchFamily="34" charset="-120"/>
               </a:rPr>
-              <a:t>—</a:t>
+              <a:t>+12.6%</a:t>
             </a:r>
             <a:endParaRPr lang="en-US" sz="1200" dirty="0"/>
           </a:p>
@@ -12236,6 +12236,45 @@
         <p:spPr>
           <a:xfrm>
             <a:off x="1655064" y="5925312"/>
+            <a:ext cx="1517904" cy="347472"/>
+          </a:xfrm>
+          <a:prstGeom prst="rect">
+            <a:avLst/>
+          </a:prstGeom>
+          <a:noFill/>
+          <a:ln/>
+        </p:spPr>
+        <p:txBody>
+          <a:bodyPr wrap="square" rtlCol="0" anchor="ctr"/>
+          <a:lstStyle/>
+          <a:p>
+            <a:pPr algn="ctr" indent="0" marL="0">
+              <a:buNone/>
+            </a:pPr>
+            <a:r>
+              <a:rPr lang="en-US" sz="1200" b="1" dirty="0">
+                <a:solidFill>
+                  <a:srgbClr val="C0392B"/>
+                </a:solidFill>
+                <a:latin typeface="Calibri" pitchFamily="34" charset="0"/>
+                <a:ea typeface="Calibri" pitchFamily="34" charset="-122"/>
+                <a:cs typeface="Calibri" pitchFamily="34" charset="-120"/>
+              </a:rPr>
+              <a:t>+10.4%</a:t>
+            </a:r>
+            <a:endParaRPr lang="en-US" sz="1200" dirty="0"/>
+          </a:p>
+        </p:txBody>
+      </p:sp>
+      <p:sp>
+        <p:nvSpPr>
+          <p:cNvPr id="17" name="Text 14"/>
+          <p:cNvSpPr/>
+          <p:nvPr/>
+        </p:nvSpPr>
+        <p:spPr>
+          <a:xfrm>
+            <a:off x="3172968" y="5925312"/>
             <a:ext cx="1517904" cy="347472"/>
           </a:xfrm>
           <a:prstGeom prst="rect">
@@ -12268,13 +12307,13 @@
       </p:sp>
       <p:sp>
         <p:nvSpPr>
-          <p:cNvPr id="17" name="Text 14"/>
-          <p:cNvSpPr/>
-          <p:nvPr/>
-        </p:nvSpPr>
-        <p:spPr>
-          <a:xfrm>
-            <a:off x="3172968" y="5925312"/>
+          <p:cNvPr id="18" name="Text 15"/>
+          <p:cNvSpPr/>
+          <p:nvPr/>
+        </p:nvSpPr>
+        <p:spPr>
+          <a:xfrm>
+            <a:off x="4690872" y="5925312"/>
             <a:ext cx="1517904" cy="347472"/>
           </a:xfrm>
           <a:prstGeom prst="rect">
@@ -12307,13 +12346,13 @@
       </p:sp>
       <p:sp>
         <p:nvSpPr>
-          <p:cNvPr id="18" name="Text 15"/>
-          <p:cNvSpPr/>
-          <p:nvPr/>
-        </p:nvSpPr>
-        <p:spPr>
-          <a:xfrm>
-            <a:off x="4690872" y="5925312"/>
+          <p:cNvPr id="19" name="Text 16"/>
+          <p:cNvSpPr/>
+          <p:nvPr/>
+        </p:nvSpPr>
+        <p:spPr>
+          <a:xfrm>
+            <a:off x="6208776" y="5925312"/>
             <a:ext cx="1517904" cy="347472"/>
           </a:xfrm>
           <a:prstGeom prst="rect">
@@ -12346,45 +12385,6 @@
       </p:sp>
       <p:sp>
         <p:nvSpPr>
-          <p:cNvPr id="19" name="Text 16"/>
-          <p:cNvSpPr/>
-          <p:nvPr/>
-        </p:nvSpPr>
-        <p:spPr>
-          <a:xfrm>
-            <a:off x="6208776" y="5925312"/>
-            <a:ext cx="1517904" cy="347472"/>
-          </a:xfrm>
-          <a:prstGeom prst="rect">
-            <a:avLst/>
-          </a:prstGeom>
-          <a:noFill/>
-          <a:ln/>
-        </p:spPr>
-        <p:txBody>
-          <a:bodyPr wrap="square" rtlCol="0" anchor="ctr"/>
-          <a:lstStyle/>
-          <a:p>
-            <a:pPr algn="ctr" indent="0" marL="0">
-              <a:buNone/>
-            </a:pPr>
-            <a:r>
-              <a:rPr lang="en-US" sz="1200" b="1" dirty="0">
-                <a:solidFill>
-                  <a:srgbClr val="718096"/>
-                </a:solidFill>
-                <a:latin typeface="Calibri" pitchFamily="34" charset="0"/>
-                <a:ea typeface="Calibri" pitchFamily="34" charset="-122"/>
-                <a:cs typeface="Calibri" pitchFamily="34" charset="-120"/>
-              </a:rPr>
-              <a:t>—</a:t>
-            </a:r>
-            <a:endParaRPr lang="en-US" sz="1200" dirty="0"/>
-          </a:p>
-        </p:txBody>
-      </p:sp>
-      <p:sp>
-        <p:nvSpPr>
           <p:cNvPr id="20" name="Shape 17"/>
           <p:cNvSpPr/>
           <p:nvPr/>
@@ -12608,7 +12608,7 @@
                 <a:ea typeface="Century Gothic" pitchFamily="34" charset="-122"/>
                 <a:cs typeface="Century Gothic" pitchFamily="34" charset="-120"/>
               </a:rPr>
-              <a:t>—</a:t>
+              <a:t>+45.4%</a:t>
             </a:r>
             <a:endParaRPr lang="en-US" sz="2600" dirty="0"/>
           </a:p>
@@ -12775,7 +12775,7 @@
                 <a:ea typeface="Calibri" pitchFamily="34" charset="-122"/>
                 <a:cs typeface="Calibri" pitchFamily="34" charset="-120"/>
               </a:rPr>
-              <a:t>Total loan book: $13,661,650.</a:t>
+              <a:t>Total loan book: $13,661,650 (+45.4% vs prior month).</a:t>
             </a:r>
             <a:endParaRPr lang="en-US" sz="1200" dirty="0"/>
           </a:p>
@@ -13492,7 +13492,7 @@
                           <a:ea typeface="Calibri" pitchFamily="34" charset="-122"/>
                           <a:cs typeface="Calibri" pitchFamily="34" charset="-120"/>
                         </a:rPr>
-                        <a:t>0.0%</a:t>
+                        <a:t>4.5%</a:t>
                       </a:r>
                       <a:endParaRPr lang="en-US" sz="1200" dirty="0">
                         <a:latin typeface="Calibri" charset="0"/>
@@ -13628,7 +13628,7 @@
                           <a:ea typeface="Calibri" pitchFamily="34" charset="-122"/>
                           <a:cs typeface="Calibri" pitchFamily="34" charset="-120"/>
                         </a:rPr>
-                        <a:t>+646 bps</a:t>
+                        <a:t>+195 bps</a:t>
                       </a:r>
                       <a:endParaRPr lang="en-US" sz="1200" dirty="0">
                         <a:latin typeface="Calibri" charset="0"/>
@@ -13766,7 +13766,7 @@
                           <a:ea typeface="Calibri" pitchFamily="34" charset="-122"/>
                           <a:cs typeface="Calibri" pitchFamily="34" charset="-120"/>
                         </a:rPr>
-                        <a:t>0.0%</a:t>
+                        <a:t>5.1%</a:t>
                       </a:r>
                       <a:endParaRPr lang="en-US" sz="1200" dirty="0">
                         <a:latin typeface="Calibri" charset="0"/>
@@ -13896,13 +13896,13 @@
                       <a:r>
                         <a:rPr lang="en-US" sz="1200" dirty="0">
                           <a:solidFill>
-                            <a:srgbClr val="C0392B"/>
+                            <a:srgbClr val="1A7A6E"/>
                           </a:solidFill>
                           <a:latin typeface="Calibri" pitchFamily="34" charset="0"/>
                           <a:ea typeface="Calibri" pitchFamily="34" charset="-122"/>
                           <a:cs typeface="Calibri" pitchFamily="34" charset="-120"/>
                         </a:rPr>
-                        <a:t>+456 bps</a:t>
+                        <a:t>-57 bps</a:t>
                       </a:r>
                       <a:endParaRPr lang="en-US" sz="1200" dirty="0">
                         <a:latin typeface="Calibri" charset="0"/>
@@ -14862,7 +14862,7 @@
                           <a:ea typeface="Calibri" pitchFamily="34" charset="-122"/>
                           <a:cs typeface="Calibri" pitchFamily="34" charset="-120"/>
                         </a:rPr>
-                        <a:t>—</a:t>
+                        <a:t>4.8%</a:t>
                       </a:r>
                       <a:endParaRPr lang="en-US" sz="1200" dirty="0">
                         <a:latin typeface="Calibri" charset="0"/>
@@ -14992,13 +14992,13 @@
                       <a:r>
                         <a:rPr lang="en-US" sz="1200" b="1" dirty="0">
                           <a:solidFill>
-                            <a:srgbClr val="718096"/>
+                            <a:srgbClr val="C0392B"/>
                           </a:solidFill>
                           <a:latin typeface="Calibri" pitchFamily="34" charset="0"/>
                           <a:ea typeface="Calibri" pitchFamily="34" charset="-122"/>
                           <a:cs typeface="Calibri" pitchFamily="34" charset="-120"/>
                         </a:rPr>
-                        <a:t>—</a:t>
+                        <a:t>+161 bps</a:t>
                       </a:r>
                       <a:endParaRPr lang="en-US" sz="1200" dirty="0">
                         <a:latin typeface="Calibri" charset="0"/>
@@ -15748,7 +15748,7 @@
                           <a:ea typeface="Calibri" pitchFamily="34" charset="-122"/>
                           <a:cs typeface="Calibri" pitchFamily="34" charset="-120"/>
                         </a:rPr>
-                        <a:t>0.0%</a:t>
+                        <a:t>8.2%</a:t>
                       </a:r>
                       <a:endParaRPr lang="en-US" sz="1200" dirty="0">
                         <a:latin typeface="Calibri" charset="0"/>
@@ -15878,13 +15878,13 @@
                       <a:r>
                         <a:rPr lang="en-US" sz="1200" dirty="0">
                           <a:solidFill>
-                            <a:srgbClr val="C0392B"/>
+                            <a:srgbClr val="1A7A6E"/>
                           </a:solidFill>
                           <a:latin typeface="Calibri" pitchFamily="34" charset="0"/>
                           <a:ea typeface="Calibri" pitchFamily="34" charset="-122"/>
                           <a:cs typeface="Calibri" pitchFamily="34" charset="-120"/>
                         </a:rPr>
-                        <a:t>+800 bps</a:t>
+                        <a:t>-15 bps</a:t>
                       </a:r>
                       <a:endParaRPr lang="en-US" sz="1200" dirty="0">
                         <a:latin typeface="Calibri" charset="0"/>
@@ -16022,7 +16022,7 @@
                           <a:ea typeface="Calibri" pitchFamily="34" charset="-122"/>
                           <a:cs typeface="Calibri" pitchFamily="34" charset="-120"/>
                         </a:rPr>
-                        <a:t>0.0%</a:t>
+                        <a:t>6.2%</a:t>
                       </a:r>
                       <a:endParaRPr lang="en-US" sz="1200" dirty="0">
                         <a:latin typeface="Calibri" charset="0"/>
@@ -16158,7 +16158,7 @@
                           <a:ea typeface="Calibri" pitchFamily="34" charset="-122"/>
                           <a:cs typeface="Calibri" pitchFamily="34" charset="-120"/>
                         </a:rPr>
-                        <a:t>+876 bps</a:t>
+                        <a:t>+257 bps</a:t>
                       </a:r>
                       <a:endParaRPr lang="en-US" sz="1200" dirty="0">
                         <a:latin typeface="Calibri" charset="0"/>
@@ -17118,7 +17118,7 @@
                           <a:ea typeface="Calibri" pitchFamily="34" charset="-122"/>
                           <a:cs typeface="Calibri" pitchFamily="34" charset="-120"/>
                         </a:rPr>
-                        <a:t>—</a:t>
+                        <a:t>7.4%</a:t>
                       </a:r>
                       <a:endParaRPr lang="en-US" sz="1200" dirty="0">
                         <a:latin typeface="Calibri" charset="0"/>
@@ -17248,13 +17248,13 @@
                       <a:r>
                         <a:rPr lang="en-US" sz="1200" b="1" dirty="0">
                           <a:solidFill>
-                            <a:srgbClr val="718096"/>
+                            <a:srgbClr val="C0392B"/>
                           </a:solidFill>
                           <a:latin typeface="Calibri" pitchFamily="34" charset="0"/>
                           <a:ea typeface="Calibri" pitchFamily="34" charset="-122"/>
                           <a:cs typeface="Calibri" pitchFamily="34" charset="-120"/>
                         </a:rPr>
-                        <a:t>—</a:t>
+                        <a:t>+182 bps</a:t>
                       </a:r>
                       <a:endParaRPr lang="en-US" sz="1200" dirty="0">
                         <a:latin typeface="Calibri" charset="0"/>

--- a/reports/2026-02.pptx
+++ b/reports/2026-02.pptx
@@ -7226,13 +7226,13 @@
             <a:r>
               <a:rPr lang="en-US" sz="1200" b="1" dirty="0">
                 <a:solidFill>
-                  <a:srgbClr val="718096"/>
+                  <a:srgbClr val="C0392B"/>
                 </a:solidFill>
                 <a:latin typeface="Calibri" pitchFamily="34" charset="0"/>
                 <a:ea typeface="Calibri" pitchFamily="34" charset="-122"/>
                 <a:cs typeface="Calibri" pitchFamily="34" charset="-120"/>
               </a:rPr>
-              <a:t>—</a:t>
+              <a:t>+66.7%</a:t>
             </a:r>
             <a:endParaRPr lang="en-US" sz="1200" dirty="0"/>
           </a:p>
@@ -7265,13 +7265,13 @@
             <a:r>
               <a:rPr lang="en-US" sz="1200" b="1" dirty="0">
                 <a:solidFill>
-                  <a:srgbClr val="718096"/>
+                  <a:srgbClr val="1A7A6E"/>
                 </a:solidFill>
                 <a:latin typeface="Calibri" pitchFamily="34" charset="0"/>
                 <a:ea typeface="Calibri" pitchFamily="34" charset="-122"/>
                 <a:cs typeface="Calibri" pitchFamily="34" charset="-120"/>
               </a:rPr>
-              <a:t>—</a:t>
+              <a:t>-8.8%</a:t>
             </a:r>
             <a:endParaRPr lang="en-US" sz="1200" dirty="0"/>
           </a:p>
@@ -7304,13 +7304,13 @@
             <a:r>
               <a:rPr lang="en-US" sz="1200" b="1" dirty="0">
                 <a:solidFill>
-                  <a:srgbClr val="718096"/>
+                  <a:srgbClr val="C0392B"/>
                 </a:solidFill>
                 <a:latin typeface="Calibri" pitchFamily="34" charset="0"/>
                 <a:ea typeface="Calibri" pitchFamily="34" charset="-122"/>
                 <a:cs typeface="Calibri" pitchFamily="34" charset="-120"/>
               </a:rPr>
-              <a:t>—</a:t>
+              <a:t>+21.2%</a:t>
             </a:r>
             <a:endParaRPr lang="en-US" sz="1200" dirty="0"/>
           </a:p>
@@ -8382,13 +8382,13 @@
             <a:r>
               <a:rPr lang="en-US" sz="1200" b="1" dirty="0">
                 <a:solidFill>
-                  <a:srgbClr val="718096"/>
+                  <a:srgbClr val="C0392B"/>
                 </a:solidFill>
                 <a:latin typeface="Calibri" pitchFamily="34" charset="0"/>
                 <a:ea typeface="Calibri" pitchFamily="34" charset="-122"/>
                 <a:cs typeface="Calibri" pitchFamily="34" charset="-120"/>
               </a:rPr>
-              <a:t>+9726 bps</a:t>
+              <a:t>+868 bps</a:t>
             </a:r>
             <a:endParaRPr lang="en-US" sz="1200" dirty="0"/>
           </a:p>
@@ -8421,13 +8421,13 @@
             <a:r>
               <a:rPr lang="en-US" sz="1200" b="1" dirty="0">
                 <a:solidFill>
-                  <a:srgbClr val="718096"/>
+                  <a:srgbClr val="C0392B"/>
                 </a:solidFill>
                 <a:latin typeface="Calibri" pitchFamily="34" charset="0"/>
                 <a:ea typeface="Calibri" pitchFamily="34" charset="-122"/>
                 <a:cs typeface="Calibri" pitchFamily="34" charset="-120"/>
               </a:rPr>
-              <a:t>+8331 bps</a:t>
+              <a:t>+21 bps</a:t>
             </a:r>
             <a:endParaRPr lang="en-US" sz="1200" dirty="0"/>
           </a:p>
@@ -8460,13 +8460,13 @@
             <a:r>
               <a:rPr lang="en-US" sz="1200" b="1" dirty="0">
                 <a:solidFill>
-                  <a:srgbClr val="718096"/>
+                  <a:srgbClr val="C0392B"/>
                 </a:solidFill>
                 <a:latin typeface="Calibri" pitchFamily="34" charset="0"/>
                 <a:ea typeface="Calibri" pitchFamily="34" charset="-122"/>
                 <a:cs typeface="Calibri" pitchFamily="34" charset="-120"/>
               </a:rPr>
-              <a:t>+6331 bps</a:t>
+              <a:t>+145 bps</a:t>
             </a:r>
             <a:endParaRPr lang="en-US" sz="1200" dirty="0"/>
           </a:p>
@@ -9538,13 +9538,13 @@
             <a:r>
               <a:rPr lang="en-US" sz="1200" b="1" dirty="0">
                 <a:solidFill>
-                  <a:srgbClr val="718096"/>
+                  <a:srgbClr val="C0392B"/>
                 </a:solidFill>
                 <a:latin typeface="Calibri" pitchFamily="34" charset="0"/>
                 <a:ea typeface="Calibri" pitchFamily="34" charset="-122"/>
                 <a:cs typeface="Calibri" pitchFamily="34" charset="-120"/>
               </a:rPr>
-              <a:t>—</a:t>
+              <a:t>+65.9%</a:t>
             </a:r>
             <a:endParaRPr lang="en-US" sz="1200" dirty="0"/>
           </a:p>
@@ -9577,13 +9577,13 @@
             <a:r>
               <a:rPr lang="en-US" sz="1200" b="1" dirty="0">
                 <a:solidFill>
-                  <a:srgbClr val="718096"/>
+                  <a:srgbClr val="C0392B"/>
                 </a:solidFill>
                 <a:latin typeface="Calibri" pitchFamily="34" charset="0"/>
                 <a:ea typeface="Calibri" pitchFamily="34" charset="-122"/>
                 <a:cs typeface="Calibri" pitchFamily="34" charset="-120"/>
               </a:rPr>
-              <a:t>—</a:t>
+              <a:t>+11.0%</a:t>
             </a:r>
             <a:endParaRPr lang="en-US" sz="1200" dirty="0"/>
           </a:p>
@@ -9616,13 +9616,13 @@
             <a:r>
               <a:rPr lang="en-US" sz="1200" b="1" dirty="0">
                 <a:solidFill>
-                  <a:srgbClr val="718096"/>
+                  <a:srgbClr val="C0392B"/>
                 </a:solidFill>
                 <a:latin typeface="Calibri" pitchFamily="34" charset="0"/>
                 <a:ea typeface="Calibri" pitchFamily="34" charset="-122"/>
                 <a:cs typeface="Calibri" pitchFamily="34" charset="-120"/>
               </a:rPr>
-              <a:t>—</a:t>
+              <a:t>+17.8%</a:t>
             </a:r>
             <a:endParaRPr lang="en-US" sz="1200" dirty="0"/>
           </a:p>
@@ -10759,7 +10759,7 @@
                 <a:ea typeface="Calibri" pitchFamily="34" charset="-122"/>
                 <a:cs typeface="Calibri" pitchFamily="34" charset="-120"/>
               </a:rPr>
-              <a:t>Total disbursed: $4,152,197 (+31.8% vs prior month).</a:t>
+              <a:t>Total disbursed: $4,152,197 (+5.4% vs prior month).</a:t>
             </a:r>
             <a:endParaRPr lang="en-US" sz="1200" dirty="0"/>
           </a:p>
@@ -11403,13 +11403,13 @@
             <a:r>
               <a:rPr lang="en-US" sz="1200" b="1" dirty="0">
                 <a:solidFill>
-                  <a:srgbClr val="718096"/>
+                  <a:srgbClr val="1A7A6E"/>
                 </a:solidFill>
                 <a:latin typeface="Calibri" pitchFamily="34" charset="0"/>
                 <a:ea typeface="Calibri" pitchFamily="34" charset="-122"/>
                 <a:cs typeface="Calibri" pitchFamily="34" charset="-120"/>
               </a:rPr>
-              <a:t>—</a:t>
+              <a:t>-6.5%</a:t>
             </a:r>
             <a:endParaRPr lang="en-US" sz="1200" dirty="0"/>
           </a:p>
@@ -11442,13 +11442,13 @@
             <a:r>
               <a:rPr lang="en-US" sz="1200" b="1" dirty="0">
                 <a:solidFill>
-                  <a:srgbClr val="718096"/>
+                  <a:srgbClr val="C0392B"/>
                 </a:solidFill>
                 <a:latin typeface="Calibri" pitchFamily="34" charset="0"/>
                 <a:ea typeface="Calibri" pitchFamily="34" charset="-122"/>
                 <a:cs typeface="Calibri" pitchFamily="34" charset="-120"/>
               </a:rPr>
-              <a:t>—</a:t>
+              <a:t>+16.9%</a:t>
             </a:r>
             <a:endParaRPr lang="en-US" sz="1200" dirty="0"/>
           </a:p>
@@ -11481,13 +11481,13 @@
             <a:r>
               <a:rPr lang="en-US" sz="1200" b="1" dirty="0">
                 <a:solidFill>
-                  <a:srgbClr val="718096"/>
+                  <a:srgbClr val="1A7A6E"/>
                 </a:solidFill>
                 <a:latin typeface="Calibri" pitchFamily="34" charset="0"/>
                 <a:ea typeface="Calibri" pitchFamily="34" charset="-122"/>
                 <a:cs typeface="Calibri" pitchFamily="34" charset="-120"/>
               </a:rPr>
-              <a:t>—</a:t>
+              <a:t>-24.5%</a:t>
             </a:r>
             <a:endParaRPr lang="en-US" sz="1200" dirty="0"/>
           </a:p>
@@ -11687,13 +11687,13 @@
             <a:r>
               <a:rPr lang="en-US" sz="1200" b="1" dirty="0">
                 <a:solidFill>
-                  <a:srgbClr val="718096"/>
+                  <a:srgbClr val="C0392B"/>
                 </a:solidFill>
                 <a:latin typeface="Calibri" pitchFamily="34" charset="0"/>
                 <a:ea typeface="Calibri" pitchFamily="34" charset="-122"/>
                 <a:cs typeface="Calibri" pitchFamily="34" charset="-120"/>
               </a:rPr>
-              <a:t>—</a:t>
+              <a:t>+34.1%</a:t>
             </a:r>
             <a:endParaRPr lang="en-US" sz="1200" dirty="0"/>
           </a:p>
@@ -11726,13 +11726,13 @@
             <a:r>
               <a:rPr lang="en-US" sz="1200" b="1" dirty="0">
                 <a:solidFill>
-                  <a:srgbClr val="718096"/>
+                  <a:srgbClr val="1A7A6E"/>
                 </a:solidFill>
                 <a:latin typeface="Calibri" pitchFamily="34" charset="0"/>
                 <a:ea typeface="Calibri" pitchFamily="34" charset="-122"/>
                 <a:cs typeface="Calibri" pitchFamily="34" charset="-120"/>
               </a:rPr>
-              <a:t>—</a:t>
+              <a:t>-33.3%</a:t>
             </a:r>
             <a:endParaRPr lang="en-US" sz="1200" dirty="0"/>
           </a:p>
@@ -11765,13 +11765,13 @@
             <a:r>
               <a:rPr lang="en-US" sz="1200" b="1" dirty="0">
                 <a:solidFill>
-                  <a:srgbClr val="718096"/>
+                  <a:srgbClr val="C0392B"/>
                 </a:solidFill>
                 <a:latin typeface="Calibri" pitchFamily="34" charset="0"/>
                 <a:ea typeface="Calibri" pitchFamily="34" charset="-122"/>
                 <a:cs typeface="Calibri" pitchFamily="34" charset="-120"/>
               </a:rPr>
-              <a:t>—</a:t>
+              <a:t>+78.3%</a:t>
             </a:r>
             <a:endParaRPr lang="en-US" sz="1200" dirty="0"/>
           </a:p>
@@ -12293,13 +12293,13 @@
             <a:r>
               <a:rPr lang="en-US" sz="1200" b="1" dirty="0">
                 <a:solidFill>
-                  <a:srgbClr val="718096"/>
+                  <a:srgbClr val="C0392B"/>
                 </a:solidFill>
                 <a:latin typeface="Calibri" pitchFamily="34" charset="0"/>
                 <a:ea typeface="Calibri" pitchFamily="34" charset="-122"/>
                 <a:cs typeface="Calibri" pitchFamily="34" charset="-120"/>
               </a:rPr>
-              <a:t>—</a:t>
+              <a:t>+18.2%</a:t>
             </a:r>
             <a:endParaRPr lang="en-US" sz="1200" dirty="0"/>
           </a:p>
@@ -12332,13 +12332,13 @@
             <a:r>
               <a:rPr lang="en-US" sz="1200" b="1" dirty="0">
                 <a:solidFill>
-                  <a:srgbClr val="718096"/>
+                  <a:srgbClr val="C0392B"/>
                 </a:solidFill>
                 <a:latin typeface="Calibri" pitchFamily="34" charset="0"/>
                 <a:ea typeface="Calibri" pitchFamily="34" charset="-122"/>
                 <a:cs typeface="Calibri" pitchFamily="34" charset="-120"/>
               </a:rPr>
-              <a:t>—</a:t>
+              <a:t>+14.0%</a:t>
             </a:r>
             <a:endParaRPr lang="en-US" sz="1200" dirty="0"/>
           </a:p>
@@ -12371,13 +12371,13 @@
             <a:r>
               <a:rPr lang="en-US" sz="1200" b="1" dirty="0">
                 <a:solidFill>
-                  <a:srgbClr val="718096"/>
+                  <a:srgbClr val="C0392B"/>
                 </a:solidFill>
                 <a:latin typeface="Calibri" pitchFamily="34" charset="0"/>
                 <a:ea typeface="Calibri" pitchFamily="34" charset="-122"/>
                 <a:cs typeface="Calibri" pitchFamily="34" charset="-120"/>
               </a:rPr>
-              <a:t>—</a:t>
+              <a:t>+7.5%</a:t>
             </a:r>
             <a:endParaRPr lang="en-US" sz="1200" dirty="0"/>
           </a:p>
@@ -12608,7 +12608,7 @@
                 <a:ea typeface="Century Gothic" pitchFamily="34" charset="-122"/>
                 <a:cs typeface="Century Gothic" pitchFamily="34" charset="-120"/>
               </a:rPr>
-              <a:t>+45.4%</a:t>
+              <a:t>+12.4%</a:t>
             </a:r>
             <a:endParaRPr lang="en-US" sz="2600" dirty="0"/>
           </a:p>
@@ -12775,7 +12775,7 @@
                 <a:ea typeface="Calibri" pitchFamily="34" charset="-122"/>
                 <a:cs typeface="Calibri" pitchFamily="34" charset="-120"/>
               </a:rPr>
-              <a:t>Total loan book: $13,661,650 (+45.4% vs prior month).</a:t>
+              <a:t>Total loan book: $13,661,650 (+12.4% vs prior month).</a:t>
             </a:r>
             <a:endParaRPr lang="en-US" sz="1200" dirty="0"/>
           </a:p>
@@ -14040,7 +14040,7 @@
                           <a:ea typeface="Calibri" pitchFamily="34" charset="-122"/>
                           <a:cs typeface="Calibri" pitchFamily="34" charset="-120"/>
                         </a:rPr>
-                        <a:t>0.0%</a:t>
+                        <a:t>11.1%</a:t>
                       </a:r>
                       <a:endParaRPr lang="en-US" sz="1200" dirty="0">
                         <a:latin typeface="Calibri" charset="0"/>
@@ -14176,7 +14176,7 @@
                           <a:ea typeface="Calibri" pitchFamily="34" charset="-122"/>
                           <a:cs typeface="Calibri" pitchFamily="34" charset="-120"/>
                         </a:rPr>
-                        <a:t>+1159 bps</a:t>
+                        <a:t>+51 bps</a:t>
                       </a:r>
                       <a:endParaRPr lang="en-US" sz="1200" dirty="0">
                         <a:latin typeface="Calibri" charset="0"/>
@@ -14314,7 +14314,7 @@
                           <a:ea typeface="Calibri" pitchFamily="34" charset="-122"/>
                           <a:cs typeface="Calibri" pitchFamily="34" charset="-120"/>
                         </a:rPr>
-                        <a:t>0.0%</a:t>
+                        <a:t>2.7%</a:t>
                       </a:r>
                       <a:endParaRPr lang="en-US" sz="1200" dirty="0">
                         <a:latin typeface="Calibri" charset="0"/>
@@ -14444,13 +14444,13 @@
                       <a:r>
                         <a:rPr lang="en-US" sz="1200" dirty="0">
                           <a:solidFill>
-                            <a:srgbClr val="C0392B"/>
+                            <a:srgbClr val="1A7A6E"/>
                           </a:solidFill>
                           <a:latin typeface="Calibri" pitchFamily="34" charset="0"/>
                           <a:ea typeface="Calibri" pitchFamily="34" charset="-122"/>
                           <a:cs typeface="Calibri" pitchFamily="34" charset="-120"/>
                         </a:rPr>
-                        <a:t>+225 bps</a:t>
+                        <a:t>-43 bps</a:t>
                       </a:r>
                       <a:endParaRPr lang="en-US" sz="1200" dirty="0">
                         <a:latin typeface="Calibri" charset="0"/>
@@ -14588,7 +14588,7 @@
                           <a:ea typeface="Calibri" pitchFamily="34" charset="-122"/>
                           <a:cs typeface="Calibri" pitchFamily="34" charset="-120"/>
                         </a:rPr>
-                        <a:t>0.0%</a:t>
+                        <a:t>15.7%</a:t>
                       </a:r>
                       <a:endParaRPr lang="en-US" sz="1200" dirty="0">
                         <a:latin typeface="Calibri" charset="0"/>
@@ -14724,7 +14724,7 @@
                           <a:ea typeface="Calibri" pitchFamily="34" charset="-122"/>
                           <a:cs typeface="Calibri" pitchFamily="34" charset="-120"/>
                         </a:rPr>
-                        <a:t>+1756 bps</a:t>
+                        <a:t>+184 bps</a:t>
                       </a:r>
                       <a:endParaRPr lang="en-US" sz="1200" dirty="0">
                         <a:latin typeface="Calibri" charset="0"/>
@@ -14862,7 +14862,7 @@
                           <a:ea typeface="Calibri" pitchFamily="34" charset="-122"/>
                           <a:cs typeface="Calibri" pitchFamily="34" charset="-120"/>
                         </a:rPr>
-                        <a:t>4.8%</a:t>
+                        <a:t>5.6%</a:t>
                       </a:r>
                       <a:endParaRPr lang="en-US" sz="1200" dirty="0">
                         <a:latin typeface="Calibri" charset="0"/>
@@ -14998,7 +14998,7 @@
                           <a:ea typeface="Calibri" pitchFamily="34" charset="-122"/>
                           <a:cs typeface="Calibri" pitchFamily="34" charset="-120"/>
                         </a:rPr>
-                        <a:t>+161 bps</a:t>
+                        <a:t>+81 bps</a:t>
                       </a:r>
                       <a:endParaRPr lang="en-US" sz="1200" dirty="0">
                         <a:latin typeface="Calibri" charset="0"/>
@@ -16296,7 +16296,7 @@
                           <a:ea typeface="Calibri" pitchFamily="34" charset="-122"/>
                           <a:cs typeface="Calibri" pitchFamily="34" charset="-120"/>
                         </a:rPr>
-                        <a:t>0.0%</a:t>
+                        <a:t>17.4%</a:t>
                       </a:r>
                       <a:endParaRPr lang="en-US" sz="1200" dirty="0">
                         <a:latin typeface="Calibri" charset="0"/>
@@ -16432,7 +16432,7 @@
                           <a:ea typeface="Calibri" pitchFamily="34" charset="-122"/>
                           <a:cs typeface="Calibri" pitchFamily="34" charset="-120"/>
                         </a:rPr>
-                        <a:t>+1875 bps</a:t>
+                        <a:t>+139 bps</a:t>
                       </a:r>
                       <a:endParaRPr lang="en-US" sz="1200" dirty="0">
                         <a:latin typeface="Calibri" charset="0"/>
@@ -16570,7 +16570,7 @@
                           <a:ea typeface="Calibri" pitchFamily="34" charset="-122"/>
                           <a:cs typeface="Calibri" pitchFamily="34" charset="-120"/>
                         </a:rPr>
-                        <a:t>0.0%</a:t>
+                        <a:t>2.0%</a:t>
                       </a:r>
                       <a:endParaRPr lang="en-US" sz="1200" dirty="0">
                         <a:latin typeface="Calibri" charset="0"/>
@@ -16700,13 +16700,13 @@
                       <a:r>
                         <a:rPr lang="en-US" sz="1200" dirty="0">
                           <a:solidFill>
-                            <a:srgbClr val="C0392B"/>
+                            <a:srgbClr val="1A7A6E"/>
                           </a:solidFill>
                           <a:latin typeface="Calibri" pitchFamily="34" charset="0"/>
                           <a:ea typeface="Calibri" pitchFamily="34" charset="-122"/>
                           <a:cs typeface="Calibri" pitchFamily="34" charset="-120"/>
                         </a:rPr>
-                        <a:t>+180 bps</a:t>
+                        <a:t>-20 bps</a:t>
                       </a:r>
                       <a:endParaRPr lang="en-US" sz="1200" dirty="0">
                         <a:latin typeface="Calibri" charset="0"/>
@@ -16844,7 +16844,7 @@
                           <a:ea typeface="Calibri" pitchFamily="34" charset="-122"/>
                           <a:cs typeface="Calibri" pitchFamily="34" charset="-120"/>
                         </a:rPr>
-                        <a:t>0.0%</a:t>
+                        <a:t>17.0%</a:t>
                       </a:r>
                       <a:endParaRPr lang="en-US" sz="1200" dirty="0">
                         <a:latin typeface="Calibri" charset="0"/>
@@ -16980,7 +16980,7 @@
                           <a:ea typeface="Calibri" pitchFamily="34" charset="-122"/>
                           <a:cs typeface="Calibri" pitchFamily="34" charset="-120"/>
                         </a:rPr>
-                        <a:t>+2170 bps</a:t>
+                        <a:t>+470 bps</a:t>
                       </a:r>
                       <a:endParaRPr lang="en-US" sz="1200" dirty="0">
                         <a:latin typeface="Calibri" charset="0"/>
@@ -17118,7 +17118,7 @@
                           <a:ea typeface="Calibri" pitchFamily="34" charset="-122"/>
                           <a:cs typeface="Calibri" pitchFamily="34" charset="-120"/>
                         </a:rPr>
-                        <a:t>7.4%</a:t>
+                        <a:t>8.1%</a:t>
                       </a:r>
                       <a:endParaRPr lang="en-US" sz="1200" dirty="0">
                         <a:latin typeface="Calibri" charset="0"/>
@@ -17254,7 +17254,7 @@
                           <a:ea typeface="Calibri" pitchFamily="34" charset="-122"/>
                           <a:cs typeface="Calibri" pitchFamily="34" charset="-120"/>
                         </a:rPr>
-                        <a:t>+182 bps</a:t>
+                        <a:t>+103 bps</a:t>
                       </a:r>
                       <a:endParaRPr lang="en-US" sz="1200" dirty="0">
                         <a:latin typeface="Calibri" charset="0"/>

--- a/reports/2026-02.pptx
+++ b/reports/2026-02.pptx
@@ -4847,7 +4847,7 @@
                 <a:ea typeface="Calibri" pitchFamily="34" charset="-122"/>
                 <a:cs typeface="Calibri" pitchFamily="34" charset="-120"/>
               </a:rPr>
-              <a:t>Prepared: March 12, 2026</a:t>
+              <a:t>Prepared: March 13, 2026</a:t>
             </a:r>
             <a:endParaRPr lang="en-US" sz="1200" dirty="0"/>
           </a:p>

--- a/reports/2026-02.pptx
+++ b/reports/2026-02.pptx
@@ -5330,7 +5330,7 @@
             <a:r>
               <a:rPr lang="en-US" sz="1200" b="1" dirty="0">
                 <a:solidFill>
-                  <a:srgbClr val="1A7A6E"/>
+                  <a:srgbClr val="C0392B"/>
                 </a:solidFill>
                 <a:latin typeface="Calibri" pitchFamily="34" charset="0"/>
                 <a:ea typeface="Calibri" pitchFamily="34" charset="-122"/>
@@ -5369,7 +5369,7 @@
             <a:r>
               <a:rPr lang="en-US" sz="1200" b="1" dirty="0">
                 <a:solidFill>
-                  <a:srgbClr val="1A7A6E"/>
+                  <a:srgbClr val="C0392B"/>
                 </a:solidFill>
                 <a:latin typeface="Calibri" pitchFamily="34" charset="0"/>
                 <a:ea typeface="Calibri" pitchFamily="34" charset="-122"/>
@@ -5408,7 +5408,7 @@
             <a:r>
               <a:rPr lang="en-US" sz="1200" b="1" dirty="0">
                 <a:solidFill>
-                  <a:srgbClr val="1A7A6E"/>
+                  <a:srgbClr val="C0392B"/>
                 </a:solidFill>
                 <a:latin typeface="Calibri" pitchFamily="34" charset="0"/>
                 <a:ea typeface="Calibri" pitchFamily="34" charset="-122"/>
@@ -5447,7 +5447,7 @@
             <a:r>
               <a:rPr lang="en-US" sz="1200" b="1" dirty="0">
                 <a:solidFill>
-                  <a:srgbClr val="1A7A6E"/>
+                  <a:srgbClr val="C0392B"/>
                 </a:solidFill>
                 <a:latin typeface="Calibri" pitchFamily="34" charset="0"/>
                 <a:ea typeface="Calibri" pitchFamily="34" charset="-122"/>
@@ -5486,7 +5486,7 @@
             <a:r>
               <a:rPr lang="en-US" sz="1200" b="1" dirty="0">
                 <a:solidFill>
-                  <a:srgbClr val="1A7A6E"/>
+                  <a:srgbClr val="C0392B"/>
                 </a:solidFill>
                 <a:latin typeface="Calibri" pitchFamily="34" charset="0"/>
                 <a:ea typeface="Calibri" pitchFamily="34" charset="-122"/>
@@ -5936,7 +5936,7 @@
             <a:r>
               <a:rPr lang="en-US" sz="1200" b="1" dirty="0">
                 <a:solidFill>
-                  <a:srgbClr val="C0392B"/>
+                  <a:srgbClr val="1A7A6E"/>
                 </a:solidFill>
                 <a:latin typeface="Calibri" pitchFamily="34" charset="0"/>
                 <a:ea typeface="Calibri" pitchFamily="34" charset="-122"/>
@@ -5957,6 +5957,45 @@
         <p:spPr>
           <a:xfrm>
             <a:off x="2514600" y="5943600"/>
+            <a:ext cx="2377440" cy="347472"/>
+          </a:xfrm>
+          <a:prstGeom prst="rect">
+            <a:avLst/>
+          </a:prstGeom>
+          <a:noFill/>
+          <a:ln/>
+        </p:spPr>
+        <p:txBody>
+          <a:bodyPr wrap="square" rtlCol="0" anchor="ctr"/>
+          <a:lstStyle/>
+          <a:p>
+            <a:pPr algn="ctr" indent="0" marL="0">
+              <a:buNone/>
+            </a:pPr>
+            <a:r>
+              <a:rPr lang="en-US" sz="1200" b="1" dirty="0">
+                <a:solidFill>
+                  <a:srgbClr val="1A7A6E"/>
+                </a:solidFill>
+                <a:latin typeface="Calibri" pitchFamily="34" charset="0"/>
+                <a:ea typeface="Calibri" pitchFamily="34" charset="-122"/>
+                <a:cs typeface="Calibri" pitchFamily="34" charset="-120"/>
+              </a:rPr>
+              <a:t>-3.8%</a:t>
+            </a:r>
+            <a:endParaRPr lang="en-US" sz="1200" dirty="0"/>
+          </a:p>
+        </p:txBody>
+      </p:sp>
+      <p:sp>
+        <p:nvSpPr>
+          <p:cNvPr id="17" name="Text 14"/>
+          <p:cNvSpPr/>
+          <p:nvPr/>
+        </p:nvSpPr>
+        <p:spPr>
+          <a:xfrm>
+            <a:off x="4892040" y="5943600"/>
             <a:ext cx="2377440" cy="347472"/>
           </a:xfrm>
           <a:prstGeom prst="rect">
@@ -5981,7 +6020,7 @@
                 <a:ea typeface="Calibri" pitchFamily="34" charset="-122"/>
                 <a:cs typeface="Calibri" pitchFamily="34" charset="-120"/>
               </a:rPr>
-              <a:t>-3.8%</a:t>
+              <a:t>+13.7%</a:t>
             </a:r>
             <a:endParaRPr lang="en-US" sz="1200" dirty="0"/>
           </a:p>
@@ -5989,13 +6028,13 @@
       </p:sp>
       <p:sp>
         <p:nvSpPr>
-          <p:cNvPr id="17" name="Text 14"/>
-          <p:cNvSpPr/>
-          <p:nvPr/>
-        </p:nvSpPr>
-        <p:spPr>
-          <a:xfrm>
-            <a:off x="4892040" y="5943600"/>
+          <p:cNvPr id="18" name="Text 15"/>
+          <p:cNvSpPr/>
+          <p:nvPr/>
+        </p:nvSpPr>
+        <p:spPr>
+          <a:xfrm>
+            <a:off x="7269480" y="5943600"/>
             <a:ext cx="2377440" cy="347472"/>
           </a:xfrm>
           <a:prstGeom prst="rect">
@@ -6014,13 +6053,13 @@
             <a:r>
               <a:rPr lang="en-US" sz="1200" b="1" dirty="0">
                 <a:solidFill>
-                  <a:srgbClr val="1A7A6E"/>
+                  <a:srgbClr val="C0392B"/>
                 </a:solidFill>
                 <a:latin typeface="Calibri" pitchFamily="34" charset="0"/>
                 <a:ea typeface="Calibri" pitchFamily="34" charset="-122"/>
                 <a:cs typeface="Calibri" pitchFamily="34" charset="-120"/>
               </a:rPr>
-              <a:t>+13.7%</a:t>
+              <a:t>+3.2%</a:t>
             </a:r>
             <a:endParaRPr lang="en-US" sz="1200" dirty="0"/>
           </a:p>
@@ -6028,13 +6067,13 @@
       </p:sp>
       <p:sp>
         <p:nvSpPr>
-          <p:cNvPr id="18" name="Text 15"/>
-          <p:cNvSpPr/>
-          <p:nvPr/>
-        </p:nvSpPr>
-        <p:spPr>
-          <a:xfrm>
-            <a:off x="7269480" y="5943600"/>
+          <p:cNvPr id="19" name="Text 16"/>
+          <p:cNvSpPr/>
+          <p:nvPr/>
+        </p:nvSpPr>
+        <p:spPr>
+          <a:xfrm>
+            <a:off x="9646920" y="5943600"/>
             <a:ext cx="2377440" cy="347472"/>
           </a:xfrm>
           <a:prstGeom prst="rect">
@@ -6053,46 +6092,7 @@
             <a:r>
               <a:rPr lang="en-US" sz="1200" b="1" dirty="0">
                 <a:solidFill>
-                  <a:srgbClr val="1A7A6E"/>
-                </a:solidFill>
-                <a:latin typeface="Calibri" pitchFamily="34" charset="0"/>
-                <a:ea typeface="Calibri" pitchFamily="34" charset="-122"/>
-                <a:cs typeface="Calibri" pitchFamily="34" charset="-120"/>
-              </a:rPr>
-              <a:t>+3.2%</a:t>
-            </a:r>
-            <a:endParaRPr lang="en-US" sz="1200" dirty="0"/>
-          </a:p>
-        </p:txBody>
-      </p:sp>
-      <p:sp>
-        <p:nvSpPr>
-          <p:cNvPr id="19" name="Text 16"/>
-          <p:cNvSpPr/>
-          <p:nvPr/>
-        </p:nvSpPr>
-        <p:spPr>
-          <a:xfrm>
-            <a:off x="9646920" y="5943600"/>
-            <a:ext cx="2377440" cy="347472"/>
-          </a:xfrm>
-          <a:prstGeom prst="rect">
-            <a:avLst/>
-          </a:prstGeom>
-          <a:noFill/>
-          <a:ln/>
-        </p:spPr>
-        <p:txBody>
-          <a:bodyPr wrap="square" rtlCol="0" anchor="ctr"/>
-          <a:lstStyle/>
-          <a:p>
-            <a:pPr algn="ctr" indent="0" marL="0">
-              <a:buNone/>
-            </a:pPr>
-            <a:r>
-              <a:rPr lang="en-US" sz="1200" b="1" dirty="0">
-                <a:solidFill>
-                  <a:srgbClr val="1A7A6E"/>
+                  <a:srgbClr val="C0392B"/>
                 </a:solidFill>
                 <a:latin typeface="Calibri" pitchFamily="34" charset="0"/>
                 <a:ea typeface="Calibri" pitchFamily="34" charset="-122"/>
@@ -6542,7 +6542,7 @@
             <a:r>
               <a:rPr lang="en-US" sz="1200" b="1" dirty="0">
                 <a:solidFill>
-                  <a:srgbClr val="C0392B"/>
+                  <a:srgbClr val="1A7A6E"/>
                 </a:solidFill>
                 <a:latin typeface="Calibri" pitchFamily="34" charset="0"/>
                 <a:ea typeface="Calibri" pitchFamily="34" charset="-122"/>
@@ -6563,6 +6563,84 @@
         <p:spPr>
           <a:xfrm>
             <a:off x="2514600" y="5943600"/>
+            <a:ext cx="2377440" cy="347472"/>
+          </a:xfrm>
+          <a:prstGeom prst="rect">
+            <a:avLst/>
+          </a:prstGeom>
+          <a:noFill/>
+          <a:ln/>
+        </p:spPr>
+        <p:txBody>
+          <a:bodyPr wrap="square" rtlCol="0" anchor="ctr"/>
+          <a:lstStyle/>
+          <a:p>
+            <a:pPr algn="ctr" indent="0" marL="0">
+              <a:buNone/>
+            </a:pPr>
+            <a:r>
+              <a:rPr lang="en-US" sz="1200" b="1" dirty="0">
+                <a:solidFill>
+                  <a:srgbClr val="C0392B"/>
+                </a:solidFill>
+                <a:latin typeface="Calibri" pitchFamily="34" charset="0"/>
+                <a:ea typeface="Calibri" pitchFamily="34" charset="-122"/>
+                <a:cs typeface="Calibri" pitchFamily="34" charset="-120"/>
+              </a:rPr>
+              <a:t>+68.2%</a:t>
+            </a:r>
+            <a:endParaRPr lang="en-US" sz="1200" dirty="0"/>
+          </a:p>
+        </p:txBody>
+      </p:sp>
+      <p:sp>
+        <p:nvSpPr>
+          <p:cNvPr id="17" name="Text 14"/>
+          <p:cNvSpPr/>
+          <p:nvPr/>
+        </p:nvSpPr>
+        <p:spPr>
+          <a:xfrm>
+            <a:off x="4892040" y="5943600"/>
+            <a:ext cx="2377440" cy="347472"/>
+          </a:xfrm>
+          <a:prstGeom prst="rect">
+            <a:avLst/>
+          </a:prstGeom>
+          <a:noFill/>
+          <a:ln/>
+        </p:spPr>
+        <p:txBody>
+          <a:bodyPr wrap="square" rtlCol="0" anchor="ctr"/>
+          <a:lstStyle/>
+          <a:p>
+            <a:pPr algn="ctr" indent="0" marL="0">
+              <a:buNone/>
+            </a:pPr>
+            <a:r>
+              <a:rPr lang="en-US" sz="1200" b="1" dirty="0">
+                <a:solidFill>
+                  <a:srgbClr val="C0392B"/>
+                </a:solidFill>
+                <a:latin typeface="Calibri" pitchFamily="34" charset="0"/>
+                <a:ea typeface="Calibri" pitchFamily="34" charset="-122"/>
+                <a:cs typeface="Calibri" pitchFamily="34" charset="-120"/>
+              </a:rPr>
+              <a:t>+30.4%</a:t>
+            </a:r>
+            <a:endParaRPr lang="en-US" sz="1200" dirty="0"/>
+          </a:p>
+        </p:txBody>
+      </p:sp>
+      <p:sp>
+        <p:nvSpPr>
+          <p:cNvPr id="18" name="Text 15"/>
+          <p:cNvSpPr/>
+          <p:nvPr/>
+        </p:nvSpPr>
+        <p:spPr>
+          <a:xfrm>
+            <a:off x="7269480" y="5943600"/>
             <a:ext cx="2377440" cy="347472"/>
           </a:xfrm>
           <a:prstGeom prst="rect">
@@ -6587,7 +6665,7 @@
                 <a:ea typeface="Calibri" pitchFamily="34" charset="-122"/>
                 <a:cs typeface="Calibri" pitchFamily="34" charset="-120"/>
               </a:rPr>
-              <a:t>+68.2%</a:t>
+              <a:t>-71.4%</a:t>
             </a:r>
             <a:endParaRPr lang="en-US" sz="1200" dirty="0"/>
           </a:p>
@@ -6595,13 +6673,13 @@
       </p:sp>
       <p:sp>
         <p:nvSpPr>
-          <p:cNvPr id="17" name="Text 14"/>
-          <p:cNvSpPr/>
-          <p:nvPr/>
-        </p:nvSpPr>
-        <p:spPr>
-          <a:xfrm>
-            <a:off x="4892040" y="5943600"/>
+          <p:cNvPr id="19" name="Text 16"/>
+          <p:cNvSpPr/>
+          <p:nvPr/>
+        </p:nvSpPr>
+        <p:spPr>
+          <a:xfrm>
+            <a:off x="9646920" y="5943600"/>
             <a:ext cx="2377440" cy="347472"/>
           </a:xfrm>
           <a:prstGeom prst="rect">
@@ -6621,84 +6699,6 @@
               <a:rPr lang="en-US" sz="1200" b="1" dirty="0">
                 <a:solidFill>
                   <a:srgbClr val="1A7A6E"/>
-                </a:solidFill>
-                <a:latin typeface="Calibri" pitchFamily="34" charset="0"/>
-                <a:ea typeface="Calibri" pitchFamily="34" charset="-122"/>
-                <a:cs typeface="Calibri" pitchFamily="34" charset="-120"/>
-              </a:rPr>
-              <a:t>+30.4%</a:t>
-            </a:r>
-            <a:endParaRPr lang="en-US" sz="1200" dirty="0"/>
-          </a:p>
-        </p:txBody>
-      </p:sp>
-      <p:sp>
-        <p:nvSpPr>
-          <p:cNvPr id="18" name="Text 15"/>
-          <p:cNvSpPr/>
-          <p:nvPr/>
-        </p:nvSpPr>
-        <p:spPr>
-          <a:xfrm>
-            <a:off x="7269480" y="5943600"/>
-            <a:ext cx="2377440" cy="347472"/>
-          </a:xfrm>
-          <a:prstGeom prst="rect">
-            <a:avLst/>
-          </a:prstGeom>
-          <a:noFill/>
-          <a:ln/>
-        </p:spPr>
-        <p:txBody>
-          <a:bodyPr wrap="square" rtlCol="0" anchor="ctr"/>
-          <a:lstStyle/>
-          <a:p>
-            <a:pPr algn="ctr" indent="0" marL="0">
-              <a:buNone/>
-            </a:pPr>
-            <a:r>
-              <a:rPr lang="en-US" sz="1200" b="1" dirty="0">
-                <a:solidFill>
-                  <a:srgbClr val="C0392B"/>
-                </a:solidFill>
-                <a:latin typeface="Calibri" pitchFamily="34" charset="0"/>
-                <a:ea typeface="Calibri" pitchFamily="34" charset="-122"/>
-                <a:cs typeface="Calibri" pitchFamily="34" charset="-120"/>
-              </a:rPr>
-              <a:t>-71.4%</a:t>
-            </a:r>
-            <a:endParaRPr lang="en-US" sz="1200" dirty="0"/>
-          </a:p>
-        </p:txBody>
-      </p:sp>
-      <p:sp>
-        <p:nvSpPr>
-          <p:cNvPr id="19" name="Text 16"/>
-          <p:cNvSpPr/>
-          <p:nvPr/>
-        </p:nvSpPr>
-        <p:spPr>
-          <a:xfrm>
-            <a:off x="9646920" y="5943600"/>
-            <a:ext cx="2377440" cy="347472"/>
-          </a:xfrm>
-          <a:prstGeom prst="rect">
-            <a:avLst/>
-          </a:prstGeom>
-          <a:noFill/>
-          <a:ln/>
-        </p:spPr>
-        <p:txBody>
-          <a:bodyPr wrap="square" rtlCol="0" anchor="ctr"/>
-          <a:lstStyle/>
-          <a:p>
-            <a:pPr algn="ctr" indent="0" marL="0">
-              <a:buNone/>
-            </a:pPr>
-            <a:r>
-              <a:rPr lang="en-US" sz="1200" b="1" dirty="0">
-                <a:solidFill>
-                  <a:srgbClr val="C0392B"/>
                 </a:solidFill>
                 <a:latin typeface="Calibri" pitchFamily="34" charset="0"/>
                 <a:ea typeface="Calibri" pitchFamily="34" charset="-122"/>
@@ -7148,7 +7148,7 @@
             <a:r>
               <a:rPr lang="en-US" sz="1200" b="1" dirty="0">
                 <a:solidFill>
-                  <a:srgbClr val="1A7A6E"/>
+                  <a:srgbClr val="C0392B"/>
                 </a:solidFill>
                 <a:latin typeface="Calibri" pitchFamily="34" charset="0"/>
                 <a:ea typeface="Calibri" pitchFamily="34" charset="-122"/>
@@ -7169,6 +7169,45 @@
         <p:spPr>
           <a:xfrm>
             <a:off x="1655064" y="5925312"/>
+            <a:ext cx="1517904" cy="347472"/>
+          </a:xfrm>
+          <a:prstGeom prst="rect">
+            <a:avLst/>
+          </a:prstGeom>
+          <a:noFill/>
+          <a:ln/>
+        </p:spPr>
+        <p:txBody>
+          <a:bodyPr wrap="square" rtlCol="0" anchor="ctr"/>
+          <a:lstStyle/>
+          <a:p>
+            <a:pPr algn="ctr" indent="0" marL="0">
+              <a:buNone/>
+            </a:pPr>
+            <a:r>
+              <a:rPr lang="en-US" sz="1200" b="1" dirty="0">
+                <a:solidFill>
+                  <a:srgbClr val="C0392B"/>
+                </a:solidFill>
+                <a:latin typeface="Calibri" pitchFamily="34" charset="0"/>
+                <a:ea typeface="Calibri" pitchFamily="34" charset="-122"/>
+                <a:cs typeface="Calibri" pitchFamily="34" charset="-120"/>
+              </a:rPr>
+              <a:t>-23.4%</a:t>
+            </a:r>
+            <a:endParaRPr lang="en-US" sz="1200" dirty="0"/>
+          </a:p>
+        </p:txBody>
+      </p:sp>
+      <p:sp>
+        <p:nvSpPr>
+          <p:cNvPr id="17" name="Text 14"/>
+          <p:cNvSpPr/>
+          <p:nvPr/>
+        </p:nvSpPr>
+        <p:spPr>
+          <a:xfrm>
+            <a:off x="3172968" y="5925312"/>
             <a:ext cx="1517904" cy="347472"/>
           </a:xfrm>
           <a:prstGeom prst="rect">
@@ -7193,7 +7232,7 @@
                 <a:ea typeface="Calibri" pitchFamily="34" charset="-122"/>
                 <a:cs typeface="Calibri" pitchFamily="34" charset="-120"/>
               </a:rPr>
-              <a:t>-23.4%</a:t>
+              <a:t>+66.7%</a:t>
             </a:r>
             <a:endParaRPr lang="en-US" sz="1200" dirty="0"/>
           </a:p>
@@ -7201,13 +7240,13 @@
       </p:sp>
       <p:sp>
         <p:nvSpPr>
-          <p:cNvPr id="17" name="Text 14"/>
-          <p:cNvSpPr/>
-          <p:nvPr/>
-        </p:nvSpPr>
-        <p:spPr>
-          <a:xfrm>
-            <a:off x="3172968" y="5925312"/>
+          <p:cNvPr id="18" name="Text 15"/>
+          <p:cNvSpPr/>
+          <p:nvPr/>
+        </p:nvSpPr>
+        <p:spPr>
+          <a:xfrm>
+            <a:off x="4690872" y="5925312"/>
             <a:ext cx="1517904" cy="347472"/>
           </a:xfrm>
           <a:prstGeom prst="rect">
@@ -7232,7 +7271,7 @@
                 <a:ea typeface="Calibri" pitchFamily="34" charset="-122"/>
                 <a:cs typeface="Calibri" pitchFamily="34" charset="-120"/>
               </a:rPr>
-              <a:t>+66.7%</a:t>
+              <a:t>-8.8%</a:t>
             </a:r>
             <a:endParaRPr lang="en-US" sz="1200" dirty="0"/>
           </a:p>
@@ -7240,13 +7279,13 @@
       </p:sp>
       <p:sp>
         <p:nvSpPr>
-          <p:cNvPr id="18" name="Text 15"/>
-          <p:cNvSpPr/>
-          <p:nvPr/>
-        </p:nvSpPr>
-        <p:spPr>
-          <a:xfrm>
-            <a:off x="4690872" y="5925312"/>
+          <p:cNvPr id="19" name="Text 16"/>
+          <p:cNvSpPr/>
+          <p:nvPr/>
+        </p:nvSpPr>
+        <p:spPr>
+          <a:xfrm>
+            <a:off x="6208776" y="5925312"/>
             <a:ext cx="1517904" cy="347472"/>
           </a:xfrm>
           <a:prstGeom prst="rect">
@@ -7266,45 +7305,6 @@
               <a:rPr lang="en-US" sz="1200" b="1" dirty="0">
                 <a:solidFill>
                   <a:srgbClr val="1A7A6E"/>
-                </a:solidFill>
-                <a:latin typeface="Calibri" pitchFamily="34" charset="0"/>
-                <a:ea typeface="Calibri" pitchFamily="34" charset="-122"/>
-                <a:cs typeface="Calibri" pitchFamily="34" charset="-120"/>
-              </a:rPr>
-              <a:t>-8.8%</a:t>
-            </a:r>
-            <a:endParaRPr lang="en-US" sz="1200" dirty="0"/>
-          </a:p>
-        </p:txBody>
-      </p:sp>
-      <p:sp>
-        <p:nvSpPr>
-          <p:cNvPr id="19" name="Text 16"/>
-          <p:cNvSpPr/>
-          <p:nvPr/>
-        </p:nvSpPr>
-        <p:spPr>
-          <a:xfrm>
-            <a:off x="6208776" y="5925312"/>
-            <a:ext cx="1517904" cy="347472"/>
-          </a:xfrm>
-          <a:prstGeom prst="rect">
-            <a:avLst/>
-          </a:prstGeom>
-          <a:noFill/>
-          <a:ln/>
-        </p:spPr>
-        <p:txBody>
-          <a:bodyPr wrap="square" rtlCol="0" anchor="ctr"/>
-          <a:lstStyle/>
-          <a:p>
-            <a:pPr algn="ctr" indent="0" marL="0">
-              <a:buNone/>
-            </a:pPr>
-            <a:r>
-              <a:rPr lang="en-US" sz="1200" b="1" dirty="0">
-                <a:solidFill>
-                  <a:srgbClr val="C0392B"/>
                 </a:solidFill>
                 <a:latin typeface="Calibri" pitchFamily="34" charset="0"/>
                 <a:ea typeface="Calibri" pitchFamily="34" charset="-122"/>
@@ -7676,7 +7676,7 @@
                 <a:ea typeface="Century Gothic" pitchFamily="34" charset="-122"/>
                 <a:cs typeface="Century Gothic" pitchFamily="34" charset="-120"/>
               </a:rPr>
-              <a:t>—</a:t>
+              <a:t>-6.9%</a:t>
             </a:r>
             <a:endParaRPr lang="en-US" sz="2600" dirty="0"/>
           </a:p>
@@ -8271,7 +8271,7 @@
                 <a:ea typeface="Century Gothic" pitchFamily="34" charset="-122"/>
                 <a:cs typeface="Century Gothic" pitchFamily="34" charset="-120"/>
               </a:rPr>
-              <a:t>Change from Prior Month (bps)</a:t>
+              <a:t>Trend vs Prior Month</a:t>
             </a:r>
             <a:endParaRPr lang="en-US" sz="1200" dirty="0"/>
           </a:p>
@@ -8286,6 +8286,45 @@
         <p:spPr>
           <a:xfrm>
             <a:off x="137160" y="5925312"/>
+            <a:ext cx="1517904" cy="347472"/>
+          </a:xfrm>
+          <a:prstGeom prst="rect">
+            <a:avLst/>
+          </a:prstGeom>
+          <a:noFill/>
+          <a:ln/>
+        </p:spPr>
+        <p:txBody>
+          <a:bodyPr wrap="square" rtlCol="0" anchor="ctr"/>
+          <a:lstStyle/>
+          <a:p>
+            <a:pPr algn="ctr" indent="0" marL="0">
+              <a:buNone/>
+            </a:pPr>
+            <a:r>
+              <a:rPr lang="en-US" sz="1200" b="1" dirty="0">
+                <a:solidFill>
+                  <a:srgbClr val="C0392B"/>
+                </a:solidFill>
+                <a:latin typeface="Calibri" pitchFamily="34" charset="0"/>
+                <a:ea typeface="Calibri" pitchFamily="34" charset="-122"/>
+                <a:cs typeface="Calibri" pitchFamily="34" charset="-120"/>
+              </a:rPr>
+              <a:t>↓</a:t>
+            </a:r>
+            <a:endParaRPr lang="en-US" sz="1200" dirty="0"/>
+          </a:p>
+        </p:txBody>
+      </p:sp>
+      <p:sp>
+        <p:nvSpPr>
+          <p:cNvPr id="16" name="Text 13"/>
+          <p:cNvSpPr/>
+          <p:nvPr/>
+        </p:nvSpPr>
+        <p:spPr>
+          <a:xfrm>
+            <a:off x="1655064" y="5925312"/>
             <a:ext cx="1517904" cy="347472"/>
           </a:xfrm>
           <a:prstGeom prst="rect">
@@ -8310,7 +8349,7 @@
                 <a:ea typeface="Calibri" pitchFamily="34" charset="-122"/>
                 <a:cs typeface="Calibri" pitchFamily="34" charset="-120"/>
               </a:rPr>
-              <a:t>-197 bps</a:t>
+              <a:t>↑</a:t>
             </a:r>
             <a:endParaRPr lang="en-US" sz="1200" dirty="0"/>
           </a:p>
@@ -8318,13 +8357,13 @@
       </p:sp>
       <p:sp>
         <p:nvSpPr>
-          <p:cNvPr id="16" name="Text 13"/>
-          <p:cNvSpPr/>
-          <p:nvPr/>
-        </p:nvSpPr>
-        <p:spPr>
-          <a:xfrm>
-            <a:off x="1655064" y="5925312"/>
+          <p:cNvPr id="17" name="Text 14"/>
+          <p:cNvSpPr/>
+          <p:nvPr/>
+        </p:nvSpPr>
+        <p:spPr>
+          <a:xfrm>
+            <a:off x="3172968" y="5925312"/>
             <a:ext cx="1517904" cy="347472"/>
           </a:xfrm>
           <a:prstGeom prst="rect">
@@ -8343,13 +8382,13 @@
             <a:r>
               <a:rPr lang="en-US" sz="1200" b="1" dirty="0">
                 <a:solidFill>
-                  <a:srgbClr val="C0392B"/>
+                  <a:srgbClr val="1A7A6E"/>
                 </a:solidFill>
                 <a:latin typeface="Calibri" pitchFamily="34" charset="0"/>
                 <a:ea typeface="Calibri" pitchFamily="34" charset="-122"/>
                 <a:cs typeface="Calibri" pitchFamily="34" charset="-120"/>
               </a:rPr>
-              <a:t>+421 bps</a:t>
+              <a:t>↑</a:t>
             </a:r>
             <a:endParaRPr lang="en-US" sz="1200" dirty="0"/>
           </a:p>
@@ -8357,13 +8396,13 @@
       </p:sp>
       <p:sp>
         <p:nvSpPr>
-          <p:cNvPr id="17" name="Text 14"/>
-          <p:cNvSpPr/>
-          <p:nvPr/>
-        </p:nvSpPr>
-        <p:spPr>
-          <a:xfrm>
-            <a:off x="3172968" y="5925312"/>
+          <p:cNvPr id="18" name="Text 15"/>
+          <p:cNvSpPr/>
+          <p:nvPr/>
+        </p:nvSpPr>
+        <p:spPr>
+          <a:xfrm>
+            <a:off x="4690872" y="5925312"/>
             <a:ext cx="1517904" cy="347472"/>
           </a:xfrm>
           <a:prstGeom prst="rect">
@@ -8382,13 +8421,13 @@
             <a:r>
               <a:rPr lang="en-US" sz="1200" b="1" dirty="0">
                 <a:solidFill>
-                  <a:srgbClr val="C0392B"/>
+                  <a:srgbClr val="1A7A6E"/>
                 </a:solidFill>
                 <a:latin typeface="Calibri" pitchFamily="34" charset="0"/>
                 <a:ea typeface="Calibri" pitchFamily="34" charset="-122"/>
                 <a:cs typeface="Calibri" pitchFamily="34" charset="-120"/>
               </a:rPr>
-              <a:t>+868 bps</a:t>
+              <a:t>↑</a:t>
             </a:r>
             <a:endParaRPr lang="en-US" sz="1200" dirty="0"/>
           </a:p>
@@ -8396,13 +8435,13 @@
       </p:sp>
       <p:sp>
         <p:nvSpPr>
-          <p:cNvPr id="18" name="Text 15"/>
-          <p:cNvSpPr/>
-          <p:nvPr/>
-        </p:nvSpPr>
-        <p:spPr>
-          <a:xfrm>
-            <a:off x="4690872" y="5925312"/>
+          <p:cNvPr id="19" name="Text 16"/>
+          <p:cNvSpPr/>
+          <p:nvPr/>
+        </p:nvSpPr>
+        <p:spPr>
+          <a:xfrm>
+            <a:off x="6208776" y="5925312"/>
             <a:ext cx="1517904" cy="347472"/>
           </a:xfrm>
           <a:prstGeom prst="rect">
@@ -8421,52 +8460,13 @@
             <a:r>
               <a:rPr lang="en-US" sz="1200" b="1" dirty="0">
                 <a:solidFill>
-                  <a:srgbClr val="C0392B"/>
+                  <a:srgbClr val="1A7A6E"/>
                 </a:solidFill>
                 <a:latin typeface="Calibri" pitchFamily="34" charset="0"/>
                 <a:ea typeface="Calibri" pitchFamily="34" charset="-122"/>
                 <a:cs typeface="Calibri" pitchFamily="34" charset="-120"/>
               </a:rPr>
-              <a:t>+21 bps</a:t>
-            </a:r>
-            <a:endParaRPr lang="en-US" sz="1200" dirty="0"/>
-          </a:p>
-        </p:txBody>
-      </p:sp>
-      <p:sp>
-        <p:nvSpPr>
-          <p:cNvPr id="19" name="Text 16"/>
-          <p:cNvSpPr/>
-          <p:nvPr/>
-        </p:nvSpPr>
-        <p:spPr>
-          <a:xfrm>
-            <a:off x="6208776" y="5925312"/>
-            <a:ext cx="1517904" cy="347472"/>
-          </a:xfrm>
-          <a:prstGeom prst="rect">
-            <a:avLst/>
-          </a:prstGeom>
-          <a:noFill/>
-          <a:ln/>
-        </p:spPr>
-        <p:txBody>
-          <a:bodyPr wrap="square" rtlCol="0" anchor="ctr"/>
-          <a:lstStyle/>
-          <a:p>
-            <a:pPr algn="ctr" indent="0" marL="0">
-              <a:buNone/>
-            </a:pPr>
-            <a:r>
-              <a:rPr lang="en-US" sz="1200" b="1" dirty="0">
-                <a:solidFill>
-                  <a:srgbClr val="C0392B"/>
-                </a:solidFill>
-                <a:latin typeface="Calibri" pitchFamily="34" charset="0"/>
-                <a:ea typeface="Calibri" pitchFamily="34" charset="-122"/>
-                <a:cs typeface="Calibri" pitchFamily="34" charset="-120"/>
-              </a:rPr>
-              <a:t>+145 bps</a:t>
+              <a:t>↑</a:t>
             </a:r>
             <a:endParaRPr lang="en-US" sz="1200" dirty="0"/>
           </a:p>
@@ -8826,13 +8826,13 @@
             <a:r>
               <a:rPr lang="en-US" sz="2600" b="1" dirty="0">
                 <a:solidFill>
-                  <a:srgbClr val="5D300F"/>
+                  <a:srgbClr val="1A7A6E"/>
                 </a:solidFill>
                 <a:latin typeface="Century Gothic" pitchFamily="34" charset="0"/>
                 <a:ea typeface="Century Gothic" pitchFamily="34" charset="-122"/>
                 <a:cs typeface="Century Gothic" pitchFamily="34" charset="-120"/>
               </a:rPr>
-              <a:t>+9215 bps</a:t>
+              <a:t>↑</a:t>
             </a:r>
             <a:endParaRPr lang="en-US" sz="2600" dirty="0"/>
           </a:p>
@@ -8871,7 +8871,7 @@
                 <a:ea typeface="Calibri" pitchFamily="34" charset="-122"/>
                 <a:cs typeface="Calibri" pitchFamily="34" charset="-120"/>
               </a:rPr>
-              <a:t>Change from Prior Month</a:t>
+              <a:t>Trend vs Prior Month</a:t>
             </a:r>
             <a:endParaRPr lang="en-US" sz="1200" dirty="0"/>
           </a:p>
@@ -9460,7 +9460,7 @@
             <a:r>
               <a:rPr lang="en-US" sz="1200" b="1" dirty="0">
                 <a:solidFill>
-                  <a:srgbClr val="1A7A6E"/>
+                  <a:srgbClr val="C0392B"/>
                 </a:solidFill>
                 <a:latin typeface="Calibri" pitchFamily="34" charset="0"/>
                 <a:ea typeface="Calibri" pitchFamily="34" charset="-122"/>
@@ -9499,7 +9499,7 @@
             <a:r>
               <a:rPr lang="en-US" sz="1200" b="1" dirty="0">
                 <a:solidFill>
-                  <a:srgbClr val="C0392B"/>
+                  <a:srgbClr val="1A7A6E"/>
                 </a:solidFill>
                 <a:latin typeface="Calibri" pitchFamily="34" charset="0"/>
                 <a:ea typeface="Calibri" pitchFamily="34" charset="-122"/>
@@ -9538,7 +9538,7 @@
             <a:r>
               <a:rPr lang="en-US" sz="1200" b="1" dirty="0">
                 <a:solidFill>
-                  <a:srgbClr val="C0392B"/>
+                  <a:srgbClr val="1A7A6E"/>
                 </a:solidFill>
                 <a:latin typeface="Calibri" pitchFamily="34" charset="0"/>
                 <a:ea typeface="Calibri" pitchFamily="34" charset="-122"/>
@@ -9577,7 +9577,7 @@
             <a:r>
               <a:rPr lang="en-US" sz="1200" b="1" dirty="0">
                 <a:solidFill>
-                  <a:srgbClr val="C0392B"/>
+                  <a:srgbClr val="1A7A6E"/>
                 </a:solidFill>
                 <a:latin typeface="Calibri" pitchFamily="34" charset="0"/>
                 <a:ea typeface="Calibri" pitchFamily="34" charset="-122"/>
@@ -9616,7 +9616,7 @@
             <a:r>
               <a:rPr lang="en-US" sz="1200" b="1" dirty="0">
                 <a:solidFill>
-                  <a:srgbClr val="C0392B"/>
+                  <a:srgbClr val="1A7A6E"/>
                 </a:solidFill>
                 <a:latin typeface="Calibri" pitchFamily="34" charset="0"/>
                 <a:ea typeface="Calibri" pitchFamily="34" charset="-122"/>
@@ -9853,7 +9853,7 @@
                 <a:ea typeface="Century Gothic" pitchFamily="34" charset="-122"/>
                 <a:cs typeface="Century Gothic" pitchFamily="34" charset="-120"/>
               </a:rPr>
-              <a:t>$11,897</a:t>
+              <a:t>51</a:t>
             </a:r>
             <a:endParaRPr lang="en-US" sz="2600" dirty="0"/>
           </a:p>
@@ -11325,7 +11325,7 @@
             <a:r>
               <a:rPr lang="en-US" sz="1200" b="1" dirty="0">
                 <a:solidFill>
-                  <a:srgbClr val="C0392B"/>
+                  <a:srgbClr val="1A7A6E"/>
                 </a:solidFill>
                 <a:latin typeface="Calibri" pitchFamily="34" charset="0"/>
                 <a:ea typeface="Calibri" pitchFamily="34" charset="-122"/>
@@ -11346,6 +11346,45 @@
         <p:spPr>
           <a:xfrm>
             <a:off x="1298448" y="5925312"/>
+            <a:ext cx="1161288" cy="347472"/>
+          </a:xfrm>
+          <a:prstGeom prst="rect">
+            <a:avLst/>
+          </a:prstGeom>
+          <a:noFill/>
+          <a:ln/>
+        </p:spPr>
+        <p:txBody>
+          <a:bodyPr wrap="square" rtlCol="0" anchor="ctr"/>
+          <a:lstStyle/>
+          <a:p>
+            <a:pPr algn="ctr" indent="0" marL="0">
+              <a:buNone/>
+            </a:pPr>
+            <a:r>
+              <a:rPr lang="en-US" sz="1200" b="1" dirty="0">
+                <a:solidFill>
+                  <a:srgbClr val="1A7A6E"/>
+                </a:solidFill>
+                <a:latin typeface="Calibri" pitchFamily="34" charset="0"/>
+                <a:ea typeface="Calibri" pitchFamily="34" charset="-122"/>
+                <a:cs typeface="Calibri" pitchFamily="34" charset="-120"/>
+              </a:rPr>
+              <a:t>+2.9%</a:t>
+            </a:r>
+            <a:endParaRPr lang="en-US" sz="1200" dirty="0"/>
+          </a:p>
+        </p:txBody>
+      </p:sp>
+      <p:sp>
+        <p:nvSpPr>
+          <p:cNvPr id="21" name="Text 17"/>
+          <p:cNvSpPr/>
+          <p:nvPr/>
+        </p:nvSpPr>
+        <p:spPr>
+          <a:xfrm>
+            <a:off x="2459736" y="5925312"/>
             <a:ext cx="1161288" cy="347472"/>
           </a:xfrm>
           <a:prstGeom prst="rect">
@@ -11370,7 +11409,7 @@
                 <a:ea typeface="Calibri" pitchFamily="34" charset="-122"/>
                 <a:cs typeface="Calibri" pitchFamily="34" charset="-120"/>
               </a:rPr>
-              <a:t>+2.9%</a:t>
+              <a:t>-6.5%</a:t>
             </a:r>
             <a:endParaRPr lang="en-US" sz="1200" dirty="0"/>
           </a:p>
@@ -11378,13 +11417,13 @@
       </p:sp>
       <p:sp>
         <p:nvSpPr>
-          <p:cNvPr id="21" name="Text 17"/>
-          <p:cNvSpPr/>
-          <p:nvPr/>
-        </p:nvSpPr>
-        <p:spPr>
-          <a:xfrm>
-            <a:off x="2459736" y="5925312"/>
+          <p:cNvPr id="22" name="Text 18"/>
+          <p:cNvSpPr/>
+          <p:nvPr/>
+        </p:nvSpPr>
+        <p:spPr>
+          <a:xfrm>
+            <a:off x="3621024" y="5925312"/>
             <a:ext cx="1161288" cy="347472"/>
           </a:xfrm>
           <a:prstGeom prst="rect">
@@ -11409,7 +11448,7 @@
                 <a:ea typeface="Calibri" pitchFamily="34" charset="-122"/>
                 <a:cs typeface="Calibri" pitchFamily="34" charset="-120"/>
               </a:rPr>
-              <a:t>-6.5%</a:t>
+              <a:t>+16.9%</a:t>
             </a:r>
             <a:endParaRPr lang="en-US" sz="1200" dirty="0"/>
           </a:p>
@@ -11417,13 +11456,13 @@
       </p:sp>
       <p:sp>
         <p:nvSpPr>
-          <p:cNvPr id="22" name="Text 18"/>
-          <p:cNvSpPr/>
-          <p:nvPr/>
-        </p:nvSpPr>
-        <p:spPr>
-          <a:xfrm>
-            <a:off x="3621024" y="5925312"/>
+          <p:cNvPr id="23" name="Text 19"/>
+          <p:cNvSpPr/>
+          <p:nvPr/>
+        </p:nvSpPr>
+        <p:spPr>
+          <a:xfrm>
+            <a:off x="4782312" y="5925312"/>
             <a:ext cx="1161288" cy="347472"/>
           </a:xfrm>
           <a:prstGeom prst="rect">
@@ -11443,45 +11482,6 @@
               <a:rPr lang="en-US" sz="1200" b="1" dirty="0">
                 <a:solidFill>
                   <a:srgbClr val="C0392B"/>
-                </a:solidFill>
-                <a:latin typeface="Calibri" pitchFamily="34" charset="0"/>
-                <a:ea typeface="Calibri" pitchFamily="34" charset="-122"/>
-                <a:cs typeface="Calibri" pitchFamily="34" charset="-120"/>
-              </a:rPr>
-              <a:t>+16.9%</a:t>
-            </a:r>
-            <a:endParaRPr lang="en-US" sz="1200" dirty="0"/>
-          </a:p>
-        </p:txBody>
-      </p:sp>
-      <p:sp>
-        <p:nvSpPr>
-          <p:cNvPr id="23" name="Text 19"/>
-          <p:cNvSpPr/>
-          <p:nvPr/>
-        </p:nvSpPr>
-        <p:spPr>
-          <a:xfrm>
-            <a:off x="4782312" y="5925312"/>
-            <a:ext cx="1161288" cy="347472"/>
-          </a:xfrm>
-          <a:prstGeom prst="rect">
-            <a:avLst/>
-          </a:prstGeom>
-          <a:noFill/>
-          <a:ln/>
-        </p:spPr>
-        <p:txBody>
-          <a:bodyPr wrap="square" rtlCol="0" anchor="ctr"/>
-          <a:lstStyle/>
-          <a:p>
-            <a:pPr algn="ctr" indent="0" marL="0">
-              <a:buNone/>
-            </a:pPr>
-            <a:r>
-              <a:rPr lang="en-US" sz="1200" b="1" dirty="0">
-                <a:solidFill>
-                  <a:srgbClr val="1A7A6E"/>
                 </a:solidFill>
                 <a:latin typeface="Calibri" pitchFamily="34" charset="0"/>
                 <a:ea typeface="Calibri" pitchFamily="34" charset="-122"/>
@@ -11609,7 +11609,7 @@
             <a:r>
               <a:rPr lang="en-US" sz="1200" b="1" dirty="0">
                 <a:solidFill>
-                  <a:srgbClr val="1A7A6E"/>
+                  <a:srgbClr val="C0392B"/>
                 </a:solidFill>
                 <a:latin typeface="Calibri" pitchFamily="34" charset="0"/>
                 <a:ea typeface="Calibri" pitchFamily="34" charset="-122"/>
@@ -11630,6 +11630,45 @@
         <p:spPr>
           <a:xfrm>
             <a:off x="7333488" y="5925312"/>
+            <a:ext cx="1161288" cy="347472"/>
+          </a:xfrm>
+          <a:prstGeom prst="rect">
+            <a:avLst/>
+          </a:prstGeom>
+          <a:noFill/>
+          <a:ln/>
+        </p:spPr>
+        <p:txBody>
+          <a:bodyPr wrap="square" rtlCol="0" anchor="ctr"/>
+          <a:lstStyle/>
+          <a:p>
+            <a:pPr algn="ctr" indent="0" marL="0">
+              <a:buNone/>
+            </a:pPr>
+            <a:r>
+              <a:rPr lang="en-US" sz="1200" b="1" dirty="0">
+                <a:solidFill>
+                  <a:srgbClr val="C0392B"/>
+                </a:solidFill>
+                <a:latin typeface="Calibri" pitchFamily="34" charset="0"/>
+                <a:ea typeface="Calibri" pitchFamily="34" charset="-122"/>
+                <a:cs typeface="Calibri" pitchFamily="34" charset="-120"/>
+              </a:rPr>
+              <a:t>-14.9%</a:t>
+            </a:r>
+            <a:endParaRPr lang="en-US" sz="1200" dirty="0"/>
+          </a:p>
+        </p:txBody>
+      </p:sp>
+      <p:sp>
+        <p:nvSpPr>
+          <p:cNvPr id="29" name="Text 25"/>
+          <p:cNvSpPr/>
+          <p:nvPr/>
+        </p:nvSpPr>
+        <p:spPr>
+          <a:xfrm>
+            <a:off x="8494776" y="5925312"/>
             <a:ext cx="1161288" cy="347472"/>
           </a:xfrm>
           <a:prstGeom prst="rect">
@@ -11654,7 +11693,7 @@
                 <a:ea typeface="Calibri" pitchFamily="34" charset="-122"/>
                 <a:cs typeface="Calibri" pitchFamily="34" charset="-120"/>
               </a:rPr>
-              <a:t>-14.9%</a:t>
+              <a:t>+34.1%</a:t>
             </a:r>
             <a:endParaRPr lang="en-US" sz="1200" dirty="0"/>
           </a:p>
@@ -11662,13 +11701,13 @@
       </p:sp>
       <p:sp>
         <p:nvSpPr>
-          <p:cNvPr id="29" name="Text 25"/>
-          <p:cNvSpPr/>
-          <p:nvPr/>
-        </p:nvSpPr>
-        <p:spPr>
-          <a:xfrm>
-            <a:off x="8494776" y="5925312"/>
+          <p:cNvPr id="30" name="Text 26"/>
+          <p:cNvSpPr/>
+          <p:nvPr/>
+        </p:nvSpPr>
+        <p:spPr>
+          <a:xfrm>
+            <a:off x="9656064" y="5925312"/>
             <a:ext cx="1161288" cy="347472"/>
           </a:xfrm>
           <a:prstGeom prst="rect">
@@ -11693,7 +11732,7 @@
                 <a:ea typeface="Calibri" pitchFamily="34" charset="-122"/>
                 <a:cs typeface="Calibri" pitchFamily="34" charset="-120"/>
               </a:rPr>
-              <a:t>+34.1%</a:t>
+              <a:t>-33.3%</a:t>
             </a:r>
             <a:endParaRPr lang="en-US" sz="1200" dirty="0"/>
           </a:p>
@@ -11701,13 +11740,13 @@
       </p:sp>
       <p:sp>
         <p:nvSpPr>
-          <p:cNvPr id="30" name="Text 26"/>
-          <p:cNvSpPr/>
-          <p:nvPr/>
-        </p:nvSpPr>
-        <p:spPr>
-          <a:xfrm>
-            <a:off x="9656064" y="5925312"/>
+          <p:cNvPr id="31" name="Text 27"/>
+          <p:cNvSpPr/>
+          <p:nvPr/>
+        </p:nvSpPr>
+        <p:spPr>
+          <a:xfrm>
+            <a:off x="10817352" y="5925312"/>
             <a:ext cx="1161288" cy="347472"/>
           </a:xfrm>
           <a:prstGeom prst="rect">
@@ -11727,45 +11766,6 @@
               <a:rPr lang="en-US" sz="1200" b="1" dirty="0">
                 <a:solidFill>
                   <a:srgbClr val="1A7A6E"/>
-                </a:solidFill>
-                <a:latin typeface="Calibri" pitchFamily="34" charset="0"/>
-                <a:ea typeface="Calibri" pitchFamily="34" charset="-122"/>
-                <a:cs typeface="Calibri" pitchFamily="34" charset="-120"/>
-              </a:rPr>
-              <a:t>-33.3%</a:t>
-            </a:r>
-            <a:endParaRPr lang="en-US" sz="1200" dirty="0"/>
-          </a:p>
-        </p:txBody>
-      </p:sp>
-      <p:sp>
-        <p:nvSpPr>
-          <p:cNvPr id="31" name="Text 27"/>
-          <p:cNvSpPr/>
-          <p:nvPr/>
-        </p:nvSpPr>
-        <p:spPr>
-          <a:xfrm>
-            <a:off x="10817352" y="5925312"/>
-            <a:ext cx="1161288" cy="347472"/>
-          </a:xfrm>
-          <a:prstGeom prst="rect">
-            <a:avLst/>
-          </a:prstGeom>
-          <a:noFill/>
-          <a:ln/>
-        </p:spPr>
-        <p:txBody>
-          <a:bodyPr wrap="square" rtlCol="0" anchor="ctr"/>
-          <a:lstStyle/>
-          <a:p>
-            <a:pPr algn="ctr" indent="0" marL="0">
-              <a:buNone/>
-            </a:pPr>
-            <a:r>
-              <a:rPr lang="en-US" sz="1200" b="1" dirty="0">
-                <a:solidFill>
-                  <a:srgbClr val="C0392B"/>
                 </a:solidFill>
                 <a:latin typeface="Calibri" pitchFamily="34" charset="0"/>
                 <a:ea typeface="Calibri" pitchFamily="34" charset="-122"/>
@@ -12215,7 +12215,7 @@
             <a:r>
               <a:rPr lang="en-US" sz="1200" b="1" dirty="0">
                 <a:solidFill>
-                  <a:srgbClr val="C0392B"/>
+                  <a:srgbClr val="1A7A6E"/>
                 </a:solidFill>
                 <a:latin typeface="Calibri" pitchFamily="34" charset="0"/>
                 <a:ea typeface="Calibri" pitchFamily="34" charset="-122"/>
@@ -12254,7 +12254,7 @@
             <a:r>
               <a:rPr lang="en-US" sz="1200" b="1" dirty="0">
                 <a:solidFill>
-                  <a:srgbClr val="C0392B"/>
+                  <a:srgbClr val="1A7A6E"/>
                 </a:solidFill>
                 <a:latin typeface="Calibri" pitchFamily="34" charset="0"/>
                 <a:ea typeface="Calibri" pitchFamily="34" charset="-122"/>
@@ -12293,7 +12293,7 @@
             <a:r>
               <a:rPr lang="en-US" sz="1200" b="1" dirty="0">
                 <a:solidFill>
-                  <a:srgbClr val="C0392B"/>
+                  <a:srgbClr val="1A7A6E"/>
                 </a:solidFill>
                 <a:latin typeface="Calibri" pitchFamily="34" charset="0"/>
                 <a:ea typeface="Calibri" pitchFamily="34" charset="-122"/>
@@ -12332,7 +12332,7 @@
             <a:r>
               <a:rPr lang="en-US" sz="1200" b="1" dirty="0">
                 <a:solidFill>
-                  <a:srgbClr val="C0392B"/>
+                  <a:srgbClr val="1A7A6E"/>
                 </a:solidFill>
                 <a:latin typeface="Calibri" pitchFamily="34" charset="0"/>
                 <a:ea typeface="Calibri" pitchFamily="34" charset="-122"/>
@@ -12371,7 +12371,7 @@
             <a:r>
               <a:rPr lang="en-US" sz="1200" b="1" dirty="0">
                 <a:solidFill>
-                  <a:srgbClr val="C0392B"/>
+                  <a:srgbClr val="1A7A6E"/>
                 </a:solidFill>
                 <a:latin typeface="Calibri" pitchFamily="34" charset="0"/>
                 <a:ea typeface="Calibri" pitchFamily="34" charset="-122"/>

--- a/reports/2026-02.pptx
+++ b/reports/2026-02.pptx
@@ -2062,19 +2062,19 @@
                 <c:formatCode>General</c:formatCode>
                 <c:ptCount val="5"/>
                 <c:pt idx="0">
-                  <c:v>2571</c:v>
+                  <c:v>1285</c:v>
                 </c:pt>
                 <c:pt idx="1">
-                  <c:v>2973</c:v>
+                  <c:v>1486</c:v>
                 </c:pt>
                 <c:pt idx="2">
-                  <c:v>2658</c:v>
+                  <c:v>1329</c:v>
                 </c:pt>
                 <c:pt idx="3">
-                  <c:v>1609</c:v>
+                  <c:v>805</c:v>
                 </c:pt>
                 <c:pt idx="4">
-                  <c:v>725</c:v>
+                  <c:v>363</c:v>
                 </c:pt>
               </c:numCache>
             </c:numRef>
@@ -2362,19 +2362,19 @@
                 <c:formatCode>General</c:formatCode>
                 <c:ptCount val="5"/>
                 <c:pt idx="0">
-                  <c:v>455</c:v>
+                  <c:v>227</c:v>
                 </c:pt>
                 <c:pt idx="1">
-                  <c:v>326</c:v>
+                  <c:v>163</c:v>
                 </c:pt>
                 <c:pt idx="2">
-                  <c:v>199</c:v>
+                  <c:v>99</c:v>
                 </c:pt>
                 <c:pt idx="3">
-                  <c:v>291</c:v>
+                  <c:v>145</c:v>
                 </c:pt>
                 <c:pt idx="4">
-                  <c:v>119</c:v>
+                  <c:v>60</c:v>
                 </c:pt>
               </c:numCache>
             </c:numRef>
@@ -5375,7 +5375,7 @@
                 <a:ea typeface="Calibri" pitchFamily="34" charset="-122"/>
                 <a:cs typeface="Calibri" pitchFamily="34" charset="-120"/>
               </a:rPr>
-              <a:t>+4.8%</a:t>
+              <a:t>+4.7%</a:t>
             </a:r>
             <a:endParaRPr lang="en-US" sz="1200" dirty="0"/>
           </a:p>
@@ -5453,7 +5453,7 @@
                 <a:ea typeface="Calibri" pitchFamily="34" charset="-122"/>
                 <a:cs typeface="Calibri" pitchFamily="34" charset="-120"/>
               </a:rPr>
-              <a:t>+6.1%</a:t>
+              <a:t>+6.2%</a:t>
             </a:r>
             <a:endParaRPr lang="en-US" sz="1200" dirty="0"/>
           </a:p>
@@ -5492,7 +5492,7 @@
                 <a:ea typeface="Calibri" pitchFamily="34" charset="-122"/>
                 <a:cs typeface="Calibri" pitchFamily="34" charset="-120"/>
               </a:rPr>
-              <a:t>+7.2%</a:t>
+              <a:t>+7.4%</a:t>
             </a:r>
             <a:endParaRPr lang="en-US" sz="1200" dirty="0"/>
           </a:p>
@@ -5942,7 +5942,7 @@
                 <a:ea typeface="Calibri" pitchFamily="34" charset="-122"/>
                 <a:cs typeface="Calibri" pitchFamily="34" charset="-120"/>
               </a:rPr>
-              <a:t>-21.0%</a:t>
+              <a:t>-21.2%</a:t>
             </a:r>
             <a:endParaRPr lang="en-US" sz="1200" dirty="0"/>
           </a:p>
@@ -5981,7 +5981,7 @@
                 <a:ea typeface="Calibri" pitchFamily="34" charset="-122"/>
                 <a:cs typeface="Calibri" pitchFamily="34" charset="-120"/>
               </a:rPr>
-              <a:t>-3.8%</a:t>
+              <a:t>-4.1%</a:t>
             </a:r>
             <a:endParaRPr lang="en-US" sz="1200" dirty="0"/>
           </a:p>
@@ -6020,7 +6020,7 @@
                 <a:ea typeface="Calibri" pitchFamily="34" charset="-122"/>
                 <a:cs typeface="Calibri" pitchFamily="34" charset="-120"/>
               </a:rPr>
-              <a:t>+13.7%</a:t>
+              <a:t>+12.5%</a:t>
             </a:r>
             <a:endParaRPr lang="en-US" sz="1200" dirty="0"/>
           </a:p>
@@ -6059,7 +6059,7 @@
                 <a:ea typeface="Calibri" pitchFamily="34" charset="-122"/>
                 <a:cs typeface="Calibri" pitchFamily="34" charset="-120"/>
               </a:rPr>
-              <a:t>+3.2%</a:t>
+              <a:t>+2.8%</a:t>
             </a:r>
             <a:endParaRPr lang="en-US" sz="1200" dirty="0"/>
           </a:p>
@@ -6098,7 +6098,7 @@
                 <a:ea typeface="Calibri" pitchFamily="34" charset="-122"/>
                 <a:cs typeface="Calibri" pitchFamily="34" charset="-120"/>
               </a:rPr>
-              <a:t>+12.3%</a:t>
+              <a:t>+13.2%</a:t>
             </a:r>
             <a:endParaRPr lang="en-US" sz="1200" dirty="0"/>
           </a:p>
@@ -9988,7 +9988,7 @@
                 <a:ea typeface="Century Gothic" pitchFamily="34" charset="-122"/>
                 <a:cs typeface="Century Gothic" pitchFamily="34" charset="-120"/>
               </a:rPr>
-              <a:t>—</a:t>
+              <a:t>+4.1%</a:t>
             </a:r>
             <a:endParaRPr lang="en-US" sz="2600" dirty="0"/>
           </a:p>
@@ -13354,7 +13354,7 @@
                           <a:ea typeface="Century Gothic" pitchFamily="34" charset="-122"/>
                           <a:cs typeface="Century Gothic" pitchFamily="34" charset="-120"/>
                         </a:rPr>
-                        <a:t>Change (bps)</a:t>
+                        <a:t>Trend</a:t>
                       </a:r>
                       <a:endParaRPr lang="en-US" sz="1200" dirty="0">
                         <a:latin typeface="Century Gothic" charset="0"/>
@@ -13628,7 +13628,7 @@
                           <a:ea typeface="Calibri" pitchFamily="34" charset="-122"/>
                           <a:cs typeface="Calibri" pitchFamily="34" charset="-120"/>
                         </a:rPr>
-                        <a:t>+195 bps</a:t>
+                        <a:t>↑</a:t>
                       </a:r>
                       <a:endParaRPr lang="en-US" sz="1200" dirty="0">
                         <a:latin typeface="Calibri" charset="0"/>
@@ -13902,7 +13902,7 @@
                           <a:ea typeface="Calibri" pitchFamily="34" charset="-122"/>
                           <a:cs typeface="Calibri" pitchFamily="34" charset="-120"/>
                         </a:rPr>
-                        <a:t>-57 bps</a:t>
+                        <a:t>↓</a:t>
                       </a:r>
                       <a:endParaRPr lang="en-US" sz="1200" dirty="0">
                         <a:latin typeface="Calibri" charset="0"/>
@@ -14176,7 +14176,7 @@
                           <a:ea typeface="Calibri" pitchFamily="34" charset="-122"/>
                           <a:cs typeface="Calibri" pitchFamily="34" charset="-120"/>
                         </a:rPr>
-                        <a:t>+51 bps</a:t>
+                        <a:t>↑</a:t>
                       </a:r>
                       <a:endParaRPr lang="en-US" sz="1200" dirty="0">
                         <a:latin typeface="Calibri" charset="0"/>
@@ -14450,7 +14450,7 @@
                           <a:ea typeface="Calibri" pitchFamily="34" charset="-122"/>
                           <a:cs typeface="Calibri" pitchFamily="34" charset="-120"/>
                         </a:rPr>
-                        <a:t>-43 bps</a:t>
+                        <a:t>↓</a:t>
                       </a:r>
                       <a:endParaRPr lang="en-US" sz="1200" dirty="0">
                         <a:latin typeface="Calibri" charset="0"/>
@@ -14724,7 +14724,7 @@
                           <a:ea typeface="Calibri" pitchFamily="34" charset="-122"/>
                           <a:cs typeface="Calibri" pitchFamily="34" charset="-120"/>
                         </a:rPr>
-                        <a:t>+184 bps</a:t>
+                        <a:t>↑</a:t>
                       </a:r>
                       <a:endParaRPr lang="en-US" sz="1200" dirty="0">
                         <a:latin typeface="Calibri" charset="0"/>
@@ -14998,7 +14998,7 @@
                           <a:ea typeface="Calibri" pitchFamily="34" charset="-122"/>
                           <a:cs typeface="Calibri" pitchFamily="34" charset="-120"/>
                         </a:rPr>
-                        <a:t>+81 bps</a:t>
+                        <a:t>↑</a:t>
                       </a:r>
                       <a:endParaRPr lang="en-US" sz="1200" dirty="0">
                         <a:latin typeface="Calibri" charset="0"/>
@@ -15610,7 +15610,7 @@
                           <a:ea typeface="Century Gothic" pitchFamily="34" charset="-122"/>
                           <a:cs typeface="Century Gothic" pitchFamily="34" charset="-120"/>
                         </a:rPr>
-                        <a:t>Change (bps)</a:t>
+                        <a:t>Trend</a:t>
                       </a:r>
                       <a:endParaRPr lang="en-US" sz="1200" dirty="0">
                         <a:latin typeface="Century Gothic" charset="0"/>
@@ -15884,7 +15884,7 @@
                           <a:ea typeface="Calibri" pitchFamily="34" charset="-122"/>
                           <a:cs typeface="Calibri" pitchFamily="34" charset="-120"/>
                         </a:rPr>
-                        <a:t>-15 bps</a:t>
+                        <a:t>↓</a:t>
                       </a:r>
                       <a:endParaRPr lang="en-US" sz="1200" dirty="0">
                         <a:latin typeface="Calibri" charset="0"/>
@@ -16158,7 +16158,7 @@
                           <a:ea typeface="Calibri" pitchFamily="34" charset="-122"/>
                           <a:cs typeface="Calibri" pitchFamily="34" charset="-120"/>
                         </a:rPr>
-                        <a:t>+257 bps</a:t>
+                        <a:t>↑</a:t>
                       </a:r>
                       <a:endParaRPr lang="en-US" sz="1200" dirty="0">
                         <a:latin typeface="Calibri" charset="0"/>
@@ -16432,7 +16432,7 @@
                           <a:ea typeface="Calibri" pitchFamily="34" charset="-122"/>
                           <a:cs typeface="Calibri" pitchFamily="34" charset="-120"/>
                         </a:rPr>
-                        <a:t>+139 bps</a:t>
+                        <a:t>↑</a:t>
                       </a:r>
                       <a:endParaRPr lang="en-US" sz="1200" dirty="0">
                         <a:latin typeface="Calibri" charset="0"/>
@@ -16706,7 +16706,7 @@
                           <a:ea typeface="Calibri" pitchFamily="34" charset="-122"/>
                           <a:cs typeface="Calibri" pitchFamily="34" charset="-120"/>
                         </a:rPr>
-                        <a:t>-20 bps</a:t>
+                        <a:t>↓</a:t>
                       </a:r>
                       <a:endParaRPr lang="en-US" sz="1200" dirty="0">
                         <a:latin typeface="Calibri" charset="0"/>
@@ -16980,7 +16980,7 @@
                           <a:ea typeface="Calibri" pitchFamily="34" charset="-122"/>
                           <a:cs typeface="Calibri" pitchFamily="34" charset="-120"/>
                         </a:rPr>
-                        <a:t>+470 bps</a:t>
+                        <a:t>↑</a:t>
                       </a:r>
                       <a:endParaRPr lang="en-US" sz="1200" dirty="0">
                         <a:latin typeface="Calibri" charset="0"/>
@@ -17254,7 +17254,7 @@
                           <a:ea typeface="Calibri" pitchFamily="34" charset="-122"/>
                           <a:cs typeface="Calibri" pitchFamily="34" charset="-120"/>
                         </a:rPr>
-                        <a:t>+103 bps</a:t>
+                        <a:t>↑</a:t>
                       </a:r>
                       <a:endParaRPr lang="en-US" sz="1200" dirty="0">
                         <a:latin typeface="Calibri" charset="0"/>

--- a/reports/2026-02.pptx
+++ b/reports/2026-02.pptx
@@ -537,13 +537,13 @@
                 <c:ptCount val="5"/>
                 <c:lvl>
                   <c:pt idx="0">
+                    <c:v>Uganda</c:v>
+                  </c:pt>
+                  <c:pt idx="1">
                     <c:v>Tanzania</c:v>
                   </c:pt>
-                  <c:pt idx="1">
+                  <c:pt idx="2">
                     <c:v>Kenya</c:v>
-                  </c:pt>
-                  <c:pt idx="2">
-                    <c:v>Uganda</c:v>
                   </c:pt>
                   <c:pt idx="3">
                     <c:v>Sierra Leone</c:v>
@@ -562,13 +562,13 @@
                 <c:formatCode>General</c:formatCode>
                 <c:ptCount val="5"/>
                 <c:pt idx="0">
+                  <c:v>0.972603</c:v>
+                </c:pt>
+                <c:pt idx="1">
                   <c:v>0.944763</c:v>
                 </c:pt>
-                <c:pt idx="1">
+                <c:pt idx="2">
                   <c:v>0.933149</c:v>
-                </c:pt>
-                <c:pt idx="2">
-                  <c:v>0.972603</c:v>
                 </c:pt>
                 <c:pt idx="3">
                   <c:v>0.833138</c:v>
@@ -843,10 +843,10 @@
                     <c:v>Kenya</c:v>
                   </c:pt>
                   <c:pt idx="2">
-                    <c:v>Uganda</c:v>
+                    <c:v>Sierra Leone</c:v>
                   </c:pt>
                   <c:pt idx="3">
-                    <c:v>Sierra Leone</c:v>
+                    <c:v>Uganda</c:v>
                   </c:pt>
                   <c:pt idx="4">
                     <c:v>Nigeria</c:v>
@@ -868,10 +868,10 @@
                   <c:v>1255542.636</c:v>
                 </c:pt>
                 <c:pt idx="2">
-                  <c:v>349353.9326</c:v>
+                  <c:v>548074.3098</c:v>
                 </c:pt>
                 <c:pt idx="3">
-                  <c:v>548074.3098</c:v>
+                  <c:v>349353.9326</c:v>
                 </c:pt>
                 <c:pt idx="4">
                   <c:v>97814.81481</c:v>
@@ -1143,10 +1143,10 @@
                     <c:v>Kenya</c:v>
                   </c:pt>
                   <c:pt idx="2">
-                    <c:v>Uganda</c:v>
+                    <c:v>Sierra Leone</c:v>
                   </c:pt>
                   <c:pt idx="3">
-                    <c:v>Sierra Leone</c:v>
+                    <c:v>Uganda</c:v>
                   </c:pt>
                   <c:pt idx="4">
                     <c:v>Nigeria</c:v>
@@ -1168,10 +1168,10 @@
                   <c:v>224.64531</c:v>
                 </c:pt>
                 <c:pt idx="2">
-                  <c:v>217.937575</c:v>
+                  <c:v>494.651904</c:v>
                 </c:pt>
                 <c:pt idx="3">
-                  <c:v>494.651904</c:v>
+                  <c:v>217.937575</c:v>
                 </c:pt>
                 <c:pt idx="4">
                   <c:v>171.304404</c:v>
@@ -1443,10 +1443,10 @@
                     <c:v>Kenya</c:v>
                   </c:pt>
                   <c:pt idx="2">
-                    <c:v>Uganda</c:v>
+                    <c:v>Sierra Leone</c:v>
                   </c:pt>
                   <c:pt idx="3">
-                    <c:v>Sierra Leone</c:v>
+                    <c:v>Uganda</c:v>
                   </c:pt>
                   <c:pt idx="4">
                     <c:v>Nigeria</c:v>
@@ -1468,10 +1468,10 @@
                   <c:v>114</c:v>
                 </c:pt>
                 <c:pt idx="2">
-                  <c:v>55</c:v>
+                  <c:v>26</c:v>
                 </c:pt>
                 <c:pt idx="3">
-                  <c:v>26</c:v>
+                  <c:v>55</c:v>
                 </c:pt>
                 <c:pt idx="4">
                   <c:v>41</c:v>
@@ -1743,10 +1743,10 @@
                     <c:v>Kenya</c:v>
                   </c:pt>
                   <c:pt idx="2">
-                    <c:v>Uganda</c:v>
+                    <c:v>Sierra Leone</c:v>
                   </c:pt>
                   <c:pt idx="3">
-                    <c:v>Sierra Leone</c:v>
+                    <c:v>Uganda</c:v>
                   </c:pt>
                   <c:pt idx="4">
                     <c:v>Nigeria</c:v>
@@ -1768,10 +1768,10 @@
                   <c:v>4177694.043</c:v>
                 </c:pt>
                 <c:pt idx="2">
-                  <c:v>1328495.447</c:v>
+                  <c:v>1332374.784</c:v>
                 </c:pt>
                 <c:pt idx="3">
-                  <c:v>1332374.784</c:v>
+                  <c:v>1328495.447</c:v>
                 </c:pt>
                 <c:pt idx="4">
                   <c:v>504260.5</c:v>
@@ -2037,19 +2037,19 @@
                 <c:ptCount val="5"/>
                 <c:lvl>
                   <c:pt idx="0">
+                    <c:v>Nigeria</c:v>
+                  </c:pt>
+                  <c:pt idx="1">
+                    <c:v>Sierra Leone</c:v>
+                  </c:pt>
+                  <c:pt idx="2">
                     <c:v>Tanzania</c:v>
                   </c:pt>
-                  <c:pt idx="1">
-                    <c:v>Kenya</c:v>
-                  </c:pt>
-                  <c:pt idx="2">
+                  <c:pt idx="3">
                     <c:v>Uganda</c:v>
                   </c:pt>
-                  <c:pt idx="3">
-                    <c:v>Sierra Leone</c:v>
-                  </c:pt>
                   <c:pt idx="4">
-                    <c:v>Nigeria</c:v>
+                    <c:v>Kenya</c:v>
                   </c:pt>
                 </c:lvl>
               </c:multiLvlStrCache>
@@ -2062,19 +2062,19 @@
                 <c:formatCode>General</c:formatCode>
                 <c:ptCount val="5"/>
                 <c:pt idx="0">
+                  <c:v>363</c:v>
+                </c:pt>
+                <c:pt idx="1">
+                  <c:v>805</c:v>
+                </c:pt>
+                <c:pt idx="2">
                   <c:v>1285</c:v>
                 </c:pt>
-                <c:pt idx="1">
-                  <c:v>1486</c:v>
-                </c:pt>
-                <c:pt idx="2">
+                <c:pt idx="3">
                   <c:v>1329</c:v>
                 </c:pt>
-                <c:pt idx="3">
-                  <c:v>805</c:v>
-                </c:pt>
                 <c:pt idx="4">
-                  <c:v>363</c:v>
+                  <c:v>1486</c:v>
                 </c:pt>
               </c:numCache>
             </c:numRef>
@@ -2337,19 +2337,19 @@
                 <c:ptCount val="5"/>
                 <c:lvl>
                   <c:pt idx="0">
-                    <c:v>Tanzania</c:v>
+                    <c:v>Nigeria</c:v>
                   </c:pt>
                   <c:pt idx="1">
+                    <c:v>Uganda</c:v>
+                  </c:pt>
+                  <c:pt idx="2">
+                    <c:v>Sierra Leone</c:v>
+                  </c:pt>
+                  <c:pt idx="3">
                     <c:v>Kenya</c:v>
                   </c:pt>
-                  <c:pt idx="2">
-                    <c:v>Uganda</c:v>
-                  </c:pt>
-                  <c:pt idx="3">
-                    <c:v>Sierra Leone</c:v>
-                  </c:pt>
                   <c:pt idx="4">
-                    <c:v>Nigeria</c:v>
+                    <c:v>Tanzania</c:v>
                   </c:pt>
                 </c:lvl>
               </c:multiLvlStrCache>
@@ -2362,19 +2362,19 @@
                 <c:formatCode>General</c:formatCode>
                 <c:ptCount val="5"/>
                 <c:pt idx="0">
-                  <c:v>227</c:v>
+                  <c:v>60</c:v>
                 </c:pt>
                 <c:pt idx="1">
+                  <c:v>99</c:v>
+                </c:pt>
+                <c:pt idx="2">
+                  <c:v>145</c:v>
+                </c:pt>
+                <c:pt idx="3">
                   <c:v>163</c:v>
                 </c:pt>
-                <c:pt idx="2">
-                  <c:v>99</c:v>
-                </c:pt>
-                <c:pt idx="3">
-                  <c:v>145</c:v>
-                </c:pt>
                 <c:pt idx="4">
-                  <c:v>60</c:v>
+                  <c:v>227</c:v>
                 </c:pt>
               </c:numCache>
             </c:numRef>
@@ -2637,16 +2637,16 @@
                 <c:ptCount val="5"/>
                 <c:lvl>
                   <c:pt idx="0">
-                    <c:v>Tanzania</c:v>
+                    <c:v>Sierra Leone</c:v>
                   </c:pt>
                   <c:pt idx="1">
+                    <c:v>Uganda</c:v>
+                  </c:pt>
+                  <c:pt idx="2">
                     <c:v>Kenya</c:v>
                   </c:pt>
-                  <c:pt idx="2">
-                    <c:v>Uganda</c:v>
-                  </c:pt>
                   <c:pt idx="3">
-                    <c:v>Sierra Leone</c:v>
+                    <c:v>Tanzania</c:v>
                   </c:pt>
                   <c:pt idx="4">
                     <c:v>Nigeria</c:v>
@@ -2662,16 +2662,16 @@
                 <c:formatCode>General</c:formatCode>
                 <c:ptCount val="5"/>
                 <c:pt idx="0">
-                  <c:v>43</c:v>
+                  <c:v>6</c:v>
                 </c:pt>
                 <c:pt idx="1">
+                  <c:v>30</c:v>
+                </c:pt>
+                <c:pt idx="2">
                   <c:v>37</c:v>
                 </c:pt>
-                <c:pt idx="2">
-                  <c:v>30</c:v>
-                </c:pt>
                 <c:pt idx="3">
-                  <c:v>6</c:v>
+                  <c:v>43</c:v>
                 </c:pt>
                 <c:pt idx="4">
                   <c:v>49</c:v>
@@ -4847,7 +4847,7 @@
                 <a:ea typeface="Calibri" pitchFamily="34" charset="-122"/>
                 <a:cs typeface="Calibri" pitchFamily="34" charset="-120"/>
               </a:rPr>
-              <a:t>Prepared: March 13, 2026</a:t>
+              <a:t>Prepared: March 14, 2026</a:t>
             </a:r>
             <a:endParaRPr lang="en-US" sz="1200" dirty="0"/>
           </a:p>
@@ -5297,7 +5297,7 @@
                 <a:ea typeface="Century Gothic" pitchFamily="34" charset="-122"/>
                 <a:cs typeface="Century Gothic" pitchFamily="34" charset="-120"/>
               </a:rPr>
-              <a:t>% Change from Prior Month</a:t>
+              <a:t>% Change in Cost per Team vs Prior Month</a:t>
             </a:r>
             <a:endParaRPr lang="en-US" sz="1200" dirty="0"/>
           </a:p>
@@ -5312,6 +5312,84 @@
         <p:spPr>
           <a:xfrm>
             <a:off x="137160" y="5943600"/>
+            <a:ext cx="2377440" cy="347472"/>
+          </a:xfrm>
+          <a:prstGeom prst="rect">
+            <a:avLst/>
+          </a:prstGeom>
+          <a:noFill/>
+          <a:ln/>
+        </p:spPr>
+        <p:txBody>
+          <a:bodyPr wrap="square" rtlCol="0" anchor="ctr"/>
+          <a:lstStyle/>
+          <a:p>
+            <a:pPr algn="ctr" indent="0" marL="0">
+              <a:buNone/>
+            </a:pPr>
+            <a:r>
+              <a:rPr lang="en-US" sz="1200" b="1" dirty="0">
+                <a:solidFill>
+                  <a:srgbClr val="C0392B"/>
+                </a:solidFill>
+                <a:latin typeface="Calibri" pitchFamily="34" charset="0"/>
+                <a:ea typeface="Calibri" pitchFamily="34" charset="-122"/>
+                <a:cs typeface="Calibri" pitchFamily="34" charset="-120"/>
+              </a:rPr>
+              <a:t>+7.4%</a:t>
+            </a:r>
+            <a:endParaRPr lang="en-US" sz="1200" dirty="0"/>
+          </a:p>
+        </p:txBody>
+      </p:sp>
+      <p:sp>
+        <p:nvSpPr>
+          <p:cNvPr id="16" name="Text 13"/>
+          <p:cNvSpPr/>
+          <p:nvPr/>
+        </p:nvSpPr>
+        <p:spPr>
+          <a:xfrm>
+            <a:off x="2514600" y="5943600"/>
+            <a:ext cx="2377440" cy="347472"/>
+          </a:xfrm>
+          <a:prstGeom prst="rect">
+            <a:avLst/>
+          </a:prstGeom>
+          <a:noFill/>
+          <a:ln/>
+        </p:spPr>
+        <p:txBody>
+          <a:bodyPr wrap="square" rtlCol="0" anchor="ctr"/>
+          <a:lstStyle/>
+          <a:p>
+            <a:pPr algn="ctr" indent="0" marL="0">
+              <a:buNone/>
+            </a:pPr>
+            <a:r>
+              <a:rPr lang="en-US" sz="1200" b="1" dirty="0">
+                <a:solidFill>
+                  <a:srgbClr val="C0392B"/>
+                </a:solidFill>
+                <a:latin typeface="Calibri" pitchFamily="34" charset="0"/>
+                <a:ea typeface="Calibri" pitchFamily="34" charset="-122"/>
+                <a:cs typeface="Calibri" pitchFamily="34" charset="-120"/>
+              </a:rPr>
+              <a:t>+6.2%</a:t>
+            </a:r>
+            <a:endParaRPr lang="en-US" sz="1200" dirty="0"/>
+          </a:p>
+        </p:txBody>
+      </p:sp>
+      <p:sp>
+        <p:nvSpPr>
+          <p:cNvPr id="17" name="Text 14"/>
+          <p:cNvSpPr/>
+          <p:nvPr/>
+        </p:nvSpPr>
+        <p:spPr>
+          <a:xfrm>
+            <a:off x="4892040" y="5943600"/>
             <a:ext cx="2377440" cy="347472"/>
           </a:xfrm>
           <a:prstGeom prst="rect">
@@ -5344,52 +5422,13 @@
       </p:sp>
       <p:sp>
         <p:nvSpPr>
-          <p:cNvPr id="16" name="Text 13"/>
-          <p:cNvSpPr/>
-          <p:nvPr/>
-        </p:nvSpPr>
-        <p:spPr>
-          <a:xfrm>
-            <a:off x="2514600" y="5943600"/>
-            <a:ext cx="2377440" cy="347472"/>
-          </a:xfrm>
-          <a:prstGeom prst="rect">
-            <a:avLst/>
-          </a:prstGeom>
-          <a:noFill/>
-          <a:ln/>
-        </p:spPr>
-        <p:txBody>
-          <a:bodyPr wrap="square" rtlCol="0" anchor="ctr"/>
-          <a:lstStyle/>
-          <a:p>
-            <a:pPr algn="ctr" indent="0" marL="0">
-              <a:buNone/>
-            </a:pPr>
-            <a:r>
-              <a:rPr lang="en-US" sz="1200" b="1" dirty="0">
-                <a:solidFill>
-                  <a:srgbClr val="C0392B"/>
-                </a:solidFill>
-                <a:latin typeface="Calibri" pitchFamily="34" charset="0"/>
-                <a:ea typeface="Calibri" pitchFamily="34" charset="-122"/>
-                <a:cs typeface="Calibri" pitchFamily="34" charset="-120"/>
-              </a:rPr>
-              <a:t>+4.7%</a:t>
-            </a:r>
-            <a:endParaRPr lang="en-US" sz="1200" dirty="0"/>
-          </a:p>
-        </p:txBody>
-      </p:sp>
-      <p:sp>
-        <p:nvSpPr>
-          <p:cNvPr id="17" name="Text 14"/>
-          <p:cNvSpPr/>
-          <p:nvPr/>
-        </p:nvSpPr>
-        <p:spPr>
-          <a:xfrm>
-            <a:off x="4892040" y="5943600"/>
+          <p:cNvPr id="18" name="Text 15"/>
+          <p:cNvSpPr/>
+          <p:nvPr/>
+        </p:nvSpPr>
+        <p:spPr>
+          <a:xfrm>
+            <a:off x="7269480" y="5943600"/>
             <a:ext cx="2377440" cy="347472"/>
           </a:xfrm>
           <a:prstGeom prst="rect">
@@ -5422,13 +5461,13 @@
       </p:sp>
       <p:sp>
         <p:nvSpPr>
-          <p:cNvPr id="18" name="Text 15"/>
-          <p:cNvSpPr/>
-          <p:nvPr/>
-        </p:nvSpPr>
-        <p:spPr>
-          <a:xfrm>
-            <a:off x="7269480" y="5943600"/>
+          <p:cNvPr id="19" name="Text 16"/>
+          <p:cNvSpPr/>
+          <p:nvPr/>
+        </p:nvSpPr>
+        <p:spPr>
+          <a:xfrm>
+            <a:off x="9646920" y="5943600"/>
             <a:ext cx="2377440" cy="347472"/>
           </a:xfrm>
           <a:prstGeom prst="rect">
@@ -5453,46 +5492,7 @@
                 <a:ea typeface="Calibri" pitchFamily="34" charset="-122"/>
                 <a:cs typeface="Calibri" pitchFamily="34" charset="-120"/>
               </a:rPr>
-              <a:t>+6.2%</a:t>
-            </a:r>
-            <a:endParaRPr lang="en-US" sz="1200" dirty="0"/>
-          </a:p>
-        </p:txBody>
-      </p:sp>
-      <p:sp>
-        <p:nvSpPr>
-          <p:cNvPr id="19" name="Text 16"/>
-          <p:cNvSpPr/>
-          <p:nvPr/>
-        </p:nvSpPr>
-        <p:spPr>
-          <a:xfrm>
-            <a:off x="9646920" y="5943600"/>
-            <a:ext cx="2377440" cy="347472"/>
-          </a:xfrm>
-          <a:prstGeom prst="rect">
-            <a:avLst/>
-          </a:prstGeom>
-          <a:noFill/>
-          <a:ln/>
-        </p:spPr>
-        <p:txBody>
-          <a:bodyPr wrap="square" rtlCol="0" anchor="ctr"/>
-          <a:lstStyle/>
-          <a:p>
-            <a:pPr algn="ctr" indent="0" marL="0">
-              <a:buNone/>
-            </a:pPr>
-            <a:r>
-              <a:rPr lang="en-US" sz="1200" b="1" dirty="0">
-                <a:solidFill>
-                  <a:srgbClr val="C0392B"/>
-                </a:solidFill>
-                <a:latin typeface="Calibri" pitchFamily="34" charset="0"/>
-                <a:ea typeface="Calibri" pitchFamily="34" charset="-122"/>
-                <a:cs typeface="Calibri" pitchFamily="34" charset="-120"/>
-              </a:rPr>
-              <a:t>+7.4%</a:t>
+              <a:t>+4.7%</a:t>
             </a:r>
             <a:endParaRPr lang="en-US" sz="1200" dirty="0"/>
           </a:p>
@@ -5812,7 +5812,7 @@
         </p:nvGraphicFramePr>
         <p:xfrm>
           <a:off x="137160" y="841248"/>
-          <a:ext cx="11887200" cy="4754880"/>
+          <a:ext cx="11887200" cy="4297680"/>
         </p:xfrm>
         <a:graphic xmlns:a="http://schemas.openxmlformats.org/drawingml/2006/main">
           <a:graphicData uri="http://schemas.openxmlformats.org/drawingml/2006/chart">
@@ -5828,7 +5828,7 @@
         </p:nvSpPr>
         <p:spPr>
           <a:xfrm>
-            <a:off x="0" y="5641848"/>
+            <a:off x="0" y="5184648"/>
             <a:ext cx="12161520" cy="292608"/>
           </a:xfrm>
           <a:prstGeom prst="rect">
@@ -5853,7 +5853,7 @@
         </p:nvSpPr>
         <p:spPr>
           <a:xfrm>
-            <a:off x="0" y="5641848"/>
+            <a:off x="0" y="5184648"/>
             <a:ext cx="54864" cy="292608"/>
           </a:xfrm>
           <a:prstGeom prst="rect">
@@ -5878,7 +5878,7 @@
         </p:nvSpPr>
         <p:spPr>
           <a:xfrm>
-            <a:off x="109728" y="5641848"/>
+            <a:off x="109728" y="5184648"/>
             <a:ext cx="12051792" cy="292608"/>
           </a:xfrm>
           <a:prstGeom prst="rect">
@@ -5903,7 +5903,7 @@
                 <a:ea typeface="Century Gothic" pitchFamily="34" charset="-122"/>
                 <a:cs typeface="Century Gothic" pitchFamily="34" charset="-120"/>
               </a:rPr>
-              <a:t>% Change from Prior Month</a:t>
+              <a:t>% Change in Cost per Team vs Prior Month</a:t>
             </a:r>
             <a:endParaRPr lang="en-US" sz="1200" dirty="0"/>
           </a:p>
@@ -5917,7 +5917,163 @@
         </p:nvSpPr>
         <p:spPr>
           <a:xfrm>
-            <a:off x="137160" y="5943600"/>
+            <a:off x="137160" y="5486400"/>
+            <a:ext cx="2377440" cy="347472"/>
+          </a:xfrm>
+          <a:prstGeom prst="rect">
+            <a:avLst/>
+          </a:prstGeom>
+          <a:noFill/>
+          <a:ln/>
+        </p:spPr>
+        <p:txBody>
+          <a:bodyPr wrap="square" rtlCol="0" anchor="ctr"/>
+          <a:lstStyle/>
+          <a:p>
+            <a:pPr algn="ctr" indent="0" marL="0">
+              <a:buNone/>
+            </a:pPr>
+            <a:r>
+              <a:rPr lang="en-US" sz="1200" b="1" dirty="0">
+                <a:solidFill>
+                  <a:srgbClr val="C0392B"/>
+                </a:solidFill>
+                <a:latin typeface="Calibri" pitchFamily="34" charset="0"/>
+                <a:ea typeface="Calibri" pitchFamily="34" charset="-122"/>
+                <a:cs typeface="Calibri" pitchFamily="34" charset="-120"/>
+              </a:rPr>
+              <a:t>+13.2%</a:t>
+            </a:r>
+            <a:endParaRPr lang="en-US" sz="1200" dirty="0"/>
+          </a:p>
+        </p:txBody>
+      </p:sp>
+      <p:sp>
+        <p:nvSpPr>
+          <p:cNvPr id="16" name="Text 13"/>
+          <p:cNvSpPr/>
+          <p:nvPr/>
+        </p:nvSpPr>
+        <p:spPr>
+          <a:xfrm>
+            <a:off x="2514600" y="5486400"/>
+            <a:ext cx="2377440" cy="347472"/>
+          </a:xfrm>
+          <a:prstGeom prst="rect">
+            <a:avLst/>
+          </a:prstGeom>
+          <a:noFill/>
+          <a:ln/>
+        </p:spPr>
+        <p:txBody>
+          <a:bodyPr wrap="square" rtlCol="0" anchor="ctr"/>
+          <a:lstStyle/>
+          <a:p>
+            <a:pPr algn="ctr" indent="0" marL="0">
+              <a:buNone/>
+            </a:pPr>
+            <a:r>
+              <a:rPr lang="en-US" sz="1200" b="1" dirty="0">
+                <a:solidFill>
+                  <a:srgbClr val="C0392B"/>
+                </a:solidFill>
+                <a:latin typeface="Calibri" pitchFamily="34" charset="0"/>
+                <a:ea typeface="Calibri" pitchFamily="34" charset="-122"/>
+                <a:cs typeface="Calibri" pitchFamily="34" charset="-120"/>
+              </a:rPr>
+              <a:t>+12.5%</a:t>
+            </a:r>
+            <a:endParaRPr lang="en-US" sz="1200" dirty="0"/>
+          </a:p>
+        </p:txBody>
+      </p:sp>
+      <p:sp>
+        <p:nvSpPr>
+          <p:cNvPr id="17" name="Text 14"/>
+          <p:cNvSpPr/>
+          <p:nvPr/>
+        </p:nvSpPr>
+        <p:spPr>
+          <a:xfrm>
+            <a:off x="4892040" y="5486400"/>
+            <a:ext cx="2377440" cy="347472"/>
+          </a:xfrm>
+          <a:prstGeom prst="rect">
+            <a:avLst/>
+          </a:prstGeom>
+          <a:noFill/>
+          <a:ln/>
+        </p:spPr>
+        <p:txBody>
+          <a:bodyPr wrap="square" rtlCol="0" anchor="ctr"/>
+          <a:lstStyle/>
+          <a:p>
+            <a:pPr algn="ctr" indent="0" marL="0">
+              <a:buNone/>
+            </a:pPr>
+            <a:r>
+              <a:rPr lang="en-US" sz="1200" b="1" dirty="0">
+                <a:solidFill>
+                  <a:srgbClr val="C0392B"/>
+                </a:solidFill>
+                <a:latin typeface="Calibri" pitchFamily="34" charset="0"/>
+                <a:ea typeface="Calibri" pitchFamily="34" charset="-122"/>
+                <a:cs typeface="Calibri" pitchFamily="34" charset="-120"/>
+              </a:rPr>
+              <a:t>+2.8%</a:t>
+            </a:r>
+            <a:endParaRPr lang="en-US" sz="1200" dirty="0"/>
+          </a:p>
+        </p:txBody>
+      </p:sp>
+      <p:sp>
+        <p:nvSpPr>
+          <p:cNvPr id="18" name="Text 15"/>
+          <p:cNvSpPr/>
+          <p:nvPr/>
+        </p:nvSpPr>
+        <p:spPr>
+          <a:xfrm>
+            <a:off x="7269480" y="5486400"/>
+            <a:ext cx="2377440" cy="347472"/>
+          </a:xfrm>
+          <a:prstGeom prst="rect">
+            <a:avLst/>
+          </a:prstGeom>
+          <a:noFill/>
+          <a:ln/>
+        </p:spPr>
+        <p:txBody>
+          <a:bodyPr wrap="square" rtlCol="0" anchor="ctr"/>
+          <a:lstStyle/>
+          <a:p>
+            <a:pPr algn="ctr" indent="0" marL="0">
+              <a:buNone/>
+            </a:pPr>
+            <a:r>
+              <a:rPr lang="en-US" sz="1200" b="1" dirty="0">
+                <a:solidFill>
+                  <a:srgbClr val="1A7A6E"/>
+                </a:solidFill>
+                <a:latin typeface="Calibri" pitchFamily="34" charset="0"/>
+                <a:ea typeface="Calibri" pitchFamily="34" charset="-122"/>
+                <a:cs typeface="Calibri" pitchFamily="34" charset="-120"/>
+              </a:rPr>
+              <a:t>-4.1%</a:t>
+            </a:r>
+            <a:endParaRPr lang="en-US" sz="1200" dirty="0"/>
+          </a:p>
+        </p:txBody>
+      </p:sp>
+      <p:sp>
+        <p:nvSpPr>
+          <p:cNvPr id="19" name="Text 16"/>
+          <p:cNvSpPr/>
+          <p:nvPr/>
+        </p:nvSpPr>
+        <p:spPr>
+          <a:xfrm>
+            <a:off x="9646920" y="5486400"/>
             <a:ext cx="2377440" cy="347472"/>
           </a:xfrm>
           <a:prstGeom prst="rect">
@@ -5950,13 +6106,102 @@
       </p:sp>
       <p:sp>
         <p:nvSpPr>
-          <p:cNvPr id="16" name="Text 13"/>
-          <p:cNvSpPr/>
-          <p:nvPr/>
-        </p:nvSpPr>
-        <p:spPr>
-          <a:xfrm>
-            <a:off x="2514600" y="5943600"/>
+          <p:cNvPr id="20" name="Shape 17"/>
+          <p:cNvSpPr/>
+          <p:nvPr/>
+        </p:nvSpPr>
+        <p:spPr>
+          <a:xfrm>
+            <a:off x="0" y="5897880"/>
+            <a:ext cx="12161520" cy="292608"/>
+          </a:xfrm>
+          <a:prstGeom prst="rect">
+            <a:avLst/>
+          </a:prstGeom>
+          <a:solidFill>
+            <a:srgbClr val="FFF9D9"/>
+          </a:solidFill>
+          <a:ln w="12700">
+            <a:solidFill>
+              <a:srgbClr val="F0E0B8"/>
+            </a:solidFill>
+            <a:prstDash val="solid"/>
+          </a:ln>
+        </p:spPr>
+      </p:sp>
+      <p:sp>
+        <p:nvSpPr>
+          <p:cNvPr id="21" name="Shape 18"/>
+          <p:cNvSpPr/>
+          <p:nvPr/>
+        </p:nvSpPr>
+        <p:spPr>
+          <a:xfrm>
+            <a:off x="0" y="5897880"/>
+            <a:ext cx="54864" cy="292608"/>
+          </a:xfrm>
+          <a:prstGeom prst="rect">
+            <a:avLst/>
+          </a:prstGeom>
+          <a:solidFill>
+            <a:srgbClr val="5D300F"/>
+          </a:solidFill>
+          <a:ln w="12700">
+            <a:solidFill>
+              <a:srgbClr val="5D300F"/>
+            </a:solidFill>
+            <a:prstDash val="solid"/>
+          </a:ln>
+        </p:spPr>
+      </p:sp>
+      <p:sp>
+        <p:nvSpPr>
+          <p:cNvPr id="22" name="Text 19"/>
+          <p:cNvSpPr/>
+          <p:nvPr/>
+        </p:nvSpPr>
+        <p:spPr>
+          <a:xfrm>
+            <a:off x="109728" y="5897880"/>
+            <a:ext cx="12051792" cy="292608"/>
+          </a:xfrm>
+          <a:prstGeom prst="rect">
+            <a:avLst/>
+          </a:prstGeom>
+          <a:noFill/>
+          <a:ln/>
+        </p:spPr>
+        <p:txBody>
+          <a:bodyPr wrap="square" lIns="0" tIns="0" rIns="0" bIns="0" rtlCol="0" anchor="ctr"/>
+          <a:lstStyle/>
+          <a:p>
+            <a:pPr indent="0" marL="0">
+              <a:buNone/>
+            </a:pPr>
+            <a:r>
+              <a:rPr lang="en-US" sz="1200" b="1" dirty="0">
+                <a:solidFill>
+                  <a:srgbClr val="5D300F"/>
+                </a:solidFill>
+                <a:latin typeface="Century Gothic" pitchFamily="34" charset="0"/>
+                <a:ea typeface="Century Gothic" pitchFamily="34" charset="-122"/>
+                <a:cs typeface="Century Gothic" pitchFamily="34" charset="-120"/>
+              </a:rPr>
+              <a:t>% Change in Disb per Team vs Prior Month</a:t>
+            </a:r>
+            <a:endParaRPr lang="en-US" sz="1200" dirty="0"/>
+          </a:p>
+        </p:txBody>
+      </p:sp>
+      <p:sp>
+        <p:nvSpPr>
+          <p:cNvPr id="23" name="Text 20"/>
+          <p:cNvSpPr/>
+          <p:nvPr/>
+        </p:nvSpPr>
+        <p:spPr>
+          <a:xfrm>
+            <a:off x="137160" y="6199632"/>
             <a:ext cx="2377440" cy="347472"/>
           </a:xfrm>
           <a:prstGeom prst="rect">
@@ -5981,7 +6226,7 @@
                 <a:ea typeface="Calibri" pitchFamily="34" charset="-122"/>
                 <a:cs typeface="Calibri" pitchFamily="34" charset="-120"/>
               </a:rPr>
-              <a:t>-4.1%</a:t>
+              <a:t>+78.3%</a:t>
             </a:r>
             <a:endParaRPr lang="en-US" sz="1200" dirty="0"/>
           </a:p>
@@ -5989,13 +6234,52 @@
       </p:sp>
       <p:sp>
         <p:nvSpPr>
-          <p:cNvPr id="17" name="Text 14"/>
-          <p:cNvSpPr/>
-          <p:nvPr/>
-        </p:nvSpPr>
-        <p:spPr>
-          <a:xfrm>
-            <a:off x="4892040" y="5943600"/>
+          <p:cNvPr id="24" name="Text 21"/>
+          <p:cNvSpPr/>
+          <p:nvPr/>
+        </p:nvSpPr>
+        <p:spPr>
+          <a:xfrm>
+            <a:off x="2514600" y="6199632"/>
+            <a:ext cx="2377440" cy="347472"/>
+          </a:xfrm>
+          <a:prstGeom prst="rect">
+            <a:avLst/>
+          </a:prstGeom>
+          <a:noFill/>
+          <a:ln/>
+        </p:spPr>
+        <p:txBody>
+          <a:bodyPr wrap="square" rtlCol="0" anchor="ctr"/>
+          <a:lstStyle/>
+          <a:p>
+            <a:pPr algn="ctr" indent="0" marL="0">
+              <a:buNone/>
+            </a:pPr>
+            <a:r>
+              <a:rPr lang="en-US" sz="1200" b="1" dirty="0">
+                <a:solidFill>
+                  <a:srgbClr val="1A7A6E"/>
+                </a:solidFill>
+                <a:latin typeface="Calibri" pitchFamily="34" charset="0"/>
+                <a:ea typeface="Calibri" pitchFamily="34" charset="-122"/>
+                <a:cs typeface="Calibri" pitchFamily="34" charset="-120"/>
+              </a:rPr>
+              <a:t>+34.1%</a:t>
+            </a:r>
+            <a:endParaRPr lang="en-US" sz="1200" dirty="0"/>
+          </a:p>
+        </p:txBody>
+      </p:sp>
+      <p:sp>
+        <p:nvSpPr>
+          <p:cNvPr id="25" name="Text 22"/>
+          <p:cNvSpPr/>
+          <p:nvPr/>
+        </p:nvSpPr>
+        <p:spPr>
+          <a:xfrm>
+            <a:off x="4892040" y="6199632"/>
             <a:ext cx="2377440" cy="347472"/>
           </a:xfrm>
           <a:prstGeom prst="rect">
@@ -6020,7 +6304,7 @@
                 <a:ea typeface="Calibri" pitchFamily="34" charset="-122"/>
                 <a:cs typeface="Calibri" pitchFamily="34" charset="-120"/>
               </a:rPr>
-              <a:t>+12.5%</a:t>
+              <a:t>-33.3%</a:t>
             </a:r>
             <a:endParaRPr lang="en-US" sz="1200" dirty="0"/>
           </a:p>
@@ -6028,13 +6312,13 @@
       </p:sp>
       <p:sp>
         <p:nvSpPr>
-          <p:cNvPr id="18" name="Text 15"/>
-          <p:cNvSpPr/>
-          <p:nvPr/>
-        </p:nvSpPr>
-        <p:spPr>
-          <a:xfrm>
-            <a:off x="7269480" y="5943600"/>
+          <p:cNvPr id="26" name="Text 23"/>
+          <p:cNvSpPr/>
+          <p:nvPr/>
+        </p:nvSpPr>
+        <p:spPr>
+          <a:xfrm>
+            <a:off x="7269480" y="6199632"/>
             <a:ext cx="2377440" cy="347472"/>
           </a:xfrm>
           <a:prstGeom prst="rect">
@@ -6059,7 +6343,7 @@
                 <a:ea typeface="Calibri" pitchFamily="34" charset="-122"/>
                 <a:cs typeface="Calibri" pitchFamily="34" charset="-120"/>
               </a:rPr>
-              <a:t>+2.8%</a:t>
+              <a:t>-14.9%</a:t>
             </a:r>
             <a:endParaRPr lang="en-US" sz="1200" dirty="0"/>
           </a:p>
@@ -6067,13 +6351,13 @@
       </p:sp>
       <p:sp>
         <p:nvSpPr>
-          <p:cNvPr id="19" name="Text 16"/>
-          <p:cNvSpPr/>
-          <p:nvPr/>
-        </p:nvSpPr>
-        <p:spPr>
-          <a:xfrm>
-            <a:off x="9646920" y="5943600"/>
+          <p:cNvPr id="27" name="Text 24"/>
+          <p:cNvSpPr/>
+          <p:nvPr/>
+        </p:nvSpPr>
+        <p:spPr>
+          <a:xfrm>
+            <a:off x="9646920" y="6199632"/>
             <a:ext cx="2377440" cy="347472"/>
           </a:xfrm>
           <a:prstGeom prst="rect">
@@ -6098,7 +6382,7 @@
                 <a:ea typeface="Calibri" pitchFamily="34" charset="-122"/>
                 <a:cs typeface="Calibri" pitchFamily="34" charset="-120"/>
               </a:rPr>
-              <a:t>+13.2%</a:t>
+              <a:t>-40.2%</a:t>
             </a:r>
             <a:endParaRPr lang="en-US" sz="1200" dirty="0"/>
           </a:p>
@@ -6418,7 +6702,7 @@
         </p:nvGraphicFramePr>
         <p:xfrm>
           <a:off x="137160" y="841248"/>
-          <a:ext cx="11887200" cy="4754880"/>
+          <a:ext cx="11887200" cy="4297680"/>
         </p:xfrm>
         <a:graphic xmlns:a="http://schemas.openxmlformats.org/drawingml/2006/main">
           <a:graphicData uri="http://schemas.openxmlformats.org/drawingml/2006/chart">
@@ -6434,7 +6718,7 @@
         </p:nvSpPr>
         <p:spPr>
           <a:xfrm>
-            <a:off x="0" y="5641848"/>
+            <a:off x="0" y="5184648"/>
             <a:ext cx="12161520" cy="292608"/>
           </a:xfrm>
           <a:prstGeom prst="rect">
@@ -6459,7 +6743,7 @@
         </p:nvSpPr>
         <p:spPr>
           <a:xfrm>
-            <a:off x="0" y="5641848"/>
+            <a:off x="0" y="5184648"/>
             <a:ext cx="54864" cy="292608"/>
           </a:xfrm>
           <a:prstGeom prst="rect">
@@ -6484,7 +6768,7 @@
         </p:nvSpPr>
         <p:spPr>
           <a:xfrm>
-            <a:off x="109728" y="5641848"/>
+            <a:off x="109728" y="5184648"/>
             <a:ext cx="12051792" cy="292608"/>
           </a:xfrm>
           <a:prstGeom prst="rect">
@@ -6509,7 +6793,7 @@
                 <a:ea typeface="Century Gothic" pitchFamily="34" charset="-122"/>
                 <a:cs typeface="Century Gothic" pitchFamily="34" charset="-120"/>
               </a:rPr>
-              <a:t>% Change from Prior Month</a:t>
+              <a:t>% Change in Cost per Team vs Prior Month</a:t>
             </a:r>
             <a:endParaRPr lang="en-US" sz="1200" dirty="0"/>
           </a:p>
@@ -6523,7 +6807,124 @@
         </p:nvSpPr>
         <p:spPr>
           <a:xfrm>
-            <a:off x="137160" y="5943600"/>
+            <a:off x="137160" y="5486400"/>
+            <a:ext cx="2377440" cy="347472"/>
+          </a:xfrm>
+          <a:prstGeom prst="rect">
+            <a:avLst/>
+          </a:prstGeom>
+          <a:noFill/>
+          <a:ln/>
+        </p:spPr>
+        <p:txBody>
+          <a:bodyPr wrap="square" rtlCol="0" anchor="ctr"/>
+          <a:lstStyle/>
+          <a:p>
+            <a:pPr algn="ctr" indent="0" marL="0">
+              <a:buNone/>
+            </a:pPr>
+            <a:r>
+              <a:rPr lang="en-US" sz="1200" b="1" dirty="0">
+                <a:solidFill>
+                  <a:srgbClr val="1A7A6E"/>
+                </a:solidFill>
+                <a:latin typeface="Calibri" pitchFamily="34" charset="0"/>
+                <a:ea typeface="Calibri" pitchFamily="34" charset="-122"/>
+                <a:cs typeface="Calibri" pitchFamily="34" charset="-120"/>
+              </a:rPr>
+              <a:t>-71.4%</a:t>
+            </a:r>
+            <a:endParaRPr lang="en-US" sz="1200" dirty="0"/>
+          </a:p>
+        </p:txBody>
+      </p:sp>
+      <p:sp>
+        <p:nvSpPr>
+          <p:cNvPr id="16" name="Text 13"/>
+          <p:cNvSpPr/>
+          <p:nvPr/>
+        </p:nvSpPr>
+        <p:spPr>
+          <a:xfrm>
+            <a:off x="2514600" y="5486400"/>
+            <a:ext cx="2377440" cy="347472"/>
+          </a:xfrm>
+          <a:prstGeom prst="rect">
+            <a:avLst/>
+          </a:prstGeom>
+          <a:noFill/>
+          <a:ln/>
+        </p:spPr>
+        <p:txBody>
+          <a:bodyPr wrap="square" rtlCol="0" anchor="ctr"/>
+          <a:lstStyle/>
+          <a:p>
+            <a:pPr algn="ctr" indent="0" marL="0">
+              <a:buNone/>
+            </a:pPr>
+            <a:r>
+              <a:rPr lang="en-US" sz="1200" b="1" dirty="0">
+                <a:solidFill>
+                  <a:srgbClr val="C0392B"/>
+                </a:solidFill>
+                <a:latin typeface="Calibri" pitchFamily="34" charset="0"/>
+                <a:ea typeface="Calibri" pitchFamily="34" charset="-122"/>
+                <a:cs typeface="Calibri" pitchFamily="34" charset="-120"/>
+              </a:rPr>
+              <a:t>+30.4%</a:t>
+            </a:r>
+            <a:endParaRPr lang="en-US" sz="1200" dirty="0"/>
+          </a:p>
+        </p:txBody>
+      </p:sp>
+      <p:sp>
+        <p:nvSpPr>
+          <p:cNvPr id="17" name="Text 14"/>
+          <p:cNvSpPr/>
+          <p:nvPr/>
+        </p:nvSpPr>
+        <p:spPr>
+          <a:xfrm>
+            <a:off x="4892040" y="5486400"/>
+            <a:ext cx="2377440" cy="347472"/>
+          </a:xfrm>
+          <a:prstGeom prst="rect">
+            <a:avLst/>
+          </a:prstGeom>
+          <a:noFill/>
+          <a:ln/>
+        </p:spPr>
+        <p:txBody>
+          <a:bodyPr wrap="square" rtlCol="0" anchor="ctr"/>
+          <a:lstStyle/>
+          <a:p>
+            <a:pPr algn="ctr" indent="0" marL="0">
+              <a:buNone/>
+            </a:pPr>
+            <a:r>
+              <a:rPr lang="en-US" sz="1200" b="1" dirty="0">
+                <a:solidFill>
+                  <a:srgbClr val="C0392B"/>
+                </a:solidFill>
+                <a:latin typeface="Calibri" pitchFamily="34" charset="0"/>
+                <a:ea typeface="Calibri" pitchFamily="34" charset="-122"/>
+                <a:cs typeface="Calibri" pitchFamily="34" charset="-120"/>
+              </a:rPr>
+              <a:t>+68.2%</a:t>
+            </a:r>
+            <a:endParaRPr lang="en-US" sz="1200" dirty="0"/>
+          </a:p>
+        </p:txBody>
+      </p:sp>
+      <p:sp>
+        <p:nvSpPr>
+          <p:cNvPr id="18" name="Text 15"/>
+          <p:cNvSpPr/>
+          <p:nvPr/>
+        </p:nvSpPr>
+        <p:spPr>
+          <a:xfrm>
+            <a:off x="7269480" y="5486400"/>
             <a:ext cx="2377440" cy="347472"/>
           </a:xfrm>
           <a:prstGeom prst="rect">
@@ -6556,130 +6957,13 @@
       </p:sp>
       <p:sp>
         <p:nvSpPr>
-          <p:cNvPr id="16" name="Text 13"/>
-          <p:cNvSpPr/>
-          <p:nvPr/>
-        </p:nvSpPr>
-        <p:spPr>
-          <a:xfrm>
-            <a:off x="2514600" y="5943600"/>
-            <a:ext cx="2377440" cy="347472"/>
-          </a:xfrm>
-          <a:prstGeom prst="rect">
-            <a:avLst/>
-          </a:prstGeom>
-          <a:noFill/>
-          <a:ln/>
-        </p:spPr>
-        <p:txBody>
-          <a:bodyPr wrap="square" rtlCol="0" anchor="ctr"/>
-          <a:lstStyle/>
-          <a:p>
-            <a:pPr algn="ctr" indent="0" marL="0">
-              <a:buNone/>
-            </a:pPr>
-            <a:r>
-              <a:rPr lang="en-US" sz="1200" b="1" dirty="0">
-                <a:solidFill>
-                  <a:srgbClr val="C0392B"/>
-                </a:solidFill>
-                <a:latin typeface="Calibri" pitchFamily="34" charset="0"/>
-                <a:ea typeface="Calibri" pitchFamily="34" charset="-122"/>
-                <a:cs typeface="Calibri" pitchFamily="34" charset="-120"/>
-              </a:rPr>
-              <a:t>+68.2%</a:t>
-            </a:r>
-            <a:endParaRPr lang="en-US" sz="1200" dirty="0"/>
-          </a:p>
-        </p:txBody>
-      </p:sp>
-      <p:sp>
-        <p:nvSpPr>
-          <p:cNvPr id="17" name="Text 14"/>
-          <p:cNvSpPr/>
-          <p:nvPr/>
-        </p:nvSpPr>
-        <p:spPr>
-          <a:xfrm>
-            <a:off x="4892040" y="5943600"/>
-            <a:ext cx="2377440" cy="347472"/>
-          </a:xfrm>
-          <a:prstGeom prst="rect">
-            <a:avLst/>
-          </a:prstGeom>
-          <a:noFill/>
-          <a:ln/>
-        </p:spPr>
-        <p:txBody>
-          <a:bodyPr wrap="square" rtlCol="0" anchor="ctr"/>
-          <a:lstStyle/>
-          <a:p>
-            <a:pPr algn="ctr" indent="0" marL="0">
-              <a:buNone/>
-            </a:pPr>
-            <a:r>
-              <a:rPr lang="en-US" sz="1200" b="1" dirty="0">
-                <a:solidFill>
-                  <a:srgbClr val="C0392B"/>
-                </a:solidFill>
-                <a:latin typeface="Calibri" pitchFamily="34" charset="0"/>
-                <a:ea typeface="Calibri" pitchFamily="34" charset="-122"/>
-                <a:cs typeface="Calibri" pitchFamily="34" charset="-120"/>
-              </a:rPr>
-              <a:t>+30.4%</a:t>
-            </a:r>
-            <a:endParaRPr lang="en-US" sz="1200" dirty="0"/>
-          </a:p>
-        </p:txBody>
-      </p:sp>
-      <p:sp>
-        <p:nvSpPr>
-          <p:cNvPr id="18" name="Text 15"/>
-          <p:cNvSpPr/>
-          <p:nvPr/>
-        </p:nvSpPr>
-        <p:spPr>
-          <a:xfrm>
-            <a:off x="7269480" y="5943600"/>
-            <a:ext cx="2377440" cy="347472"/>
-          </a:xfrm>
-          <a:prstGeom prst="rect">
-            <a:avLst/>
-          </a:prstGeom>
-          <a:noFill/>
-          <a:ln/>
-        </p:spPr>
-        <p:txBody>
-          <a:bodyPr wrap="square" rtlCol="0" anchor="ctr"/>
-          <a:lstStyle/>
-          <a:p>
-            <a:pPr algn="ctr" indent="0" marL="0">
-              <a:buNone/>
-            </a:pPr>
-            <a:r>
-              <a:rPr lang="en-US" sz="1200" b="1" dirty="0">
-                <a:solidFill>
-                  <a:srgbClr val="1A7A6E"/>
-                </a:solidFill>
-                <a:latin typeface="Calibri" pitchFamily="34" charset="0"/>
-                <a:ea typeface="Calibri" pitchFamily="34" charset="-122"/>
-                <a:cs typeface="Calibri" pitchFamily="34" charset="-120"/>
-              </a:rPr>
-              <a:t>-71.4%</a:t>
-            </a:r>
-            <a:endParaRPr lang="en-US" sz="1200" dirty="0"/>
-          </a:p>
-        </p:txBody>
-      </p:sp>
-      <p:sp>
-        <p:nvSpPr>
           <p:cNvPr id="19" name="Text 16"/>
           <p:cNvSpPr/>
           <p:nvPr/>
         </p:nvSpPr>
         <p:spPr>
           <a:xfrm>
-            <a:off x="9646920" y="5943600"/>
+            <a:off x="9646920" y="5486400"/>
             <a:ext cx="2377440" cy="347472"/>
           </a:xfrm>
           <a:prstGeom prst="rect">
@@ -6705,6 +6989,290 @@
                 <a:cs typeface="Calibri" pitchFamily="34" charset="-120"/>
               </a:rPr>
               <a:t>-27.9%</a:t>
+            </a:r>
+            <a:endParaRPr lang="en-US" sz="1200" dirty="0"/>
+          </a:p>
+        </p:txBody>
+      </p:sp>
+      <p:sp>
+        <p:nvSpPr>
+          <p:cNvPr id="20" name="Shape 17"/>
+          <p:cNvSpPr/>
+          <p:nvPr/>
+        </p:nvSpPr>
+        <p:spPr>
+          <a:xfrm>
+            <a:off x="0" y="5897880"/>
+            <a:ext cx="12161520" cy="292608"/>
+          </a:xfrm>
+          <a:prstGeom prst="rect">
+            <a:avLst/>
+          </a:prstGeom>
+          <a:solidFill>
+            <a:srgbClr val="FFF9D9"/>
+          </a:solidFill>
+          <a:ln w="12700">
+            <a:solidFill>
+              <a:srgbClr val="F0E0B8"/>
+            </a:solidFill>
+            <a:prstDash val="solid"/>
+          </a:ln>
+        </p:spPr>
+      </p:sp>
+      <p:sp>
+        <p:nvSpPr>
+          <p:cNvPr id="21" name="Shape 18"/>
+          <p:cNvSpPr/>
+          <p:nvPr/>
+        </p:nvSpPr>
+        <p:spPr>
+          <a:xfrm>
+            <a:off x="0" y="5897880"/>
+            <a:ext cx="54864" cy="292608"/>
+          </a:xfrm>
+          <a:prstGeom prst="rect">
+            <a:avLst/>
+          </a:prstGeom>
+          <a:solidFill>
+            <a:srgbClr val="5D300F"/>
+          </a:solidFill>
+          <a:ln w="12700">
+            <a:solidFill>
+              <a:srgbClr val="5D300F"/>
+            </a:solidFill>
+            <a:prstDash val="solid"/>
+          </a:ln>
+        </p:spPr>
+      </p:sp>
+      <p:sp>
+        <p:nvSpPr>
+          <p:cNvPr id="22" name="Text 19"/>
+          <p:cNvSpPr/>
+          <p:nvPr/>
+        </p:nvSpPr>
+        <p:spPr>
+          <a:xfrm>
+            <a:off x="109728" y="5897880"/>
+            <a:ext cx="12051792" cy="292608"/>
+          </a:xfrm>
+          <a:prstGeom prst="rect">
+            <a:avLst/>
+          </a:prstGeom>
+          <a:noFill/>
+          <a:ln/>
+        </p:spPr>
+        <p:txBody>
+          <a:bodyPr wrap="square" lIns="0" tIns="0" rIns="0" bIns="0" rtlCol="0" anchor="ctr"/>
+          <a:lstStyle/>
+          <a:p>
+            <a:pPr indent="0" marL="0">
+              <a:buNone/>
+            </a:pPr>
+            <a:r>
+              <a:rPr lang="en-US" sz="1200" b="1" dirty="0">
+                <a:solidFill>
+                  <a:srgbClr val="5D300F"/>
+                </a:solidFill>
+                <a:latin typeface="Century Gothic" pitchFamily="34" charset="0"/>
+                <a:ea typeface="Century Gothic" pitchFamily="34" charset="-122"/>
+                <a:cs typeface="Century Gothic" pitchFamily="34" charset="-120"/>
+              </a:rPr>
+              <a:t>% Change in Disb per Team vs Prior Month</a:t>
+            </a:r>
+            <a:endParaRPr lang="en-US" sz="1200" dirty="0"/>
+          </a:p>
+        </p:txBody>
+      </p:sp>
+      <p:sp>
+        <p:nvSpPr>
+          <p:cNvPr id="23" name="Text 20"/>
+          <p:cNvSpPr/>
+          <p:nvPr/>
+        </p:nvSpPr>
+        <p:spPr>
+          <a:xfrm>
+            <a:off x="137160" y="6199632"/>
+            <a:ext cx="2377440" cy="347472"/>
+          </a:xfrm>
+          <a:prstGeom prst="rect">
+            <a:avLst/>
+          </a:prstGeom>
+          <a:noFill/>
+          <a:ln/>
+        </p:spPr>
+        <p:txBody>
+          <a:bodyPr wrap="square" rtlCol="0" anchor="ctr"/>
+          <a:lstStyle/>
+          <a:p>
+            <a:pPr algn="ctr" indent="0" marL="0">
+              <a:buNone/>
+            </a:pPr>
+            <a:r>
+              <a:rPr lang="en-US" sz="1200" b="1" dirty="0">
+                <a:solidFill>
+                  <a:srgbClr val="C0392B"/>
+                </a:solidFill>
+                <a:latin typeface="Calibri" pitchFamily="34" charset="0"/>
+                <a:ea typeface="Calibri" pitchFamily="34" charset="-122"/>
+                <a:cs typeface="Calibri" pitchFamily="34" charset="-120"/>
+              </a:rPr>
+              <a:t>-33.3%</a:t>
+            </a:r>
+            <a:endParaRPr lang="en-US" sz="1200" dirty="0"/>
+          </a:p>
+        </p:txBody>
+      </p:sp>
+      <p:sp>
+        <p:nvSpPr>
+          <p:cNvPr id="24" name="Text 21"/>
+          <p:cNvSpPr/>
+          <p:nvPr/>
+        </p:nvSpPr>
+        <p:spPr>
+          <a:xfrm>
+            <a:off x="2514600" y="6199632"/>
+            <a:ext cx="2377440" cy="347472"/>
+          </a:xfrm>
+          <a:prstGeom prst="rect">
+            <a:avLst/>
+          </a:prstGeom>
+          <a:noFill/>
+          <a:ln/>
+        </p:spPr>
+        <p:txBody>
+          <a:bodyPr wrap="square" rtlCol="0" anchor="ctr"/>
+          <a:lstStyle/>
+          <a:p>
+            <a:pPr algn="ctr" indent="0" marL="0">
+              <a:buNone/>
+            </a:pPr>
+            <a:r>
+              <a:rPr lang="en-US" sz="1200" b="1" dirty="0">
+                <a:solidFill>
+                  <a:srgbClr val="1A7A6E"/>
+                </a:solidFill>
+                <a:latin typeface="Calibri" pitchFamily="34" charset="0"/>
+                <a:ea typeface="Calibri" pitchFamily="34" charset="-122"/>
+                <a:cs typeface="Calibri" pitchFamily="34" charset="-120"/>
+              </a:rPr>
+              <a:t>+34.1%</a:t>
+            </a:r>
+            <a:endParaRPr lang="en-US" sz="1200" dirty="0"/>
+          </a:p>
+        </p:txBody>
+      </p:sp>
+      <p:sp>
+        <p:nvSpPr>
+          <p:cNvPr id="25" name="Text 22"/>
+          <p:cNvSpPr/>
+          <p:nvPr/>
+        </p:nvSpPr>
+        <p:spPr>
+          <a:xfrm>
+            <a:off x="4892040" y="6199632"/>
+            <a:ext cx="2377440" cy="347472"/>
+          </a:xfrm>
+          <a:prstGeom prst="rect">
+            <a:avLst/>
+          </a:prstGeom>
+          <a:noFill/>
+          <a:ln/>
+        </p:spPr>
+        <p:txBody>
+          <a:bodyPr wrap="square" rtlCol="0" anchor="ctr"/>
+          <a:lstStyle/>
+          <a:p>
+            <a:pPr algn="ctr" indent="0" marL="0">
+              <a:buNone/>
+            </a:pPr>
+            <a:r>
+              <a:rPr lang="en-US" sz="1200" b="1" dirty="0">
+                <a:solidFill>
+                  <a:srgbClr val="C0392B"/>
+                </a:solidFill>
+                <a:latin typeface="Calibri" pitchFamily="34" charset="0"/>
+                <a:ea typeface="Calibri" pitchFamily="34" charset="-122"/>
+                <a:cs typeface="Calibri" pitchFamily="34" charset="-120"/>
+              </a:rPr>
+              <a:t>-14.9%</a:t>
+            </a:r>
+            <a:endParaRPr lang="en-US" sz="1200" dirty="0"/>
+          </a:p>
+        </p:txBody>
+      </p:sp>
+      <p:sp>
+        <p:nvSpPr>
+          <p:cNvPr id="26" name="Text 23"/>
+          <p:cNvSpPr/>
+          <p:nvPr/>
+        </p:nvSpPr>
+        <p:spPr>
+          <a:xfrm>
+            <a:off x="7269480" y="6199632"/>
+            <a:ext cx="2377440" cy="347472"/>
+          </a:xfrm>
+          <a:prstGeom prst="rect">
+            <a:avLst/>
+          </a:prstGeom>
+          <a:noFill/>
+          <a:ln/>
+        </p:spPr>
+        <p:txBody>
+          <a:bodyPr wrap="square" rtlCol="0" anchor="ctr"/>
+          <a:lstStyle/>
+          <a:p>
+            <a:pPr algn="ctr" indent="0" marL="0">
+              <a:buNone/>
+            </a:pPr>
+            <a:r>
+              <a:rPr lang="en-US" sz="1200" b="1" dirty="0">
+                <a:solidFill>
+                  <a:srgbClr val="C0392B"/>
+                </a:solidFill>
+                <a:latin typeface="Calibri" pitchFamily="34" charset="0"/>
+                <a:ea typeface="Calibri" pitchFamily="34" charset="-122"/>
+                <a:cs typeface="Calibri" pitchFamily="34" charset="-120"/>
+              </a:rPr>
+              <a:t>-40.2%</a:t>
+            </a:r>
+            <a:endParaRPr lang="en-US" sz="1200" dirty="0"/>
+          </a:p>
+        </p:txBody>
+      </p:sp>
+      <p:sp>
+        <p:nvSpPr>
+          <p:cNvPr id="27" name="Text 24"/>
+          <p:cNvSpPr/>
+          <p:nvPr/>
+        </p:nvSpPr>
+        <p:spPr>
+          <a:xfrm>
+            <a:off x="9646920" y="6199632"/>
+            <a:ext cx="2377440" cy="347472"/>
+          </a:xfrm>
+          <a:prstGeom prst="rect">
+            <a:avLst/>
+          </a:prstGeom>
+          <a:noFill/>
+          <a:ln/>
+        </p:spPr>
+        <p:txBody>
+          <a:bodyPr wrap="square" rtlCol="0" anchor="ctr"/>
+          <a:lstStyle/>
+          <a:p>
+            <a:pPr algn="ctr" indent="0" marL="0">
+              <a:buNone/>
+            </a:pPr>
+            <a:r>
+              <a:rPr lang="en-US" sz="1200" b="1" dirty="0">
+                <a:solidFill>
+                  <a:srgbClr val="1A7A6E"/>
+                </a:solidFill>
+                <a:latin typeface="Calibri" pitchFamily="34" charset="0"/>
+                <a:ea typeface="Calibri" pitchFamily="34" charset="-122"/>
+                <a:cs typeface="Calibri" pitchFamily="34" charset="-120"/>
+              </a:rPr>
+              <a:t>+78.3%</a:t>
             </a:r>
             <a:endParaRPr lang="en-US" sz="1200" dirty="0"/>
           </a:p>
@@ -8304,13 +8872,13 @@
             <a:r>
               <a:rPr lang="en-US" sz="1200" b="1" dirty="0">
                 <a:solidFill>
-                  <a:srgbClr val="C0392B"/>
+                  <a:srgbClr val="1A7A6E"/>
                 </a:solidFill>
                 <a:latin typeface="Calibri" pitchFamily="34" charset="0"/>
                 <a:ea typeface="Calibri" pitchFamily="34" charset="-122"/>
                 <a:cs typeface="Calibri" pitchFamily="34" charset="-120"/>
               </a:rPr>
-              <a:t>↓</a:t>
+              <a:t>↑</a:t>
             </a:r>
             <a:endParaRPr lang="en-US" sz="1200" dirty="0"/>
           </a:p>
@@ -8343,13 +8911,13 @@
             <a:r>
               <a:rPr lang="en-US" sz="1200" b="1" dirty="0">
                 <a:solidFill>
-                  <a:srgbClr val="1A7A6E"/>
+                  <a:srgbClr val="C0392B"/>
                 </a:solidFill>
                 <a:latin typeface="Calibri" pitchFamily="34" charset="0"/>
                 <a:ea typeface="Calibri" pitchFamily="34" charset="-122"/>
                 <a:cs typeface="Calibri" pitchFamily="34" charset="-120"/>
               </a:rPr>
-              <a:t>↑</a:t>
+              <a:t>↓</a:t>
             </a:r>
             <a:endParaRPr lang="en-US" sz="1200" dirty="0"/>
           </a:p>
@@ -9544,7 +10112,7 @@
                 <a:ea typeface="Calibri" pitchFamily="34" charset="-122"/>
                 <a:cs typeface="Calibri" pitchFamily="34" charset="-120"/>
               </a:rPr>
-              <a:t>+65.9%</a:t>
+              <a:t>+11.0%</a:t>
             </a:r>
             <a:endParaRPr lang="en-US" sz="1200" dirty="0"/>
           </a:p>
@@ -9583,7 +10151,7 @@
                 <a:ea typeface="Calibri" pitchFamily="34" charset="-122"/>
                 <a:cs typeface="Calibri" pitchFamily="34" charset="-120"/>
               </a:rPr>
-              <a:t>+11.0%</a:t>
+              <a:t>+65.9%</a:t>
             </a:r>
             <a:endParaRPr lang="en-US" sz="1200" dirty="0"/>
           </a:p>
@@ -10386,6 +10954,109 @@
                 <a:ea typeface="Calibri" pitchFamily="34" charset="-122"/>
                 <a:cs typeface="Calibri" pitchFamily="34" charset="-120"/>
               </a:rPr>
+              <a:t>Sierra Leone</a:t>
+            </a:r>
+            <a:endParaRPr lang="en-US" sz="1200" dirty="0"/>
+          </a:p>
+        </p:txBody>
+      </p:sp>
+      <p:sp>
+        <p:nvSpPr>
+          <p:cNvPr id="43" name="Text 40"/>
+          <p:cNvSpPr/>
+          <p:nvPr/>
+        </p:nvSpPr>
+        <p:spPr>
+          <a:xfrm>
+            <a:off x="10661904" y="4389120"/>
+            <a:ext cx="1234440" cy="310896"/>
+          </a:xfrm>
+          <a:prstGeom prst="rect">
+            <a:avLst/>
+          </a:prstGeom>
+          <a:noFill/>
+          <a:ln/>
+        </p:spPr>
+        <p:txBody>
+          <a:bodyPr wrap="square" rtlCol="0" anchor="ctr"/>
+          <a:lstStyle/>
+          <a:p>
+            <a:pPr algn="ctr" indent="0" marL="0">
+              <a:buNone/>
+            </a:pPr>
+            <a:r>
+              <a:rPr lang="en-US" sz="1200" b="1" dirty="0">
+                <a:solidFill>
+                  <a:srgbClr val="5D300F"/>
+                </a:solidFill>
+                <a:latin typeface="Century Gothic" pitchFamily="34" charset="0"/>
+                <a:ea typeface="Century Gothic" pitchFamily="34" charset="-122"/>
+                <a:cs typeface="Century Gothic" pitchFamily="34" charset="-120"/>
+              </a:rPr>
+              <a:t>33</a:t>
+            </a:r>
+            <a:endParaRPr lang="en-US" sz="1200" dirty="0"/>
+          </a:p>
+        </p:txBody>
+      </p:sp>
+      <p:sp>
+        <p:nvSpPr>
+          <p:cNvPr id="44" name="Shape 41"/>
+          <p:cNvSpPr/>
+          <p:nvPr/>
+        </p:nvSpPr>
+        <p:spPr>
+          <a:xfrm>
+            <a:off x="7955280" y="4791456"/>
+            <a:ext cx="1234440" cy="566928"/>
+          </a:xfrm>
+          <a:prstGeom prst="rect">
+            <a:avLst/>
+          </a:prstGeom>
+          <a:solidFill>
+            <a:srgbClr val="FFF9D9"/>
+          </a:solidFill>
+          <a:ln w="12700">
+            <a:solidFill>
+              <a:srgbClr val="D6CFC4"/>
+            </a:solidFill>
+            <a:prstDash val="solid"/>
+          </a:ln>
+        </p:spPr>
+      </p:sp>
+      <p:sp>
+        <p:nvSpPr>
+          <p:cNvPr id="45" name="Text 42"/>
+          <p:cNvSpPr/>
+          <p:nvPr/>
+        </p:nvSpPr>
+        <p:spPr>
+          <a:xfrm>
+            <a:off x="7955280" y="4791456"/>
+            <a:ext cx="1234440" cy="256032"/>
+          </a:xfrm>
+          <a:prstGeom prst="rect">
+            <a:avLst/>
+          </a:prstGeom>
+          <a:noFill/>
+          <a:ln/>
+        </p:spPr>
+        <p:txBody>
+          <a:bodyPr wrap="square" rtlCol="0" anchor="b"/>
+          <a:lstStyle/>
+          <a:p>
+            <a:pPr algn="ctr" indent="0" marL="0">
+              <a:buNone/>
+            </a:pPr>
+            <a:r>
+              <a:rPr lang="en-US" sz="1200" dirty="0">
+                <a:solidFill>
+                  <a:srgbClr val="718096"/>
+                </a:solidFill>
+                <a:latin typeface="Calibri" pitchFamily="34" charset="0"/>
+                <a:ea typeface="Calibri" pitchFamily="34" charset="-122"/>
+                <a:cs typeface="Calibri" pitchFamily="34" charset="-120"/>
+              </a:rPr>
               <a:t>Uganda</a:t>
             </a:r>
             <a:endParaRPr lang="en-US" sz="1200" dirty="0"/>
@@ -10394,13 +11065,13 @@
       </p:sp>
       <p:sp>
         <p:nvSpPr>
-          <p:cNvPr id="43" name="Text 40"/>
-          <p:cNvSpPr/>
-          <p:nvPr/>
-        </p:nvSpPr>
-        <p:spPr>
-          <a:xfrm>
-            <a:off x="10661904" y="4389120"/>
+          <p:cNvPr id="46" name="Text 43"/>
+          <p:cNvSpPr/>
+          <p:nvPr/>
+        </p:nvSpPr>
+        <p:spPr>
+          <a:xfrm>
+            <a:off x="7955280" y="5047488"/>
             <a:ext cx="1234440" cy="310896"/>
           </a:xfrm>
           <a:prstGeom prst="rect">
@@ -10426,109 +11097,6 @@
                 <a:cs typeface="Century Gothic" pitchFamily="34" charset="-120"/>
               </a:rPr>
               <a:t>39</a:t>
-            </a:r>
-            <a:endParaRPr lang="en-US" sz="1200" dirty="0"/>
-          </a:p>
-        </p:txBody>
-      </p:sp>
-      <p:sp>
-        <p:nvSpPr>
-          <p:cNvPr id="44" name="Shape 41"/>
-          <p:cNvSpPr/>
-          <p:nvPr/>
-        </p:nvSpPr>
-        <p:spPr>
-          <a:xfrm>
-            <a:off x="7955280" y="4791456"/>
-            <a:ext cx="1234440" cy="566928"/>
-          </a:xfrm>
-          <a:prstGeom prst="rect">
-            <a:avLst/>
-          </a:prstGeom>
-          <a:solidFill>
-            <a:srgbClr val="FFF9D9"/>
-          </a:solidFill>
-          <a:ln w="12700">
-            <a:solidFill>
-              <a:srgbClr val="D6CFC4"/>
-            </a:solidFill>
-            <a:prstDash val="solid"/>
-          </a:ln>
-        </p:spPr>
-      </p:sp>
-      <p:sp>
-        <p:nvSpPr>
-          <p:cNvPr id="45" name="Text 42"/>
-          <p:cNvSpPr/>
-          <p:nvPr/>
-        </p:nvSpPr>
-        <p:spPr>
-          <a:xfrm>
-            <a:off x="7955280" y="4791456"/>
-            <a:ext cx="1234440" cy="256032"/>
-          </a:xfrm>
-          <a:prstGeom prst="rect">
-            <a:avLst/>
-          </a:prstGeom>
-          <a:noFill/>
-          <a:ln/>
-        </p:spPr>
-        <p:txBody>
-          <a:bodyPr wrap="square" rtlCol="0" anchor="b"/>
-          <a:lstStyle/>
-          <a:p>
-            <a:pPr algn="ctr" indent="0" marL="0">
-              <a:buNone/>
-            </a:pPr>
-            <a:r>
-              <a:rPr lang="en-US" sz="1200" dirty="0">
-                <a:solidFill>
-                  <a:srgbClr val="718096"/>
-                </a:solidFill>
-                <a:latin typeface="Calibri" pitchFamily="34" charset="0"/>
-                <a:ea typeface="Calibri" pitchFamily="34" charset="-122"/>
-                <a:cs typeface="Calibri" pitchFamily="34" charset="-120"/>
-              </a:rPr>
-              <a:t>Sierra Leone</a:t>
-            </a:r>
-            <a:endParaRPr lang="en-US" sz="1200" dirty="0"/>
-          </a:p>
-        </p:txBody>
-      </p:sp>
-      <p:sp>
-        <p:nvSpPr>
-          <p:cNvPr id="46" name="Text 43"/>
-          <p:cNvSpPr/>
-          <p:nvPr/>
-        </p:nvSpPr>
-        <p:spPr>
-          <a:xfrm>
-            <a:off x="7955280" y="5047488"/>
-            <a:ext cx="1234440" cy="310896"/>
-          </a:xfrm>
-          <a:prstGeom prst="rect">
-            <a:avLst/>
-          </a:prstGeom>
-          <a:noFill/>
-          <a:ln/>
-        </p:spPr>
-        <p:txBody>
-          <a:bodyPr wrap="square" rtlCol="0" anchor="ctr"/>
-          <a:lstStyle/>
-          <a:p>
-            <a:pPr algn="ctr" indent="0" marL="0">
-              <a:buNone/>
-            </a:pPr>
-            <a:r>
-              <a:rPr lang="en-US" sz="1200" b="1" dirty="0">
-                <a:solidFill>
-                  <a:srgbClr val="5D300F"/>
-                </a:solidFill>
-                <a:latin typeface="Century Gothic" pitchFamily="34" charset="0"/>
-                <a:ea typeface="Century Gothic" pitchFamily="34" charset="-122"/>
-                <a:cs typeface="Century Gothic" pitchFamily="34" charset="-120"/>
-              </a:rPr>
-              <a:t>33</a:t>
             </a:r>
             <a:endParaRPr lang="en-US" sz="1200" dirty="0"/>
           </a:p>
@@ -11403,13 +11971,13 @@
             <a:r>
               <a:rPr lang="en-US" sz="1200" b="1" dirty="0">
                 <a:solidFill>
-                  <a:srgbClr val="C0392B"/>
+                  <a:srgbClr val="1A7A6E"/>
                 </a:solidFill>
                 <a:latin typeface="Calibri" pitchFamily="34" charset="0"/>
                 <a:ea typeface="Calibri" pitchFamily="34" charset="-122"/>
                 <a:cs typeface="Calibri" pitchFamily="34" charset="-120"/>
               </a:rPr>
-              <a:t>-6.5%</a:t>
+              <a:t>+16.9%</a:t>
             </a:r>
             <a:endParaRPr lang="en-US" sz="1200" dirty="0"/>
           </a:p>
@@ -11442,13 +12010,13 @@
             <a:r>
               <a:rPr lang="en-US" sz="1200" b="1" dirty="0">
                 <a:solidFill>
-                  <a:srgbClr val="1A7A6E"/>
+                  <a:srgbClr val="C0392B"/>
                 </a:solidFill>
                 <a:latin typeface="Calibri" pitchFamily="34" charset="0"/>
                 <a:ea typeface="Calibri" pitchFamily="34" charset="-122"/>
                 <a:cs typeface="Calibri" pitchFamily="34" charset="-120"/>
               </a:rPr>
-              <a:t>+16.9%</a:t>
+              <a:t>-6.5%</a:t>
             </a:r>
             <a:endParaRPr lang="en-US" sz="1200" dirty="0"/>
           </a:p>
@@ -11687,13 +12255,13 @@
             <a:r>
               <a:rPr lang="en-US" sz="1200" b="1" dirty="0">
                 <a:solidFill>
-                  <a:srgbClr val="1A7A6E"/>
+                  <a:srgbClr val="C0392B"/>
                 </a:solidFill>
                 <a:latin typeface="Calibri" pitchFamily="34" charset="0"/>
                 <a:ea typeface="Calibri" pitchFamily="34" charset="-122"/>
                 <a:cs typeface="Calibri" pitchFamily="34" charset="-120"/>
               </a:rPr>
-              <a:t>+34.1%</a:t>
+              <a:t>-33.3%</a:t>
             </a:r>
             <a:endParaRPr lang="en-US" sz="1200" dirty="0"/>
           </a:p>
@@ -11726,13 +12294,13 @@
             <a:r>
               <a:rPr lang="en-US" sz="1200" b="1" dirty="0">
                 <a:solidFill>
-                  <a:srgbClr val="C0392B"/>
+                  <a:srgbClr val="1A7A6E"/>
                 </a:solidFill>
                 <a:latin typeface="Calibri" pitchFamily="34" charset="0"/>
                 <a:ea typeface="Calibri" pitchFamily="34" charset="-122"/>
                 <a:cs typeface="Calibri" pitchFamily="34" charset="-120"/>
               </a:rPr>
-              <a:t>-33.3%</a:t>
+              <a:t>+34.1%</a:t>
             </a:r>
             <a:endParaRPr lang="en-US" sz="1200" dirty="0"/>
           </a:p>
@@ -12299,7 +12867,7 @@
                 <a:ea typeface="Calibri" pitchFamily="34" charset="-122"/>
                 <a:cs typeface="Calibri" pitchFamily="34" charset="-120"/>
               </a:rPr>
-              <a:t>+18.2%</a:t>
+              <a:t>+14.0%</a:t>
             </a:r>
             <a:endParaRPr lang="en-US" sz="1200" dirty="0"/>
           </a:p>
@@ -12338,7 +12906,7 @@
                 <a:ea typeface="Calibri" pitchFamily="34" charset="-122"/>
                 <a:cs typeface="Calibri" pitchFamily="34" charset="-120"/>
               </a:rPr>
-              <a:t>+14.0%</a:t>
+              <a:t>+18.2%</a:t>
             </a:r>
             <a:endParaRPr lang="en-US" sz="1200" dirty="0"/>
           </a:p>
@@ -13424,7 +13992,7 @@
                           <a:ea typeface="Century Gothic" pitchFamily="34" charset="-122"/>
                           <a:cs typeface="Century Gothic" pitchFamily="34" charset="-120"/>
                         </a:rPr>
-                        <a:t>Tanzania</a:t>
+                        <a:t>Sierra Leone</a:t>
                       </a:r>
                       <a:endParaRPr lang="en-US" sz="1200" dirty="0">
                         <a:latin typeface="Century Gothic" charset="0"/>
@@ -13492,7 +14060,7 @@
                           <a:ea typeface="Calibri" pitchFamily="34" charset="-122"/>
                           <a:cs typeface="Calibri" pitchFamily="34" charset="-120"/>
                         </a:rPr>
-                        <a:t>4.5%</a:t>
+                        <a:t>2.7%</a:t>
                       </a:r>
                       <a:endParaRPr lang="en-US" sz="1200" dirty="0">
                         <a:latin typeface="Calibri" charset="0"/>
@@ -13560,7 +14128,7 @@
                           <a:ea typeface="Calibri" pitchFamily="34" charset="-122"/>
                           <a:cs typeface="Calibri" pitchFamily="34" charset="-120"/>
                         </a:rPr>
-                        <a:t>6.5%</a:t>
+                        <a:t>2.2%</a:t>
                       </a:r>
                       <a:endParaRPr lang="en-US" sz="1200" dirty="0">
                         <a:latin typeface="Calibri" charset="0"/>
@@ -13622,13 +14190,13 @@
                       <a:r>
                         <a:rPr lang="en-US" sz="1200" dirty="0">
                           <a:solidFill>
-                            <a:srgbClr val="C0392B"/>
+                            <a:srgbClr val="1A7A6E"/>
                           </a:solidFill>
                           <a:latin typeface="Calibri" pitchFamily="34" charset="0"/>
                           <a:ea typeface="Calibri" pitchFamily="34" charset="-122"/>
                           <a:cs typeface="Calibri" pitchFamily="34" charset="-120"/>
                         </a:rPr>
-                        <a:t>↑</a:t>
+                        <a:t>↓</a:t>
                       </a:r>
                       <a:endParaRPr lang="en-US" sz="1200" dirty="0">
                         <a:latin typeface="Calibri" charset="0"/>
@@ -13972,7 +14540,7 @@
                           <a:ea typeface="Century Gothic" pitchFamily="34" charset="-122"/>
                           <a:cs typeface="Century Gothic" pitchFamily="34" charset="-120"/>
                         </a:rPr>
-                        <a:t>Uganda</a:t>
+                        <a:t>Tanzania</a:t>
                       </a:r>
                       <a:endParaRPr lang="en-US" sz="1200" dirty="0">
                         <a:latin typeface="Century Gothic" charset="0"/>
@@ -14040,7 +14608,7 @@
                           <a:ea typeface="Calibri" pitchFamily="34" charset="-122"/>
                           <a:cs typeface="Calibri" pitchFamily="34" charset="-120"/>
                         </a:rPr>
-                        <a:t>11.1%</a:t>
+                        <a:t>4.5%</a:t>
                       </a:r>
                       <a:endParaRPr lang="en-US" sz="1200" dirty="0">
                         <a:latin typeface="Calibri" charset="0"/>
@@ -14108,7 +14676,7 @@
                           <a:ea typeface="Calibri" pitchFamily="34" charset="-122"/>
                           <a:cs typeface="Calibri" pitchFamily="34" charset="-120"/>
                         </a:rPr>
-                        <a:t>11.6%</a:t>
+                        <a:t>6.5%</a:t>
                       </a:r>
                       <a:endParaRPr lang="en-US" sz="1200" dirty="0">
                         <a:latin typeface="Calibri" charset="0"/>
@@ -14246,7 +14814,7 @@
                           <a:ea typeface="Century Gothic" pitchFamily="34" charset="-122"/>
                           <a:cs typeface="Century Gothic" pitchFamily="34" charset="-120"/>
                         </a:rPr>
-                        <a:t>Sierra Leone</a:t>
+                        <a:t>Uganda</a:t>
                       </a:r>
                       <a:endParaRPr lang="en-US" sz="1200" dirty="0">
                         <a:latin typeface="Century Gothic" charset="0"/>
@@ -14314,7 +14882,7 @@
                           <a:ea typeface="Calibri" pitchFamily="34" charset="-122"/>
                           <a:cs typeface="Calibri" pitchFamily="34" charset="-120"/>
                         </a:rPr>
-                        <a:t>2.7%</a:t>
+                        <a:t>11.1%</a:t>
                       </a:r>
                       <a:endParaRPr lang="en-US" sz="1200" dirty="0">
                         <a:latin typeface="Calibri" charset="0"/>
@@ -14382,7 +14950,7 @@
                           <a:ea typeface="Calibri" pitchFamily="34" charset="-122"/>
                           <a:cs typeface="Calibri" pitchFamily="34" charset="-120"/>
                         </a:rPr>
-                        <a:t>2.2%</a:t>
+                        <a:t>11.6%</a:t>
                       </a:r>
                       <a:endParaRPr lang="en-US" sz="1200" dirty="0">
                         <a:latin typeface="Calibri" charset="0"/>
@@ -14444,13 +15012,13 @@
                       <a:r>
                         <a:rPr lang="en-US" sz="1200" dirty="0">
                           <a:solidFill>
-                            <a:srgbClr val="1A7A6E"/>
+                            <a:srgbClr val="C0392B"/>
                           </a:solidFill>
                           <a:latin typeface="Calibri" pitchFamily="34" charset="0"/>
                           <a:ea typeface="Calibri" pitchFamily="34" charset="-122"/>
                           <a:cs typeface="Calibri" pitchFamily="34" charset="-120"/>
                         </a:rPr>
-                        <a:t>↓</a:t>
+                        <a:t>↑</a:t>
                       </a:r>
                       <a:endParaRPr lang="en-US" sz="1200" dirty="0">
                         <a:latin typeface="Calibri" charset="0"/>
@@ -15680,7 +16248,7 @@
                           <a:ea typeface="Century Gothic" pitchFamily="34" charset="-122"/>
                           <a:cs typeface="Century Gothic" pitchFamily="34" charset="-120"/>
                         </a:rPr>
-                        <a:t>Tanzania</a:t>
+                        <a:t>Sierra Leone</a:t>
                       </a:r>
                       <a:endParaRPr lang="en-US" sz="1200" dirty="0">
                         <a:latin typeface="Century Gothic" charset="0"/>
@@ -15748,7 +16316,7 @@
                           <a:ea typeface="Calibri" pitchFamily="34" charset="-122"/>
                           <a:cs typeface="Calibri" pitchFamily="34" charset="-120"/>
                         </a:rPr>
-                        <a:t>8.2%</a:t>
+                        <a:t>2.0%</a:t>
                       </a:r>
                       <a:endParaRPr lang="en-US" sz="1200" dirty="0">
                         <a:latin typeface="Calibri" charset="0"/>
@@ -15816,7 +16384,7 @@
                           <a:ea typeface="Calibri" pitchFamily="34" charset="-122"/>
                           <a:cs typeface="Calibri" pitchFamily="34" charset="-120"/>
                         </a:rPr>
-                        <a:t>8.0%</a:t>
+                        <a:t>1.8%</a:t>
                       </a:r>
                       <a:endParaRPr lang="en-US" sz="1200" dirty="0">
                         <a:latin typeface="Calibri" charset="0"/>
@@ -15954,6 +16522,280 @@
                           <a:ea typeface="Century Gothic" pitchFamily="34" charset="-122"/>
                           <a:cs typeface="Century Gothic" pitchFamily="34" charset="-120"/>
                         </a:rPr>
+                        <a:t>Tanzania</a:t>
+                      </a:r>
+                      <a:endParaRPr lang="en-US" sz="1200" dirty="0">
+                        <a:latin typeface="Century Gothic" charset="0"/>
+                        <a:ea typeface="Century Gothic" charset="0"/>
+                        <a:cs typeface="Century Gothic" charset="0"/>
+                      </a:endParaRPr>
+                    </a:p>
+                  </a:txBody>
+                  <a:tcPr marL="91440" marR="91440" marT="45720" marB="45720" anchor="ctr">
+                    <a:lnL w="6350" cap="flat" cmpd="sng" algn="ctr">
+                      <a:solidFill>
+                        <a:srgbClr val="D6CFC4"/>
+                      </a:solidFill>
+                      <a:prstDash val="solid"/>
+                      <a:round/>
+                      <a:headEnd type="none" w="med" len="med"/>
+                      <a:tailEnd type="none" w="med" len="med"/>
+                    </a:lnL>
+                    <a:lnR w="6350" cap="flat" cmpd="sng" algn="ctr">
+                      <a:solidFill>
+                        <a:srgbClr val="D6CFC4"/>
+                      </a:solidFill>
+                      <a:prstDash val="solid"/>
+                      <a:round/>
+                      <a:headEnd type="none" w="med" len="med"/>
+                      <a:tailEnd type="none" w="med" len="med"/>
+                    </a:lnR>
+                    <a:lnT w="6350" cap="flat" cmpd="sng" algn="ctr">
+                      <a:solidFill>
+                        <a:srgbClr val="D6CFC4"/>
+                      </a:solidFill>
+                      <a:prstDash val="solid"/>
+                      <a:round/>
+                      <a:headEnd type="none" w="med" len="med"/>
+                      <a:tailEnd type="none" w="med" len="med"/>
+                    </a:lnT>
+                    <a:lnB w="6350" cap="flat" cmpd="sng" algn="ctr">
+                      <a:solidFill>
+                        <a:srgbClr val="D6CFC4"/>
+                      </a:solidFill>
+                      <a:prstDash val="solid"/>
+                      <a:round/>
+                      <a:headEnd type="none" w="med" len="med"/>
+                      <a:tailEnd type="none" w="med" len="med"/>
+                    </a:lnB>
+                    <a:solidFill>
+                      <a:srgbClr val="FFF9D9"/>
+                    </a:solidFill>
+                  </a:tcPr>
+                </a:tc>
+                <a:tc>
+                  <a:txBody>
+                    <a:bodyPr/>
+                    <a:lstStyle/>
+                    <a:p>
+                      <a:pPr algn="ctr" indent="0" marL="0">
+                        <a:buNone/>
+                      </a:pPr>
+                      <a:r>
+                        <a:rPr lang="en-US" sz="1200" dirty="0">
+                          <a:solidFill>
+                            <a:srgbClr val="2D2A26"/>
+                          </a:solidFill>
+                          <a:latin typeface="Calibri" pitchFamily="34" charset="0"/>
+                          <a:ea typeface="Calibri" pitchFamily="34" charset="-122"/>
+                          <a:cs typeface="Calibri" pitchFamily="34" charset="-120"/>
+                        </a:rPr>
+                        <a:t>8.2%</a:t>
+                      </a:r>
+                      <a:endParaRPr lang="en-US" sz="1200" dirty="0">
+                        <a:latin typeface="Calibri" charset="0"/>
+                        <a:ea typeface="Calibri" charset="0"/>
+                        <a:cs typeface="Calibri" charset="0"/>
+                      </a:endParaRPr>
+                    </a:p>
+                  </a:txBody>
+                  <a:tcPr marL="91440" marR="91440" marT="45720" marB="45720" anchor="ctr">
+                    <a:lnL w="6350" cap="flat" cmpd="sng" algn="ctr">
+                      <a:solidFill>
+                        <a:srgbClr val="D6CFC4"/>
+                      </a:solidFill>
+                      <a:prstDash val="solid"/>
+                      <a:round/>
+                      <a:headEnd type="none" w="med" len="med"/>
+                      <a:tailEnd type="none" w="med" len="med"/>
+                    </a:lnL>
+                    <a:lnR w="6350" cap="flat" cmpd="sng" algn="ctr">
+                      <a:solidFill>
+                        <a:srgbClr val="D6CFC4"/>
+                      </a:solidFill>
+                      <a:prstDash val="solid"/>
+                      <a:round/>
+                      <a:headEnd type="none" w="med" len="med"/>
+                      <a:tailEnd type="none" w="med" len="med"/>
+                    </a:lnR>
+                    <a:lnT w="6350" cap="flat" cmpd="sng" algn="ctr">
+                      <a:solidFill>
+                        <a:srgbClr val="D6CFC4"/>
+                      </a:solidFill>
+                      <a:prstDash val="solid"/>
+                      <a:round/>
+                      <a:headEnd type="none" w="med" len="med"/>
+                      <a:tailEnd type="none" w="med" len="med"/>
+                    </a:lnT>
+                    <a:lnB w="6350" cap="flat" cmpd="sng" algn="ctr">
+                      <a:solidFill>
+                        <a:srgbClr val="D6CFC4"/>
+                      </a:solidFill>
+                      <a:prstDash val="solid"/>
+                      <a:round/>
+                      <a:headEnd type="none" w="med" len="med"/>
+                      <a:tailEnd type="none" w="med" len="med"/>
+                    </a:lnB>
+                    <a:solidFill>
+                      <a:srgbClr val="FFF9D9"/>
+                    </a:solidFill>
+                  </a:tcPr>
+                </a:tc>
+                <a:tc>
+                  <a:txBody>
+                    <a:bodyPr/>
+                    <a:lstStyle/>
+                    <a:p>
+                      <a:pPr algn="ctr" indent="0" marL="0">
+                        <a:buNone/>
+                      </a:pPr>
+                      <a:r>
+                        <a:rPr lang="en-US" sz="1200" dirty="0">
+                          <a:solidFill>
+                            <a:srgbClr val="2D2A26"/>
+                          </a:solidFill>
+                          <a:latin typeface="Calibri" pitchFamily="34" charset="0"/>
+                          <a:ea typeface="Calibri" pitchFamily="34" charset="-122"/>
+                          <a:cs typeface="Calibri" pitchFamily="34" charset="-120"/>
+                        </a:rPr>
+                        <a:t>8.0%</a:t>
+                      </a:r>
+                      <a:endParaRPr lang="en-US" sz="1200" dirty="0">
+                        <a:latin typeface="Calibri" charset="0"/>
+                        <a:ea typeface="Calibri" charset="0"/>
+                        <a:cs typeface="Calibri" charset="0"/>
+                      </a:endParaRPr>
+                    </a:p>
+                  </a:txBody>
+                  <a:tcPr marL="91440" marR="91440" marT="45720" marB="45720" anchor="ctr">
+                    <a:lnL w="6350" cap="flat" cmpd="sng" algn="ctr">
+                      <a:solidFill>
+                        <a:srgbClr val="D6CFC4"/>
+                      </a:solidFill>
+                      <a:prstDash val="solid"/>
+                      <a:round/>
+                      <a:headEnd type="none" w="med" len="med"/>
+                      <a:tailEnd type="none" w="med" len="med"/>
+                    </a:lnL>
+                    <a:lnR w="6350" cap="flat" cmpd="sng" algn="ctr">
+                      <a:solidFill>
+                        <a:srgbClr val="D6CFC4"/>
+                      </a:solidFill>
+                      <a:prstDash val="solid"/>
+                      <a:round/>
+                      <a:headEnd type="none" w="med" len="med"/>
+                      <a:tailEnd type="none" w="med" len="med"/>
+                    </a:lnR>
+                    <a:lnT w="6350" cap="flat" cmpd="sng" algn="ctr">
+                      <a:solidFill>
+                        <a:srgbClr val="D6CFC4"/>
+                      </a:solidFill>
+                      <a:prstDash val="solid"/>
+                      <a:round/>
+                      <a:headEnd type="none" w="med" len="med"/>
+                      <a:tailEnd type="none" w="med" len="med"/>
+                    </a:lnT>
+                    <a:lnB w="6350" cap="flat" cmpd="sng" algn="ctr">
+                      <a:solidFill>
+                        <a:srgbClr val="D6CFC4"/>
+                      </a:solidFill>
+                      <a:prstDash val="solid"/>
+                      <a:round/>
+                      <a:headEnd type="none" w="med" len="med"/>
+                      <a:tailEnd type="none" w="med" len="med"/>
+                    </a:lnB>
+                    <a:solidFill>
+                      <a:srgbClr val="FFF9D9"/>
+                    </a:solidFill>
+                  </a:tcPr>
+                </a:tc>
+                <a:tc>
+                  <a:txBody>
+                    <a:bodyPr/>
+                    <a:lstStyle/>
+                    <a:p>
+                      <a:pPr algn="ctr" indent="0" marL="0">
+                        <a:buNone/>
+                      </a:pPr>
+                      <a:r>
+                        <a:rPr lang="en-US" sz="1200" dirty="0">
+                          <a:solidFill>
+                            <a:srgbClr val="1A7A6E"/>
+                          </a:solidFill>
+                          <a:latin typeface="Calibri" pitchFamily="34" charset="0"/>
+                          <a:ea typeface="Calibri" pitchFamily="34" charset="-122"/>
+                          <a:cs typeface="Calibri" pitchFamily="34" charset="-120"/>
+                        </a:rPr>
+                        <a:t>↓</a:t>
+                      </a:r>
+                      <a:endParaRPr lang="en-US" sz="1200" dirty="0">
+                        <a:latin typeface="Calibri" charset="0"/>
+                        <a:ea typeface="Calibri" charset="0"/>
+                        <a:cs typeface="Calibri" charset="0"/>
+                      </a:endParaRPr>
+                    </a:p>
+                  </a:txBody>
+                  <a:tcPr marL="91440" marR="91440" marT="45720" marB="45720" anchor="ctr">
+                    <a:lnL w="6350" cap="flat" cmpd="sng" algn="ctr">
+                      <a:solidFill>
+                        <a:srgbClr val="D6CFC4"/>
+                      </a:solidFill>
+                      <a:prstDash val="solid"/>
+                      <a:round/>
+                      <a:headEnd type="none" w="med" len="med"/>
+                      <a:tailEnd type="none" w="med" len="med"/>
+                    </a:lnL>
+                    <a:lnR w="6350" cap="flat" cmpd="sng" algn="ctr">
+                      <a:solidFill>
+                        <a:srgbClr val="D6CFC4"/>
+                      </a:solidFill>
+                      <a:prstDash val="solid"/>
+                      <a:round/>
+                      <a:headEnd type="none" w="med" len="med"/>
+                      <a:tailEnd type="none" w="med" len="med"/>
+                    </a:lnR>
+                    <a:lnT w="6350" cap="flat" cmpd="sng" algn="ctr">
+                      <a:solidFill>
+                        <a:srgbClr val="D6CFC4"/>
+                      </a:solidFill>
+                      <a:prstDash val="solid"/>
+                      <a:round/>
+                      <a:headEnd type="none" w="med" len="med"/>
+                      <a:tailEnd type="none" w="med" len="med"/>
+                    </a:lnT>
+                    <a:lnB w="6350" cap="flat" cmpd="sng" algn="ctr">
+                      <a:solidFill>
+                        <a:srgbClr val="D6CFC4"/>
+                      </a:solidFill>
+                      <a:prstDash val="solid"/>
+                      <a:round/>
+                      <a:headEnd type="none" w="med" len="med"/>
+                      <a:tailEnd type="none" w="med" len="med"/>
+                    </a:lnB>
+                    <a:solidFill>
+                      <a:srgbClr val="FFF9D9"/>
+                    </a:solidFill>
+                  </a:tcPr>
+                </a:tc>
+              </a:tr>
+              <a:tr h="384048">
+                <a:tc>
+                  <a:txBody>
+                    <a:bodyPr/>
+                    <a:lstStyle/>
+                    <a:p>
+                      <a:pPr algn="l" indent="0" marL="0">
+                        <a:buNone/>
+                      </a:pPr>
+                      <a:r>
+                        <a:rPr lang="en-US" sz="1200" b="1" dirty="0">
+                          <a:solidFill>
+                            <a:srgbClr val="2D2A26"/>
+                          </a:solidFill>
+                          <a:latin typeface="Century Gothic" pitchFamily="34" charset="0"/>
+                          <a:ea typeface="Century Gothic" pitchFamily="34" charset="-122"/>
+                          <a:cs typeface="Century Gothic" pitchFamily="34" charset="-120"/>
+                        </a:rPr>
                         <a:t>Kenya</a:t>
                       </a:r>
                       <a:endParaRPr lang="en-US" sz="1200" dirty="0">
@@ -16001,7 +16843,7 @@
                       <a:tailEnd type="none" w="med" len="med"/>
                     </a:lnB>
                     <a:solidFill>
-                      <a:srgbClr val="FFF9D9"/>
+                      <a:srgbClr val="FFFFFF"/>
                     </a:solidFill>
                   </a:tcPr>
                 </a:tc>
@@ -16069,7 +16911,7 @@
                       <a:tailEnd type="none" w="med" len="med"/>
                     </a:lnB>
                     <a:solidFill>
-                      <a:srgbClr val="FFF9D9"/>
+                      <a:srgbClr val="FFFFFF"/>
                     </a:solidFill>
                   </a:tcPr>
                 </a:tc>
@@ -16091,280 +16933,6 @@
                           <a:cs typeface="Calibri" pitchFamily="34" charset="-120"/>
                         </a:rPr>
                         <a:t>8.8%</a:t>
-                      </a:r>
-                      <a:endParaRPr lang="en-US" sz="1200" dirty="0">
-                        <a:latin typeface="Calibri" charset="0"/>
-                        <a:ea typeface="Calibri" charset="0"/>
-                        <a:cs typeface="Calibri" charset="0"/>
-                      </a:endParaRPr>
-                    </a:p>
-                  </a:txBody>
-                  <a:tcPr marL="91440" marR="91440" marT="45720" marB="45720" anchor="ctr">
-                    <a:lnL w="6350" cap="flat" cmpd="sng" algn="ctr">
-                      <a:solidFill>
-                        <a:srgbClr val="D6CFC4"/>
-                      </a:solidFill>
-                      <a:prstDash val="solid"/>
-                      <a:round/>
-                      <a:headEnd type="none" w="med" len="med"/>
-                      <a:tailEnd type="none" w="med" len="med"/>
-                    </a:lnL>
-                    <a:lnR w="6350" cap="flat" cmpd="sng" algn="ctr">
-                      <a:solidFill>
-                        <a:srgbClr val="D6CFC4"/>
-                      </a:solidFill>
-                      <a:prstDash val="solid"/>
-                      <a:round/>
-                      <a:headEnd type="none" w="med" len="med"/>
-                      <a:tailEnd type="none" w="med" len="med"/>
-                    </a:lnR>
-                    <a:lnT w="6350" cap="flat" cmpd="sng" algn="ctr">
-                      <a:solidFill>
-                        <a:srgbClr val="D6CFC4"/>
-                      </a:solidFill>
-                      <a:prstDash val="solid"/>
-                      <a:round/>
-                      <a:headEnd type="none" w="med" len="med"/>
-                      <a:tailEnd type="none" w="med" len="med"/>
-                    </a:lnT>
-                    <a:lnB w="6350" cap="flat" cmpd="sng" algn="ctr">
-                      <a:solidFill>
-                        <a:srgbClr val="D6CFC4"/>
-                      </a:solidFill>
-                      <a:prstDash val="solid"/>
-                      <a:round/>
-                      <a:headEnd type="none" w="med" len="med"/>
-                      <a:tailEnd type="none" w="med" len="med"/>
-                    </a:lnB>
-                    <a:solidFill>
-                      <a:srgbClr val="FFF9D9"/>
-                    </a:solidFill>
-                  </a:tcPr>
-                </a:tc>
-                <a:tc>
-                  <a:txBody>
-                    <a:bodyPr/>
-                    <a:lstStyle/>
-                    <a:p>
-                      <a:pPr algn="ctr" indent="0" marL="0">
-                        <a:buNone/>
-                      </a:pPr>
-                      <a:r>
-                        <a:rPr lang="en-US" sz="1200" dirty="0">
-                          <a:solidFill>
-                            <a:srgbClr val="C0392B"/>
-                          </a:solidFill>
-                          <a:latin typeface="Calibri" pitchFamily="34" charset="0"/>
-                          <a:ea typeface="Calibri" pitchFamily="34" charset="-122"/>
-                          <a:cs typeface="Calibri" pitchFamily="34" charset="-120"/>
-                        </a:rPr>
-                        <a:t>↑</a:t>
-                      </a:r>
-                      <a:endParaRPr lang="en-US" sz="1200" dirty="0">
-                        <a:latin typeface="Calibri" charset="0"/>
-                        <a:ea typeface="Calibri" charset="0"/>
-                        <a:cs typeface="Calibri" charset="0"/>
-                      </a:endParaRPr>
-                    </a:p>
-                  </a:txBody>
-                  <a:tcPr marL="91440" marR="91440" marT="45720" marB="45720" anchor="ctr">
-                    <a:lnL w="6350" cap="flat" cmpd="sng" algn="ctr">
-                      <a:solidFill>
-                        <a:srgbClr val="D6CFC4"/>
-                      </a:solidFill>
-                      <a:prstDash val="solid"/>
-                      <a:round/>
-                      <a:headEnd type="none" w="med" len="med"/>
-                      <a:tailEnd type="none" w="med" len="med"/>
-                    </a:lnL>
-                    <a:lnR w="6350" cap="flat" cmpd="sng" algn="ctr">
-                      <a:solidFill>
-                        <a:srgbClr val="D6CFC4"/>
-                      </a:solidFill>
-                      <a:prstDash val="solid"/>
-                      <a:round/>
-                      <a:headEnd type="none" w="med" len="med"/>
-                      <a:tailEnd type="none" w="med" len="med"/>
-                    </a:lnR>
-                    <a:lnT w="6350" cap="flat" cmpd="sng" algn="ctr">
-                      <a:solidFill>
-                        <a:srgbClr val="D6CFC4"/>
-                      </a:solidFill>
-                      <a:prstDash val="solid"/>
-                      <a:round/>
-                      <a:headEnd type="none" w="med" len="med"/>
-                      <a:tailEnd type="none" w="med" len="med"/>
-                    </a:lnT>
-                    <a:lnB w="6350" cap="flat" cmpd="sng" algn="ctr">
-                      <a:solidFill>
-                        <a:srgbClr val="D6CFC4"/>
-                      </a:solidFill>
-                      <a:prstDash val="solid"/>
-                      <a:round/>
-                      <a:headEnd type="none" w="med" len="med"/>
-                      <a:tailEnd type="none" w="med" len="med"/>
-                    </a:lnB>
-                    <a:solidFill>
-                      <a:srgbClr val="FFF9D9"/>
-                    </a:solidFill>
-                  </a:tcPr>
-                </a:tc>
-              </a:tr>
-              <a:tr h="384048">
-                <a:tc>
-                  <a:txBody>
-                    <a:bodyPr/>
-                    <a:lstStyle/>
-                    <a:p>
-                      <a:pPr algn="l" indent="0" marL="0">
-                        <a:buNone/>
-                      </a:pPr>
-                      <a:r>
-                        <a:rPr lang="en-US" sz="1200" b="1" dirty="0">
-                          <a:solidFill>
-                            <a:srgbClr val="2D2A26"/>
-                          </a:solidFill>
-                          <a:latin typeface="Century Gothic" pitchFamily="34" charset="0"/>
-                          <a:ea typeface="Century Gothic" pitchFamily="34" charset="-122"/>
-                          <a:cs typeface="Century Gothic" pitchFamily="34" charset="-120"/>
-                        </a:rPr>
-                        <a:t>Uganda</a:t>
-                      </a:r>
-                      <a:endParaRPr lang="en-US" sz="1200" dirty="0">
-                        <a:latin typeface="Century Gothic" charset="0"/>
-                        <a:ea typeface="Century Gothic" charset="0"/>
-                        <a:cs typeface="Century Gothic" charset="0"/>
-                      </a:endParaRPr>
-                    </a:p>
-                  </a:txBody>
-                  <a:tcPr marL="91440" marR="91440" marT="45720" marB="45720" anchor="ctr">
-                    <a:lnL w="6350" cap="flat" cmpd="sng" algn="ctr">
-                      <a:solidFill>
-                        <a:srgbClr val="D6CFC4"/>
-                      </a:solidFill>
-                      <a:prstDash val="solid"/>
-                      <a:round/>
-                      <a:headEnd type="none" w="med" len="med"/>
-                      <a:tailEnd type="none" w="med" len="med"/>
-                    </a:lnL>
-                    <a:lnR w="6350" cap="flat" cmpd="sng" algn="ctr">
-                      <a:solidFill>
-                        <a:srgbClr val="D6CFC4"/>
-                      </a:solidFill>
-                      <a:prstDash val="solid"/>
-                      <a:round/>
-                      <a:headEnd type="none" w="med" len="med"/>
-                      <a:tailEnd type="none" w="med" len="med"/>
-                    </a:lnR>
-                    <a:lnT w="6350" cap="flat" cmpd="sng" algn="ctr">
-                      <a:solidFill>
-                        <a:srgbClr val="D6CFC4"/>
-                      </a:solidFill>
-                      <a:prstDash val="solid"/>
-                      <a:round/>
-                      <a:headEnd type="none" w="med" len="med"/>
-                      <a:tailEnd type="none" w="med" len="med"/>
-                    </a:lnT>
-                    <a:lnB w="6350" cap="flat" cmpd="sng" algn="ctr">
-                      <a:solidFill>
-                        <a:srgbClr val="D6CFC4"/>
-                      </a:solidFill>
-                      <a:prstDash val="solid"/>
-                      <a:round/>
-                      <a:headEnd type="none" w="med" len="med"/>
-                      <a:tailEnd type="none" w="med" len="med"/>
-                    </a:lnB>
-                    <a:solidFill>
-                      <a:srgbClr val="FFFFFF"/>
-                    </a:solidFill>
-                  </a:tcPr>
-                </a:tc>
-                <a:tc>
-                  <a:txBody>
-                    <a:bodyPr/>
-                    <a:lstStyle/>
-                    <a:p>
-                      <a:pPr algn="ctr" indent="0" marL="0">
-                        <a:buNone/>
-                      </a:pPr>
-                      <a:r>
-                        <a:rPr lang="en-US" sz="1200" dirty="0">
-                          <a:solidFill>
-                            <a:srgbClr val="2D2A26"/>
-                          </a:solidFill>
-                          <a:latin typeface="Calibri" pitchFamily="34" charset="0"/>
-                          <a:ea typeface="Calibri" pitchFamily="34" charset="-122"/>
-                          <a:cs typeface="Calibri" pitchFamily="34" charset="-120"/>
-                        </a:rPr>
-                        <a:t>17.4%</a:t>
-                      </a:r>
-                      <a:endParaRPr lang="en-US" sz="1200" dirty="0">
-                        <a:latin typeface="Calibri" charset="0"/>
-                        <a:ea typeface="Calibri" charset="0"/>
-                        <a:cs typeface="Calibri" charset="0"/>
-                      </a:endParaRPr>
-                    </a:p>
-                  </a:txBody>
-                  <a:tcPr marL="91440" marR="91440" marT="45720" marB="45720" anchor="ctr">
-                    <a:lnL w="6350" cap="flat" cmpd="sng" algn="ctr">
-                      <a:solidFill>
-                        <a:srgbClr val="D6CFC4"/>
-                      </a:solidFill>
-                      <a:prstDash val="solid"/>
-                      <a:round/>
-                      <a:headEnd type="none" w="med" len="med"/>
-                      <a:tailEnd type="none" w="med" len="med"/>
-                    </a:lnL>
-                    <a:lnR w="6350" cap="flat" cmpd="sng" algn="ctr">
-                      <a:solidFill>
-                        <a:srgbClr val="D6CFC4"/>
-                      </a:solidFill>
-                      <a:prstDash val="solid"/>
-                      <a:round/>
-                      <a:headEnd type="none" w="med" len="med"/>
-                      <a:tailEnd type="none" w="med" len="med"/>
-                    </a:lnR>
-                    <a:lnT w="6350" cap="flat" cmpd="sng" algn="ctr">
-                      <a:solidFill>
-                        <a:srgbClr val="D6CFC4"/>
-                      </a:solidFill>
-                      <a:prstDash val="solid"/>
-                      <a:round/>
-                      <a:headEnd type="none" w="med" len="med"/>
-                      <a:tailEnd type="none" w="med" len="med"/>
-                    </a:lnT>
-                    <a:lnB w="6350" cap="flat" cmpd="sng" algn="ctr">
-                      <a:solidFill>
-                        <a:srgbClr val="D6CFC4"/>
-                      </a:solidFill>
-                      <a:prstDash val="solid"/>
-                      <a:round/>
-                      <a:headEnd type="none" w="med" len="med"/>
-                      <a:tailEnd type="none" w="med" len="med"/>
-                    </a:lnB>
-                    <a:solidFill>
-                      <a:srgbClr val="FFFFFF"/>
-                    </a:solidFill>
-                  </a:tcPr>
-                </a:tc>
-                <a:tc>
-                  <a:txBody>
-                    <a:bodyPr/>
-                    <a:lstStyle/>
-                    <a:p>
-                      <a:pPr algn="ctr" indent="0" marL="0">
-                        <a:buNone/>
-                      </a:pPr>
-                      <a:r>
-                        <a:rPr lang="en-US" sz="1200" dirty="0">
-                          <a:solidFill>
-                            <a:srgbClr val="2D2A26"/>
-                          </a:solidFill>
-                          <a:latin typeface="Calibri" pitchFamily="34" charset="0"/>
-                          <a:ea typeface="Calibri" pitchFamily="34" charset="-122"/>
-                          <a:cs typeface="Calibri" pitchFamily="34" charset="-120"/>
-                        </a:rPr>
-                        <a:t>18.8%</a:t>
                       </a:r>
                       <a:endParaRPr lang="en-US" sz="1200" dirty="0">
                         <a:latin typeface="Calibri" charset="0"/>
@@ -16502,7 +17070,7 @@
                           <a:ea typeface="Century Gothic" pitchFamily="34" charset="-122"/>
                           <a:cs typeface="Century Gothic" pitchFamily="34" charset="-120"/>
                         </a:rPr>
-                        <a:t>Sierra Leone</a:t>
+                        <a:t>Uganda</a:t>
                       </a:r>
                       <a:endParaRPr lang="en-US" sz="1200" dirty="0">
                         <a:latin typeface="Century Gothic" charset="0"/>
@@ -16570,7 +17138,7 @@
                           <a:ea typeface="Calibri" pitchFamily="34" charset="-122"/>
                           <a:cs typeface="Calibri" pitchFamily="34" charset="-120"/>
                         </a:rPr>
-                        <a:t>2.0%</a:t>
+                        <a:t>17.4%</a:t>
                       </a:r>
                       <a:endParaRPr lang="en-US" sz="1200" dirty="0">
                         <a:latin typeface="Calibri" charset="0"/>
@@ -16638,7 +17206,7 @@
                           <a:ea typeface="Calibri" pitchFamily="34" charset="-122"/>
                           <a:cs typeface="Calibri" pitchFamily="34" charset="-120"/>
                         </a:rPr>
-                        <a:t>1.8%</a:t>
+                        <a:t>18.8%</a:t>
                       </a:r>
                       <a:endParaRPr lang="en-US" sz="1200" dirty="0">
                         <a:latin typeface="Calibri" charset="0"/>
@@ -16700,13 +17268,13 @@
                       <a:r>
                         <a:rPr lang="en-US" sz="1200" dirty="0">
                           <a:solidFill>
-                            <a:srgbClr val="1A7A6E"/>
+                            <a:srgbClr val="C0392B"/>
                           </a:solidFill>
                           <a:latin typeface="Calibri" pitchFamily="34" charset="0"/>
                           <a:ea typeface="Calibri" pitchFamily="34" charset="-122"/>
                           <a:cs typeface="Calibri" pitchFamily="34" charset="-120"/>
                         </a:rPr>
-                        <a:t>↓</a:t>
+                        <a:t>↑</a:t>
                       </a:r>
                       <a:endParaRPr lang="en-US" sz="1200" dirty="0">
                         <a:latin typeface="Calibri" charset="0"/>
@@ -19099,6 +19667,484 @@
                           <a:ea typeface="Century Gothic" pitchFamily="34" charset="-122"/>
                           <a:cs typeface="Century Gothic" pitchFamily="34" charset="-120"/>
                         </a:rPr>
+                        <a:t>Sierra Leone</a:t>
+                      </a:r>
+                      <a:endParaRPr lang="en-US" sz="1200" dirty="0">
+                        <a:latin typeface="Century Gothic" charset="0"/>
+                        <a:ea typeface="Century Gothic" charset="0"/>
+                        <a:cs typeface="Century Gothic" charset="0"/>
+                      </a:endParaRPr>
+                    </a:p>
+                  </a:txBody>
+                  <a:tcPr marL="91440" marR="91440" marT="45720" marB="45720" anchor="ctr">
+                    <a:lnL w="6350" cap="flat" cmpd="sng" algn="ctr">
+                      <a:solidFill>
+                        <a:srgbClr val="D6CFC4"/>
+                      </a:solidFill>
+                      <a:prstDash val="solid"/>
+                      <a:round/>
+                      <a:headEnd type="none" w="med" len="med"/>
+                      <a:tailEnd type="none" w="med" len="med"/>
+                    </a:lnL>
+                    <a:lnR w="6350" cap="flat" cmpd="sng" algn="ctr">
+                      <a:solidFill>
+                        <a:srgbClr val="D6CFC4"/>
+                      </a:solidFill>
+                      <a:prstDash val="solid"/>
+                      <a:round/>
+                      <a:headEnd type="none" w="med" len="med"/>
+                      <a:tailEnd type="none" w="med" len="med"/>
+                    </a:lnR>
+                    <a:lnT w="6350" cap="flat" cmpd="sng" algn="ctr">
+                      <a:solidFill>
+                        <a:srgbClr val="D6CFC4"/>
+                      </a:solidFill>
+                      <a:prstDash val="solid"/>
+                      <a:round/>
+                      <a:headEnd type="none" w="med" len="med"/>
+                      <a:tailEnd type="none" w="med" len="med"/>
+                    </a:lnT>
+                    <a:lnB w="6350" cap="flat" cmpd="sng" algn="ctr">
+                      <a:solidFill>
+                        <a:srgbClr val="D6CFC4"/>
+                      </a:solidFill>
+                      <a:prstDash val="solid"/>
+                      <a:round/>
+                      <a:headEnd type="none" w="med" len="med"/>
+                      <a:tailEnd type="none" w="med" len="med"/>
+                    </a:lnB>
+                    <a:solidFill>
+                      <a:srgbClr val="FFFFFF"/>
+                    </a:solidFill>
+                  </a:tcPr>
+                </a:tc>
+                <a:tc>
+                  <a:txBody>
+                    <a:bodyPr/>
+                    <a:lstStyle/>
+                    <a:p>
+                      <a:pPr algn="ctr" indent="0" marL="0">
+                        <a:buNone/>
+                      </a:pPr>
+                      <a:r>
+                        <a:rPr lang="en-US" sz="1200" dirty="0">
+                          <a:solidFill>
+                            <a:srgbClr val="2D2A26"/>
+                          </a:solidFill>
+                          <a:latin typeface="Calibri" pitchFamily="34" charset="0"/>
+                          <a:ea typeface="Calibri" pitchFamily="34" charset="-122"/>
+                          <a:cs typeface="Calibri" pitchFamily="34" charset="-120"/>
+                        </a:rPr>
+                        <a:t>$190,965</a:t>
+                      </a:r>
+                      <a:endParaRPr lang="en-US" sz="1200" dirty="0">
+                        <a:latin typeface="Calibri" charset="0"/>
+                        <a:ea typeface="Calibri" charset="0"/>
+                        <a:cs typeface="Calibri" charset="0"/>
+                      </a:endParaRPr>
+                    </a:p>
+                  </a:txBody>
+                  <a:tcPr marL="91440" marR="91440" marT="45720" marB="45720" anchor="ctr">
+                    <a:lnL w="6350" cap="flat" cmpd="sng" algn="ctr">
+                      <a:solidFill>
+                        <a:srgbClr val="D6CFC4"/>
+                      </a:solidFill>
+                      <a:prstDash val="solid"/>
+                      <a:round/>
+                      <a:headEnd type="none" w="med" len="med"/>
+                      <a:tailEnd type="none" w="med" len="med"/>
+                    </a:lnL>
+                    <a:lnR w="6350" cap="flat" cmpd="sng" algn="ctr">
+                      <a:solidFill>
+                        <a:srgbClr val="D6CFC4"/>
+                      </a:solidFill>
+                      <a:prstDash val="solid"/>
+                      <a:round/>
+                      <a:headEnd type="none" w="med" len="med"/>
+                      <a:tailEnd type="none" w="med" len="med"/>
+                    </a:lnR>
+                    <a:lnT w="6350" cap="flat" cmpd="sng" algn="ctr">
+                      <a:solidFill>
+                        <a:srgbClr val="D6CFC4"/>
+                      </a:solidFill>
+                      <a:prstDash val="solid"/>
+                      <a:round/>
+                      <a:headEnd type="none" w="med" len="med"/>
+                      <a:tailEnd type="none" w="med" len="med"/>
+                    </a:lnT>
+                    <a:lnB w="6350" cap="flat" cmpd="sng" algn="ctr">
+                      <a:solidFill>
+                        <a:srgbClr val="D6CFC4"/>
+                      </a:solidFill>
+                      <a:prstDash val="solid"/>
+                      <a:round/>
+                      <a:headEnd type="none" w="med" len="med"/>
+                      <a:tailEnd type="none" w="med" len="med"/>
+                    </a:lnB>
+                    <a:solidFill>
+                      <a:srgbClr val="FFFFFF"/>
+                    </a:solidFill>
+                  </a:tcPr>
+                </a:tc>
+                <a:tc>
+                  <a:txBody>
+                    <a:bodyPr/>
+                    <a:lstStyle/>
+                    <a:p>
+                      <a:pPr algn="ctr" indent="0" marL="0">
+                        <a:buNone/>
+                      </a:pPr>
+                      <a:r>
+                        <a:rPr lang="en-US" sz="1200" dirty="0">
+                          <a:solidFill>
+                            <a:srgbClr val="2D2A26"/>
+                          </a:solidFill>
+                          <a:latin typeface="Calibri" pitchFamily="34" charset="0"/>
+                          <a:ea typeface="Calibri" pitchFamily="34" charset="-122"/>
+                          <a:cs typeface="Calibri" pitchFamily="34" charset="-120"/>
+                        </a:rPr>
+                        <a:t>$-5,647</a:t>
+                      </a:r>
+                      <a:endParaRPr lang="en-US" sz="1200" dirty="0">
+                        <a:latin typeface="Calibri" charset="0"/>
+                        <a:ea typeface="Calibri" charset="0"/>
+                        <a:cs typeface="Calibri" charset="0"/>
+                      </a:endParaRPr>
+                    </a:p>
+                  </a:txBody>
+                  <a:tcPr marL="91440" marR="91440" marT="45720" marB="45720" anchor="ctr">
+                    <a:lnL w="6350" cap="flat" cmpd="sng" algn="ctr">
+                      <a:solidFill>
+                        <a:srgbClr val="D6CFC4"/>
+                      </a:solidFill>
+                      <a:prstDash val="solid"/>
+                      <a:round/>
+                      <a:headEnd type="none" w="med" len="med"/>
+                      <a:tailEnd type="none" w="med" len="med"/>
+                    </a:lnL>
+                    <a:lnR w="6350" cap="flat" cmpd="sng" algn="ctr">
+                      <a:solidFill>
+                        <a:srgbClr val="D6CFC4"/>
+                      </a:solidFill>
+                      <a:prstDash val="solid"/>
+                      <a:round/>
+                      <a:headEnd type="none" w="med" len="med"/>
+                      <a:tailEnd type="none" w="med" len="med"/>
+                    </a:lnR>
+                    <a:lnT w="6350" cap="flat" cmpd="sng" algn="ctr">
+                      <a:solidFill>
+                        <a:srgbClr val="D6CFC4"/>
+                      </a:solidFill>
+                      <a:prstDash val="solid"/>
+                      <a:round/>
+                      <a:headEnd type="none" w="med" len="med"/>
+                      <a:tailEnd type="none" w="med" len="med"/>
+                    </a:lnT>
+                    <a:lnB w="6350" cap="flat" cmpd="sng" algn="ctr">
+                      <a:solidFill>
+                        <a:srgbClr val="D6CFC4"/>
+                      </a:solidFill>
+                      <a:prstDash val="solid"/>
+                      <a:round/>
+                      <a:headEnd type="none" w="med" len="med"/>
+                      <a:tailEnd type="none" w="med" len="med"/>
+                    </a:lnB>
+                    <a:solidFill>
+                      <a:srgbClr val="FFFFFF"/>
+                    </a:solidFill>
+                  </a:tcPr>
+                </a:tc>
+                <a:tc>
+                  <a:txBody>
+                    <a:bodyPr/>
+                    <a:lstStyle/>
+                    <a:p>
+                      <a:pPr algn="ctr" indent="0" marL="0">
+                        <a:buNone/>
+                      </a:pPr>
+                      <a:r>
+                        <a:rPr lang="en-US" sz="1200" dirty="0">
+                          <a:solidFill>
+                            <a:srgbClr val="2D2A26"/>
+                          </a:solidFill>
+                          <a:latin typeface="Calibri" pitchFamily="34" charset="0"/>
+                          <a:ea typeface="Calibri" pitchFamily="34" charset="-122"/>
+                          <a:cs typeface="Calibri" pitchFamily="34" charset="-120"/>
+                        </a:rPr>
+                        <a:t>$-119,291</a:t>
+                      </a:r>
+                      <a:endParaRPr lang="en-US" sz="1200" dirty="0">
+                        <a:latin typeface="Calibri" charset="0"/>
+                        <a:ea typeface="Calibri" charset="0"/>
+                        <a:cs typeface="Calibri" charset="0"/>
+                      </a:endParaRPr>
+                    </a:p>
+                  </a:txBody>
+                  <a:tcPr marL="91440" marR="91440" marT="45720" marB="45720" anchor="ctr">
+                    <a:lnL w="6350" cap="flat" cmpd="sng" algn="ctr">
+                      <a:solidFill>
+                        <a:srgbClr val="D6CFC4"/>
+                      </a:solidFill>
+                      <a:prstDash val="solid"/>
+                      <a:round/>
+                      <a:headEnd type="none" w="med" len="med"/>
+                      <a:tailEnd type="none" w="med" len="med"/>
+                    </a:lnL>
+                    <a:lnR w="6350" cap="flat" cmpd="sng" algn="ctr">
+                      <a:solidFill>
+                        <a:srgbClr val="D6CFC4"/>
+                      </a:solidFill>
+                      <a:prstDash val="solid"/>
+                      <a:round/>
+                      <a:headEnd type="none" w="med" len="med"/>
+                      <a:tailEnd type="none" w="med" len="med"/>
+                    </a:lnR>
+                    <a:lnT w="6350" cap="flat" cmpd="sng" algn="ctr">
+                      <a:solidFill>
+                        <a:srgbClr val="D6CFC4"/>
+                      </a:solidFill>
+                      <a:prstDash val="solid"/>
+                      <a:round/>
+                      <a:headEnd type="none" w="med" len="med"/>
+                      <a:tailEnd type="none" w="med" len="med"/>
+                    </a:lnT>
+                    <a:lnB w="6350" cap="flat" cmpd="sng" algn="ctr">
+                      <a:solidFill>
+                        <a:srgbClr val="D6CFC4"/>
+                      </a:solidFill>
+                      <a:prstDash val="solid"/>
+                      <a:round/>
+                      <a:headEnd type="none" w="med" len="med"/>
+                      <a:tailEnd type="none" w="med" len="med"/>
+                    </a:lnB>
+                    <a:solidFill>
+                      <a:srgbClr val="FFFFFF"/>
+                    </a:solidFill>
+                  </a:tcPr>
+                </a:tc>
+                <a:tc>
+                  <a:txBody>
+                    <a:bodyPr/>
+                    <a:lstStyle/>
+                    <a:p>
+                      <a:pPr algn="ctr" indent="0" marL="0">
+                        <a:buNone/>
+                      </a:pPr>
+                      <a:r>
+                        <a:rPr lang="en-US" sz="1200" dirty="0">
+                          <a:solidFill>
+                            <a:srgbClr val="2D2A26"/>
+                          </a:solidFill>
+                          <a:latin typeface="Calibri" pitchFamily="34" charset="0"/>
+                          <a:ea typeface="Calibri" pitchFamily="34" charset="-122"/>
+                          <a:cs typeface="Calibri" pitchFamily="34" charset="-120"/>
+                        </a:rPr>
+                        <a:t>$66,026</a:t>
+                      </a:r>
+                      <a:endParaRPr lang="en-US" sz="1200" dirty="0">
+                        <a:latin typeface="Calibri" charset="0"/>
+                        <a:ea typeface="Calibri" charset="0"/>
+                        <a:cs typeface="Calibri" charset="0"/>
+                      </a:endParaRPr>
+                    </a:p>
+                  </a:txBody>
+                  <a:tcPr marL="91440" marR="91440" marT="45720" marB="45720" anchor="ctr">
+                    <a:lnL w="6350" cap="flat" cmpd="sng" algn="ctr">
+                      <a:solidFill>
+                        <a:srgbClr val="D6CFC4"/>
+                      </a:solidFill>
+                      <a:prstDash val="solid"/>
+                      <a:round/>
+                      <a:headEnd type="none" w="med" len="med"/>
+                      <a:tailEnd type="none" w="med" len="med"/>
+                    </a:lnL>
+                    <a:lnR w="6350" cap="flat" cmpd="sng" algn="ctr">
+                      <a:solidFill>
+                        <a:srgbClr val="D6CFC4"/>
+                      </a:solidFill>
+                      <a:prstDash val="solid"/>
+                      <a:round/>
+                      <a:headEnd type="none" w="med" len="med"/>
+                      <a:tailEnd type="none" w="med" len="med"/>
+                    </a:lnR>
+                    <a:lnT w="6350" cap="flat" cmpd="sng" algn="ctr">
+                      <a:solidFill>
+                        <a:srgbClr val="D6CFC4"/>
+                      </a:solidFill>
+                      <a:prstDash val="solid"/>
+                      <a:round/>
+                      <a:headEnd type="none" w="med" len="med"/>
+                      <a:tailEnd type="none" w="med" len="med"/>
+                    </a:lnT>
+                    <a:lnB w="6350" cap="flat" cmpd="sng" algn="ctr">
+                      <a:solidFill>
+                        <a:srgbClr val="D6CFC4"/>
+                      </a:solidFill>
+                      <a:prstDash val="solid"/>
+                      <a:round/>
+                      <a:headEnd type="none" w="med" len="med"/>
+                      <a:tailEnd type="none" w="med" len="med"/>
+                    </a:lnB>
+                    <a:solidFill>
+                      <a:srgbClr val="FFFFFF"/>
+                    </a:solidFill>
+                  </a:tcPr>
+                </a:tc>
+                <a:tc>
+                  <a:txBody>
+                    <a:bodyPr/>
+                    <a:lstStyle/>
+                    <a:p>
+                      <a:pPr algn="ctr" indent="0" marL="0">
+                        <a:buNone/>
+                      </a:pPr>
+                      <a:r>
+                        <a:rPr lang="en-US" sz="1200" dirty="0">
+                          <a:solidFill>
+                            <a:srgbClr val="2D2A26"/>
+                          </a:solidFill>
+                          <a:latin typeface="Calibri" pitchFamily="34" charset="0"/>
+                          <a:ea typeface="Calibri" pitchFamily="34" charset="-122"/>
+                          <a:cs typeface="Calibri" pitchFamily="34" charset="-120"/>
+                        </a:rPr>
+                        <a:t>34.6%</a:t>
+                      </a:r>
+                      <a:endParaRPr lang="en-US" sz="1200" dirty="0">
+                        <a:latin typeface="Calibri" charset="0"/>
+                        <a:ea typeface="Calibri" charset="0"/>
+                        <a:cs typeface="Calibri" charset="0"/>
+                      </a:endParaRPr>
+                    </a:p>
+                  </a:txBody>
+                  <a:tcPr marL="91440" marR="91440" marT="45720" marB="45720" anchor="ctr">
+                    <a:lnL w="6350" cap="flat" cmpd="sng" algn="ctr">
+                      <a:solidFill>
+                        <a:srgbClr val="D6CFC4"/>
+                      </a:solidFill>
+                      <a:prstDash val="solid"/>
+                      <a:round/>
+                      <a:headEnd type="none" w="med" len="med"/>
+                      <a:tailEnd type="none" w="med" len="med"/>
+                    </a:lnL>
+                    <a:lnR w="6350" cap="flat" cmpd="sng" algn="ctr">
+                      <a:solidFill>
+                        <a:srgbClr val="D6CFC4"/>
+                      </a:solidFill>
+                      <a:prstDash val="solid"/>
+                      <a:round/>
+                      <a:headEnd type="none" w="med" len="med"/>
+                      <a:tailEnd type="none" w="med" len="med"/>
+                    </a:lnR>
+                    <a:lnT w="6350" cap="flat" cmpd="sng" algn="ctr">
+                      <a:solidFill>
+                        <a:srgbClr val="D6CFC4"/>
+                      </a:solidFill>
+                      <a:prstDash val="solid"/>
+                      <a:round/>
+                      <a:headEnd type="none" w="med" len="med"/>
+                      <a:tailEnd type="none" w="med" len="med"/>
+                    </a:lnT>
+                    <a:lnB w="6350" cap="flat" cmpd="sng" algn="ctr">
+                      <a:solidFill>
+                        <a:srgbClr val="D6CFC4"/>
+                      </a:solidFill>
+                      <a:prstDash val="solid"/>
+                      <a:round/>
+                      <a:headEnd type="none" w="med" len="med"/>
+                      <a:tailEnd type="none" w="med" len="med"/>
+                    </a:lnB>
+                    <a:solidFill>
+                      <a:srgbClr val="FFFFFF"/>
+                    </a:solidFill>
+                  </a:tcPr>
+                </a:tc>
+                <a:tc>
+                  <a:txBody>
+                    <a:bodyPr/>
+                    <a:lstStyle/>
+                    <a:p>
+                      <a:pPr algn="ctr" indent="0" marL="0">
+                        <a:buNone/>
+                      </a:pPr>
+                      <a:r>
+                        <a:rPr lang="en-US" sz="1200" dirty="0">
+                          <a:solidFill>
+                            <a:srgbClr val="2D2A26"/>
+                          </a:solidFill>
+                          <a:latin typeface="Calibri" pitchFamily="34" charset="0"/>
+                          <a:ea typeface="Calibri" pitchFamily="34" charset="-122"/>
+                          <a:cs typeface="Calibri" pitchFamily="34" charset="-120"/>
+                        </a:rPr>
+                        <a:t>$55,275</a:t>
+                      </a:r>
+                      <a:endParaRPr lang="en-US" sz="1200" dirty="0">
+                        <a:latin typeface="Calibri" charset="0"/>
+                        <a:ea typeface="Calibri" charset="0"/>
+                        <a:cs typeface="Calibri" charset="0"/>
+                      </a:endParaRPr>
+                    </a:p>
+                  </a:txBody>
+                  <a:tcPr marL="91440" marR="91440" marT="45720" marB="45720" anchor="ctr">
+                    <a:lnL w="6350" cap="flat" cmpd="sng" algn="ctr">
+                      <a:solidFill>
+                        <a:srgbClr val="D6CFC4"/>
+                      </a:solidFill>
+                      <a:prstDash val="solid"/>
+                      <a:round/>
+                      <a:headEnd type="none" w="med" len="med"/>
+                      <a:tailEnd type="none" w="med" len="med"/>
+                    </a:lnL>
+                    <a:lnR w="6350" cap="flat" cmpd="sng" algn="ctr">
+                      <a:solidFill>
+                        <a:srgbClr val="D6CFC4"/>
+                      </a:solidFill>
+                      <a:prstDash val="solid"/>
+                      <a:round/>
+                      <a:headEnd type="none" w="med" len="med"/>
+                      <a:tailEnd type="none" w="med" len="med"/>
+                    </a:lnR>
+                    <a:lnT w="6350" cap="flat" cmpd="sng" algn="ctr">
+                      <a:solidFill>
+                        <a:srgbClr val="D6CFC4"/>
+                      </a:solidFill>
+                      <a:prstDash val="solid"/>
+                      <a:round/>
+                      <a:headEnd type="none" w="med" len="med"/>
+                      <a:tailEnd type="none" w="med" len="med"/>
+                    </a:lnT>
+                    <a:lnB w="6350" cap="flat" cmpd="sng" algn="ctr">
+                      <a:solidFill>
+                        <a:srgbClr val="D6CFC4"/>
+                      </a:solidFill>
+                      <a:prstDash val="solid"/>
+                      <a:round/>
+                      <a:headEnd type="none" w="med" len="med"/>
+                      <a:tailEnd type="none" w="med" len="med"/>
+                    </a:lnB>
+                    <a:solidFill>
+                      <a:srgbClr val="FFFFFF"/>
+                    </a:solidFill>
+                  </a:tcPr>
+                </a:tc>
+              </a:tr>
+              <a:tr h="457200">
+                <a:tc>
+                  <a:txBody>
+                    <a:bodyPr/>
+                    <a:lstStyle/>
+                    <a:p>
+                      <a:pPr algn="l" indent="0" marL="0">
+                        <a:buNone/>
+                      </a:pPr>
+                      <a:r>
+                        <a:rPr lang="en-US" sz="1200" b="1" dirty="0">
+                          <a:solidFill>
+                            <a:srgbClr val="2D2A26"/>
+                          </a:solidFill>
+                          <a:latin typeface="Century Gothic" pitchFamily="34" charset="0"/>
+                          <a:ea typeface="Century Gothic" pitchFamily="34" charset="-122"/>
+                          <a:cs typeface="Century Gothic" pitchFamily="34" charset="-120"/>
+                        </a:rPr>
                         <a:t>Uganda</a:t>
                       </a:r>
                       <a:endParaRPr lang="en-US" sz="1200" dirty="0">
@@ -19146,7 +20192,7 @@
                       <a:tailEnd type="none" w="med" len="med"/>
                     </a:lnB>
                     <a:solidFill>
-                      <a:srgbClr val="FFFFFF"/>
+                      <a:srgbClr val="FAF7F2"/>
                     </a:solidFill>
                   </a:tcPr>
                 </a:tc>
@@ -19214,7 +20260,7 @@
                       <a:tailEnd type="none" w="med" len="med"/>
                     </a:lnB>
                     <a:solidFill>
-                      <a:srgbClr val="FFFFFF"/>
+                      <a:srgbClr val="FAF7F2"/>
                     </a:solidFill>
                   </a:tcPr>
                 </a:tc>
@@ -19282,7 +20328,7 @@
                       <a:tailEnd type="none" w="med" len="med"/>
                     </a:lnB>
                     <a:solidFill>
-                      <a:srgbClr val="FFFFFF"/>
+                      <a:srgbClr val="FAF7F2"/>
                     </a:solidFill>
                   </a:tcPr>
                 </a:tc>
@@ -19350,7 +20396,7 @@
                       <a:tailEnd type="none" w="med" len="med"/>
                     </a:lnB>
                     <a:solidFill>
-                      <a:srgbClr val="FFFFFF"/>
+                      <a:srgbClr val="FAF7F2"/>
                     </a:solidFill>
                   </a:tcPr>
                 </a:tc>
@@ -19418,7 +20464,7 @@
                       <a:tailEnd type="none" w="med" len="med"/>
                     </a:lnB>
                     <a:solidFill>
-                      <a:srgbClr val="FFFFFF"/>
+                      <a:srgbClr val="FAF7F2"/>
                     </a:solidFill>
                   </a:tcPr>
                 </a:tc>
@@ -19486,7 +20532,7 @@
                       <a:tailEnd type="none" w="med" len="med"/>
                     </a:lnB>
                     <a:solidFill>
-                      <a:srgbClr val="FFFFFF"/>
+                      <a:srgbClr val="FAF7F2"/>
                     </a:solidFill>
                   </a:tcPr>
                 </a:tc>
@@ -19508,484 +20554,6 @@
                           <a:cs typeface="Calibri" pitchFamily="34" charset="-120"/>
                         </a:rPr>
                         <a:t>$-62,350</a:t>
-                      </a:r>
-                      <a:endParaRPr lang="en-US" sz="1200" dirty="0">
-                        <a:latin typeface="Calibri" charset="0"/>
-                        <a:ea typeface="Calibri" charset="0"/>
-                        <a:cs typeface="Calibri" charset="0"/>
-                      </a:endParaRPr>
-                    </a:p>
-                  </a:txBody>
-                  <a:tcPr marL="91440" marR="91440" marT="45720" marB="45720" anchor="ctr">
-                    <a:lnL w="6350" cap="flat" cmpd="sng" algn="ctr">
-                      <a:solidFill>
-                        <a:srgbClr val="D6CFC4"/>
-                      </a:solidFill>
-                      <a:prstDash val="solid"/>
-                      <a:round/>
-                      <a:headEnd type="none" w="med" len="med"/>
-                      <a:tailEnd type="none" w="med" len="med"/>
-                    </a:lnL>
-                    <a:lnR w="6350" cap="flat" cmpd="sng" algn="ctr">
-                      <a:solidFill>
-                        <a:srgbClr val="D6CFC4"/>
-                      </a:solidFill>
-                      <a:prstDash val="solid"/>
-                      <a:round/>
-                      <a:headEnd type="none" w="med" len="med"/>
-                      <a:tailEnd type="none" w="med" len="med"/>
-                    </a:lnR>
-                    <a:lnT w="6350" cap="flat" cmpd="sng" algn="ctr">
-                      <a:solidFill>
-                        <a:srgbClr val="D6CFC4"/>
-                      </a:solidFill>
-                      <a:prstDash val="solid"/>
-                      <a:round/>
-                      <a:headEnd type="none" w="med" len="med"/>
-                      <a:tailEnd type="none" w="med" len="med"/>
-                    </a:lnT>
-                    <a:lnB w="6350" cap="flat" cmpd="sng" algn="ctr">
-                      <a:solidFill>
-                        <a:srgbClr val="D6CFC4"/>
-                      </a:solidFill>
-                      <a:prstDash val="solid"/>
-                      <a:round/>
-                      <a:headEnd type="none" w="med" len="med"/>
-                      <a:tailEnd type="none" w="med" len="med"/>
-                    </a:lnB>
-                    <a:solidFill>
-                      <a:srgbClr val="FFFFFF"/>
-                    </a:solidFill>
-                  </a:tcPr>
-                </a:tc>
-              </a:tr>
-              <a:tr h="457200">
-                <a:tc>
-                  <a:txBody>
-                    <a:bodyPr/>
-                    <a:lstStyle/>
-                    <a:p>
-                      <a:pPr algn="l" indent="0" marL="0">
-                        <a:buNone/>
-                      </a:pPr>
-                      <a:r>
-                        <a:rPr lang="en-US" sz="1200" b="1" dirty="0">
-                          <a:solidFill>
-                            <a:srgbClr val="2D2A26"/>
-                          </a:solidFill>
-                          <a:latin typeface="Century Gothic" pitchFamily="34" charset="0"/>
-                          <a:ea typeface="Century Gothic" pitchFamily="34" charset="-122"/>
-                          <a:cs typeface="Century Gothic" pitchFamily="34" charset="-120"/>
-                        </a:rPr>
-                        <a:t>Sierra Leone</a:t>
-                      </a:r>
-                      <a:endParaRPr lang="en-US" sz="1200" dirty="0">
-                        <a:latin typeface="Century Gothic" charset="0"/>
-                        <a:ea typeface="Century Gothic" charset="0"/>
-                        <a:cs typeface="Century Gothic" charset="0"/>
-                      </a:endParaRPr>
-                    </a:p>
-                  </a:txBody>
-                  <a:tcPr marL="91440" marR="91440" marT="45720" marB="45720" anchor="ctr">
-                    <a:lnL w="6350" cap="flat" cmpd="sng" algn="ctr">
-                      <a:solidFill>
-                        <a:srgbClr val="D6CFC4"/>
-                      </a:solidFill>
-                      <a:prstDash val="solid"/>
-                      <a:round/>
-                      <a:headEnd type="none" w="med" len="med"/>
-                      <a:tailEnd type="none" w="med" len="med"/>
-                    </a:lnL>
-                    <a:lnR w="6350" cap="flat" cmpd="sng" algn="ctr">
-                      <a:solidFill>
-                        <a:srgbClr val="D6CFC4"/>
-                      </a:solidFill>
-                      <a:prstDash val="solid"/>
-                      <a:round/>
-                      <a:headEnd type="none" w="med" len="med"/>
-                      <a:tailEnd type="none" w="med" len="med"/>
-                    </a:lnR>
-                    <a:lnT w="6350" cap="flat" cmpd="sng" algn="ctr">
-                      <a:solidFill>
-                        <a:srgbClr val="D6CFC4"/>
-                      </a:solidFill>
-                      <a:prstDash val="solid"/>
-                      <a:round/>
-                      <a:headEnd type="none" w="med" len="med"/>
-                      <a:tailEnd type="none" w="med" len="med"/>
-                    </a:lnT>
-                    <a:lnB w="6350" cap="flat" cmpd="sng" algn="ctr">
-                      <a:solidFill>
-                        <a:srgbClr val="D6CFC4"/>
-                      </a:solidFill>
-                      <a:prstDash val="solid"/>
-                      <a:round/>
-                      <a:headEnd type="none" w="med" len="med"/>
-                      <a:tailEnd type="none" w="med" len="med"/>
-                    </a:lnB>
-                    <a:solidFill>
-                      <a:srgbClr val="FAF7F2"/>
-                    </a:solidFill>
-                  </a:tcPr>
-                </a:tc>
-                <a:tc>
-                  <a:txBody>
-                    <a:bodyPr/>
-                    <a:lstStyle/>
-                    <a:p>
-                      <a:pPr algn="ctr" indent="0" marL="0">
-                        <a:buNone/>
-                      </a:pPr>
-                      <a:r>
-                        <a:rPr lang="en-US" sz="1200" dirty="0">
-                          <a:solidFill>
-                            <a:srgbClr val="2D2A26"/>
-                          </a:solidFill>
-                          <a:latin typeface="Calibri" pitchFamily="34" charset="0"/>
-                          <a:ea typeface="Calibri" pitchFamily="34" charset="-122"/>
-                          <a:cs typeface="Calibri" pitchFamily="34" charset="-120"/>
-                        </a:rPr>
-                        <a:t>$190,965</a:t>
-                      </a:r>
-                      <a:endParaRPr lang="en-US" sz="1200" dirty="0">
-                        <a:latin typeface="Calibri" charset="0"/>
-                        <a:ea typeface="Calibri" charset="0"/>
-                        <a:cs typeface="Calibri" charset="0"/>
-                      </a:endParaRPr>
-                    </a:p>
-                  </a:txBody>
-                  <a:tcPr marL="91440" marR="91440" marT="45720" marB="45720" anchor="ctr">
-                    <a:lnL w="6350" cap="flat" cmpd="sng" algn="ctr">
-                      <a:solidFill>
-                        <a:srgbClr val="D6CFC4"/>
-                      </a:solidFill>
-                      <a:prstDash val="solid"/>
-                      <a:round/>
-                      <a:headEnd type="none" w="med" len="med"/>
-                      <a:tailEnd type="none" w="med" len="med"/>
-                    </a:lnL>
-                    <a:lnR w="6350" cap="flat" cmpd="sng" algn="ctr">
-                      <a:solidFill>
-                        <a:srgbClr val="D6CFC4"/>
-                      </a:solidFill>
-                      <a:prstDash val="solid"/>
-                      <a:round/>
-                      <a:headEnd type="none" w="med" len="med"/>
-                      <a:tailEnd type="none" w="med" len="med"/>
-                    </a:lnR>
-                    <a:lnT w="6350" cap="flat" cmpd="sng" algn="ctr">
-                      <a:solidFill>
-                        <a:srgbClr val="D6CFC4"/>
-                      </a:solidFill>
-                      <a:prstDash val="solid"/>
-                      <a:round/>
-                      <a:headEnd type="none" w="med" len="med"/>
-                      <a:tailEnd type="none" w="med" len="med"/>
-                    </a:lnT>
-                    <a:lnB w="6350" cap="flat" cmpd="sng" algn="ctr">
-                      <a:solidFill>
-                        <a:srgbClr val="D6CFC4"/>
-                      </a:solidFill>
-                      <a:prstDash val="solid"/>
-                      <a:round/>
-                      <a:headEnd type="none" w="med" len="med"/>
-                      <a:tailEnd type="none" w="med" len="med"/>
-                    </a:lnB>
-                    <a:solidFill>
-                      <a:srgbClr val="FAF7F2"/>
-                    </a:solidFill>
-                  </a:tcPr>
-                </a:tc>
-                <a:tc>
-                  <a:txBody>
-                    <a:bodyPr/>
-                    <a:lstStyle/>
-                    <a:p>
-                      <a:pPr algn="ctr" indent="0" marL="0">
-                        <a:buNone/>
-                      </a:pPr>
-                      <a:r>
-                        <a:rPr lang="en-US" sz="1200" dirty="0">
-                          <a:solidFill>
-                            <a:srgbClr val="2D2A26"/>
-                          </a:solidFill>
-                          <a:latin typeface="Calibri" pitchFamily="34" charset="0"/>
-                          <a:ea typeface="Calibri" pitchFamily="34" charset="-122"/>
-                          <a:cs typeface="Calibri" pitchFamily="34" charset="-120"/>
-                        </a:rPr>
-                        <a:t>$-5,647</a:t>
-                      </a:r>
-                      <a:endParaRPr lang="en-US" sz="1200" dirty="0">
-                        <a:latin typeface="Calibri" charset="0"/>
-                        <a:ea typeface="Calibri" charset="0"/>
-                        <a:cs typeface="Calibri" charset="0"/>
-                      </a:endParaRPr>
-                    </a:p>
-                  </a:txBody>
-                  <a:tcPr marL="91440" marR="91440" marT="45720" marB="45720" anchor="ctr">
-                    <a:lnL w="6350" cap="flat" cmpd="sng" algn="ctr">
-                      <a:solidFill>
-                        <a:srgbClr val="D6CFC4"/>
-                      </a:solidFill>
-                      <a:prstDash val="solid"/>
-                      <a:round/>
-                      <a:headEnd type="none" w="med" len="med"/>
-                      <a:tailEnd type="none" w="med" len="med"/>
-                    </a:lnL>
-                    <a:lnR w="6350" cap="flat" cmpd="sng" algn="ctr">
-                      <a:solidFill>
-                        <a:srgbClr val="D6CFC4"/>
-                      </a:solidFill>
-                      <a:prstDash val="solid"/>
-                      <a:round/>
-                      <a:headEnd type="none" w="med" len="med"/>
-                      <a:tailEnd type="none" w="med" len="med"/>
-                    </a:lnR>
-                    <a:lnT w="6350" cap="flat" cmpd="sng" algn="ctr">
-                      <a:solidFill>
-                        <a:srgbClr val="D6CFC4"/>
-                      </a:solidFill>
-                      <a:prstDash val="solid"/>
-                      <a:round/>
-                      <a:headEnd type="none" w="med" len="med"/>
-                      <a:tailEnd type="none" w="med" len="med"/>
-                    </a:lnT>
-                    <a:lnB w="6350" cap="flat" cmpd="sng" algn="ctr">
-                      <a:solidFill>
-                        <a:srgbClr val="D6CFC4"/>
-                      </a:solidFill>
-                      <a:prstDash val="solid"/>
-                      <a:round/>
-                      <a:headEnd type="none" w="med" len="med"/>
-                      <a:tailEnd type="none" w="med" len="med"/>
-                    </a:lnB>
-                    <a:solidFill>
-                      <a:srgbClr val="FAF7F2"/>
-                    </a:solidFill>
-                  </a:tcPr>
-                </a:tc>
-                <a:tc>
-                  <a:txBody>
-                    <a:bodyPr/>
-                    <a:lstStyle/>
-                    <a:p>
-                      <a:pPr algn="ctr" indent="0" marL="0">
-                        <a:buNone/>
-                      </a:pPr>
-                      <a:r>
-                        <a:rPr lang="en-US" sz="1200" dirty="0">
-                          <a:solidFill>
-                            <a:srgbClr val="2D2A26"/>
-                          </a:solidFill>
-                          <a:latin typeface="Calibri" pitchFamily="34" charset="0"/>
-                          <a:ea typeface="Calibri" pitchFamily="34" charset="-122"/>
-                          <a:cs typeface="Calibri" pitchFamily="34" charset="-120"/>
-                        </a:rPr>
-                        <a:t>$-119,291</a:t>
-                      </a:r>
-                      <a:endParaRPr lang="en-US" sz="1200" dirty="0">
-                        <a:latin typeface="Calibri" charset="0"/>
-                        <a:ea typeface="Calibri" charset="0"/>
-                        <a:cs typeface="Calibri" charset="0"/>
-                      </a:endParaRPr>
-                    </a:p>
-                  </a:txBody>
-                  <a:tcPr marL="91440" marR="91440" marT="45720" marB="45720" anchor="ctr">
-                    <a:lnL w="6350" cap="flat" cmpd="sng" algn="ctr">
-                      <a:solidFill>
-                        <a:srgbClr val="D6CFC4"/>
-                      </a:solidFill>
-                      <a:prstDash val="solid"/>
-                      <a:round/>
-                      <a:headEnd type="none" w="med" len="med"/>
-                      <a:tailEnd type="none" w="med" len="med"/>
-                    </a:lnL>
-                    <a:lnR w="6350" cap="flat" cmpd="sng" algn="ctr">
-                      <a:solidFill>
-                        <a:srgbClr val="D6CFC4"/>
-                      </a:solidFill>
-                      <a:prstDash val="solid"/>
-                      <a:round/>
-                      <a:headEnd type="none" w="med" len="med"/>
-                      <a:tailEnd type="none" w="med" len="med"/>
-                    </a:lnR>
-                    <a:lnT w="6350" cap="flat" cmpd="sng" algn="ctr">
-                      <a:solidFill>
-                        <a:srgbClr val="D6CFC4"/>
-                      </a:solidFill>
-                      <a:prstDash val="solid"/>
-                      <a:round/>
-                      <a:headEnd type="none" w="med" len="med"/>
-                      <a:tailEnd type="none" w="med" len="med"/>
-                    </a:lnT>
-                    <a:lnB w="6350" cap="flat" cmpd="sng" algn="ctr">
-                      <a:solidFill>
-                        <a:srgbClr val="D6CFC4"/>
-                      </a:solidFill>
-                      <a:prstDash val="solid"/>
-                      <a:round/>
-                      <a:headEnd type="none" w="med" len="med"/>
-                      <a:tailEnd type="none" w="med" len="med"/>
-                    </a:lnB>
-                    <a:solidFill>
-                      <a:srgbClr val="FAF7F2"/>
-                    </a:solidFill>
-                  </a:tcPr>
-                </a:tc>
-                <a:tc>
-                  <a:txBody>
-                    <a:bodyPr/>
-                    <a:lstStyle/>
-                    <a:p>
-                      <a:pPr algn="ctr" indent="0" marL="0">
-                        <a:buNone/>
-                      </a:pPr>
-                      <a:r>
-                        <a:rPr lang="en-US" sz="1200" dirty="0">
-                          <a:solidFill>
-                            <a:srgbClr val="2D2A26"/>
-                          </a:solidFill>
-                          <a:latin typeface="Calibri" pitchFamily="34" charset="0"/>
-                          <a:ea typeface="Calibri" pitchFamily="34" charset="-122"/>
-                          <a:cs typeface="Calibri" pitchFamily="34" charset="-120"/>
-                        </a:rPr>
-                        <a:t>$66,026</a:t>
-                      </a:r>
-                      <a:endParaRPr lang="en-US" sz="1200" dirty="0">
-                        <a:latin typeface="Calibri" charset="0"/>
-                        <a:ea typeface="Calibri" charset="0"/>
-                        <a:cs typeface="Calibri" charset="0"/>
-                      </a:endParaRPr>
-                    </a:p>
-                  </a:txBody>
-                  <a:tcPr marL="91440" marR="91440" marT="45720" marB="45720" anchor="ctr">
-                    <a:lnL w="6350" cap="flat" cmpd="sng" algn="ctr">
-                      <a:solidFill>
-                        <a:srgbClr val="D6CFC4"/>
-                      </a:solidFill>
-                      <a:prstDash val="solid"/>
-                      <a:round/>
-                      <a:headEnd type="none" w="med" len="med"/>
-                      <a:tailEnd type="none" w="med" len="med"/>
-                    </a:lnL>
-                    <a:lnR w="6350" cap="flat" cmpd="sng" algn="ctr">
-                      <a:solidFill>
-                        <a:srgbClr val="D6CFC4"/>
-                      </a:solidFill>
-                      <a:prstDash val="solid"/>
-                      <a:round/>
-                      <a:headEnd type="none" w="med" len="med"/>
-                      <a:tailEnd type="none" w="med" len="med"/>
-                    </a:lnR>
-                    <a:lnT w="6350" cap="flat" cmpd="sng" algn="ctr">
-                      <a:solidFill>
-                        <a:srgbClr val="D6CFC4"/>
-                      </a:solidFill>
-                      <a:prstDash val="solid"/>
-                      <a:round/>
-                      <a:headEnd type="none" w="med" len="med"/>
-                      <a:tailEnd type="none" w="med" len="med"/>
-                    </a:lnT>
-                    <a:lnB w="6350" cap="flat" cmpd="sng" algn="ctr">
-                      <a:solidFill>
-                        <a:srgbClr val="D6CFC4"/>
-                      </a:solidFill>
-                      <a:prstDash val="solid"/>
-                      <a:round/>
-                      <a:headEnd type="none" w="med" len="med"/>
-                      <a:tailEnd type="none" w="med" len="med"/>
-                    </a:lnB>
-                    <a:solidFill>
-                      <a:srgbClr val="FAF7F2"/>
-                    </a:solidFill>
-                  </a:tcPr>
-                </a:tc>
-                <a:tc>
-                  <a:txBody>
-                    <a:bodyPr/>
-                    <a:lstStyle/>
-                    <a:p>
-                      <a:pPr algn="ctr" indent="0" marL="0">
-                        <a:buNone/>
-                      </a:pPr>
-                      <a:r>
-                        <a:rPr lang="en-US" sz="1200" dirty="0">
-                          <a:solidFill>
-                            <a:srgbClr val="2D2A26"/>
-                          </a:solidFill>
-                          <a:latin typeface="Calibri" pitchFamily="34" charset="0"/>
-                          <a:ea typeface="Calibri" pitchFamily="34" charset="-122"/>
-                          <a:cs typeface="Calibri" pitchFamily="34" charset="-120"/>
-                        </a:rPr>
-                        <a:t>34.6%</a:t>
-                      </a:r>
-                      <a:endParaRPr lang="en-US" sz="1200" dirty="0">
-                        <a:latin typeface="Calibri" charset="0"/>
-                        <a:ea typeface="Calibri" charset="0"/>
-                        <a:cs typeface="Calibri" charset="0"/>
-                      </a:endParaRPr>
-                    </a:p>
-                  </a:txBody>
-                  <a:tcPr marL="91440" marR="91440" marT="45720" marB="45720" anchor="ctr">
-                    <a:lnL w="6350" cap="flat" cmpd="sng" algn="ctr">
-                      <a:solidFill>
-                        <a:srgbClr val="D6CFC4"/>
-                      </a:solidFill>
-                      <a:prstDash val="solid"/>
-                      <a:round/>
-                      <a:headEnd type="none" w="med" len="med"/>
-                      <a:tailEnd type="none" w="med" len="med"/>
-                    </a:lnL>
-                    <a:lnR w="6350" cap="flat" cmpd="sng" algn="ctr">
-                      <a:solidFill>
-                        <a:srgbClr val="D6CFC4"/>
-                      </a:solidFill>
-                      <a:prstDash val="solid"/>
-                      <a:round/>
-                      <a:headEnd type="none" w="med" len="med"/>
-                      <a:tailEnd type="none" w="med" len="med"/>
-                    </a:lnR>
-                    <a:lnT w="6350" cap="flat" cmpd="sng" algn="ctr">
-                      <a:solidFill>
-                        <a:srgbClr val="D6CFC4"/>
-                      </a:solidFill>
-                      <a:prstDash val="solid"/>
-                      <a:round/>
-                      <a:headEnd type="none" w="med" len="med"/>
-                      <a:tailEnd type="none" w="med" len="med"/>
-                    </a:lnT>
-                    <a:lnB w="6350" cap="flat" cmpd="sng" algn="ctr">
-                      <a:solidFill>
-                        <a:srgbClr val="D6CFC4"/>
-                      </a:solidFill>
-                      <a:prstDash val="solid"/>
-                      <a:round/>
-                      <a:headEnd type="none" w="med" len="med"/>
-                      <a:tailEnd type="none" w="med" len="med"/>
-                    </a:lnB>
-                    <a:solidFill>
-                      <a:srgbClr val="FAF7F2"/>
-                    </a:solidFill>
-                  </a:tcPr>
-                </a:tc>
-                <a:tc>
-                  <a:txBody>
-                    <a:bodyPr/>
-                    <a:lstStyle/>
-                    <a:p>
-                      <a:pPr algn="ctr" indent="0" marL="0">
-                        <a:buNone/>
-                      </a:pPr>
-                      <a:r>
-                        <a:rPr lang="en-US" sz="1200" dirty="0">
-                          <a:solidFill>
-                            <a:srgbClr val="2D2A26"/>
-                          </a:solidFill>
-                          <a:latin typeface="Calibri" pitchFamily="34" charset="0"/>
-                          <a:ea typeface="Calibri" pitchFamily="34" charset="-122"/>
-                          <a:cs typeface="Calibri" pitchFamily="34" charset="-120"/>
-                        </a:rPr>
-                        <a:t>$55,275</a:t>
                       </a:r>
                       <a:endParaRPr lang="en-US" sz="1200" dirty="0">
                         <a:latin typeface="Calibri" charset="0"/>

--- a/reports/2026-02.pptx
+++ b/reports/2026-02.pptx
@@ -862,19 +862,19 @@
                 <c:formatCode>General</c:formatCode>
                 <c:ptCount val="5"/>
                 <c:pt idx="0">
-                  <c:v>1901411.216</c:v>
+                  <c:v>2785600.415</c:v>
                 </c:pt>
                 <c:pt idx="1">
-                  <c:v>1255542.636</c:v>
+                  <c:v>1820891.473</c:v>
                 </c:pt>
                 <c:pt idx="2">
-                  <c:v>548074.3098</c:v>
+                  <c:v>667832.689</c:v>
                 </c:pt>
                 <c:pt idx="3">
-                  <c:v>349353.9326</c:v>
+                  <c:v>572205.0562</c:v>
                 </c:pt>
                 <c:pt idx="4">
-                  <c:v>97814.81481</c:v>
+                  <c:v>143592.5926</c:v>
                 </c:pt>
               </c:numCache>
             </c:numRef>
@@ -1162,19 +1162,19 @@
                 <c:formatCode>General</c:formatCode>
                 <c:ptCount val="5"/>
                 <c:pt idx="0">
-                  <c:v>216.685039</c:v>
+                  <c:v>219.373162</c:v>
                 </c:pt>
                 <c:pt idx="1">
-                  <c:v>224.64531</c:v>
+                  <c:v>224.940268</c:v>
                 </c:pt>
                 <c:pt idx="2">
-                  <c:v>494.651904</c:v>
+                  <c:v>465.064547</c:v>
                 </c:pt>
                 <c:pt idx="3">
-                  <c:v>217.937575</c:v>
+                  <c:v>203.704185</c:v>
                 </c:pt>
                 <c:pt idx="4">
-                  <c:v>171.304404</c:v>
+                  <c:v>165.429254</c:v>
                 </c:pt>
               </c:numCache>
             </c:numRef>
@@ -1462,19 +1462,19 @@
                 <c:formatCode>General</c:formatCode>
                 <c:ptCount val="5"/>
                 <c:pt idx="0">
-                  <c:v>131</c:v>
+                  <c:v>159</c:v>
                 </c:pt>
                 <c:pt idx="1">
-                  <c:v>114</c:v>
+                  <c:v>135</c:v>
                 </c:pt>
                 <c:pt idx="2">
                   <c:v>26</c:v>
                 </c:pt>
                 <c:pt idx="3">
-                  <c:v>55</c:v>
+                  <c:v>83</c:v>
                 </c:pt>
                 <c:pt idx="4">
-                  <c:v>41</c:v>
+                  <c:v>62</c:v>
                 </c:pt>
               </c:numCache>
             </c:numRef>
@@ -6226,7 +6226,7 @@
                 <a:ea typeface="Calibri" pitchFamily="34" charset="-122"/>
                 <a:cs typeface="Calibri" pitchFamily="34" charset="-120"/>
               </a:rPr>
-              <a:t>+78.3%</a:t>
+              <a:t>+72.2%</a:t>
             </a:r>
             <a:endParaRPr lang="en-US" sz="1200" dirty="0"/>
           </a:p>
@@ -6265,7 +6265,7 @@
                 <a:ea typeface="Calibri" pitchFamily="34" charset="-122"/>
                 <a:cs typeface="Calibri" pitchFamily="34" charset="-120"/>
               </a:rPr>
-              <a:t>+34.1%</a:t>
+              <a:t>+22.1%</a:t>
             </a:r>
             <a:endParaRPr lang="en-US" sz="1200" dirty="0"/>
           </a:p>
@@ -6304,7 +6304,7 @@
                 <a:ea typeface="Calibri" pitchFamily="34" charset="-122"/>
                 <a:cs typeface="Calibri" pitchFamily="34" charset="-120"/>
               </a:rPr>
-              <a:t>-33.3%</a:t>
+              <a:t>-21.2%</a:t>
             </a:r>
             <a:endParaRPr lang="en-US" sz="1200" dirty="0"/>
           </a:p>
@@ -6343,7 +6343,7 @@
                 <a:ea typeface="Calibri" pitchFamily="34" charset="-122"/>
                 <a:cs typeface="Calibri" pitchFamily="34" charset="-120"/>
               </a:rPr>
-              <a:t>-14.9%</a:t>
+              <a:t>-41.3%</a:t>
             </a:r>
             <a:endParaRPr lang="en-US" sz="1200" dirty="0"/>
           </a:p>
@@ -6382,7 +6382,7 @@
                 <a:ea typeface="Calibri" pitchFamily="34" charset="-122"/>
                 <a:cs typeface="Calibri" pitchFamily="34" charset="-120"/>
               </a:rPr>
-              <a:t>-40.2%</a:t>
+              <a:t>-35.6%</a:t>
             </a:r>
             <a:endParaRPr lang="en-US" sz="1200" dirty="0"/>
           </a:p>
@@ -7116,7 +7116,7 @@
                 <a:ea typeface="Calibri" pitchFamily="34" charset="-122"/>
                 <a:cs typeface="Calibri" pitchFamily="34" charset="-120"/>
               </a:rPr>
-              <a:t>-33.3%</a:t>
+              <a:t>-21.2%</a:t>
             </a:r>
             <a:endParaRPr lang="en-US" sz="1200" dirty="0"/>
           </a:p>
@@ -7155,7 +7155,7 @@
                 <a:ea typeface="Calibri" pitchFamily="34" charset="-122"/>
                 <a:cs typeface="Calibri" pitchFamily="34" charset="-120"/>
               </a:rPr>
-              <a:t>+34.1%</a:t>
+              <a:t>+22.1%</a:t>
             </a:r>
             <a:endParaRPr lang="en-US" sz="1200" dirty="0"/>
           </a:p>
@@ -7194,7 +7194,7 @@
                 <a:ea typeface="Calibri" pitchFamily="34" charset="-122"/>
                 <a:cs typeface="Calibri" pitchFamily="34" charset="-120"/>
               </a:rPr>
-              <a:t>-14.9%</a:t>
+              <a:t>-41.3%</a:t>
             </a:r>
             <a:endParaRPr lang="en-US" sz="1200" dirty="0"/>
           </a:p>
@@ -7233,7 +7233,7 @@
                 <a:ea typeface="Calibri" pitchFamily="34" charset="-122"/>
                 <a:cs typeface="Calibri" pitchFamily="34" charset="-120"/>
               </a:rPr>
-              <a:t>-40.2%</a:t>
+              <a:t>-35.6%</a:t>
             </a:r>
             <a:endParaRPr lang="en-US" sz="1200" dirty="0"/>
           </a:p>
@@ -7272,7 +7272,7 @@
                 <a:ea typeface="Calibri" pitchFamily="34" charset="-122"/>
                 <a:cs typeface="Calibri" pitchFamily="34" charset="-120"/>
               </a:rPr>
-              <a:t>+78.3%</a:t>
+              <a:t>+72.2%</a:t>
             </a:r>
             <a:endParaRPr lang="en-US" sz="1200" dirty="0"/>
           </a:p>
@@ -10034,7 +10034,7 @@
                 <a:ea typeface="Calibri" pitchFamily="34" charset="-122"/>
                 <a:cs typeface="Calibri" pitchFamily="34" charset="-120"/>
               </a:rPr>
-              <a:t>-8.1%</a:t>
+              <a:t>-4.0%</a:t>
             </a:r>
             <a:endParaRPr lang="en-US" sz="1200" dirty="0"/>
           </a:p>
@@ -10049,6 +10049,45 @@
         <p:spPr>
           <a:xfrm>
             <a:off x="1655064" y="5925312"/>
+            <a:ext cx="1517904" cy="347472"/>
+          </a:xfrm>
+          <a:prstGeom prst="rect">
+            <a:avLst/>
+          </a:prstGeom>
+          <a:noFill/>
+          <a:ln/>
+        </p:spPr>
+        <p:txBody>
+          <a:bodyPr wrap="square" rtlCol="0" anchor="ctr"/>
+          <a:lstStyle/>
+          <a:p>
+            <a:pPr algn="ctr" indent="0" marL="0">
+              <a:buNone/>
+            </a:pPr>
+            <a:r>
+              <a:rPr lang="en-US" sz="1200" b="1" dirty="0">
+                <a:solidFill>
+                  <a:srgbClr val="C0392B"/>
+                </a:solidFill>
+                <a:latin typeface="Calibri" pitchFamily="34" charset="0"/>
+                <a:ea typeface="Calibri" pitchFamily="34" charset="-122"/>
+                <a:cs typeface="Calibri" pitchFamily="34" charset="-120"/>
+              </a:rPr>
+              <a:t>-12.4%</a:t>
+            </a:r>
+            <a:endParaRPr lang="en-US" sz="1200" dirty="0"/>
+          </a:p>
+        </p:txBody>
+      </p:sp>
+      <p:sp>
+        <p:nvSpPr>
+          <p:cNvPr id="17" name="Text 14"/>
+          <p:cNvSpPr/>
+          <p:nvPr/>
+        </p:nvSpPr>
+        <p:spPr>
+          <a:xfrm>
+            <a:off x="3172968" y="5925312"/>
             <a:ext cx="1517904" cy="347472"/>
           </a:xfrm>
           <a:prstGeom prst="rect">
@@ -10073,7 +10112,7 @@
                 <a:ea typeface="Calibri" pitchFamily="34" charset="-122"/>
                 <a:cs typeface="Calibri" pitchFamily="34" charset="-120"/>
               </a:rPr>
-              <a:t>+16.2%</a:t>
+              <a:t>+6.9%</a:t>
             </a:r>
             <a:endParaRPr lang="en-US" sz="1200" dirty="0"/>
           </a:p>
@@ -10081,13 +10120,13 @@
       </p:sp>
       <p:sp>
         <p:nvSpPr>
-          <p:cNvPr id="17" name="Text 14"/>
-          <p:cNvSpPr/>
-          <p:nvPr/>
-        </p:nvSpPr>
-        <p:spPr>
-          <a:xfrm>
-            <a:off x="3172968" y="5925312"/>
+          <p:cNvPr id="18" name="Text 15"/>
+          <p:cNvSpPr/>
+          <p:nvPr/>
+        </p:nvSpPr>
+        <p:spPr>
+          <a:xfrm>
+            <a:off x="4690872" y="5925312"/>
             <a:ext cx="1517904" cy="347472"/>
           </a:xfrm>
           <a:prstGeom prst="rect">
@@ -10112,7 +10151,7 @@
                 <a:ea typeface="Calibri" pitchFamily="34" charset="-122"/>
                 <a:cs typeface="Calibri" pitchFamily="34" charset="-120"/>
               </a:rPr>
-              <a:t>+11.0%</a:t>
+              <a:t>+62.9%</a:t>
             </a:r>
             <a:endParaRPr lang="en-US" sz="1200" dirty="0"/>
           </a:p>
@@ -10120,13 +10159,13 @@
       </p:sp>
       <p:sp>
         <p:nvSpPr>
-          <p:cNvPr id="18" name="Text 15"/>
-          <p:cNvSpPr/>
-          <p:nvPr/>
-        </p:nvSpPr>
-        <p:spPr>
-          <a:xfrm>
-            <a:off x="4690872" y="5925312"/>
+          <p:cNvPr id="19" name="Text 16"/>
+          <p:cNvSpPr/>
+          <p:nvPr/>
+        </p:nvSpPr>
+        <p:spPr>
+          <a:xfrm>
+            <a:off x="6208776" y="5925312"/>
             <a:ext cx="1517904" cy="347472"/>
           </a:xfrm>
           <a:prstGeom prst="rect">
@@ -10145,52 +10184,13 @@
             <a:r>
               <a:rPr lang="en-US" sz="1200" b="1" dirty="0">
                 <a:solidFill>
-                  <a:srgbClr val="1A7A6E"/>
+                  <a:srgbClr val="C0392B"/>
                 </a:solidFill>
                 <a:latin typeface="Calibri" pitchFamily="34" charset="0"/>
                 <a:ea typeface="Calibri" pitchFamily="34" charset="-122"/>
                 <a:cs typeface="Calibri" pitchFamily="34" charset="-120"/>
               </a:rPr>
-              <a:t>+65.9%</a:t>
-            </a:r>
-            <a:endParaRPr lang="en-US" sz="1200" dirty="0"/>
-          </a:p>
-        </p:txBody>
-      </p:sp>
-      <p:sp>
-        <p:nvSpPr>
-          <p:cNvPr id="19" name="Text 16"/>
-          <p:cNvSpPr/>
-          <p:nvPr/>
-        </p:nvSpPr>
-        <p:spPr>
-          <a:xfrm>
-            <a:off x="6208776" y="5925312"/>
-            <a:ext cx="1517904" cy="347472"/>
-          </a:xfrm>
-          <a:prstGeom prst="rect">
-            <a:avLst/>
-          </a:prstGeom>
-          <a:noFill/>
-          <a:ln/>
-        </p:spPr>
-        <p:txBody>
-          <a:bodyPr wrap="square" rtlCol="0" anchor="ctr"/>
-          <a:lstStyle/>
-          <a:p>
-            <a:pPr algn="ctr" indent="0" marL="0">
-              <a:buNone/>
-            </a:pPr>
-            <a:r>
-              <a:rPr lang="en-US" sz="1200" b="1" dirty="0">
-                <a:solidFill>
-                  <a:srgbClr val="1A7A6E"/>
-                </a:solidFill>
-                <a:latin typeface="Calibri" pitchFamily="34" charset="0"/>
-                <a:ea typeface="Calibri" pitchFamily="34" charset="-122"/>
-                <a:cs typeface="Calibri" pitchFamily="34" charset="-120"/>
-              </a:rPr>
-              <a:t>+17.8%</a:t>
+              <a:t>-5.8%</a:t>
             </a:r>
             <a:endParaRPr lang="en-US" sz="1200" dirty="0"/>
           </a:p>
@@ -10286,7 +10286,7 @@
                 <a:ea typeface="Century Gothic" pitchFamily="34" charset="-122"/>
                 <a:cs typeface="Century Gothic" pitchFamily="34" charset="-120"/>
               </a:rPr>
-              <a:t>$4,152,197</a:t>
+              <a:t>$5,990,122</a:t>
             </a:r>
             <a:endParaRPr lang="en-US" sz="2600" dirty="0"/>
           </a:p>
@@ -10421,7 +10421,7 @@
                 <a:ea typeface="Century Gothic" pitchFamily="34" charset="-122"/>
                 <a:cs typeface="Century Gothic" pitchFamily="34" charset="-120"/>
               </a:rPr>
-              <a:t>51</a:t>
+              <a:t>74</a:t>
             </a:r>
             <a:endParaRPr lang="en-US" sz="2600" dirty="0"/>
           </a:p>
@@ -10556,7 +10556,7 @@
                 <a:ea typeface="Century Gothic" pitchFamily="34" charset="-122"/>
                 <a:cs typeface="Century Gothic" pitchFamily="34" charset="-120"/>
               </a:rPr>
-              <a:t>+4.1%</a:t>
+              <a:t>-6.3%</a:t>
             </a:r>
             <a:endParaRPr lang="en-US" sz="2600" dirty="0"/>
           </a:p>
@@ -11327,7 +11327,7 @@
                 <a:ea typeface="Calibri" pitchFamily="34" charset="-122"/>
                 <a:cs typeface="Calibri" pitchFamily="34" charset="-120"/>
               </a:rPr>
-              <a:t>Total disbursed: $4,152,197 (+5.4% vs prior month).</a:t>
+              <a:t>Total disbursed: $5,990,122 (-1.9% vs prior month).</a:t>
             </a:r>
             <a:endParaRPr lang="en-US" sz="1200" dirty="0"/>
           </a:p>
@@ -11344,7 +11344,7 @@
                 <a:ea typeface="Calibri" pitchFamily="34" charset="-122"/>
                 <a:cs typeface="Calibri" pitchFamily="34" charset="-120"/>
               </a:rPr>
-              <a:t>Tanzania had the highest disbursements ($1,901,411).</a:t>
+              <a:t>Tanzania had the highest disbursements ($2,785,600).</a:t>
             </a:r>
             <a:endParaRPr lang="en-US" sz="1200" dirty="0"/>
           </a:p>
@@ -11899,7 +11899,7 @@
                 <a:ea typeface="Calibri" pitchFamily="34" charset="-122"/>
                 <a:cs typeface="Calibri" pitchFamily="34" charset="-120"/>
               </a:rPr>
-              <a:t>+3.2%</a:t>
+              <a:t>+4.7%</a:t>
             </a:r>
             <a:endParaRPr lang="en-US" sz="1200" dirty="0"/>
           </a:p>
@@ -11938,7 +11938,7 @@
                 <a:ea typeface="Calibri" pitchFamily="34" charset="-122"/>
                 <a:cs typeface="Calibri" pitchFamily="34" charset="-120"/>
               </a:rPr>
-              <a:t>+2.9%</a:t>
+              <a:t>+7.2%</a:t>
             </a:r>
             <a:endParaRPr lang="en-US" sz="1200" dirty="0"/>
           </a:p>
@@ -11977,7 +11977,7 @@
                 <a:ea typeface="Calibri" pitchFamily="34" charset="-122"/>
                 <a:cs typeface="Calibri" pitchFamily="34" charset="-120"/>
               </a:rPr>
-              <a:t>+16.9%</a:t>
+              <a:t>+11.8%</a:t>
             </a:r>
             <a:endParaRPr lang="en-US" sz="1200" dirty="0"/>
           </a:p>
@@ -12016,7 +12016,7 @@
                 <a:ea typeface="Calibri" pitchFamily="34" charset="-122"/>
                 <a:cs typeface="Calibri" pitchFamily="34" charset="-120"/>
               </a:rPr>
-              <a:t>-6.5%</a:t>
+              <a:t>-9.6%</a:t>
             </a:r>
             <a:endParaRPr lang="en-US" sz="1200" dirty="0"/>
           </a:p>
@@ -12055,7 +12055,7 @@
                 <a:ea typeface="Calibri" pitchFamily="34" charset="-122"/>
                 <a:cs typeface="Calibri" pitchFamily="34" charset="-120"/>
               </a:rPr>
-              <a:t>-24.5%</a:t>
+              <a:t>-22.5%</a:t>
             </a:r>
             <a:endParaRPr lang="en-US" sz="1200" dirty="0"/>
           </a:p>
@@ -12183,7 +12183,7 @@
                 <a:ea typeface="Calibri" pitchFamily="34" charset="-122"/>
                 <a:cs typeface="Calibri" pitchFamily="34" charset="-120"/>
               </a:rPr>
-              <a:t>-40.2%</a:t>
+              <a:t>-35.6%</a:t>
             </a:r>
             <a:endParaRPr lang="en-US" sz="1200" dirty="0"/>
           </a:p>
@@ -12222,7 +12222,7 @@
                 <a:ea typeface="Calibri" pitchFamily="34" charset="-122"/>
                 <a:cs typeface="Calibri" pitchFamily="34" charset="-120"/>
               </a:rPr>
-              <a:t>-14.9%</a:t>
+              <a:t>-41.3%</a:t>
             </a:r>
             <a:endParaRPr lang="en-US" sz="1200" dirty="0"/>
           </a:p>
@@ -12261,7 +12261,7 @@
                 <a:ea typeface="Calibri" pitchFamily="34" charset="-122"/>
                 <a:cs typeface="Calibri" pitchFamily="34" charset="-120"/>
               </a:rPr>
-              <a:t>-33.3%</a:t>
+              <a:t>-21.2%</a:t>
             </a:r>
             <a:endParaRPr lang="en-US" sz="1200" dirty="0"/>
           </a:p>
@@ -12300,7 +12300,7 @@
                 <a:ea typeface="Calibri" pitchFamily="34" charset="-122"/>
                 <a:cs typeface="Calibri" pitchFamily="34" charset="-120"/>
               </a:rPr>
-              <a:t>+34.1%</a:t>
+              <a:t>+22.1%</a:t>
             </a:r>
             <a:endParaRPr lang="en-US" sz="1200" dirty="0"/>
           </a:p>
@@ -12339,7 +12339,7 @@
                 <a:ea typeface="Calibri" pitchFamily="34" charset="-122"/>
                 <a:cs typeface="Calibri" pitchFamily="34" charset="-120"/>
               </a:rPr>
-              <a:t>+78.3%</a:t>
+              <a:t>+72.2%</a:t>
             </a:r>
             <a:endParaRPr lang="en-US" sz="1200" dirty="0"/>
           </a:p>

--- a/reports/2026-02.pptx
+++ b/reports/2026-02.pptx
@@ -12413,7 +12413,7 @@
         <p:spPr>
           <a:xfrm>
             <a:off x="7955280" y="685800"/>
-            <a:ext cx="4069080" cy="914400"/>
+            <a:ext cx="4069080" cy="1005840"/>
           </a:xfrm>
           <a:prstGeom prst="rect">
             <a:avLst/>
@@ -12470,7 +12470,7 @@
         <p:spPr>
           <a:xfrm>
             <a:off x="7955280" y="777240"/>
-            <a:ext cx="4069080" cy="502920"/>
+            <a:ext cx="4069080" cy="553212"/>
           </a:xfrm>
           <a:prstGeom prst="rect">
             <a:avLst/>
@@ -12508,8 +12508,8 @@
         </p:nvSpPr>
         <p:spPr>
           <a:xfrm>
-            <a:off x="8001000" y="1234440"/>
-            <a:ext cx="3977640" cy="365760"/>
+            <a:off x="8001000" y="1289304"/>
+            <a:ext cx="3977640" cy="402336"/>
           </a:xfrm>
           <a:prstGeom prst="rect">
             <a:avLst/>
@@ -12547,8 +12547,8 @@
         </p:nvSpPr>
         <p:spPr>
           <a:xfrm>
-            <a:off x="7955280" y="1691640"/>
-            <a:ext cx="4069080" cy="914400"/>
+            <a:off x="7955280" y="1783080"/>
+            <a:ext cx="4069080" cy="1005840"/>
           </a:xfrm>
           <a:prstGeom prst="rect">
             <a:avLst/>
@@ -12579,7 +12579,7 @@
         </p:nvSpPr>
         <p:spPr>
           <a:xfrm>
-            <a:off x="7955280" y="1691640"/>
+            <a:off x="7955280" y="1783080"/>
             <a:ext cx="4069080" cy="45720"/>
           </a:xfrm>
           <a:prstGeom prst="rect">
@@ -12604,8 +12604,8 @@
         </p:nvSpPr>
         <p:spPr>
           <a:xfrm>
-            <a:off x="7955280" y="1783080"/>
-            <a:ext cx="4069080" cy="502920"/>
+            <a:off x="7955280" y="1874520"/>
+            <a:ext cx="4069080" cy="553212"/>
           </a:xfrm>
           <a:prstGeom prst="rect">
             <a:avLst/>
@@ -12643,8 +12643,8 @@
         </p:nvSpPr>
         <p:spPr>
           <a:xfrm>
-            <a:off x="8001000" y="2240280"/>
-            <a:ext cx="3977640" cy="365760"/>
+            <a:off x="8001000" y="2386584"/>
+            <a:ext cx="3977640" cy="402336"/>
           </a:xfrm>
           <a:prstGeom prst="rect">
             <a:avLst/>
@@ -12682,8 +12682,8 @@
         </p:nvSpPr>
         <p:spPr>
           <a:xfrm>
-            <a:off x="7955280" y="2697480"/>
-            <a:ext cx="4069080" cy="914400"/>
+            <a:off x="7955280" y="2880360"/>
+            <a:ext cx="4069080" cy="1005840"/>
           </a:xfrm>
           <a:prstGeom prst="rect">
             <a:avLst/>
@@ -12714,7 +12714,7 @@
         </p:nvSpPr>
         <p:spPr>
           <a:xfrm>
-            <a:off x="7955280" y="2697480"/>
+            <a:off x="7955280" y="2880360"/>
             <a:ext cx="4069080" cy="45720"/>
           </a:xfrm>
           <a:prstGeom prst="rect">
@@ -12739,8 +12739,8 @@
         </p:nvSpPr>
         <p:spPr>
           <a:xfrm>
-            <a:off x="7955280" y="2788920"/>
-            <a:ext cx="4069080" cy="502920"/>
+            <a:off x="7955280" y="2971800"/>
+            <a:ext cx="4069080" cy="553212"/>
           </a:xfrm>
           <a:prstGeom prst="rect">
             <a:avLst/>
@@ -12778,8 +12778,8 @@
         </p:nvSpPr>
         <p:spPr>
           <a:xfrm>
-            <a:off x="8001000" y="3246120"/>
-            <a:ext cx="3977640" cy="365760"/>
+            <a:off x="8001000" y="3483864"/>
+            <a:ext cx="3977640" cy="402336"/>
           </a:xfrm>
           <a:prstGeom prst="rect">
             <a:avLst/>
@@ -12817,14 +12817,14 @@
         </p:nvSpPr>
         <p:spPr>
           <a:xfrm>
-            <a:off x="7955280" y="3703320"/>
-            <a:ext cx="4069080" cy="914400"/>
+            <a:off x="7955280" y="3977640"/>
+            <a:ext cx="4069080" cy="2578608"/>
           </a:xfrm>
           <a:prstGeom prst="rect">
             <a:avLst/>
           </a:prstGeom>
           <a:solidFill>
-            <a:srgbClr val="FFFFFF"/>
+            <a:srgbClr val="FAF7F2"/>
           </a:solidFill>
           <a:ln w="12700">
             <a:solidFill>
@@ -12832,13 +12832,6 @@
             </a:solidFill>
             <a:prstDash val="solid"/>
           </a:ln>
-          <a:effectLst>
-            <a:outerShdw sx="100000" sy="100000" kx="0" ky="0" algn="bl" rotWithShape="0" blurRad="50800" dist="25400" dir="8100000">
-              <a:srgbClr val="000000">
-                <a:alpha val="8000"/>
-              </a:srgbClr>
-            </a:outerShdw>
-          </a:effectLst>
         </p:spPr>
       </p:sp>
       <p:sp>
@@ -12849,8 +12842,8 @@
         </p:nvSpPr>
         <p:spPr>
           <a:xfrm>
-            <a:off x="7955280" y="3703320"/>
-            <a:ext cx="4069080" cy="45720"/>
+            <a:off x="7955280" y="3977640"/>
+            <a:ext cx="54864" cy="2578608"/>
           </a:xfrm>
           <a:prstGeom prst="rect">
             <a:avLst/>
@@ -12874,135 +12867,7 @@
         </p:nvSpPr>
         <p:spPr>
           <a:xfrm>
-            <a:off x="7955280" y="3794760"/>
-            <a:ext cx="4069080" cy="502920"/>
-          </a:xfrm>
-          <a:prstGeom prst="rect">
-            <a:avLst/>
-          </a:prstGeom>
-          <a:noFill/>
-          <a:ln/>
-        </p:spPr>
-        <p:txBody>
-          <a:bodyPr wrap="square" rtlCol="0" anchor="ctr"/>
-          <a:lstStyle/>
-          <a:p>
-            <a:pPr algn="ctr" indent="0" marL="0">
-              <a:buNone/>
-            </a:pPr>
-            <a:r>
-              <a:rPr lang="en-US" sz="2600" b="1" dirty="0">
-                <a:solidFill>
-                  <a:srgbClr val="5D300F"/>
-                </a:solidFill>
-                <a:latin typeface="Century Gothic" pitchFamily="34" charset="0"/>
-                <a:ea typeface="Century Gothic" pitchFamily="34" charset="-122"/>
-                <a:cs typeface="Century Gothic" pitchFamily="34" charset="-120"/>
-              </a:rPr>
-              <a:t>—</a:t>
-            </a:r>
-            <a:endParaRPr lang="en-US" sz="2600" dirty="0"/>
-          </a:p>
-        </p:txBody>
-      </p:sp>
-      <p:sp>
-        <p:nvSpPr>
-          <p:cNvPr id="35" name="Text 32"/>
-          <p:cNvSpPr/>
-          <p:nvPr/>
-        </p:nvSpPr>
-        <p:spPr>
-          <a:xfrm>
-            <a:off x="8001000" y="4251960"/>
-            <a:ext cx="3977640" cy="365760"/>
-          </a:xfrm>
-          <a:prstGeom prst="rect">
-            <a:avLst/>
-          </a:prstGeom>
-          <a:noFill/>
-          <a:ln/>
-        </p:spPr>
-        <p:txBody>
-          <a:bodyPr wrap="square" rtlCol="0" anchor="ctr"/>
-          <a:lstStyle/>
-          <a:p>
-            <a:pPr algn="ctr" indent="0" marL="0">
-              <a:buNone/>
-            </a:pPr>
-            <a:r>
-              <a:rPr lang="en-US" sz="1200" dirty="0">
-                <a:solidFill>
-                  <a:srgbClr val="718096"/>
-                </a:solidFill>
-                <a:latin typeface="Calibri" pitchFamily="34" charset="0"/>
-                <a:ea typeface="Calibri" pitchFamily="34" charset="-122"/>
-                <a:cs typeface="Calibri" pitchFamily="34" charset="-120"/>
-              </a:rPr>
-              <a:t>Avg Turnaround Time</a:t>
-            </a:r>
-            <a:endParaRPr lang="en-US" sz="1200" dirty="0"/>
-          </a:p>
-        </p:txBody>
-      </p:sp>
-      <p:sp>
-        <p:nvSpPr>
-          <p:cNvPr id="36" name="Shape 33"/>
-          <p:cNvSpPr/>
-          <p:nvPr/>
-        </p:nvSpPr>
-        <p:spPr>
-          <a:xfrm>
-            <a:off x="7955280" y="4709160"/>
-            <a:ext cx="4069080" cy="1847088"/>
-          </a:xfrm>
-          <a:prstGeom prst="rect">
-            <a:avLst/>
-          </a:prstGeom>
-          <a:solidFill>
-            <a:srgbClr val="FAF7F2"/>
-          </a:solidFill>
-          <a:ln w="12700">
-            <a:solidFill>
-              <a:srgbClr val="D6CFC4"/>
-            </a:solidFill>
-            <a:prstDash val="solid"/>
-          </a:ln>
-        </p:spPr>
-      </p:sp>
-      <p:sp>
-        <p:nvSpPr>
-          <p:cNvPr id="37" name="Shape 34"/>
-          <p:cNvSpPr/>
-          <p:nvPr/>
-        </p:nvSpPr>
-        <p:spPr>
-          <a:xfrm>
-            <a:off x="7955280" y="4709160"/>
-            <a:ext cx="54864" cy="1847088"/>
-          </a:xfrm>
-          <a:prstGeom prst="rect">
-            <a:avLst/>
-          </a:prstGeom>
-          <a:solidFill>
-            <a:srgbClr val="5D300F"/>
-          </a:solidFill>
-          <a:ln w="12700">
-            <a:solidFill>
-              <a:srgbClr val="5D300F"/>
-            </a:solidFill>
-            <a:prstDash val="solid"/>
-          </a:ln>
-        </p:spPr>
-      </p:sp>
-      <p:sp>
-        <p:nvSpPr>
-          <p:cNvPr id="38" name="Text 35"/>
-          <p:cNvSpPr/>
-          <p:nvPr/>
-        </p:nvSpPr>
-        <p:spPr>
-          <a:xfrm>
-            <a:off x="8065008" y="4764024"/>
+            <a:off x="8065008" y="4032504"/>
             <a:ext cx="3886200" cy="228600"/>
           </a:xfrm>
           <a:prstGeom prst="rect">
@@ -13035,14 +12900,14 @@
       </p:sp>
       <p:sp>
         <p:nvSpPr>
-          <p:cNvPr id="39" name="Text 36"/>
-          <p:cNvSpPr/>
-          <p:nvPr/>
-        </p:nvSpPr>
-        <p:spPr>
-          <a:xfrm>
-            <a:off x="8065008" y="5029200"/>
-            <a:ext cx="3886200" cy="1435608"/>
+          <p:cNvPr id="35" name="Text 32"/>
+          <p:cNvSpPr/>
+          <p:nvPr/>
+        </p:nvSpPr>
+        <p:spPr>
+          <a:xfrm>
+            <a:off x="8065008" y="4297680"/>
+            <a:ext cx="3886200" cy="2167128"/>
           </a:xfrm>
           <a:prstGeom prst="rect">
             <a:avLst/>
@@ -15076,7 +14941,7 @@
                 <a:ea typeface="Century Gothic" pitchFamily="34" charset="-122"/>
                 <a:cs typeface="Century Gothic" pitchFamily="34" charset="-120"/>
               </a:rPr>
-              <a:t>74</a:t>
+              <a:t>-1.9%</a:t>
             </a:r>
             <a:endParaRPr lang="en-US" sz="2600" dirty="0"/>
           </a:p>
@@ -15115,7 +14980,7 @@
                 <a:ea typeface="Calibri" pitchFamily="34" charset="-122"/>
                 <a:cs typeface="Calibri" pitchFamily="34" charset="-120"/>
               </a:rPr>
-              <a:t>Group Disb per Team</a:t>
+              <a:t>Change vs Prior Month</a:t>
             </a:r>
             <a:endParaRPr lang="en-US" sz="1200" dirty="0"/>
           </a:p>
@@ -15211,7 +15076,7 @@
                 <a:ea typeface="Century Gothic" pitchFamily="34" charset="-122"/>
                 <a:cs typeface="Century Gothic" pitchFamily="34" charset="-120"/>
               </a:rPr>
-              <a:t>-6.3%</a:t>
+              <a:t>74</a:t>
             </a:r>
             <a:endParaRPr lang="en-US" sz="2600" dirty="0"/>
           </a:p>
@@ -15250,7 +15115,7 @@
                 <a:ea typeface="Calibri" pitchFamily="34" charset="-122"/>
                 <a:cs typeface="Calibri" pitchFamily="34" charset="-120"/>
               </a:rPr>
-              <a:t>Change vs Prior Month</a:t>
+              <a:t>Group Disb per Team</a:t>
             </a:r>
             <a:endParaRPr lang="en-US" sz="1200" dirty="0"/>
           </a:p>

--- a/reports/2026-02.pptx
+++ b/reports/2026-02.pptx
@@ -17600,7 +17600,7 @@
                 <a:ea typeface="Calibri" pitchFamily="34" charset="-122"/>
                 <a:cs typeface="Calibri" pitchFamily="34" charset="-120"/>
               </a:rPr>
-              <a:t>Group Median TAT</a:t>
+              <a:t>Group Median Turnaround</a:t>
             </a:r>
             <a:endParaRPr lang="en-US" sz="1200" dirty="0"/>
           </a:p>

--- a/reports/2026-02.pptx
+++ b/reports/2026-02.pptx
@@ -2044,13 +2044,13 @@
                     <c:v>Kenya</c:v>
                   </c:pt>
                   <c:pt idx="2">
+                    <c:v>Nigeria</c:v>
+                  </c:pt>
+                  <c:pt idx="3">
                     <c:v>Uganda</c:v>
                   </c:pt>
-                  <c:pt idx="3">
+                  <c:pt idx="4">
                     <c:v>Sierra Leone</c:v>
-                  </c:pt>
-                  <c:pt idx="4">
-                    <c:v>Nigeria</c:v>
                   </c:pt>
                 </c:lvl>
               </c:multiLvlStrCache>
@@ -2063,19 +2063,19 @@
                 <c:formatCode>General</c:formatCode>
                 <c:ptCount val="5"/>
                 <c:pt idx="0">
-                  <c:v>0</c:v>
+                  <c:v>2</c:v>
                 </c:pt>
                 <c:pt idx="1">
-                  <c:v>0</c:v>
+                  <c:v>2</c:v>
                 </c:pt>
                 <c:pt idx="2">
-                  <c:v>0</c:v>
+                  <c:v>4</c:v>
                 </c:pt>
                 <c:pt idx="3">
-                  <c:v>0</c:v>
+                  <c:v>5</c:v>
                 </c:pt>
                 <c:pt idx="4">
-                  <c:v>0</c:v>
+                  <c:v>6</c:v>
                 </c:pt>
               </c:numCache>
             </c:numRef>
@@ -12931,7 +12931,7 @@
                 <a:ea typeface="Calibri" pitchFamily="34" charset="-122"/>
                 <a:cs typeface="Calibri" pitchFamily="34" charset="-120"/>
               </a:rPr>
-              <a:t>Group total: 28,147 applications.</a:t>
+              <a:t>Group total: 28,147 applications (-7.1% vs prior month).</a:t>
             </a:r>
             <a:endParaRPr lang="en-US" sz="1200" dirty="0"/>
           </a:p>
@@ -17303,7 +17303,7 @@
             <a:r>
               <a:rPr lang="en-US" sz="1200" b="1" dirty="0">
                 <a:solidFill>
-                  <a:srgbClr val="718096"/>
+                  <a:srgbClr val="1A7A6E"/>
                 </a:solidFill>
                 <a:latin typeface="Calibri" pitchFamily="34" charset="0"/>
                 <a:ea typeface="Calibri" pitchFamily="34" charset="-122"/>
@@ -17342,13 +17342,13 @@
             <a:r>
               <a:rPr lang="en-US" sz="1200" b="1" dirty="0">
                 <a:solidFill>
-                  <a:srgbClr val="718096"/>
+                  <a:srgbClr val="1A7A6E"/>
                 </a:solidFill>
                 <a:latin typeface="Calibri" pitchFamily="34" charset="0"/>
                 <a:ea typeface="Calibri" pitchFamily="34" charset="-122"/>
                 <a:cs typeface="Calibri" pitchFamily="34" charset="-120"/>
               </a:rPr>
-              <a:t>—</a:t>
+              <a:t>↓</a:t>
             </a:r>
             <a:endParaRPr lang="en-US" sz="1200" dirty="0"/>
           </a:p>
@@ -17381,13 +17381,13 @@
             <a:r>
               <a:rPr lang="en-US" sz="1200" b="1" dirty="0">
                 <a:solidFill>
-                  <a:srgbClr val="718096"/>
+                  <a:srgbClr val="C0392B"/>
                 </a:solidFill>
                 <a:latin typeface="Calibri" pitchFamily="34" charset="0"/>
                 <a:ea typeface="Calibri" pitchFamily="34" charset="-122"/>
                 <a:cs typeface="Calibri" pitchFamily="34" charset="-120"/>
               </a:rPr>
-              <a:t>—</a:t>
+              <a:t>↑</a:t>
             </a:r>
             <a:endParaRPr lang="en-US" sz="1200" dirty="0"/>
           </a:p>
@@ -17420,13 +17420,13 @@
             <a:r>
               <a:rPr lang="en-US" sz="1200" b="1" dirty="0">
                 <a:solidFill>
-                  <a:srgbClr val="718096"/>
+                  <a:srgbClr val="C0392B"/>
                 </a:solidFill>
                 <a:latin typeface="Calibri" pitchFamily="34" charset="0"/>
                 <a:ea typeface="Calibri" pitchFamily="34" charset="-122"/>
                 <a:cs typeface="Calibri" pitchFamily="34" charset="-120"/>
               </a:rPr>
-              <a:t>—</a:t>
+              <a:t>↑</a:t>
             </a:r>
             <a:endParaRPr lang="en-US" sz="1200" dirty="0"/>
           </a:p>
@@ -17459,7 +17459,7 @@
             <a:r>
               <a:rPr lang="en-US" sz="1200" b="1" dirty="0">
                 <a:solidFill>
-                  <a:srgbClr val="718096"/>
+                  <a:srgbClr val="1A7A6E"/>
                 </a:solidFill>
                 <a:latin typeface="Calibri" pitchFamily="34" charset="0"/>
                 <a:ea typeface="Calibri" pitchFamily="34" charset="-122"/>
@@ -17561,7 +17561,7 @@
                 <a:ea typeface="Century Gothic" pitchFamily="34" charset="-122"/>
                 <a:cs typeface="Century Gothic" pitchFamily="34" charset="-120"/>
               </a:rPr>
-              <a:t>—</a:t>
+              <a:t>4 days</a:t>
             </a:r>
             <a:endParaRPr lang="en-US" sz="2600" dirty="0"/>
           </a:p>
@@ -17696,7 +17696,7 @@
                 <a:ea typeface="Century Gothic" pitchFamily="34" charset="-122"/>
                 <a:cs typeface="Century Gothic" pitchFamily="34" charset="-120"/>
               </a:rPr>
-              <a:t>—</a:t>
+              <a:t>+33.3%</a:t>
             </a:r>
             <a:endParaRPr lang="en-US" sz="2600" dirty="0"/>
           </a:p>

--- a/reports/2026-02.pptx
+++ b/reports/2026-02.pptx
@@ -15129,7 +15129,7 @@
         </p:nvSpPr>
         <p:spPr>
           <a:xfrm>
-            <a:off x="7955280" y="3794760"/>
+            <a:off x="7955280" y="3703320"/>
             <a:ext cx="4069080" cy="292608"/>
           </a:xfrm>
           <a:prstGeom prst="rect">
@@ -15154,7 +15154,7 @@
         </p:nvSpPr>
         <p:spPr>
           <a:xfrm>
-            <a:off x="7955280" y="3794760"/>
+            <a:off x="7955280" y="3703320"/>
             <a:ext cx="54864" cy="292608"/>
           </a:xfrm>
           <a:prstGeom prst="rect">
@@ -15179,7 +15179,7 @@
         </p:nvSpPr>
         <p:spPr>
           <a:xfrm>
-            <a:off x="8065008" y="3794760"/>
+            <a:off x="8065008" y="3703320"/>
             <a:ext cx="3959352" cy="292608"/>
           </a:xfrm>
           <a:prstGeom prst="rect">
@@ -15218,8 +15218,8 @@
         </p:nvSpPr>
         <p:spPr>
           <a:xfrm>
-            <a:off x="7955280" y="4133088"/>
-            <a:ext cx="1234440" cy="566928"/>
+            <a:off x="7955280" y="4023360"/>
+            <a:ext cx="1234440" cy="530352"/>
           </a:xfrm>
           <a:prstGeom prst="rect">
             <a:avLst/>
@@ -15243,8 +15243,8 @@
         </p:nvSpPr>
         <p:spPr>
           <a:xfrm>
-            <a:off x="7955280" y="4133088"/>
-            <a:ext cx="1234440" cy="256032"/>
+            <a:off x="7955280" y="4023360"/>
+            <a:ext cx="1234440" cy="237744"/>
           </a:xfrm>
           <a:prstGeom prst="rect">
             <a:avLst/>
@@ -15260,7 +15260,7 @@
               <a:buNone/>
             </a:pPr>
             <a:r>
-              <a:rPr lang="en-US" sz="1200" dirty="0">
+              <a:rPr lang="en-US" sz="1100" dirty="0">
                 <a:solidFill>
                   <a:srgbClr val="718096"/>
                 </a:solidFill>
@@ -15270,7 +15270,7 @@
               </a:rPr>
               <a:t>Tanzania</a:t>
             </a:r>
-            <a:endParaRPr lang="en-US" sz="1200" dirty="0"/>
+            <a:endParaRPr lang="en-US" sz="1100" dirty="0"/>
           </a:p>
         </p:txBody>
       </p:sp>
@@ -15282,8 +15282,8 @@
         </p:nvSpPr>
         <p:spPr>
           <a:xfrm>
-            <a:off x="7955280" y="4389120"/>
-            <a:ext cx="1234440" cy="310896"/>
+            <a:off x="7955280" y="4261104"/>
+            <a:ext cx="1234440" cy="292608"/>
           </a:xfrm>
           <a:prstGeom prst="rect">
             <a:avLst/>
@@ -15299,7 +15299,7 @@
               <a:buNone/>
             </a:pPr>
             <a:r>
-              <a:rPr lang="en-US" sz="1200" b="1" dirty="0">
+              <a:rPr lang="en-US" sz="1100" b="1" dirty="0">
                 <a:solidFill>
                   <a:srgbClr val="5D300F"/>
                 </a:solidFill>
@@ -15309,7 +15309,7 @@
               </a:rPr>
               <a:t>139</a:t>
             </a:r>
-            <a:endParaRPr lang="en-US" sz="1200" dirty="0"/>
+            <a:endParaRPr lang="en-US" sz="1100" dirty="0"/>
           </a:p>
         </p:txBody>
       </p:sp>
@@ -15321,8 +15321,8 @@
         </p:nvSpPr>
         <p:spPr>
           <a:xfrm>
-            <a:off x="9308592" y="4133088"/>
-            <a:ext cx="1234440" cy="566928"/>
+            <a:off x="9308592" y="4023360"/>
+            <a:ext cx="1234440" cy="530352"/>
           </a:xfrm>
           <a:prstGeom prst="rect">
             <a:avLst/>
@@ -15346,8 +15346,8 @@
         </p:nvSpPr>
         <p:spPr>
           <a:xfrm>
-            <a:off x="9308592" y="4133088"/>
-            <a:ext cx="1234440" cy="256032"/>
+            <a:off x="9308592" y="4023360"/>
+            <a:ext cx="1234440" cy="237744"/>
           </a:xfrm>
           <a:prstGeom prst="rect">
             <a:avLst/>
@@ -15363,7 +15363,7 @@
               <a:buNone/>
             </a:pPr>
             <a:r>
-              <a:rPr lang="en-US" sz="1200" dirty="0">
+              <a:rPr lang="en-US" sz="1100" dirty="0">
                 <a:solidFill>
                   <a:srgbClr val="718096"/>
                 </a:solidFill>
@@ -15373,7 +15373,7 @@
               </a:rPr>
               <a:t>Kenya</a:t>
             </a:r>
-            <a:endParaRPr lang="en-US" sz="1200" dirty="0"/>
+            <a:endParaRPr lang="en-US" sz="1100" dirty="0"/>
           </a:p>
         </p:txBody>
       </p:sp>
@@ -15385,8 +15385,8 @@
         </p:nvSpPr>
         <p:spPr>
           <a:xfrm>
-            <a:off x="9308592" y="4389120"/>
-            <a:ext cx="1234440" cy="310896"/>
+            <a:off x="9308592" y="4261104"/>
+            <a:ext cx="1234440" cy="292608"/>
           </a:xfrm>
           <a:prstGeom prst="rect">
             <a:avLst/>
@@ -15402,7 +15402,7 @@
               <a:buNone/>
             </a:pPr>
             <a:r>
-              <a:rPr lang="en-US" sz="1200" b="1" dirty="0">
+              <a:rPr lang="en-US" sz="1100" b="1" dirty="0">
                 <a:solidFill>
                   <a:srgbClr val="5D300F"/>
                 </a:solidFill>
@@ -15412,7 +15412,7 @@
               </a:rPr>
               <a:t>102</a:t>
             </a:r>
-            <a:endParaRPr lang="en-US" sz="1200" dirty="0"/>
+            <a:endParaRPr lang="en-US" sz="1100" dirty="0"/>
           </a:p>
         </p:txBody>
       </p:sp>
@@ -15424,8 +15424,8 @@
         </p:nvSpPr>
         <p:spPr>
           <a:xfrm>
-            <a:off x="10661904" y="4133088"/>
-            <a:ext cx="1234440" cy="566928"/>
+            <a:off x="10661904" y="4023360"/>
+            <a:ext cx="1234440" cy="530352"/>
           </a:xfrm>
           <a:prstGeom prst="rect">
             <a:avLst/>
@@ -15449,8 +15449,8 @@
         </p:nvSpPr>
         <p:spPr>
           <a:xfrm>
-            <a:off x="10661904" y="4133088"/>
-            <a:ext cx="1234440" cy="256032"/>
+            <a:off x="10661904" y="4023360"/>
+            <a:ext cx="1234440" cy="237744"/>
           </a:xfrm>
           <a:prstGeom prst="rect">
             <a:avLst/>
@@ -15466,7 +15466,7 @@
               <a:buNone/>
             </a:pPr>
             <a:r>
-              <a:rPr lang="en-US" sz="1200" dirty="0">
+              <a:rPr lang="en-US" sz="1100" dirty="0">
                 <a:solidFill>
                   <a:srgbClr val="718096"/>
                 </a:solidFill>
@@ -15476,7 +15476,7 @@
               </a:rPr>
               <a:t>Sierra Leone</a:t>
             </a:r>
-            <a:endParaRPr lang="en-US" sz="1200" dirty="0"/>
+            <a:endParaRPr lang="en-US" sz="1100" dirty="0"/>
           </a:p>
         </p:txBody>
       </p:sp>
@@ -15488,8 +15488,8 @@
         </p:nvSpPr>
         <p:spPr>
           <a:xfrm>
-            <a:off x="10661904" y="4389120"/>
-            <a:ext cx="1234440" cy="310896"/>
+            <a:off x="10661904" y="4261104"/>
+            <a:ext cx="1234440" cy="292608"/>
           </a:xfrm>
           <a:prstGeom prst="rect">
             <a:avLst/>
@@ -15505,7 +15505,7 @@
               <a:buNone/>
             </a:pPr>
             <a:r>
-              <a:rPr lang="en-US" sz="1200" b="1" dirty="0">
+              <a:rPr lang="en-US" sz="1100" b="1" dirty="0">
                 <a:solidFill>
                   <a:srgbClr val="5D300F"/>
                 </a:solidFill>
@@ -15515,7 +15515,7 @@
               </a:rPr>
               <a:t>33</a:t>
             </a:r>
-            <a:endParaRPr lang="en-US" sz="1200" dirty="0"/>
+            <a:endParaRPr lang="en-US" sz="1100" dirty="0"/>
           </a:p>
         </p:txBody>
       </p:sp>
@@ -15527,8 +15527,8 @@
         </p:nvSpPr>
         <p:spPr>
           <a:xfrm>
-            <a:off x="7955280" y="4791456"/>
-            <a:ext cx="1234440" cy="566928"/>
+            <a:off x="7955280" y="4617720"/>
+            <a:ext cx="1234440" cy="530352"/>
           </a:xfrm>
           <a:prstGeom prst="rect">
             <a:avLst/>
@@ -15552,8 +15552,8 @@
         </p:nvSpPr>
         <p:spPr>
           <a:xfrm>
-            <a:off x="7955280" y="4791456"/>
-            <a:ext cx="1234440" cy="256032"/>
+            <a:off x="7955280" y="4617720"/>
+            <a:ext cx="1234440" cy="237744"/>
           </a:xfrm>
           <a:prstGeom prst="rect">
             <a:avLst/>
@@ -15569,7 +15569,7 @@
               <a:buNone/>
             </a:pPr>
             <a:r>
-              <a:rPr lang="en-US" sz="1200" dirty="0">
+              <a:rPr lang="en-US" sz="1100" dirty="0">
                 <a:solidFill>
                   <a:srgbClr val="718096"/>
                 </a:solidFill>
@@ -15579,7 +15579,7 @@
               </a:rPr>
               <a:t>Uganda</a:t>
             </a:r>
-            <a:endParaRPr lang="en-US" sz="1200" dirty="0"/>
+            <a:endParaRPr lang="en-US" sz="1100" dirty="0"/>
           </a:p>
         </p:txBody>
       </p:sp>
@@ -15591,8 +15591,8 @@
         </p:nvSpPr>
         <p:spPr>
           <a:xfrm>
-            <a:off x="7955280" y="5047488"/>
-            <a:ext cx="1234440" cy="310896"/>
+            <a:off x="7955280" y="4855464"/>
+            <a:ext cx="1234440" cy="292608"/>
           </a:xfrm>
           <a:prstGeom prst="rect">
             <a:avLst/>
@@ -15608,7 +15608,7 @@
               <a:buNone/>
             </a:pPr>
             <a:r>
-              <a:rPr lang="en-US" sz="1200" b="1" dirty="0">
+              <a:rPr lang="en-US" sz="1100" b="1" dirty="0">
                 <a:solidFill>
                   <a:srgbClr val="5D300F"/>
                 </a:solidFill>
@@ -15618,7 +15618,7 @@
               </a:rPr>
               <a:t>39</a:t>
             </a:r>
-            <a:endParaRPr lang="en-US" sz="1200" dirty="0"/>
+            <a:endParaRPr lang="en-US" sz="1100" dirty="0"/>
           </a:p>
         </p:txBody>
       </p:sp>
@@ -15630,8 +15630,8 @@
         </p:nvSpPr>
         <p:spPr>
           <a:xfrm>
-            <a:off x="9308592" y="4791456"/>
-            <a:ext cx="1234440" cy="566928"/>
+            <a:off x="9308592" y="4617720"/>
+            <a:ext cx="1234440" cy="530352"/>
           </a:xfrm>
           <a:prstGeom prst="rect">
             <a:avLst/>
@@ -15655,8 +15655,8 @@
         </p:nvSpPr>
         <p:spPr>
           <a:xfrm>
-            <a:off x="9308592" y="4791456"/>
-            <a:ext cx="1234440" cy="256032"/>
+            <a:off x="9308592" y="4617720"/>
+            <a:ext cx="1234440" cy="237744"/>
           </a:xfrm>
           <a:prstGeom prst="rect">
             <a:avLst/>
@@ -15672,7 +15672,7 @@
               <a:buNone/>
             </a:pPr>
             <a:r>
-              <a:rPr lang="en-US" sz="1200" dirty="0">
+              <a:rPr lang="en-US" sz="1100" dirty="0">
                 <a:solidFill>
                   <a:srgbClr val="718096"/>
                 </a:solidFill>
@@ -15682,7 +15682,7 @@
               </a:rPr>
               <a:t>Nigeria</a:t>
             </a:r>
-            <a:endParaRPr lang="en-US" sz="1200" dirty="0"/>
+            <a:endParaRPr lang="en-US" sz="1100" dirty="0"/>
           </a:p>
         </p:txBody>
       </p:sp>
@@ -15694,8 +15694,8 @@
         </p:nvSpPr>
         <p:spPr>
           <a:xfrm>
-            <a:off x="9308592" y="5047488"/>
-            <a:ext cx="1234440" cy="310896"/>
+            <a:off x="9308592" y="4855464"/>
+            <a:ext cx="1234440" cy="292608"/>
           </a:xfrm>
           <a:prstGeom prst="rect">
             <a:avLst/>
@@ -15711,7 +15711,7 @@
               <a:buNone/>
             </a:pPr>
             <a:r>
-              <a:rPr lang="en-US" sz="1200" b="1" dirty="0">
+              <a:rPr lang="en-US" sz="1100" b="1" dirty="0">
                 <a:solidFill>
                   <a:srgbClr val="5D300F"/>
                 </a:solidFill>
@@ -15721,7 +15721,7 @@
               </a:rPr>
               <a:t>36</a:t>
             </a:r>
-            <a:endParaRPr lang="en-US" sz="1200" dirty="0"/>
+            <a:endParaRPr lang="en-US" sz="1100" dirty="0"/>
           </a:p>
         </p:txBody>
       </p:sp>
@@ -15733,8 +15733,8 @@
         </p:nvSpPr>
         <p:spPr>
           <a:xfrm>
-            <a:off x="7955280" y="5577840"/>
-            <a:ext cx="4069080" cy="978408"/>
+            <a:off x="7955280" y="5321808"/>
+            <a:ext cx="4069080" cy="960120"/>
           </a:xfrm>
           <a:prstGeom prst="rect">
             <a:avLst/>
@@ -15758,8 +15758,8 @@
         </p:nvSpPr>
         <p:spPr>
           <a:xfrm>
-            <a:off x="7955280" y="5577840"/>
-            <a:ext cx="54864" cy="978408"/>
+            <a:off x="7955280" y="5321808"/>
+            <a:ext cx="54864" cy="960120"/>
           </a:xfrm>
           <a:prstGeom prst="rect">
             <a:avLst/>
@@ -15783,7 +15783,7 @@
         </p:nvSpPr>
         <p:spPr>
           <a:xfrm>
-            <a:off x="8065008" y="5632704"/>
+            <a:off x="8065008" y="5376672"/>
             <a:ext cx="3886200" cy="228600"/>
           </a:xfrm>
           <a:prstGeom prst="rect">
@@ -15822,8 +15822,8 @@
         </p:nvSpPr>
         <p:spPr>
           <a:xfrm>
-            <a:off x="8065008" y="5897880"/>
-            <a:ext cx="3886200" cy="566928"/>
+            <a:off x="8065008" y="5641848"/>
+            <a:ext cx="3886200" cy="548640"/>
           </a:xfrm>
           <a:prstGeom prst="rect">
             <a:avLst/>
@@ -17690,13 +17690,13 @@
             <a:r>
               <a:rPr lang="en-US" sz="2600" b="1" dirty="0">
                 <a:solidFill>
-                  <a:srgbClr val="5D300F"/>
+                  <a:srgbClr val="C0392B"/>
                 </a:solidFill>
                 <a:latin typeface="Century Gothic" pitchFamily="34" charset="0"/>
                 <a:ea typeface="Century Gothic" pitchFamily="34" charset="-122"/>
                 <a:cs typeface="Century Gothic" pitchFamily="34" charset="-120"/>
               </a:rPr>
-              <a:t>+33.3%</a:t>
+              <a:t>↑</a:t>
             </a:r>
             <a:endParaRPr lang="en-US" sz="2600" dirty="0"/>
           </a:p>
@@ -17735,7 +17735,7 @@
                 <a:ea typeface="Calibri" pitchFamily="34" charset="-122"/>
                 <a:cs typeface="Calibri" pitchFamily="34" charset="-120"/>
               </a:rPr>
-              <a:t>Change vs Prior Month</a:t>
+              <a:t>Trend vs Prior Month</a:t>
             </a:r>
             <a:endParaRPr lang="en-US" sz="1200" dirty="0"/>
           </a:p>
@@ -17863,7 +17863,24 @@
                 <a:ea typeface="Calibri" pitchFamily="34" charset="-122"/>
                 <a:cs typeface="Calibri" pitchFamily="34" charset="-120"/>
               </a:rPr>
-              <a:t>—</a:t>
+              <a:t>Group median turnaround: N/A.</a:t>
+            </a:r>
+            <a:endParaRPr lang="en-US" sz="1200" dirty="0"/>
+          </a:p>
+          <a:p>
+            <a:pPr indent="0" marL="0">
+              <a:buNone/>
+            </a:pPr>
+            <a:r>
+              <a:rPr lang="en-US" sz="1200" dirty="0">
+                <a:solidFill>
+                  <a:srgbClr val="2D2A26"/>
+                </a:solidFill>
+                <a:latin typeface="Calibri" pitchFamily="34" charset="0"/>
+                <a:ea typeface="Calibri" pitchFamily="34" charset="-122"/>
+                <a:cs typeface="Calibri" pitchFamily="34" charset="-120"/>
+              </a:rPr>
+              <a:t>Fastest: Tanzania (2 days). Slowest: Sierra Leone (6 days).</a:t>
             </a:r>
             <a:endParaRPr lang="en-US" sz="1200" dirty="0"/>
           </a:p>

--- a/reports/2026-02.pptx
+++ b/reports/2026-02.pptx
@@ -17165,7 +17165,7 @@
                 <a:ea typeface="Century Gothic" pitchFamily="34" charset="-122"/>
                 <a:cs typeface="Century Gothic" pitchFamily="34" charset="-120"/>
               </a:rPr>
-              <a:t>Median Days from Application to Disbursement – February 2026</a:t>
+              <a:t>Avg Days from Application to Disbursement – February 2026</a:t>
             </a:r>
             <a:endParaRPr lang="en-US" sz="1200" dirty="0"/>
           </a:p>
@@ -17600,7 +17600,7 @@
                 <a:ea typeface="Calibri" pitchFamily="34" charset="-122"/>
                 <a:cs typeface="Calibri" pitchFamily="34" charset="-120"/>
               </a:rPr>
-              <a:t>Group Median Turnaround</a:t>
+              <a:t>Group Avg Turnaround Time</a:t>
             </a:r>
             <a:endParaRPr lang="en-US" sz="1200" dirty="0"/>
           </a:p>
@@ -17863,7 +17863,7 @@
                 <a:ea typeface="Calibri" pitchFamily="34" charset="-122"/>
                 <a:cs typeface="Calibri" pitchFamily="34" charset="-120"/>
               </a:rPr>
-              <a:t>Group median turnaround: N/A.</a:t>
+              <a:t>Group avg turnaround: 4 days.</a:t>
             </a:r>
             <a:endParaRPr lang="en-US" sz="1200" dirty="0"/>
           </a:p>

--- a/reports/2026-02.pptx
+++ b/reports/2026-02.pptx
@@ -119,7 +119,7 @@
 </p:presentation>
 </file>
 
-<file path=ppt/charts/chart1.xml><?xml version="1.0" encoding="utf-8"?>
+<file path=ppt/charts/chart11.xml><?xml version="1.0" encoding="utf-8"?>
 <c:chartSpace xmlns:c="http://schemas.openxmlformats.org/drawingml/2006/chart" xmlns:a="http://schemas.openxmlformats.org/drawingml/2006/main" xmlns:r="http://schemas.openxmlformats.org/officeDocument/2006/relationships">
   <c:date1904 val="0"/>
   <c:roundedCorners val="0"/>
@@ -419,307 +419,7 @@
 </c:chartSpace>
 </file>
 
-<file path=ppt/charts/chart10.xml><?xml version="1.0" encoding="utf-8"?>
-<c:chartSpace xmlns:c="http://schemas.openxmlformats.org/drawingml/2006/chart" xmlns:a="http://schemas.openxmlformats.org/drawingml/2006/main" xmlns:r="http://schemas.openxmlformats.org/officeDocument/2006/relationships">
-  <c:date1904 val="0"/>
-  <c:roundedCorners val="0"/>
-  <c:chart>
-    <c:autoTitleDeleted val="1"/>
-    <c:plotArea>
-      <c:layout/>
-      <c:barChart>
-        <c:barDir val="col"/>
-        <c:grouping val="clustered"/>
-        <c:varyColors val="0"/>
-        <c:ser>
-          <c:idx val="0"/>
-          <c:order val="0"/>
-          <c:tx>
-            <c:strRef>
-              <c:f>Sheet1!$B$1</c:f>
-              <c:strCache>
-                <c:ptCount val="1"/>
-                <c:pt idx="0">
-                  <c:v/>
-                </c:pt>
-              </c:strCache>
-            </c:strRef>
-          </c:tx>
-          <c:spPr>
-            <a:solidFill>
-              <a:srgbClr val="C0392B"/>
-            </a:solidFill>
-            <a:effectLst/>
-          </c:spPr>
-          <c:invertIfNegative val="0"/>
-          <c:dLbls>
-            <c:numFmt formatCode="#,##0" sourceLinked="0"/>
-            <c:txPr>
-              <a:bodyPr/>
-              <a:lstStyle/>
-              <a:p>
-                <a:pPr>
-                  <a:defRPr b="1" i="0" strike="noStrike" sz="1200" u="none">
-                    <a:solidFill>
-                      <a:srgbClr val="2D2A26"/>
-                    </a:solidFill>
-                    <a:latin typeface="Arial"/>
-                  </a:defRPr>
-                </a:pPr>
-              </a:p>
-            </c:txPr>
-            <c:showLegendKey val="0"/>
-            <c:showVal val="1"/>
-            <c:showCatName val="0"/>
-            <c:showSerName val="0"/>
-            <c:showPercent val="0"/>
-            <c:showBubbleSize val="0"/>
-            <c:showLeaderLines val="0"/>
-          </c:dLbls>
-          <c:dPt>
-            <c:idx val="0"/>
-            <c:invertIfNegative val="0"/>
-            <c:bubble3D val="0"/>
-            <c:spPr>
-              <a:solidFill>
-                <a:srgbClr val="C0392B"/>
-              </a:solidFill>
-              <a:effectLst/>
-            </c:spPr>
-          </c:dPt>
-          <c:dPt>
-            <c:idx val="1"/>
-            <c:invertIfNegative val="0"/>
-            <c:bubble3D val="0"/>
-            <c:spPr>
-              <a:solidFill>
-                <a:srgbClr val="C0392B"/>
-              </a:solidFill>
-              <a:effectLst/>
-            </c:spPr>
-          </c:dPt>
-          <c:dPt>
-            <c:idx val="2"/>
-            <c:invertIfNegative val="0"/>
-            <c:bubble3D val="0"/>
-            <c:spPr>
-              <a:solidFill>
-                <a:srgbClr val="C0392B"/>
-              </a:solidFill>
-              <a:effectLst/>
-            </c:spPr>
-          </c:dPt>
-          <c:dPt>
-            <c:idx val="3"/>
-            <c:invertIfNegative val="0"/>
-            <c:bubble3D val="0"/>
-            <c:spPr>
-              <a:solidFill>
-                <a:srgbClr val="C0392B"/>
-              </a:solidFill>
-              <a:effectLst/>
-            </c:spPr>
-          </c:dPt>
-          <c:dPt>
-            <c:idx val="4"/>
-            <c:invertIfNegative val="0"/>
-            <c:bubble3D val="0"/>
-            <c:spPr>
-              <a:solidFill>
-                <a:srgbClr val="C0392B"/>
-              </a:solidFill>
-              <a:effectLst/>
-            </c:spPr>
-          </c:dPt>
-          <c:cat>
-            <c:multiLvlStrRef>
-              <c:f>Sheet1!$A$2:$A$6</c:f>
-              <c:multiLvlStrCache>
-                <c:ptCount val="5"/>
-                <c:lvl>
-                  <c:pt idx="0">
-                    <c:v>Sierra Leone</c:v>
-                  </c:pt>
-                  <c:pt idx="1">
-                    <c:v>Uganda</c:v>
-                  </c:pt>
-                  <c:pt idx="2">
-                    <c:v>Kenya</c:v>
-                  </c:pt>
-                  <c:pt idx="3">
-                    <c:v>Tanzania</c:v>
-                  </c:pt>
-                  <c:pt idx="4">
-                    <c:v>Nigeria</c:v>
-                  </c:pt>
-                </c:lvl>
-              </c:multiLvlStrCache>
-            </c:multiLvlStrRef>
-          </c:cat>
-          <c:val>
-            <c:numRef>
-              <c:f>Sheet1!$B$2:$B$6</c:f>
-              <c:numCache>
-                <c:formatCode>General</c:formatCode>
-                <c:ptCount val="5"/>
-                <c:pt idx="0">
-                  <c:v>6</c:v>
-                </c:pt>
-                <c:pt idx="1">
-                  <c:v>30</c:v>
-                </c:pt>
-                <c:pt idx="2">
-                  <c:v>37</c:v>
-                </c:pt>
-                <c:pt idx="3">
-                  <c:v>43</c:v>
-                </c:pt>
-                <c:pt idx="4">
-                  <c:v>49</c:v>
-                </c:pt>
-              </c:numCache>
-            </c:numRef>
-          </c:val>
-        </c:ser>
-        <c:dLbls>
-          <c:numFmt formatCode="#,##0" sourceLinked="0"/>
-          <c:txPr>
-            <a:bodyPr/>
-            <a:lstStyle/>
-            <a:p>
-              <a:pPr>
-                <a:defRPr b="1" i="0" strike="noStrike" sz="1200" u="none">
-                  <a:solidFill>
-                    <a:srgbClr val="2D2A26"/>
-                  </a:solidFill>
-                  <a:latin typeface="Arial"/>
-                </a:defRPr>
-              </a:pPr>
-            </a:p>
-          </c:txPr>
-          <c:showLegendKey val="0"/>
-          <c:showVal val="1"/>
-          <c:showCatName val="0"/>
-          <c:showSerName val="0"/>
-          <c:showPercent val="0"/>
-          <c:showBubbleSize val="0"/>
-          <c:showLeaderLines val="0"/>
-        </c:dLbls>
-        <c:gapWidth val="150"/>
-        <c:overlap val="0"/>
-        <c:axId val="2094734554"/>
-        <c:axId val="2094734552"/>
-        <c:axId val="2094734556"/>
-      </c:barChart>
-      <c:catAx>
-        <c:axId val="2094734554"/>
-        <c:scaling>
-          <c:orientation val="minMax"/>
-        </c:scaling>
-        <c:delete val="0"/>
-        <c:axPos val="b"/>
-        <c:numFmt formatCode="General" sourceLinked="1"/>
-        <c:majorTickMark val="out"/>
-        <c:minorTickMark val="none"/>
-        <c:tickLblPos val="low"/>
-        <c:spPr>
-          <a:ln w="12700" cap="flat">
-            <a:solidFill>
-              <a:srgbClr val="888888"/>
-            </a:solidFill>
-            <a:prstDash val="solid"/>
-            <a:round/>
-          </a:ln>
-        </c:spPr>
-        <c:txPr>
-          <a:bodyPr/>
-          <a:lstStyle/>
-          <a:p>
-            <a:pPr>
-              <a:defRPr sz="1200" b="1" i="0" u="none" strike="noStrike">
-                <a:solidFill>
-                  <a:srgbClr val="2D2A26"/>
-                </a:solidFill>
-                <a:latin typeface="Arial"/>
-              </a:defRPr>
-            </a:pPr>
-            <a:endParaRPr lang="en-US"/>
-          </a:p>
-        </c:txPr>
-        <c:crossAx val="2094734552"/>
-        <c:crosses val="autoZero"/>
-        <c:auto val="1"/>
-        <c:lblAlgn val="ctr"/>
-        <c:noMultiLvlLbl val="1"/>
-      </c:catAx>
-      <c:valAx>
-        <c:axId val="2094734552"/>
-        <c:scaling>
-          <c:orientation val="minMax"/>
-        </c:scaling>
-        <c:delete val="1"/>
-        <c:axPos val="l"/>
-        <c:numFmt formatCode="General" sourceLinked="0"/>
-        <c:majorTickMark val="out"/>
-        <c:minorTickMark val="none"/>
-        <c:tickLblPos val="nextTo"/>
-        <c:spPr>
-          <a:ln w="12700" cap="flat">
-            <a:solidFill>
-              <a:srgbClr val="888888"/>
-            </a:solidFill>
-            <a:prstDash val="solid"/>
-            <a:round/>
-          </a:ln>
-        </c:spPr>
-        <c:txPr>
-          <a:bodyPr/>
-          <a:lstStyle/>
-          <a:p>
-            <a:pPr>
-              <a:defRPr sz="1200" b="0" i="0" u="none" strike="noStrike">
-                <a:solidFill>
-                  <a:srgbClr val="000000"/>
-                </a:solidFill>
-                <a:latin typeface="Arial"/>
-              </a:defRPr>
-            </a:pPr>
-            <a:endParaRPr lang="en-US"/>
-          </a:p>
-        </c:txPr>
-        <c:crossAx val="2094734554"/>
-        <c:crosses val="autoZero"/>
-        <c:crossBetween val="between"/>
-      </c:valAx>
-      <c:spPr>
-        <a:solidFill>
-          <a:srgbClr val="FFFFFF"/>
-        </a:solidFill>
-        <a:ln>
-          <a:noFill/>
-        </a:ln>
-        <a:effectLst/>
-      </c:spPr>
-    </c:plotArea>
-    <c:plotVisOnly val="1"/>
-    <c:dispBlanksAs val="span"/>
-  </c:chart>
-  <c:spPr>
-    <a:solidFill>
-      <a:srgbClr val="FFFFFF"/>
-    </a:solidFill>
-    <a:ln>
-      <a:noFill/>
-    </a:ln>
-    <a:effectLst/>
-  </c:spPr>
-  <c:externalData r:id="rId1">
-    <c:autoUpdate val="0"/>
-  </c:externalData>
-</c:chartSpace>
-</file>
-
-<file path=ppt/charts/chart2.xml><?xml version="1.0" encoding="utf-8"?>
+<file path=ppt/charts/chart12.xml><?xml version="1.0" encoding="utf-8"?>
 <c:chartSpace xmlns:c="http://schemas.openxmlformats.org/drawingml/2006/chart" xmlns:a="http://schemas.openxmlformats.org/drawingml/2006/main" xmlns:r="http://schemas.openxmlformats.org/officeDocument/2006/relationships">
   <c:date1904 val="0"/>
   <c:roundedCorners val="0"/>
@@ -1019,7 +719,7 @@
 </c:chartSpace>
 </file>
 
-<file path=ppt/charts/chart3.xml><?xml version="1.0" encoding="utf-8"?>
+<file path=ppt/charts/chart13.xml><?xml version="1.0" encoding="utf-8"?>
 <c:chartSpace xmlns:c="http://schemas.openxmlformats.org/drawingml/2006/chart" xmlns:a="http://schemas.openxmlformats.org/drawingml/2006/main" xmlns:r="http://schemas.openxmlformats.org/officeDocument/2006/relationships">
   <c:date1904 val="0"/>
   <c:roundedCorners val="0"/>
@@ -1319,7 +1019,7 @@
 </c:chartSpace>
 </file>
 
-<file path=ppt/charts/chart4.xml><?xml version="1.0" encoding="utf-8"?>
+<file path=ppt/charts/chart14.xml><?xml version="1.0" encoding="utf-8"?>
 <c:chartSpace xmlns:c="http://schemas.openxmlformats.org/drawingml/2006/chart" xmlns:a="http://schemas.openxmlformats.org/drawingml/2006/main" xmlns:r="http://schemas.openxmlformats.org/officeDocument/2006/relationships">
   <c:date1904 val="0"/>
   <c:roundedCorners val="0"/>
@@ -1619,7 +1319,7 @@
 </c:chartSpace>
 </file>
 
-<file path=ppt/charts/chart5.xml><?xml version="1.0" encoding="utf-8"?>
+<file path=ppt/charts/chart15.xml><?xml version="1.0" encoding="utf-8"?>
 <c:chartSpace xmlns:c="http://schemas.openxmlformats.org/drawingml/2006/chart" xmlns:a="http://schemas.openxmlformats.org/drawingml/2006/main" xmlns:r="http://schemas.openxmlformats.org/officeDocument/2006/relationships">
   <c:date1904 val="0"/>
   <c:roundedCorners val="0"/>
@@ -1919,7 +1619,7 @@
 </c:chartSpace>
 </file>
 
-<file path=ppt/charts/chart6.xml><?xml version="1.0" encoding="utf-8"?>
+<file path=ppt/charts/chart16.xml><?xml version="1.0" encoding="utf-8"?>
 <c:chartSpace xmlns:c="http://schemas.openxmlformats.org/drawingml/2006/chart" xmlns:a="http://schemas.openxmlformats.org/drawingml/2006/main" xmlns:r="http://schemas.openxmlformats.org/officeDocument/2006/relationships">
   <c:date1904 val="0"/>
   <c:roundedCorners val="0"/>
@@ -2219,7 +1919,7 @@
 </c:chartSpace>
 </file>
 
-<file path=ppt/charts/chart7.xml><?xml version="1.0" encoding="utf-8"?>
+<file path=ppt/charts/chart17.xml><?xml version="1.0" encoding="utf-8"?>
 <c:chartSpace xmlns:c="http://schemas.openxmlformats.org/drawingml/2006/chart" xmlns:a="http://schemas.openxmlformats.org/drawingml/2006/main" xmlns:r="http://schemas.openxmlformats.org/officeDocument/2006/relationships">
   <c:date1904 val="0"/>
   <c:roundedCorners val="0"/>
@@ -2519,7 +2219,7 @@
 </c:chartSpace>
 </file>
 
-<file path=ppt/charts/chart8.xml><?xml version="1.0" encoding="utf-8"?>
+<file path=ppt/charts/chart18.xml><?xml version="1.0" encoding="utf-8"?>
 <c:chartSpace xmlns:c="http://schemas.openxmlformats.org/drawingml/2006/chart" xmlns:a="http://schemas.openxmlformats.org/drawingml/2006/main" xmlns:r="http://schemas.openxmlformats.org/officeDocument/2006/relationships">
   <c:date1904 val="0"/>
   <c:roundedCorners val="0"/>
@@ -2819,7 +2519,7 @@
 </c:chartSpace>
 </file>
 
-<file path=ppt/charts/chart9.xml><?xml version="1.0" encoding="utf-8"?>
+<file path=ppt/charts/chart19.xml><?xml version="1.0" encoding="utf-8"?>
 <c:chartSpace xmlns:c="http://schemas.openxmlformats.org/drawingml/2006/chart" xmlns:a="http://schemas.openxmlformats.org/drawingml/2006/main" xmlns:r="http://schemas.openxmlformats.org/officeDocument/2006/relationships">
   <c:date1904 val="0"/>
   <c:roundedCorners val="0"/>
@@ -2976,6 +2676,306 @@
                 </c:pt>
                 <c:pt idx="4">
                   <c:v>227</c:v>
+                </c:pt>
+              </c:numCache>
+            </c:numRef>
+          </c:val>
+        </c:ser>
+        <c:dLbls>
+          <c:numFmt formatCode="#,##0" sourceLinked="0"/>
+          <c:txPr>
+            <a:bodyPr/>
+            <a:lstStyle/>
+            <a:p>
+              <a:pPr>
+                <a:defRPr b="1" i="0" strike="noStrike" sz="1200" u="none">
+                  <a:solidFill>
+                    <a:srgbClr val="2D2A26"/>
+                  </a:solidFill>
+                  <a:latin typeface="Arial"/>
+                </a:defRPr>
+              </a:pPr>
+            </a:p>
+          </c:txPr>
+          <c:showLegendKey val="0"/>
+          <c:showVal val="1"/>
+          <c:showCatName val="0"/>
+          <c:showSerName val="0"/>
+          <c:showPercent val="0"/>
+          <c:showBubbleSize val="0"/>
+          <c:showLeaderLines val="0"/>
+        </c:dLbls>
+        <c:gapWidth val="150"/>
+        <c:overlap val="0"/>
+        <c:axId val="2094734554"/>
+        <c:axId val="2094734552"/>
+        <c:axId val="2094734556"/>
+      </c:barChart>
+      <c:catAx>
+        <c:axId val="2094734554"/>
+        <c:scaling>
+          <c:orientation val="minMax"/>
+        </c:scaling>
+        <c:delete val="0"/>
+        <c:axPos val="b"/>
+        <c:numFmt formatCode="General" sourceLinked="1"/>
+        <c:majorTickMark val="out"/>
+        <c:minorTickMark val="none"/>
+        <c:tickLblPos val="low"/>
+        <c:spPr>
+          <a:ln w="12700" cap="flat">
+            <a:solidFill>
+              <a:srgbClr val="888888"/>
+            </a:solidFill>
+            <a:prstDash val="solid"/>
+            <a:round/>
+          </a:ln>
+        </c:spPr>
+        <c:txPr>
+          <a:bodyPr/>
+          <a:lstStyle/>
+          <a:p>
+            <a:pPr>
+              <a:defRPr sz="1200" b="1" i="0" u="none" strike="noStrike">
+                <a:solidFill>
+                  <a:srgbClr val="2D2A26"/>
+                </a:solidFill>
+                <a:latin typeface="Arial"/>
+              </a:defRPr>
+            </a:pPr>
+            <a:endParaRPr lang="en-US"/>
+          </a:p>
+        </c:txPr>
+        <c:crossAx val="2094734552"/>
+        <c:crosses val="autoZero"/>
+        <c:auto val="1"/>
+        <c:lblAlgn val="ctr"/>
+        <c:noMultiLvlLbl val="1"/>
+      </c:catAx>
+      <c:valAx>
+        <c:axId val="2094734552"/>
+        <c:scaling>
+          <c:orientation val="minMax"/>
+        </c:scaling>
+        <c:delete val="1"/>
+        <c:axPos val="l"/>
+        <c:numFmt formatCode="General" sourceLinked="0"/>
+        <c:majorTickMark val="out"/>
+        <c:minorTickMark val="none"/>
+        <c:tickLblPos val="nextTo"/>
+        <c:spPr>
+          <a:ln w="12700" cap="flat">
+            <a:solidFill>
+              <a:srgbClr val="888888"/>
+            </a:solidFill>
+            <a:prstDash val="solid"/>
+            <a:round/>
+          </a:ln>
+        </c:spPr>
+        <c:txPr>
+          <a:bodyPr/>
+          <a:lstStyle/>
+          <a:p>
+            <a:pPr>
+              <a:defRPr sz="1200" b="0" i="0" u="none" strike="noStrike">
+                <a:solidFill>
+                  <a:srgbClr val="000000"/>
+                </a:solidFill>
+                <a:latin typeface="Arial"/>
+              </a:defRPr>
+            </a:pPr>
+            <a:endParaRPr lang="en-US"/>
+          </a:p>
+        </c:txPr>
+        <c:crossAx val="2094734554"/>
+        <c:crosses val="autoZero"/>
+        <c:crossBetween val="between"/>
+      </c:valAx>
+      <c:spPr>
+        <a:solidFill>
+          <a:srgbClr val="FFFFFF"/>
+        </a:solidFill>
+        <a:ln>
+          <a:noFill/>
+        </a:ln>
+        <a:effectLst/>
+      </c:spPr>
+    </c:plotArea>
+    <c:plotVisOnly val="1"/>
+    <c:dispBlanksAs val="span"/>
+  </c:chart>
+  <c:spPr>
+    <a:solidFill>
+      <a:srgbClr val="FFFFFF"/>
+    </a:solidFill>
+    <a:ln>
+      <a:noFill/>
+    </a:ln>
+    <a:effectLst/>
+  </c:spPr>
+  <c:externalData r:id="rId1">
+    <c:autoUpdate val="0"/>
+  </c:externalData>
+</c:chartSpace>
+</file>
+
+<file path=ppt/charts/chart20.xml><?xml version="1.0" encoding="utf-8"?>
+<c:chartSpace xmlns:c="http://schemas.openxmlformats.org/drawingml/2006/chart" xmlns:a="http://schemas.openxmlformats.org/drawingml/2006/main" xmlns:r="http://schemas.openxmlformats.org/officeDocument/2006/relationships">
+  <c:date1904 val="0"/>
+  <c:roundedCorners val="0"/>
+  <c:chart>
+    <c:autoTitleDeleted val="1"/>
+    <c:plotArea>
+      <c:layout/>
+      <c:barChart>
+        <c:barDir val="col"/>
+        <c:grouping val="clustered"/>
+        <c:varyColors val="0"/>
+        <c:ser>
+          <c:idx val="0"/>
+          <c:order val="0"/>
+          <c:tx>
+            <c:strRef>
+              <c:f>Sheet1!$B$1</c:f>
+              <c:strCache>
+                <c:ptCount val="1"/>
+                <c:pt idx="0">
+                  <c:v/>
+                </c:pt>
+              </c:strCache>
+            </c:strRef>
+          </c:tx>
+          <c:spPr>
+            <a:solidFill>
+              <a:srgbClr val="C0392B"/>
+            </a:solidFill>
+            <a:effectLst/>
+          </c:spPr>
+          <c:invertIfNegative val="0"/>
+          <c:dLbls>
+            <c:numFmt formatCode="#,##0" sourceLinked="0"/>
+            <c:txPr>
+              <a:bodyPr/>
+              <a:lstStyle/>
+              <a:p>
+                <a:pPr>
+                  <a:defRPr b="1" i="0" strike="noStrike" sz="1200" u="none">
+                    <a:solidFill>
+                      <a:srgbClr val="2D2A26"/>
+                    </a:solidFill>
+                    <a:latin typeface="Arial"/>
+                  </a:defRPr>
+                </a:pPr>
+              </a:p>
+            </c:txPr>
+            <c:showLegendKey val="0"/>
+            <c:showVal val="1"/>
+            <c:showCatName val="0"/>
+            <c:showSerName val="0"/>
+            <c:showPercent val="0"/>
+            <c:showBubbleSize val="0"/>
+            <c:showLeaderLines val="0"/>
+          </c:dLbls>
+          <c:dPt>
+            <c:idx val="0"/>
+            <c:invertIfNegative val="0"/>
+            <c:bubble3D val="0"/>
+            <c:spPr>
+              <a:solidFill>
+                <a:srgbClr val="C0392B"/>
+              </a:solidFill>
+              <a:effectLst/>
+            </c:spPr>
+          </c:dPt>
+          <c:dPt>
+            <c:idx val="1"/>
+            <c:invertIfNegative val="0"/>
+            <c:bubble3D val="0"/>
+            <c:spPr>
+              <a:solidFill>
+                <a:srgbClr val="C0392B"/>
+              </a:solidFill>
+              <a:effectLst/>
+            </c:spPr>
+          </c:dPt>
+          <c:dPt>
+            <c:idx val="2"/>
+            <c:invertIfNegative val="0"/>
+            <c:bubble3D val="0"/>
+            <c:spPr>
+              <a:solidFill>
+                <a:srgbClr val="C0392B"/>
+              </a:solidFill>
+              <a:effectLst/>
+            </c:spPr>
+          </c:dPt>
+          <c:dPt>
+            <c:idx val="3"/>
+            <c:invertIfNegative val="0"/>
+            <c:bubble3D val="0"/>
+            <c:spPr>
+              <a:solidFill>
+                <a:srgbClr val="C0392B"/>
+              </a:solidFill>
+              <a:effectLst/>
+            </c:spPr>
+          </c:dPt>
+          <c:dPt>
+            <c:idx val="4"/>
+            <c:invertIfNegative val="0"/>
+            <c:bubble3D val="0"/>
+            <c:spPr>
+              <a:solidFill>
+                <a:srgbClr val="C0392B"/>
+              </a:solidFill>
+              <a:effectLst/>
+            </c:spPr>
+          </c:dPt>
+          <c:cat>
+            <c:multiLvlStrRef>
+              <c:f>Sheet1!$A$2:$A$6</c:f>
+              <c:multiLvlStrCache>
+                <c:ptCount val="5"/>
+                <c:lvl>
+                  <c:pt idx="0">
+                    <c:v>Sierra Leone</c:v>
+                  </c:pt>
+                  <c:pt idx="1">
+                    <c:v>Uganda</c:v>
+                  </c:pt>
+                  <c:pt idx="2">
+                    <c:v>Kenya</c:v>
+                  </c:pt>
+                  <c:pt idx="3">
+                    <c:v>Tanzania</c:v>
+                  </c:pt>
+                  <c:pt idx="4">
+                    <c:v>Nigeria</c:v>
+                  </c:pt>
+                </c:lvl>
+              </c:multiLvlStrCache>
+            </c:multiLvlStrRef>
+          </c:cat>
+          <c:val>
+            <c:numRef>
+              <c:f>Sheet1!$B$2:$B$6</c:f>
+              <c:numCache>
+                <c:formatCode>General</c:formatCode>
+                <c:ptCount val="5"/>
+                <c:pt idx="0">
+                  <c:v>6</c:v>
+                </c:pt>
+                <c:pt idx="1">
+                  <c:v>30</c:v>
+                </c:pt>
+                <c:pt idx="2">
+                  <c:v>37</c:v>
+                </c:pt>
+                <c:pt idx="3">
+                  <c:v>43</c:v>
+                </c:pt>
+                <c:pt idx="4">
+                  <c:v>49</c:v>
                 </c:pt>
               </c:numCache>
             </c:numRef>
@@ -5236,7 +5236,7 @@
                 <a:ea typeface="Calibri" pitchFamily="34" charset="-122"/>
                 <a:cs typeface="Calibri" pitchFamily="34" charset="-120"/>
               </a:rPr>
-              <a:t>Prepared: March 17, 2026</a:t>
+              <a:t>Prepared: May 5, 2026</a:t>
             </a:r>
             <a:endParaRPr lang="en-US" sz="1200" dirty="0"/>
           </a:p>

--- a/reports/2026-02.pptx
+++ b/reports/2026-02.pptx
@@ -119,7 +119,7 @@
 </p:presentation>
 </file>
 
-<file path=ppt/charts/chart11.xml><?xml version="1.0" encoding="utf-8"?>
+<file path=ppt/charts/chart31.xml><?xml version="1.0" encoding="utf-8"?>
 <c:chartSpace xmlns:c="http://schemas.openxmlformats.org/drawingml/2006/chart" xmlns:a="http://schemas.openxmlformats.org/drawingml/2006/main" xmlns:r="http://schemas.openxmlformats.org/officeDocument/2006/relationships">
   <c:date1904 val="0"/>
   <c:roundedCorners val="0"/>
@@ -419,7 +419,7 @@
 </c:chartSpace>
 </file>
 
-<file path=ppt/charts/chart12.xml><?xml version="1.0" encoding="utf-8"?>
+<file path=ppt/charts/chart32.xml><?xml version="1.0" encoding="utf-8"?>
 <c:chartSpace xmlns:c="http://schemas.openxmlformats.org/drawingml/2006/chart" xmlns:a="http://schemas.openxmlformats.org/drawingml/2006/main" xmlns:r="http://schemas.openxmlformats.org/officeDocument/2006/relationships">
   <c:date1904 val="0"/>
   <c:roundedCorners val="0"/>
@@ -719,7 +719,7 @@
 </c:chartSpace>
 </file>
 
-<file path=ppt/charts/chart13.xml><?xml version="1.0" encoding="utf-8"?>
+<file path=ppt/charts/chart33.xml><?xml version="1.0" encoding="utf-8"?>
 <c:chartSpace xmlns:c="http://schemas.openxmlformats.org/drawingml/2006/chart" xmlns:a="http://schemas.openxmlformats.org/drawingml/2006/main" xmlns:r="http://schemas.openxmlformats.org/officeDocument/2006/relationships">
   <c:date1904 val="0"/>
   <c:roundedCorners val="0"/>
@@ -1019,7 +1019,7 @@
 </c:chartSpace>
 </file>
 
-<file path=ppt/charts/chart14.xml><?xml version="1.0" encoding="utf-8"?>
+<file path=ppt/charts/chart34.xml><?xml version="1.0" encoding="utf-8"?>
 <c:chartSpace xmlns:c="http://schemas.openxmlformats.org/drawingml/2006/chart" xmlns:a="http://schemas.openxmlformats.org/drawingml/2006/main" xmlns:r="http://schemas.openxmlformats.org/officeDocument/2006/relationships">
   <c:date1904 val="0"/>
   <c:roundedCorners val="0"/>
@@ -1319,7 +1319,7 @@
 </c:chartSpace>
 </file>
 
-<file path=ppt/charts/chart15.xml><?xml version="1.0" encoding="utf-8"?>
+<file path=ppt/charts/chart35.xml><?xml version="1.0" encoding="utf-8"?>
 <c:chartSpace xmlns:c="http://schemas.openxmlformats.org/drawingml/2006/chart" xmlns:a="http://schemas.openxmlformats.org/drawingml/2006/main" xmlns:r="http://schemas.openxmlformats.org/officeDocument/2006/relationships">
   <c:date1904 val="0"/>
   <c:roundedCorners val="0"/>
@@ -1619,7 +1619,7 @@
 </c:chartSpace>
 </file>
 
-<file path=ppt/charts/chart16.xml><?xml version="1.0" encoding="utf-8"?>
+<file path=ppt/charts/chart36.xml><?xml version="1.0" encoding="utf-8"?>
 <c:chartSpace xmlns:c="http://schemas.openxmlformats.org/drawingml/2006/chart" xmlns:a="http://schemas.openxmlformats.org/drawingml/2006/main" xmlns:r="http://schemas.openxmlformats.org/officeDocument/2006/relationships">
   <c:date1904 val="0"/>
   <c:roundedCorners val="0"/>
@@ -1919,7 +1919,7 @@
 </c:chartSpace>
 </file>
 
-<file path=ppt/charts/chart17.xml><?xml version="1.0" encoding="utf-8"?>
+<file path=ppt/charts/chart37.xml><?xml version="1.0" encoding="utf-8"?>
 <c:chartSpace xmlns:c="http://schemas.openxmlformats.org/drawingml/2006/chart" xmlns:a="http://schemas.openxmlformats.org/drawingml/2006/main" xmlns:r="http://schemas.openxmlformats.org/officeDocument/2006/relationships">
   <c:date1904 val="0"/>
   <c:roundedCorners val="0"/>
@@ -2219,7 +2219,7 @@
 </c:chartSpace>
 </file>
 
-<file path=ppt/charts/chart18.xml><?xml version="1.0" encoding="utf-8"?>
+<file path=ppt/charts/chart38.xml><?xml version="1.0" encoding="utf-8"?>
 <c:chartSpace xmlns:c="http://schemas.openxmlformats.org/drawingml/2006/chart" xmlns:a="http://schemas.openxmlformats.org/drawingml/2006/main" xmlns:r="http://schemas.openxmlformats.org/officeDocument/2006/relationships">
   <c:date1904 val="0"/>
   <c:roundedCorners val="0"/>
@@ -2519,7 +2519,7 @@
 </c:chartSpace>
 </file>
 
-<file path=ppt/charts/chart19.xml><?xml version="1.0" encoding="utf-8"?>
+<file path=ppt/charts/chart39.xml><?xml version="1.0" encoding="utf-8"?>
 <c:chartSpace xmlns:c="http://schemas.openxmlformats.org/drawingml/2006/chart" xmlns:a="http://schemas.openxmlformats.org/drawingml/2006/main" xmlns:r="http://schemas.openxmlformats.org/officeDocument/2006/relationships">
   <c:date1904 val="0"/>
   <c:roundedCorners val="0"/>
@@ -2819,7 +2819,7 @@
 </c:chartSpace>
 </file>
 
-<file path=ppt/charts/chart20.xml><?xml version="1.0" encoding="utf-8"?>
+<file path=ppt/charts/chart40.xml><?xml version="1.0" encoding="utf-8"?>
 <c:chartSpace xmlns:c="http://schemas.openxmlformats.org/drawingml/2006/chart" xmlns:a="http://schemas.openxmlformats.org/drawingml/2006/main" xmlns:r="http://schemas.openxmlformats.org/officeDocument/2006/relationships">
   <c:date1904 val="0"/>
   <c:roundedCorners val="0"/>
@@ -5236,7 +5236,7 @@
                 <a:ea typeface="Calibri" pitchFamily="34" charset="-122"/>
                 <a:cs typeface="Calibri" pitchFamily="34" charset="-120"/>
               </a:rPr>
-              <a:t>Prepared: May 5, 2026</a:t>
+              <a:t>Prepared: June 6, 2026</a:t>
             </a:r>
             <a:endParaRPr lang="en-US" sz="1200" dirty="0"/>
           </a:p>

--- a/reports/2026-02.pptx
+++ b/reports/2026-02.pptx
@@ -5236,7 +5236,7 @@
                 <a:ea typeface="Calibri" pitchFamily="34" charset="-122"/>
                 <a:cs typeface="Calibri" pitchFamily="34" charset="-120"/>
               </a:rPr>
-              <a:t>Prepared: June 6, 2026</a:t>
+              <a:t>Prepared: July 6, 2026</a:t>
             </a:r>
             <a:endParaRPr lang="en-US" sz="1200" dirty="0"/>
           </a:p>

--- a/reports/2026-02.pptx
+++ b/reports/2026-02.pptx
@@ -119,7 +119,7 @@
 </p:presentation>
 </file>
 
-<file path=ppt/charts/chart31.xml><?xml version="1.0" encoding="utf-8"?>
+<file path=ppt/charts/chart41.xml><?xml version="1.0" encoding="utf-8"?>
 <c:chartSpace xmlns:c="http://schemas.openxmlformats.org/drawingml/2006/chart" xmlns:a="http://schemas.openxmlformats.org/drawingml/2006/main" xmlns:r="http://schemas.openxmlformats.org/officeDocument/2006/relationships">
   <c:date1904 val="0"/>
   <c:roundedCorners val="0"/>
@@ -419,7 +419,7 @@
 </c:chartSpace>
 </file>
 
-<file path=ppt/charts/chart32.xml><?xml version="1.0" encoding="utf-8"?>
+<file path=ppt/charts/chart42.xml><?xml version="1.0" encoding="utf-8"?>
 <c:chartSpace xmlns:c="http://schemas.openxmlformats.org/drawingml/2006/chart" xmlns:a="http://schemas.openxmlformats.org/drawingml/2006/main" xmlns:r="http://schemas.openxmlformats.org/officeDocument/2006/relationships">
   <c:date1904 val="0"/>
   <c:roundedCorners val="0"/>
@@ -719,7 +719,7 @@
 </c:chartSpace>
 </file>
 
-<file path=ppt/charts/chart33.xml><?xml version="1.0" encoding="utf-8"?>
+<file path=ppt/charts/chart43.xml><?xml version="1.0" encoding="utf-8"?>
 <c:chartSpace xmlns:c="http://schemas.openxmlformats.org/drawingml/2006/chart" xmlns:a="http://schemas.openxmlformats.org/drawingml/2006/main" xmlns:r="http://schemas.openxmlformats.org/officeDocument/2006/relationships">
   <c:date1904 val="0"/>
   <c:roundedCorners val="0"/>
@@ -1019,7 +1019,7 @@
 </c:chartSpace>
 </file>
 
-<file path=ppt/charts/chart34.xml><?xml version="1.0" encoding="utf-8"?>
+<file path=ppt/charts/chart44.xml><?xml version="1.0" encoding="utf-8"?>
 <c:chartSpace xmlns:c="http://schemas.openxmlformats.org/drawingml/2006/chart" xmlns:a="http://schemas.openxmlformats.org/drawingml/2006/main" xmlns:r="http://schemas.openxmlformats.org/officeDocument/2006/relationships">
   <c:date1904 val="0"/>
   <c:roundedCorners val="0"/>
@@ -1319,7 +1319,7 @@
 </c:chartSpace>
 </file>
 
-<file path=ppt/charts/chart35.xml><?xml version="1.0" encoding="utf-8"?>
+<file path=ppt/charts/chart45.xml><?xml version="1.0" encoding="utf-8"?>
 <c:chartSpace xmlns:c="http://schemas.openxmlformats.org/drawingml/2006/chart" xmlns:a="http://schemas.openxmlformats.org/drawingml/2006/main" xmlns:r="http://schemas.openxmlformats.org/officeDocument/2006/relationships">
   <c:date1904 val="0"/>
   <c:roundedCorners val="0"/>
@@ -1619,7 +1619,7 @@
 </c:chartSpace>
 </file>
 
-<file path=ppt/charts/chart36.xml><?xml version="1.0" encoding="utf-8"?>
+<file path=ppt/charts/chart46.xml><?xml version="1.0" encoding="utf-8"?>
 <c:chartSpace xmlns:c="http://schemas.openxmlformats.org/drawingml/2006/chart" xmlns:a="http://schemas.openxmlformats.org/drawingml/2006/main" xmlns:r="http://schemas.openxmlformats.org/officeDocument/2006/relationships">
   <c:date1904 val="0"/>
   <c:roundedCorners val="0"/>
@@ -1919,7 +1919,7 @@
 </c:chartSpace>
 </file>
 
-<file path=ppt/charts/chart37.xml><?xml version="1.0" encoding="utf-8"?>
+<file path=ppt/charts/chart47.xml><?xml version="1.0" encoding="utf-8"?>
 <c:chartSpace xmlns:c="http://schemas.openxmlformats.org/drawingml/2006/chart" xmlns:a="http://schemas.openxmlformats.org/drawingml/2006/main" xmlns:r="http://schemas.openxmlformats.org/officeDocument/2006/relationships">
   <c:date1904 val="0"/>
   <c:roundedCorners val="0"/>
@@ -2219,7 +2219,7 @@
 </c:chartSpace>
 </file>
 
-<file path=ppt/charts/chart38.xml><?xml version="1.0" encoding="utf-8"?>
+<file path=ppt/charts/chart48.xml><?xml version="1.0" encoding="utf-8"?>
 <c:chartSpace xmlns:c="http://schemas.openxmlformats.org/drawingml/2006/chart" xmlns:a="http://schemas.openxmlformats.org/drawingml/2006/main" xmlns:r="http://schemas.openxmlformats.org/officeDocument/2006/relationships">
   <c:date1904 val="0"/>
   <c:roundedCorners val="0"/>
@@ -2519,7 +2519,7 @@
 </c:chartSpace>
 </file>
 
-<file path=ppt/charts/chart39.xml><?xml version="1.0" encoding="utf-8"?>
+<file path=ppt/charts/chart49.xml><?xml version="1.0" encoding="utf-8"?>
 <c:chartSpace xmlns:c="http://schemas.openxmlformats.org/drawingml/2006/chart" xmlns:a="http://schemas.openxmlformats.org/drawingml/2006/main" xmlns:r="http://schemas.openxmlformats.org/officeDocument/2006/relationships">
   <c:date1904 val="0"/>
   <c:roundedCorners val="0"/>
@@ -2819,7 +2819,7 @@
 </c:chartSpace>
 </file>
 
-<file path=ppt/charts/chart40.xml><?xml version="1.0" encoding="utf-8"?>
+<file path=ppt/charts/chart50.xml><?xml version="1.0" encoding="utf-8"?>
 <c:chartSpace xmlns:c="http://schemas.openxmlformats.org/drawingml/2006/chart" xmlns:a="http://schemas.openxmlformats.org/drawingml/2006/main" xmlns:r="http://schemas.openxmlformats.org/officeDocument/2006/relationships">
   <c:date1904 val="0"/>
   <c:roundedCorners val="0"/>
@@ -5236,7 +5236,7 @@
                 <a:ea typeface="Calibri" pitchFamily="34" charset="-122"/>
                 <a:cs typeface="Calibri" pitchFamily="34" charset="-120"/>
               </a:rPr>
-              <a:t>Prepared: July 6, 2026</a:t>
+              <a:t>Prepared: August 6, 2026</a:t>
             </a:r>
             <a:endParaRPr lang="en-US" sz="1200" dirty="0"/>
           </a:p>

--- a/reports/2026-02.pptx
+++ b/reports/2026-02.pptx
@@ -119,7 +119,7 @@
 </p:presentation>
 </file>
 
-<file path=ppt/charts/chart41.xml><?xml version="1.0" encoding="utf-8"?>
+<file path=ppt/charts/chart51.xml><?xml version="1.0" encoding="utf-8"?>
 <c:chartSpace xmlns:c="http://schemas.openxmlformats.org/drawingml/2006/chart" xmlns:a="http://schemas.openxmlformats.org/drawingml/2006/main" xmlns:r="http://schemas.openxmlformats.org/officeDocument/2006/relationships">
   <c:date1904 val="0"/>
   <c:roundedCorners val="0"/>
@@ -419,7 +419,7 @@
 </c:chartSpace>
 </file>
 
-<file path=ppt/charts/chart42.xml><?xml version="1.0" encoding="utf-8"?>
+<file path=ppt/charts/chart52.xml><?xml version="1.0" encoding="utf-8"?>
 <c:chartSpace xmlns:c="http://schemas.openxmlformats.org/drawingml/2006/chart" xmlns:a="http://schemas.openxmlformats.org/drawingml/2006/main" xmlns:r="http://schemas.openxmlformats.org/officeDocument/2006/relationships">
   <c:date1904 val="0"/>
   <c:roundedCorners val="0"/>
@@ -719,7 +719,7 @@
 </c:chartSpace>
 </file>
 
-<file path=ppt/charts/chart43.xml><?xml version="1.0" encoding="utf-8"?>
+<file path=ppt/charts/chart53.xml><?xml version="1.0" encoding="utf-8"?>
 <c:chartSpace xmlns:c="http://schemas.openxmlformats.org/drawingml/2006/chart" xmlns:a="http://schemas.openxmlformats.org/drawingml/2006/main" xmlns:r="http://schemas.openxmlformats.org/officeDocument/2006/relationships">
   <c:date1904 val="0"/>
   <c:roundedCorners val="0"/>
@@ -1019,7 +1019,7 @@
 </c:chartSpace>
 </file>
 
-<file path=ppt/charts/chart44.xml><?xml version="1.0" encoding="utf-8"?>
+<file path=ppt/charts/chart54.xml><?xml version="1.0" encoding="utf-8"?>
 <c:chartSpace xmlns:c="http://schemas.openxmlformats.org/drawingml/2006/chart" xmlns:a="http://schemas.openxmlformats.org/drawingml/2006/main" xmlns:r="http://schemas.openxmlformats.org/officeDocument/2006/relationships">
   <c:date1904 val="0"/>
   <c:roundedCorners val="0"/>
@@ -1319,7 +1319,7 @@
 </c:chartSpace>
 </file>
 
-<file path=ppt/charts/chart45.xml><?xml version="1.0" encoding="utf-8"?>
+<file path=ppt/charts/chart55.xml><?xml version="1.0" encoding="utf-8"?>
 <c:chartSpace xmlns:c="http://schemas.openxmlformats.org/drawingml/2006/chart" xmlns:a="http://schemas.openxmlformats.org/drawingml/2006/main" xmlns:r="http://schemas.openxmlformats.org/officeDocument/2006/relationships">
   <c:date1904 val="0"/>
   <c:roundedCorners val="0"/>
@@ -1619,7 +1619,7 @@
 </c:chartSpace>
 </file>
 
-<file path=ppt/charts/chart46.xml><?xml version="1.0" encoding="utf-8"?>
+<file path=ppt/charts/chart56.xml><?xml version="1.0" encoding="utf-8"?>
 <c:chartSpace xmlns:c="http://schemas.openxmlformats.org/drawingml/2006/chart" xmlns:a="http://schemas.openxmlformats.org/drawingml/2006/main" xmlns:r="http://schemas.openxmlformats.org/officeDocument/2006/relationships">
   <c:date1904 val="0"/>
   <c:roundedCorners val="0"/>
@@ -1919,7 +1919,7 @@
 </c:chartSpace>
 </file>
 
-<file path=ppt/charts/chart47.xml><?xml version="1.0" encoding="utf-8"?>
+<file path=ppt/charts/chart57.xml><?xml version="1.0" encoding="utf-8"?>
 <c:chartSpace xmlns:c="http://schemas.openxmlformats.org/drawingml/2006/chart" xmlns:a="http://schemas.openxmlformats.org/drawingml/2006/main" xmlns:r="http://schemas.openxmlformats.org/officeDocument/2006/relationships">
   <c:date1904 val="0"/>
   <c:roundedCorners val="0"/>
@@ -2219,7 +2219,7 @@
 </c:chartSpace>
 </file>
 
-<file path=ppt/charts/chart48.xml><?xml version="1.0" encoding="utf-8"?>
+<file path=ppt/charts/chart58.xml><?xml version="1.0" encoding="utf-8"?>
 <c:chartSpace xmlns:c="http://schemas.openxmlformats.org/drawingml/2006/chart" xmlns:a="http://schemas.openxmlformats.org/drawingml/2006/main" xmlns:r="http://schemas.openxmlformats.org/officeDocument/2006/relationships">
   <c:date1904 val="0"/>
   <c:roundedCorners val="0"/>
@@ -2519,7 +2519,7 @@
 </c:chartSpace>
 </file>
 
-<file path=ppt/charts/chart49.xml><?xml version="1.0" encoding="utf-8"?>
+<file path=ppt/charts/chart59.xml><?xml version="1.0" encoding="utf-8"?>
 <c:chartSpace xmlns:c="http://schemas.openxmlformats.org/drawingml/2006/chart" xmlns:a="http://schemas.openxmlformats.org/drawingml/2006/main" xmlns:r="http://schemas.openxmlformats.org/officeDocument/2006/relationships">
   <c:date1904 val="0"/>
   <c:roundedCorners val="0"/>
@@ -2819,7 +2819,7 @@
 </c:chartSpace>
 </file>
 
-<file path=ppt/charts/chart50.xml><?xml version="1.0" encoding="utf-8"?>
+<file path=ppt/charts/chart60.xml><?xml version="1.0" encoding="utf-8"?>
 <c:chartSpace xmlns:c="http://schemas.openxmlformats.org/drawingml/2006/chart" xmlns:a="http://schemas.openxmlformats.org/drawingml/2006/main" xmlns:r="http://schemas.openxmlformats.org/officeDocument/2006/relationships">
   <c:date1904 val="0"/>
   <c:roundedCorners val="0"/>
@@ -5236,7 +5236,7 @@
                 <a:ea typeface="Calibri" pitchFamily="34" charset="-122"/>
                 <a:cs typeface="Calibri" pitchFamily="34" charset="-120"/>
               </a:rPr>
-              <a:t>Prepared: August 6, 2026</a:t>
+              <a:t>Prepared: September 6, 2026</a:t>
             </a:r>
             <a:endParaRPr lang="en-US" sz="1200" dirty="0"/>
           </a:p>
